--- a/docs/design/dist/d03-migration-flow.pptx
+++ b/docs/design/dist/d03-migration-flow.pptx
@@ -3104,8 +3104,8 @@
         </p:nvSpPr>
         <p:spPr>
           <a:xfrm>
-            <a:off x="381000" y="289560"/>
-            <a:ext cx="53340" cy="335280"/>
+            <a:off x="381000" y="274320"/>
+            <a:ext cx="53340" cy="548640"/>
           </a:xfrm>
           <a:prstGeom prst="roundRect">
             <a:avLst>
@@ -3113,7 +3113,7 @@
             </a:avLst>
           </a:prstGeom>
           <a:solidFill>
-            <a:srgbClr val="164B8C"/>
+            <a:srgbClr val="1F4E8C"/>
           </a:solidFill>
           <a:ln>
             <a:noFill/>
@@ -3135,8 +3135,8 @@
         </p:nvSpPr>
         <p:spPr>
           <a:xfrm>
-            <a:off x="533400" y="289560"/>
-            <a:ext cx="7620000" cy="304800"/>
+            <a:off x="533400" y="228600"/>
+            <a:ext cx="8001000" cy="365760"/>
           </a:xfrm>
           <a:prstGeom prst="rect">
             <a:avLst/>
@@ -3151,9 +3151,9 @@
           <a:p>
             <a:pPr algn="l"/>
             <a:r>
-              <a:rPr sz="1800" b="1">
+              <a:rPr sz="2160" b="1">
                 <a:solidFill>
-                  <a:srgbClr val="0A2342"/>
+                  <a:srgbClr val="0B2545"/>
                 </a:solidFill>
                 <a:latin typeface="Pretendard"/>
                 <a:ea typeface="Pretendard"/>
@@ -3172,8 +3172,8 @@
         </p:nvSpPr>
         <p:spPr>
           <a:xfrm>
-            <a:off x="533400" y="624840"/>
-            <a:ext cx="7620000" cy="167640"/>
+            <a:off x="533400" y="640080"/>
+            <a:ext cx="9144000" cy="182880"/>
           </a:xfrm>
           <a:prstGeom prst="rect">
             <a:avLst/>
@@ -3188,7 +3188,7 @@
           <a:p>
             <a:pPr algn="l"/>
             <a:r>
-              <a:rPr sz="960" b="0">
+              <a:rPr sz="1080" b="0">
                 <a:solidFill>
                   <a:srgbClr val="3F4E61"/>
                 </a:solidFill>
@@ -3209,8 +3209,8 @@
         </p:nvSpPr>
         <p:spPr>
           <a:xfrm>
-            <a:off x="8763000" y="426720"/>
-            <a:ext cx="3048000" cy="152400"/>
+            <a:off x="8382000" y="411480"/>
+            <a:ext cx="3429000" cy="167640"/>
           </a:xfrm>
           <a:prstGeom prst="rect">
             <a:avLst/>
@@ -3225,7 +3225,7 @@
           <a:p>
             <a:pPr algn="r"/>
             <a:r>
-              <a:rPr sz="840" b="0">
+              <a:rPr sz="1019" b="0">
                 <a:solidFill>
                   <a:srgbClr val="3F4E61"/>
                 </a:solidFill>
@@ -3233,7 +3233,7 @@
                 <a:ea typeface="Pretendard"/>
                 <a:cs typeface="Pretendard"/>
               </a:rPr>
-              <a:t>KDMS-D03 · v0.1 · 2026-10-06</a:t>
+              <a:t>KDMS-D03 · v0.2 · 2026-10-09</a:t>
             </a:r>
           </a:p>
         </p:txBody>
@@ -3247,19 +3247,19 @@
         <p:spPr>
           <a:xfrm>
             <a:off x="335280" y="960120"/>
-            <a:ext cx="4846320" cy="2971800"/>
+            <a:ext cx="11521440" cy="1554480"/>
           </a:xfrm>
           <a:prstGeom prst="roundRect">
             <a:avLst>
-              <a:gd name="adj" fmla="val 4615"/>
+              <a:gd name="adj" fmla="val 8823"/>
             </a:avLst>
           </a:prstGeom>
           <a:solidFill>
-            <a:srgbClr val="F1F6FC"/>
+            <a:srgbClr val="EEF6FD"/>
           </a:solidFill>
           <a:ln w="10668">
             <a:solidFill>
-              <a:srgbClr val="A9C3E2"/>
+              <a:srgbClr val="8EC3EC"/>
             </a:solidFill>
           </a:ln>
         </p:spPr>
@@ -3277,7 +3277,7 @@
             <a:r>
               <a:rPr sz="1200" b="1">
                 <a:solidFill>
-                  <a:srgbClr val="0A2342"/>
+                  <a:srgbClr val="0B2545"/>
                 </a:solidFill>
                 <a:latin typeface="Pretendard"/>
                 <a:ea typeface="Pretendard"/>
@@ -3289,11 +3289,11 @@
           <a:p>
             <a:pPr algn="l">
               <a:lnSpc>
-                <a:spcPts val="1200"/>
+                <a:spcPts val="1320"/>
               </a:lnSpc>
             </a:pPr>
             <a:r>
-              <a:rPr sz="869" b="0">
+              <a:rPr sz="1019" b="0">
                 <a:solidFill>
                   <a:srgbClr val="3F4E61"/>
                 </a:solidFill>
@@ -3301,7 +3301,7 @@
                 <a:ea typeface="Pretendard"/>
                 <a:cs typeface="Pretendard"/>
               </a:rPr>
-              <a:t>원천 업무는 평소처럼 계속 쓰인다</a:t>
+              <a:t>원천 업무 쓰기는 계속된다 · 그 변경은 CDC 로 따라간다</a:t>
             </a:r>
           </a:p>
         </p:txBody>
@@ -3314,20 +3314,20 @@
         </p:nvSpPr>
         <p:spPr>
           <a:xfrm>
-            <a:off x="5364480" y="960120"/>
-            <a:ext cx="6446520" cy="2971800"/>
+            <a:off x="335280" y="2636520"/>
+            <a:ext cx="11521440" cy="2209800"/>
           </a:xfrm>
           <a:prstGeom prst="roundRect">
             <a:avLst>
-              <a:gd name="adj" fmla="val 4615"/>
+              <a:gd name="adj" fmla="val 6206"/>
             </a:avLst>
           </a:prstGeom>
           <a:solidFill>
-            <a:srgbClr val="E8F1FB"/>
+            <a:srgbClr val="EEF6FD"/>
           </a:solidFill>
           <a:ln w="15240">
             <a:solidFill>
-              <a:srgbClr val="164B8C"/>
+              <a:srgbClr val="1F4E8C"/>
             </a:solidFill>
           </a:ln>
         </p:spPr>
@@ -3345,7 +3345,7 @@
             <a:r>
               <a:rPr sz="1200" b="1">
                 <a:solidFill>
-                  <a:srgbClr val="0A2342"/>
+                  <a:srgbClr val="0B2545"/>
                 </a:solidFill>
                 <a:latin typeface="Pretendard"/>
                 <a:ea typeface="Pretendard"/>
@@ -3357,11 +3357,11 @@
           <a:p>
             <a:pPr algn="l">
               <a:lnSpc>
-                <a:spcPts val="1200"/>
+                <a:spcPts val="1320"/>
               </a:lnSpc>
             </a:pPr>
             <a:r>
-              <a:rPr sz="869" b="0">
+              <a:rPr sz="1019" b="0">
                 <a:solidFill>
                   <a:srgbClr val="3F4E61"/>
                 </a:solidFill>
@@ -3369,7 +3369,7 @@
                 <a:ea typeface="Pretendard"/>
                 <a:cs typeface="Pretendard"/>
               </a:rPr>
-              <a:t>원천 쓰기를 멈춘 뒤 · 실제 다운타임 = ④ ~ ⑦</a:t>
+              <a:t>원천 쓰기를 멈춘 뒤 · 실제 다운타임 = 4 ~ 7 (kdms 가 재는 것은 cutover 시작 ~ 끝)</a:t>
             </a:r>
           </a:p>
         </p:txBody>
@@ -3382,20 +3382,20 @@
         </p:nvSpPr>
         <p:spPr>
           <a:xfrm>
-            <a:off x="335280" y="4084320"/>
-            <a:ext cx="11475720" cy="1569720"/>
+            <a:off x="335280" y="4968240"/>
+            <a:ext cx="11521440" cy="1219200"/>
           </a:xfrm>
           <a:prstGeom prst="roundRect">
             <a:avLst>
-              <a:gd name="adj" fmla="val 8737"/>
+              <a:gd name="adj" fmla="val 11250"/>
             </a:avLst>
           </a:prstGeom>
           <a:solidFill>
-            <a:srgbClr val="F1F6FC"/>
+            <a:srgbClr val="EEF6FD"/>
           </a:solidFill>
           <a:ln w="10668">
             <a:solidFill>
-              <a:srgbClr val="A9C3E2"/>
+              <a:srgbClr val="8EC3EC"/>
             </a:solidFill>
           </a:ln>
         </p:spPr>
@@ -3413,7 +3413,7 @@
             <a:r>
               <a:rPr sz="1200" b="1">
                 <a:solidFill>
-                  <a:srgbClr val="0A2342"/>
+                  <a:srgbClr val="0B2545"/>
                 </a:solidFill>
                 <a:latin typeface="Pretendard"/>
                 <a:ea typeface="Pretendard"/>
@@ -3425,11 +3425,11 @@
           <a:p>
             <a:pPr algn="l">
               <a:lnSpc>
-                <a:spcPts val="1200"/>
+                <a:spcPts val="1320"/>
               </a:lnSpc>
             </a:pPr>
             <a:r>
-              <a:rPr sz="869" b="0">
+              <a:rPr sz="1019" b="0">
                 <a:solidFill>
                   <a:srgbClr val="3F4E61"/>
                 </a:solidFill>
@@ -3437,51 +3437,97 @@
                 <a:ea typeface="Pretendard"/>
                 <a:cs typeface="Pretendard"/>
               </a:rPr>
-              <a:t>어느 단계에서 멈춰도 다시 실행하면 이어서 진행 · 오류는 FAILED 로 남고 원인 수정 후 재실행</a:t>
+              <a:t>어느 단계에서 멈춰도 다시 실행하면 이어서 진행 · 실패는 FAILED 와 원인(last_error)으로 남는다</a:t>
             </a:r>
           </a:p>
         </p:txBody>
       </p:sp>
       <p:sp>
         <p:nvSpPr>
-          <p:cNvPr id="9" name="블록 워터마크 기록"/>
+          <p:cNvPr id="9" name="블록 이관 시작"/>
           <p:cNvSpPr/>
           <p:nvPr/>
         </p:nvSpPr>
         <p:spPr>
           <a:xfrm>
-            <a:off x="457200" y="1562100"/>
-            <a:ext cx="1417320" cy="1143000"/>
+            <a:off x="563880" y="1813560"/>
+            <a:ext cx="1295400" cy="335280"/>
           </a:xfrm>
           <a:prstGeom prst="roundRect">
             <a:avLst>
-              <a:gd name="adj" fmla="val 8000"/>
+              <a:gd name="adj" fmla="val 50000"/>
+            </a:avLst>
+          </a:prstGeom>
+          <a:solidFill>
+            <a:srgbClr val="0B2545"/>
+          </a:solidFill>
+          <a:ln w="15240">
+            <a:solidFill>
+              <a:srgbClr val="0B2545"/>
+            </a:solidFill>
+          </a:ln>
+        </p:spPr>
+        <p:txBody>
+          <a:bodyPr rtlCol="0" anchor="ctr" lIns="335661" tIns="0" rIns="0" bIns="0" wrap="none">
+            <a:noAutofit/>
+          </a:bodyPr>
+          <a:lstStyle/>
+          <a:p>
+            <a:pPr algn="l"/>
+            <a:r>
+              <a:rPr sz="1080" b="1">
+                <a:solidFill>
+                  <a:srgbClr val="FFFFFF"/>
+                </a:solidFill>
+                <a:latin typeface="Pretendard"/>
+                <a:ea typeface="Pretendard"/>
+                <a:cs typeface="Pretendard"/>
+              </a:rPr>
+              <a:t>이관 시작</a:t>
+            </a:r>
+          </a:p>
+        </p:txBody>
+      </p:sp>
+      <p:sp>
+        <p:nvSpPr>
+          <p:cNvPr id="10" name="블록 워터마크 기록"/>
+          <p:cNvSpPr/>
+          <p:nvPr/>
+        </p:nvSpPr>
+        <p:spPr>
+          <a:xfrm>
+            <a:off x="2362200" y="1569720"/>
+            <a:ext cx="1828800" cy="822960"/>
+          </a:xfrm>
+          <a:prstGeom prst="roundRect">
+            <a:avLst>
+              <a:gd name="adj" fmla="val 11111"/>
             </a:avLst>
           </a:prstGeom>
           <a:solidFill>
             <a:srgbClr val="FFFFFF"/>
           </a:solidFill>
-          <a:ln w="12192">
+          <a:ln w="13716">
             <a:solidFill>
-              <a:srgbClr val="6F9BD1"/>
+              <a:srgbClr val="8EC3EC"/>
             </a:solidFill>
           </a:ln>
         </p:spPr>
         <p:txBody>
-          <a:bodyPr rtlCol="0" anchor="t" lIns="45720" tIns="495300" rIns="45720" bIns="0" wrap="none">
+          <a:bodyPr rtlCol="0" anchor="t" lIns="45720" tIns="388620" rIns="45720" bIns="0" wrap="none">
             <a:noAutofit/>
           </a:bodyPr>
           <a:lstStyle/>
           <a:p>
             <a:pPr algn="ctr">
               <a:lnSpc>
-                <a:spcPts val="1439"/>
+                <a:spcPts val="1560"/>
               </a:lnSpc>
             </a:pPr>
             <a:r>
-              <a:rPr sz="1140" b="1">
+              <a:rPr sz="1200" b="1">
                 <a:solidFill>
-                  <a:srgbClr val="0A2342"/>
+                  <a:srgbClr val="0B2545"/>
                 </a:solidFill>
                 <a:latin typeface="Pretendard"/>
                 <a:ea typeface="Pretendard"/>
@@ -3493,11 +3539,11 @@
           <a:p>
             <a:pPr algn="ctr">
               <a:lnSpc>
-                <a:spcPts val="1140"/>
+                <a:spcPts val="1320"/>
               </a:lnSpc>
             </a:pPr>
             <a:r>
-              <a:rPr sz="869" b="0">
+              <a:rPr sz="1019" b="0">
                 <a:solidFill>
                   <a:srgbClr val="3F4E61"/>
                 </a:solidFill>
@@ -3508,35 +3554,17 @@
               <a:t>CDC 시작 LSN 저장</a:t>
             </a:r>
           </a:p>
-          <a:p>
-            <a:pPr algn="ctr">
-              <a:lnSpc>
-                <a:spcPts val="1140"/>
-              </a:lnSpc>
-            </a:pPr>
-            <a:r>
-              <a:rPr sz="869" b="0">
-                <a:solidFill>
-                  <a:srgbClr val="3F4E61"/>
-                </a:solidFill>
-                <a:latin typeface="Pretendard"/>
-                <a:ea typeface="Pretendard"/>
-                <a:cs typeface="Pretendard"/>
-              </a:rPr>
-              <a:t>적재보다 먼저</a:t>
-            </a:r>
-          </a:p>
         </p:txBody>
       </p:sp>
       <p:sp>
         <p:nvSpPr>
-          <p:cNvPr id="10" name="아이콘 bookmark_flag"/>
+          <p:cNvPr id="11" name="아이콘 bookmark_flag"/>
           <p:cNvSpPr/>
           <p:nvPr/>
         </p:nvSpPr>
         <p:spPr>
           <a:xfrm>
-            <a:off x="1076960" y="1743392"/>
+            <a:off x="3187700" y="1644332"/>
             <a:ext cx="177800" cy="230188"/>
           </a:xfrm>
           <a:custGeom>
@@ -3768,7 +3796,7 @@
             </a:pathLst>
           </a:custGeom>
           <a:solidFill>
-            <a:srgbClr val="164B8C"/>
+            <a:srgbClr val="1F4E8C"/>
           </a:solidFill>
           <a:ln>
             <a:noFill/>
@@ -3784,20 +3812,20 @@
       </p:sp>
       <p:sp>
         <p:nvSpPr>
-          <p:cNvPr id="11" name="번호 1"/>
+          <p:cNvPr id="12" name="번호 1"/>
           <p:cNvSpPr/>
           <p:nvPr/>
         </p:nvSpPr>
         <p:spPr>
           <a:xfrm>
-            <a:off x="510540" y="1615440"/>
-            <a:ext cx="198120" cy="198120"/>
+            <a:off x="2415540" y="1623060"/>
+            <a:ext cx="213360" cy="213360"/>
           </a:xfrm>
           <a:prstGeom prst="ellipse">
             <a:avLst/>
           </a:prstGeom>
           <a:solidFill>
-            <a:srgbClr val="164B8C"/>
+            <a:srgbClr val="1F4E8C"/>
           </a:solidFill>
           <a:ln>
             <a:noFill/>
@@ -3811,7 +3839,7 @@
           <a:p>
             <a:pPr algn="ctr"/>
             <a:r>
-              <a:rPr sz="900" b="1">
+              <a:rPr sz="1019" b="1">
                 <a:solidFill>
                   <a:srgbClr val="FFFFFF"/>
                 </a:solidFill>
@@ -3826,44 +3854,44 @@
       </p:sp>
       <p:sp>
         <p:nvSpPr>
-          <p:cNvPr id="12" name="블록 전체 적재"/>
+          <p:cNvPr id="13" name="블록 전체 적재"/>
           <p:cNvSpPr/>
           <p:nvPr/>
         </p:nvSpPr>
         <p:spPr>
           <a:xfrm>
-            <a:off x="2042160" y="1562100"/>
-            <a:ext cx="1417320" cy="1143000"/>
+            <a:off x="4724400" y="1569720"/>
+            <a:ext cx="1828800" cy="822960"/>
           </a:xfrm>
           <a:prstGeom prst="roundRect">
             <a:avLst>
-              <a:gd name="adj" fmla="val 8000"/>
+              <a:gd name="adj" fmla="val 11111"/>
             </a:avLst>
           </a:prstGeom>
           <a:solidFill>
             <a:srgbClr val="FFFFFF"/>
           </a:solidFill>
-          <a:ln w="12192">
+          <a:ln w="13716">
             <a:solidFill>
-              <a:srgbClr val="6F9BD1"/>
+              <a:srgbClr val="8EC3EC"/>
             </a:solidFill>
           </a:ln>
         </p:spPr>
         <p:txBody>
-          <a:bodyPr rtlCol="0" anchor="t" lIns="45720" tIns="495300" rIns="45720" bIns="0" wrap="none">
+          <a:bodyPr rtlCol="0" anchor="t" lIns="45720" tIns="388620" rIns="45720" bIns="0" wrap="none">
             <a:noAutofit/>
           </a:bodyPr>
           <a:lstStyle/>
           <a:p>
             <a:pPr algn="ctr">
               <a:lnSpc>
-                <a:spcPts val="1439"/>
+                <a:spcPts val="1560"/>
               </a:lnSpc>
             </a:pPr>
             <a:r>
-              <a:rPr sz="1140" b="1">
+              <a:rPr sz="1200" b="1">
                 <a:solidFill>
-                  <a:srgbClr val="0A2342"/>
+                  <a:srgbClr val="0B2545"/>
                 </a:solidFill>
                 <a:latin typeface="Pretendard"/>
                 <a:ea typeface="Pretendard"/>
@@ -3875,11 +3903,11 @@
           <a:p>
             <a:pPr algn="ctr">
               <a:lnSpc>
-                <a:spcPts val="1140"/>
+                <a:spcPts val="1320"/>
               </a:lnSpc>
             </a:pPr>
             <a:r>
-              <a:rPr sz="869" b="0">
+              <a:rPr sz="1019" b="0">
                 <a:solidFill>
                   <a:srgbClr val="3F4E61"/>
                 </a:solidFill>
@@ -3887,38 +3915,20 @@
                 <a:ea typeface="Pretendard"/>
                 <a:cs typeface="Pretendard"/>
               </a:rPr>
-              <a:t>SNAPSHOT · COPY</a:t>
-            </a:r>
-          </a:p>
-          <a:p>
-            <a:pPr algn="ctr">
-              <a:lnSpc>
-                <a:spcPts val="1140"/>
-              </a:lnSpc>
-            </a:pPr>
-            <a:r>
-              <a:rPr sz="869" b="0">
-                <a:solidFill>
-                  <a:srgbClr val="3F4E61"/>
-                </a:solidFill>
-                <a:latin typeface="Pretendard"/>
-                <a:ea typeface="Pretendard"/>
-                <a:cs typeface="Pretendard"/>
-              </a:rPr>
-              <a:t>구간 병렬 · 수 시간</a:t>
+              <a:t>SNAPSHOT · COPY 병렬</a:t>
             </a:r>
           </a:p>
         </p:txBody>
       </p:sp>
       <p:sp>
         <p:nvSpPr>
-          <p:cNvPr id="13" name="아이콘 database_upload"/>
+          <p:cNvPr id="14" name="아이콘 database_upload"/>
           <p:cNvSpPr/>
           <p:nvPr/>
         </p:nvSpPr>
         <p:spPr>
           <a:xfrm>
-            <a:off x="2636520" y="1744980"/>
+            <a:off x="5524500" y="1645920"/>
             <a:ext cx="254000" cy="254000"/>
           </a:xfrm>
           <a:custGeom>
@@ -3972,7 +3982,7 @@
                   <a:pt x="94942" y="227315"/>
                 </a:lnTo>
                 <a:lnTo>
-                  <a:pt x="91599" y="227013"/>
+                  <a:pt x="91599" y="227012"/>
                 </a:lnTo>
                 <a:lnTo>
                   <a:pt x="88187" y="226670"/>
@@ -4188,7 +4198,7 @@
                   <a:pt x="88187" y="226670"/>
                 </a:lnTo>
                 <a:lnTo>
-                  <a:pt x="91599" y="227013"/>
+                  <a:pt x="91599" y="227012"/>
                 </a:lnTo>
                 <a:lnTo>
                   <a:pt x="94942" y="227315"/>
@@ -5177,7 +5187,7 @@
                   <a:pt x="118301" y="218597"/>
                 </a:lnTo>
                 <a:lnTo>
-                  <a:pt x="118586" y="219393"/>
+                  <a:pt x="118586" y="219392"/>
                 </a:lnTo>
                 <a:lnTo>
                   <a:pt x="118881" y="220184"/>
@@ -5249,7 +5259,7 @@
                   <a:pt x="94942" y="227315"/>
                 </a:lnTo>
                 <a:lnTo>
-                  <a:pt x="91599" y="227013"/>
+                  <a:pt x="91599" y="227012"/>
                 </a:lnTo>
                 <a:lnTo>
                   <a:pt x="88187" y="226670"/>
@@ -6174,7 +6184,7 @@
             </a:pathLst>
           </a:custGeom>
           <a:solidFill>
-            <a:srgbClr val="164B8C"/>
+            <a:srgbClr val="1F4E8C"/>
           </a:solidFill>
           <a:ln>
             <a:noFill/>
@@ -6190,20 +6200,20 @@
       </p:sp>
       <p:sp>
         <p:nvSpPr>
-          <p:cNvPr id="14" name="번호 2"/>
+          <p:cNvPr id="15" name="번호 2"/>
           <p:cNvSpPr/>
           <p:nvPr/>
         </p:nvSpPr>
         <p:spPr>
           <a:xfrm>
-            <a:off x="2095500" y="1615440"/>
-            <a:ext cx="198120" cy="198120"/>
+            <a:off x="4777740" y="1623060"/>
+            <a:ext cx="213360" cy="213360"/>
           </a:xfrm>
           <a:prstGeom prst="ellipse">
             <a:avLst/>
           </a:prstGeom>
           <a:solidFill>
-            <a:srgbClr val="164B8C"/>
+            <a:srgbClr val="1F4E8C"/>
           </a:solidFill>
           <a:ln>
             <a:noFill/>
@@ -6217,7 +6227,7 @@
           <a:p>
             <a:pPr algn="ctr"/>
             <a:r>
-              <a:rPr sz="900" b="1">
+              <a:rPr sz="1019" b="1">
                 <a:solidFill>
                   <a:srgbClr val="FFFFFF"/>
                 </a:solidFill>
@@ -6232,44 +6242,44 @@
       </p:sp>
       <p:sp>
         <p:nvSpPr>
-          <p:cNvPr id="15" name="블록 변경분 반영"/>
+          <p:cNvPr id="16" name="블록 변경분 반영"/>
           <p:cNvSpPr/>
           <p:nvPr/>
         </p:nvSpPr>
         <p:spPr>
           <a:xfrm>
-            <a:off x="3627120" y="1562100"/>
-            <a:ext cx="1417320" cy="1143000"/>
+            <a:off x="7086600" y="1569720"/>
+            <a:ext cx="1828800" cy="822960"/>
           </a:xfrm>
           <a:prstGeom prst="roundRect">
             <a:avLst>
-              <a:gd name="adj" fmla="val 8000"/>
+              <a:gd name="adj" fmla="val 11111"/>
             </a:avLst>
           </a:prstGeom>
           <a:solidFill>
-            <a:srgbClr val="D3E5F8"/>
+            <a:srgbClr val="0B2545"/>
           </a:solidFill>
           <a:ln w="18288">
             <a:solidFill>
-              <a:srgbClr val="0F3C78"/>
+              <a:srgbClr val="0B2545"/>
             </a:solidFill>
           </a:ln>
         </p:spPr>
         <p:txBody>
-          <a:bodyPr rtlCol="0" anchor="t" lIns="45720" tIns="495300" rIns="45720" bIns="0" wrap="none">
+          <a:bodyPr rtlCol="0" anchor="t" lIns="45720" tIns="388620" rIns="45720" bIns="0" wrap="none">
             <a:noAutofit/>
           </a:bodyPr>
           <a:lstStyle/>
           <a:p>
             <a:pPr algn="ctr">
               <a:lnSpc>
-                <a:spcPts val="1439"/>
+                <a:spcPts val="1560"/>
               </a:lnSpc>
             </a:pPr>
             <a:r>
-              <a:rPr sz="1140" b="1">
+              <a:rPr sz="1200" b="1">
                 <a:solidFill>
-                  <a:srgbClr val="0A2342"/>
+                  <a:srgbClr val="FFFFFF"/>
                 </a:solidFill>
                 <a:latin typeface="Pretendard"/>
                 <a:ea typeface="Pretendard"/>
@@ -6281,50 +6291,32 @@
           <a:p>
             <a:pPr algn="ctr">
               <a:lnSpc>
-                <a:spcPts val="1140"/>
+                <a:spcPts val="1320"/>
               </a:lnSpc>
             </a:pPr>
             <a:r>
-              <a:rPr sz="869" b="0">
+              <a:rPr sz="1019" b="0">
                 <a:solidFill>
-                  <a:srgbClr val="3F4E61"/>
+                  <a:srgbClr val="FFFFFF"/>
                 </a:solidFill>
                 <a:latin typeface="Pretendard"/>
                 <a:ea typeface="Pretendard"/>
                 <a:cs typeface="Pretendard"/>
               </a:rPr>
-              <a:t>CDC 이벤트 반복 적용</a:t>
-            </a:r>
-          </a:p>
-          <a:p>
-            <a:pPr algn="ctr">
-              <a:lnSpc>
-                <a:spcPts val="1140"/>
-              </a:lnSpc>
-            </a:pPr>
-            <a:r>
-              <a:rPr sz="869" b="0">
-                <a:solidFill>
-                  <a:srgbClr val="3F4E61"/>
-                </a:solidFill>
-                <a:latin typeface="Pretendard"/>
-                <a:ea typeface="Pretendard"/>
-                <a:cs typeface="Pretendard"/>
-              </a:rPr>
-              <a:t>지연 수 초 ~ 수 분</a:t>
+              <a:t>change_log 멱등 반영</a:t>
             </a:r>
           </a:p>
         </p:txBody>
       </p:sp>
       <p:sp>
         <p:nvSpPr>
-          <p:cNvPr id="16" name="아이콘 sync"/>
+          <p:cNvPr id="17" name="아이콘 sync"/>
           <p:cNvSpPr/>
           <p:nvPr/>
         </p:nvSpPr>
         <p:spPr>
           <a:xfrm>
-            <a:off x="4234180" y="1757680"/>
+            <a:off x="7899400" y="1658620"/>
             <a:ext cx="203200" cy="203200"/>
           </a:xfrm>
           <a:custGeom>
@@ -6636,7 +6628,7 @@
                   <a:pt x="44592" y="161051"/>
                 </a:lnTo>
                 <a:lnTo>
-                  <a:pt x="46672" y="162878"/>
+                  <a:pt x="46673" y="162878"/>
                 </a:lnTo>
                 <a:lnTo>
                   <a:pt x="56198" y="169545"/>
@@ -6802,7 +6794,7 @@
                   <a:pt x="159141" y="43946"/>
                 </a:lnTo>
                 <a:lnTo>
-                  <a:pt x="157162" y="41910"/>
+                  <a:pt x="157163" y="41910"/>
                 </a:lnTo>
                 <a:lnTo>
                   <a:pt x="147955" y="33655"/>
@@ -6823,7 +6815,7 @@
                   <a:pt x="201930" y="19050"/>
                 </a:lnTo>
                 <a:lnTo>
-                  <a:pt x="160338" y="19050"/>
+                  <a:pt x="160337" y="19050"/>
                 </a:lnTo>
                 <a:lnTo>
                   <a:pt x="165100" y="23495"/>
@@ -6977,7 +6969,7 @@
             </a:pathLst>
           </a:custGeom>
           <a:solidFill>
-            <a:srgbClr val="164B8C"/>
+            <a:srgbClr val="FFFFFF"/>
           </a:solidFill>
           <a:ln>
             <a:noFill/>
@@ -6993,20 +6985,20 @@
       </p:sp>
       <p:sp>
         <p:nvSpPr>
-          <p:cNvPr id="17" name="번호 3"/>
+          <p:cNvPr id="18" name="번호 3"/>
           <p:cNvSpPr/>
           <p:nvPr/>
         </p:nvSpPr>
         <p:spPr>
           <a:xfrm>
-            <a:off x="3680460" y="1615440"/>
-            <a:ext cx="198120" cy="198120"/>
+            <a:off x="7139940" y="1623060"/>
+            <a:ext cx="213360" cy="213360"/>
           </a:xfrm>
           <a:prstGeom prst="ellipse">
             <a:avLst/>
           </a:prstGeom>
           <a:solidFill>
-            <a:srgbClr val="164B8C"/>
+            <a:srgbClr val="FFFFFF"/>
           </a:solidFill>
           <a:ln>
             <a:noFill/>
@@ -7020,9 +7012,9 @@
           <a:p>
             <a:pPr algn="ctr"/>
             <a:r>
-              <a:rPr sz="900" b="1">
+              <a:rPr sz="1019" b="1">
                 <a:solidFill>
-                  <a:srgbClr val="FFFFFF"/>
+                  <a:srgbClr val="0B2545"/>
                 </a:solidFill>
                 <a:latin typeface="Pretendard"/>
                 <a:ea typeface="Pretendard"/>
@@ -7035,44 +7027,132 @@
       </p:sp>
       <p:sp>
         <p:nvSpPr>
-          <p:cNvPr id="18" name="블록 원천 쓰기 중지"/>
+          <p:cNvPr id="19" name="연결점 A"/>
           <p:cNvSpPr/>
           <p:nvPr/>
         </p:nvSpPr>
         <p:spPr>
           <a:xfrm>
-            <a:off x="5501640" y="1562100"/>
-            <a:ext cx="1417320" cy="1143000"/>
+            <a:off x="9525000" y="1813560"/>
+            <a:ext cx="335280" cy="335280"/>
+          </a:xfrm>
+          <a:prstGeom prst="ellipse">
+            <a:avLst/>
+          </a:prstGeom>
+          <a:solidFill>
+            <a:srgbClr val="FFFFFF"/>
+          </a:solidFill>
+          <a:ln w="16764">
+            <a:solidFill>
+              <a:srgbClr val="1F4E8C"/>
+            </a:solidFill>
+          </a:ln>
+        </p:spPr>
+        <p:txBody>
+          <a:bodyPr rtlCol="0" anchor="ctr" lIns="0" tIns="0" rIns="0" bIns="0" wrap="none">
+            <a:noAutofit/>
+          </a:bodyPr>
+          <a:lstStyle/>
+          <a:p>
+            <a:pPr algn="ctr"/>
+            <a:r>
+              <a:rPr sz="1200" b="1">
+                <a:solidFill>
+                  <a:srgbClr val="1F4E8C"/>
+                </a:solidFill>
+                <a:latin typeface="Pretendard"/>
+                <a:ea typeface="Pretendard"/>
+                <a:cs typeface="Pretendard"/>
+              </a:rPr>
+              <a:t>A</a:t>
+            </a:r>
+          </a:p>
+        </p:txBody>
+      </p:sp>
+      <p:sp>
+        <p:nvSpPr>
+          <p:cNvPr id="20" name="연결점 A"/>
+          <p:cNvSpPr/>
+          <p:nvPr/>
+        </p:nvSpPr>
+        <p:spPr>
+          <a:xfrm>
+            <a:off x="563880" y="3474720"/>
+            <a:ext cx="335280" cy="335280"/>
+          </a:xfrm>
+          <a:prstGeom prst="ellipse">
+            <a:avLst/>
+          </a:prstGeom>
+          <a:solidFill>
+            <a:srgbClr val="FFFFFF"/>
+          </a:solidFill>
+          <a:ln w="16764">
+            <a:solidFill>
+              <a:srgbClr val="1F4E8C"/>
+            </a:solidFill>
+          </a:ln>
+        </p:spPr>
+        <p:txBody>
+          <a:bodyPr rtlCol="0" anchor="ctr" lIns="0" tIns="0" rIns="0" bIns="0" wrap="none">
+            <a:noAutofit/>
+          </a:bodyPr>
+          <a:lstStyle/>
+          <a:p>
+            <a:pPr algn="ctr"/>
+            <a:r>
+              <a:rPr sz="1200" b="1">
+                <a:solidFill>
+                  <a:srgbClr val="1F4E8C"/>
+                </a:solidFill>
+                <a:latin typeface="Pretendard"/>
+                <a:ea typeface="Pretendard"/>
+                <a:cs typeface="Pretendard"/>
+              </a:rPr>
+              <a:t>A</a:t>
+            </a:r>
+          </a:p>
+        </p:txBody>
+      </p:sp>
+      <p:sp>
+        <p:nvSpPr>
+          <p:cNvPr id="21" name="블록 원천 쓰기 중지"/>
+          <p:cNvSpPr/>
+          <p:nvPr/>
+        </p:nvSpPr>
+        <p:spPr>
+          <a:xfrm>
+            <a:off x="1295400" y="3230880"/>
+            <a:ext cx="1828800" cy="822960"/>
           </a:xfrm>
           <a:prstGeom prst="roundRect">
             <a:avLst>
-              <a:gd name="adj" fmla="val 8000"/>
+              <a:gd name="adj" fmla="val 11111"/>
             </a:avLst>
           </a:prstGeom>
           <a:solidFill>
             <a:srgbClr val="FFFFFF"/>
           </a:solidFill>
-          <a:ln w="12192">
+          <a:ln w="13716">
             <a:solidFill>
-              <a:srgbClr val="6F9BD1"/>
+              <a:srgbClr val="8EC3EC"/>
             </a:solidFill>
           </a:ln>
         </p:spPr>
         <p:txBody>
-          <a:bodyPr rtlCol="0" anchor="t" lIns="45720" tIns="495300" rIns="45720" bIns="0" wrap="none">
+          <a:bodyPr rtlCol="0" anchor="t" lIns="45720" tIns="388620" rIns="45720" bIns="0" wrap="none">
             <a:noAutofit/>
           </a:bodyPr>
           <a:lstStyle/>
           <a:p>
             <a:pPr algn="ctr">
               <a:lnSpc>
-                <a:spcPts val="1439"/>
+                <a:spcPts val="1560"/>
               </a:lnSpc>
             </a:pPr>
             <a:r>
-              <a:rPr sz="1140" b="1">
+              <a:rPr sz="1200" b="1">
                 <a:solidFill>
-                  <a:srgbClr val="0A2342"/>
+                  <a:srgbClr val="0B2545"/>
                 </a:solidFill>
                 <a:latin typeface="Pretendard"/>
                 <a:ea typeface="Pretendard"/>
@@ -7084,11 +7164,11 @@
           <a:p>
             <a:pPr algn="ctr">
               <a:lnSpc>
-                <a:spcPts val="1140"/>
+                <a:spcPts val="1320"/>
               </a:lnSpc>
             </a:pPr>
             <a:r>
-              <a:rPr sz="869" b="0">
+              <a:rPr sz="1019" b="0">
                 <a:solidFill>
                   <a:srgbClr val="3F4E61"/>
                 </a:solidFill>
@@ -7096,38 +7176,20 @@
                 <a:ea typeface="Pretendard"/>
                 <a:cs typeface="Pretendard"/>
               </a:rPr>
-              <a:t>사람이 업무 중지</a:t>
-            </a:r>
-          </a:p>
-          <a:p>
-            <a:pPr algn="ctr">
-              <a:lnSpc>
-                <a:spcPts val="1140"/>
-              </a:lnSpc>
-            </a:pPr>
-            <a:r>
-              <a:rPr sz="869" b="0">
-                <a:solidFill>
-                  <a:srgbClr val="3F4E61"/>
-                </a:solidFill>
-                <a:latin typeface="Pretendard"/>
-                <a:ea typeface="Pretendard"/>
-                <a:cs typeface="Pretendard"/>
-              </a:rPr>
-              <a:t>캡처 지연 확인</a:t>
+              <a:t>사람이 업무를 멈춘다</a:t>
             </a:r>
           </a:p>
         </p:txBody>
       </p:sp>
       <p:sp>
         <p:nvSpPr>
-          <p:cNvPr id="19" name="아이콘 pause_circle"/>
+          <p:cNvPr id="22" name="아이콘 pause_circle"/>
           <p:cNvSpPr/>
           <p:nvPr/>
         </p:nvSpPr>
         <p:spPr>
           <a:xfrm>
-            <a:off x="6083300" y="1732280"/>
+            <a:off x="2082800" y="3294380"/>
             <a:ext cx="254000" cy="254000"/>
           </a:xfrm>
           <a:custGeom>
@@ -8046,7 +8108,7 @@
             </a:pathLst>
           </a:custGeom>
           <a:solidFill>
-            <a:srgbClr val="164B8C"/>
+            <a:srgbClr val="1F4E8C"/>
           </a:solidFill>
           <a:ln>
             <a:noFill/>
@@ -8062,20 +8124,20 @@
       </p:sp>
       <p:sp>
         <p:nvSpPr>
-          <p:cNvPr id="20" name="번호 4"/>
+          <p:cNvPr id="23" name="번호 4"/>
           <p:cNvSpPr/>
           <p:nvPr/>
         </p:nvSpPr>
         <p:spPr>
           <a:xfrm>
-            <a:off x="5554980" y="1615440"/>
-            <a:ext cx="198120" cy="198120"/>
+            <a:off x="1348740" y="3284220"/>
+            <a:ext cx="213360" cy="213360"/>
           </a:xfrm>
           <a:prstGeom prst="ellipse">
             <a:avLst/>
           </a:prstGeom>
           <a:solidFill>
-            <a:srgbClr val="164B8C"/>
+            <a:srgbClr val="1F4E8C"/>
           </a:solidFill>
           <a:ln>
             <a:noFill/>
@@ -8089,7 +8151,7 @@
           <a:p>
             <a:pPr algn="ctr"/>
             <a:r>
-              <a:rPr sz="900" b="1">
+              <a:rPr sz="1019" b="1">
                 <a:solidFill>
                   <a:srgbClr val="FFFFFF"/>
                 </a:solidFill>
@@ -8104,44 +8166,44 @@
       </p:sp>
       <p:sp>
         <p:nvSpPr>
-          <p:cNvPr id="21" name="블록 마지막 반영"/>
+          <p:cNvPr id="24" name="블록 마지막 반영"/>
           <p:cNvSpPr/>
           <p:nvPr/>
         </p:nvSpPr>
         <p:spPr>
           <a:xfrm>
-            <a:off x="7086600" y="1562100"/>
-            <a:ext cx="1417320" cy="1143000"/>
+            <a:off x="3581400" y="3230880"/>
+            <a:ext cx="1828800" cy="822960"/>
           </a:xfrm>
           <a:prstGeom prst="roundRect">
             <a:avLst>
-              <a:gd name="adj" fmla="val 8000"/>
+              <a:gd name="adj" fmla="val 11111"/>
             </a:avLst>
           </a:prstGeom>
           <a:solidFill>
-            <a:srgbClr val="D3E5F8"/>
+            <a:srgbClr val="0B2545"/>
           </a:solidFill>
           <a:ln w="18288">
             <a:solidFill>
-              <a:srgbClr val="0F3C78"/>
+              <a:srgbClr val="0B2545"/>
             </a:solidFill>
           </a:ln>
         </p:spPr>
         <p:txBody>
-          <a:bodyPr rtlCol="0" anchor="t" lIns="45720" tIns="495300" rIns="45720" bIns="0" wrap="none">
+          <a:bodyPr rtlCol="0" anchor="t" lIns="45720" tIns="388620" rIns="45720" bIns="0" wrap="none">
             <a:noAutofit/>
           </a:bodyPr>
           <a:lstStyle/>
           <a:p>
             <a:pPr algn="ctr">
               <a:lnSpc>
-                <a:spcPts val="1439"/>
+                <a:spcPts val="1560"/>
               </a:lnSpc>
             </a:pPr>
             <a:r>
-              <a:rPr sz="1140" b="1">
+              <a:rPr sz="1200" b="1">
                 <a:solidFill>
-                  <a:srgbClr val="0A2342"/>
+                  <a:srgbClr val="FFFFFF"/>
                 </a:solidFill>
                 <a:latin typeface="Pretendard"/>
                 <a:ea typeface="Pretendard"/>
@@ -8153,50 +8215,32 @@
           <a:p>
             <a:pPr algn="ctr">
               <a:lnSpc>
-                <a:spcPts val="1140"/>
+                <a:spcPts val="1320"/>
               </a:lnSpc>
             </a:pPr>
             <a:r>
-              <a:rPr sz="869" b="0">
+              <a:rPr sz="1019" b="0">
                 <a:solidFill>
-                  <a:srgbClr val="3F4E61"/>
+                  <a:srgbClr val="FFFFFF"/>
                 </a:solidFill>
                 <a:latin typeface="Pretendard"/>
                 <a:ea typeface="Pretendard"/>
                 <a:cs typeface="Pretendard"/>
               </a:rPr>
-              <a:t>반영 0건이</a:t>
-            </a:r>
-          </a:p>
-          <a:p>
-            <a:pPr algn="ctr">
-              <a:lnSpc>
-                <a:spcPts val="1140"/>
-              </a:lnSpc>
-            </a:pPr>
-            <a:r>
-              <a:rPr sz="869" b="0">
-                <a:solidFill>
-                  <a:srgbClr val="3F4E61"/>
-                </a:solidFill>
-                <a:latin typeface="Pretendard"/>
-                <a:ea typeface="Pretendard"/>
-                <a:cs typeface="Pretendard"/>
-              </a:rPr>
-              <a:t>2회 연속될 때까지</a:t>
+              <a:t>kdms cutover 시작</a:t>
             </a:r>
           </a:p>
         </p:txBody>
       </p:sp>
       <p:sp>
         <p:nvSpPr>
-          <p:cNvPr id="22" name="아이콘 published_with_changes"/>
+          <p:cNvPr id="25" name="아이콘 published_with_changes"/>
           <p:cNvSpPr/>
           <p:nvPr/>
         </p:nvSpPr>
         <p:spPr>
           <a:xfrm>
-            <a:off x="7671435" y="1732915"/>
+            <a:off x="4371975" y="3295015"/>
             <a:ext cx="247650" cy="252730"/>
           </a:xfrm>
           <a:custGeom>
@@ -8244,7 +8288,7 @@
                   <a:pt x="68574" y="240822"/>
                 </a:lnTo>
                 <a:lnTo>
-                  <a:pt x="65246" y="239078"/>
+                  <a:pt x="65246" y="239077"/>
                 </a:lnTo>
                 <a:lnTo>
                   <a:pt x="61976" y="237238"/>
@@ -8807,7 +8851,7 @@
                   <a:pt x="211612" y="35289"/>
                 </a:lnTo>
                 <a:lnTo>
-                  <a:pt x="216852" y="40957"/>
+                  <a:pt x="216853" y="40957"/>
                 </a:lnTo>
                 <a:lnTo>
                   <a:pt x="221772" y="46935"/>
@@ -8931,7 +8975,7 @@
             </a:pathLst>
           </a:custGeom>
           <a:solidFill>
-            <a:srgbClr val="164B8C"/>
+            <a:srgbClr val="FFFFFF"/>
           </a:solidFill>
           <a:ln>
             <a:noFill/>
@@ -8947,20 +8991,20 @@
       </p:sp>
       <p:sp>
         <p:nvSpPr>
-          <p:cNvPr id="23" name="번호 5"/>
+          <p:cNvPr id="26" name="번호 5"/>
           <p:cNvSpPr/>
           <p:nvPr/>
         </p:nvSpPr>
         <p:spPr>
           <a:xfrm>
-            <a:off x="7139940" y="1615440"/>
-            <a:ext cx="198120" cy="198120"/>
+            <a:off x="3634740" y="3284220"/>
+            <a:ext cx="213360" cy="213360"/>
           </a:xfrm>
           <a:prstGeom prst="ellipse">
             <a:avLst/>
           </a:prstGeom>
           <a:solidFill>
-            <a:srgbClr val="164B8C"/>
+            <a:srgbClr val="FFFFFF"/>
           </a:solidFill>
           <a:ln>
             <a:noFill/>
@@ -8974,9 +9018,9 @@
           <a:p>
             <a:pPr algn="ctr"/>
             <a:r>
-              <a:rPr sz="900" b="1">
+              <a:rPr sz="1019" b="1">
                 <a:solidFill>
-                  <a:srgbClr val="FFFFFF"/>
+                  <a:srgbClr val="0B2545"/>
                 </a:solidFill>
                 <a:latin typeface="Pretendard"/>
                 <a:ea typeface="Pretendard"/>
@@ -8989,60 +9033,58 @@
       </p:sp>
       <p:sp>
         <p:nvSpPr>
-          <p:cNvPr id="24" name="블록 검증"/>
+          <p:cNvPr id="27" name="판단 6. 검증 일치?"/>
           <p:cNvSpPr/>
           <p:nvPr/>
         </p:nvSpPr>
         <p:spPr>
           <a:xfrm>
-            <a:off x="8671560" y="1562100"/>
-            <a:ext cx="1417320" cy="1143000"/>
+            <a:off x="5867400" y="3185160"/>
+            <a:ext cx="1905000" cy="914400"/>
           </a:xfrm>
-          <a:prstGeom prst="roundRect">
-            <a:avLst>
-              <a:gd name="adj" fmla="val 8000"/>
-            </a:avLst>
+          <a:prstGeom prst="diamond">
+            <a:avLst/>
           </a:prstGeom>
           <a:solidFill>
             <a:srgbClr val="FFFFFF"/>
           </a:solidFill>
-          <a:ln w="12192">
+          <a:ln w="13716">
             <a:solidFill>
-              <a:srgbClr val="6F9BD1"/>
+              <a:srgbClr val="8EC3EC"/>
             </a:solidFill>
           </a:ln>
         </p:spPr>
         <p:txBody>
-          <a:bodyPr rtlCol="0" anchor="t" lIns="45720" tIns="495300" rIns="45720" bIns="0" wrap="none">
+          <a:bodyPr rtlCol="0" anchor="t" lIns="45720" tIns="243840" rIns="45720" bIns="0" wrap="none">
             <a:noAutofit/>
           </a:bodyPr>
           <a:lstStyle/>
           <a:p>
             <a:pPr algn="ctr">
               <a:lnSpc>
-                <a:spcPts val="1439"/>
+                <a:spcPts val="1560"/>
               </a:lnSpc>
             </a:pPr>
             <a:r>
-              <a:rPr sz="1140" b="1">
+              <a:rPr sz="1200" b="1">
                 <a:solidFill>
-                  <a:srgbClr val="0A2342"/>
+                  <a:srgbClr val="0B2545"/>
                 </a:solidFill>
                 <a:latin typeface="Pretendard"/>
                 <a:ea typeface="Pretendard"/>
                 <a:cs typeface="Pretendard"/>
               </a:rPr>
-              <a:t>검증</a:t>
+              <a:t>6. 검증 일치?</a:t>
             </a:r>
           </a:p>
           <a:p>
             <a:pPr algn="ctr">
               <a:lnSpc>
-                <a:spcPts val="1140"/>
+                <a:spcPts val="1320"/>
               </a:lnSpc>
             </a:pPr>
             <a:r>
-              <a:rPr sz="869" b="0">
+              <a:rPr sz="1019" b="0">
                 <a:solidFill>
                   <a:srgbClr val="3F4E61"/>
                 </a:solidFill>
@@ -9050,548 +9092,51 @@
                 <a:ea typeface="Pretendard"/>
                 <a:cs typeface="Pretendard"/>
               </a:rPr>
-              <a:t>건수 · 합계 · 해시</a:t>
-            </a:r>
-          </a:p>
-          <a:p>
-            <a:pPr algn="ctr">
-              <a:lnSpc>
-                <a:spcPts val="1140"/>
-              </a:lnSpc>
-            </a:pPr>
-            <a:r>
-              <a:rPr sz="869" b="0">
-                <a:solidFill>
-                  <a:srgbClr val="3F4E61"/>
-                </a:solidFill>
-                <a:latin typeface="Pretendard"/>
-                <a:ea typeface="Pretendard"/>
-                <a:cs typeface="Pretendard"/>
-              </a:rPr>
-              <a:t>원천 = 대상</a:t>
+              <a:t>건수·합계·해시</a:t>
             </a:r>
           </a:p>
         </p:txBody>
       </p:sp>
       <p:sp>
         <p:nvSpPr>
-          <p:cNvPr id="25" name="아이콘 fact_check"/>
+          <p:cNvPr id="28" name="블록 전환"/>
           <p:cNvSpPr/>
           <p:nvPr/>
         </p:nvSpPr>
         <p:spPr>
           <a:xfrm>
-            <a:off x="9250680" y="1744980"/>
-            <a:ext cx="259080" cy="228600"/>
-          </a:xfrm>
-          <a:custGeom>
-            <a:avLst/>
-            <a:gdLst/>
-            <a:ahLst/>
-            <a:cxnLst/>
-            <a:rect l="l" t="t" r="r" b="b"/>
-            <a:pathLst>
-              <a:path w="259080" h="228600">
-                <a:moveTo>
-                  <a:pt x="19050" y="228600"/>
-                </a:moveTo>
-                <a:lnTo>
-                  <a:pt x="17793" y="228560"/>
-                </a:lnTo>
-                <a:lnTo>
-                  <a:pt x="16563" y="228441"/>
-                </a:lnTo>
-                <a:lnTo>
-                  <a:pt x="15359" y="228243"/>
-                </a:lnTo>
-                <a:lnTo>
-                  <a:pt x="14182" y="227965"/>
-                </a:lnTo>
-                <a:lnTo>
-                  <a:pt x="13031" y="227608"/>
-                </a:lnTo>
-                <a:lnTo>
-                  <a:pt x="11906" y="227171"/>
-                </a:lnTo>
-                <a:lnTo>
-                  <a:pt x="10808" y="226655"/>
-                </a:lnTo>
-                <a:lnTo>
-                  <a:pt x="9737" y="226060"/>
-                </a:lnTo>
-                <a:lnTo>
-                  <a:pt x="8692" y="225385"/>
-                </a:lnTo>
-                <a:lnTo>
-                  <a:pt x="7673" y="224631"/>
-                </a:lnTo>
-                <a:lnTo>
-                  <a:pt x="6681" y="223798"/>
-                </a:lnTo>
-                <a:lnTo>
-                  <a:pt x="5715" y="222885"/>
-                </a:lnTo>
-                <a:lnTo>
-                  <a:pt x="4802" y="221919"/>
-                </a:lnTo>
-                <a:lnTo>
-                  <a:pt x="3969" y="220927"/>
-                </a:lnTo>
-                <a:lnTo>
-                  <a:pt x="3215" y="219908"/>
-                </a:lnTo>
-                <a:lnTo>
-                  <a:pt x="2540" y="218863"/>
-                </a:lnTo>
-                <a:lnTo>
-                  <a:pt x="1945" y="217792"/>
-                </a:lnTo>
-                <a:lnTo>
-                  <a:pt x="1429" y="216694"/>
-                </a:lnTo>
-                <a:lnTo>
-                  <a:pt x="992" y="215569"/>
-                </a:lnTo>
-                <a:lnTo>
-                  <a:pt x="635" y="214418"/>
-                </a:lnTo>
-                <a:lnTo>
-                  <a:pt x="357" y="213241"/>
-                </a:lnTo>
-                <a:lnTo>
-                  <a:pt x="159" y="212037"/>
-                </a:lnTo>
-                <a:lnTo>
-                  <a:pt x="40" y="210807"/>
-                </a:lnTo>
-                <a:lnTo>
-                  <a:pt x="0" y="209550"/>
-                </a:lnTo>
-                <a:lnTo>
-                  <a:pt x="0" y="19050"/>
-                </a:lnTo>
-                <a:lnTo>
-                  <a:pt x="40" y="17793"/>
-                </a:lnTo>
-                <a:lnTo>
-                  <a:pt x="159" y="16563"/>
-                </a:lnTo>
-                <a:lnTo>
-                  <a:pt x="357" y="15359"/>
-                </a:lnTo>
-                <a:lnTo>
-                  <a:pt x="635" y="14182"/>
-                </a:lnTo>
-                <a:lnTo>
-                  <a:pt x="992" y="13031"/>
-                </a:lnTo>
-                <a:lnTo>
-                  <a:pt x="1429" y="11906"/>
-                </a:lnTo>
-                <a:lnTo>
-                  <a:pt x="1945" y="10808"/>
-                </a:lnTo>
-                <a:lnTo>
-                  <a:pt x="2540" y="9737"/>
-                </a:lnTo>
-                <a:lnTo>
-                  <a:pt x="3215" y="8692"/>
-                </a:lnTo>
-                <a:lnTo>
-                  <a:pt x="3969" y="7673"/>
-                </a:lnTo>
-                <a:lnTo>
-                  <a:pt x="4802" y="6681"/>
-                </a:lnTo>
-                <a:lnTo>
-                  <a:pt x="5715" y="5715"/>
-                </a:lnTo>
-                <a:lnTo>
-                  <a:pt x="6681" y="4802"/>
-                </a:lnTo>
-                <a:lnTo>
-                  <a:pt x="7673" y="3969"/>
-                </a:lnTo>
-                <a:lnTo>
-                  <a:pt x="8692" y="3215"/>
-                </a:lnTo>
-                <a:lnTo>
-                  <a:pt x="9737" y="2540"/>
-                </a:lnTo>
-                <a:lnTo>
-                  <a:pt x="10808" y="1945"/>
-                </a:lnTo>
-                <a:lnTo>
-                  <a:pt x="11906" y="1429"/>
-                </a:lnTo>
-                <a:lnTo>
-                  <a:pt x="13031" y="992"/>
-                </a:lnTo>
-                <a:lnTo>
-                  <a:pt x="14182" y="635"/>
-                </a:lnTo>
-                <a:lnTo>
-                  <a:pt x="15359" y="357"/>
-                </a:lnTo>
-                <a:lnTo>
-                  <a:pt x="16563" y="159"/>
-                </a:lnTo>
-                <a:lnTo>
-                  <a:pt x="17793" y="40"/>
-                </a:lnTo>
-                <a:lnTo>
-                  <a:pt x="19050" y="0"/>
-                </a:lnTo>
-                <a:lnTo>
-                  <a:pt x="240030" y="0"/>
-                </a:lnTo>
-                <a:lnTo>
-                  <a:pt x="241287" y="40"/>
-                </a:lnTo>
-                <a:lnTo>
-                  <a:pt x="242517" y="159"/>
-                </a:lnTo>
-                <a:lnTo>
-                  <a:pt x="243721" y="357"/>
-                </a:lnTo>
-                <a:lnTo>
-                  <a:pt x="244898" y="635"/>
-                </a:lnTo>
-                <a:lnTo>
-                  <a:pt x="246049" y="992"/>
-                </a:lnTo>
-                <a:lnTo>
-                  <a:pt x="247174" y="1429"/>
-                </a:lnTo>
-                <a:lnTo>
-                  <a:pt x="248272" y="1945"/>
-                </a:lnTo>
-                <a:lnTo>
-                  <a:pt x="249343" y="2540"/>
-                </a:lnTo>
-                <a:lnTo>
-                  <a:pt x="250388" y="3215"/>
-                </a:lnTo>
-                <a:lnTo>
-                  <a:pt x="251407" y="3969"/>
-                </a:lnTo>
-                <a:lnTo>
-                  <a:pt x="252399" y="4802"/>
-                </a:lnTo>
-                <a:lnTo>
-                  <a:pt x="253365" y="5715"/>
-                </a:lnTo>
-                <a:lnTo>
-                  <a:pt x="254278" y="6681"/>
-                </a:lnTo>
-                <a:lnTo>
-                  <a:pt x="255111" y="7673"/>
-                </a:lnTo>
-                <a:lnTo>
-                  <a:pt x="255865" y="8692"/>
-                </a:lnTo>
-                <a:lnTo>
-                  <a:pt x="256540" y="9737"/>
-                </a:lnTo>
-                <a:lnTo>
-                  <a:pt x="257135" y="10808"/>
-                </a:lnTo>
-                <a:lnTo>
-                  <a:pt x="257651" y="11906"/>
-                </a:lnTo>
-                <a:lnTo>
-                  <a:pt x="258088" y="13031"/>
-                </a:lnTo>
-                <a:lnTo>
-                  <a:pt x="258445" y="14182"/>
-                </a:lnTo>
-                <a:lnTo>
-                  <a:pt x="258723" y="15359"/>
-                </a:lnTo>
-                <a:lnTo>
-                  <a:pt x="258921" y="16563"/>
-                </a:lnTo>
-                <a:lnTo>
-                  <a:pt x="259040" y="17793"/>
-                </a:lnTo>
-                <a:lnTo>
-                  <a:pt x="259080" y="19050"/>
-                </a:lnTo>
-                <a:lnTo>
-                  <a:pt x="259080" y="209550"/>
-                </a:lnTo>
-                <a:lnTo>
-                  <a:pt x="259040" y="210807"/>
-                </a:lnTo>
-                <a:lnTo>
-                  <a:pt x="258921" y="212037"/>
-                </a:lnTo>
-                <a:lnTo>
-                  <a:pt x="258723" y="213241"/>
-                </a:lnTo>
-                <a:lnTo>
-                  <a:pt x="258445" y="214418"/>
-                </a:lnTo>
-                <a:lnTo>
-                  <a:pt x="258088" y="215569"/>
-                </a:lnTo>
-                <a:lnTo>
-                  <a:pt x="257651" y="216694"/>
-                </a:lnTo>
-                <a:lnTo>
-                  <a:pt x="257135" y="217792"/>
-                </a:lnTo>
-                <a:lnTo>
-                  <a:pt x="256540" y="218863"/>
-                </a:lnTo>
-                <a:lnTo>
-                  <a:pt x="255865" y="219908"/>
-                </a:lnTo>
-                <a:lnTo>
-                  <a:pt x="255111" y="220927"/>
-                </a:lnTo>
-                <a:lnTo>
-                  <a:pt x="254278" y="221919"/>
-                </a:lnTo>
-                <a:lnTo>
-                  <a:pt x="253365" y="222885"/>
-                </a:lnTo>
-                <a:lnTo>
-                  <a:pt x="252399" y="223798"/>
-                </a:lnTo>
-                <a:lnTo>
-                  <a:pt x="251407" y="224631"/>
-                </a:lnTo>
-                <a:lnTo>
-                  <a:pt x="250388" y="225385"/>
-                </a:lnTo>
-                <a:lnTo>
-                  <a:pt x="249343" y="226060"/>
-                </a:lnTo>
-                <a:lnTo>
-                  <a:pt x="248272" y="226655"/>
-                </a:lnTo>
-                <a:lnTo>
-                  <a:pt x="247174" y="227171"/>
-                </a:lnTo>
-                <a:lnTo>
-                  <a:pt x="246049" y="227608"/>
-                </a:lnTo>
-                <a:lnTo>
-                  <a:pt x="244898" y="227965"/>
-                </a:lnTo>
-                <a:lnTo>
-                  <a:pt x="243721" y="228243"/>
-                </a:lnTo>
-                <a:lnTo>
-                  <a:pt x="242517" y="228441"/>
-                </a:lnTo>
-                <a:lnTo>
-                  <a:pt x="241287" y="228560"/>
-                </a:lnTo>
-                <a:lnTo>
-                  <a:pt x="240030" y="228600"/>
-                </a:lnTo>
-                <a:lnTo>
-                  <a:pt x="19050" y="228600"/>
-                </a:lnTo>
-                <a:close/>
-                <a:moveTo>
-                  <a:pt x="19050" y="209550"/>
-                </a:moveTo>
-                <a:lnTo>
-                  <a:pt x="240030" y="209550"/>
-                </a:lnTo>
-                <a:lnTo>
-                  <a:pt x="240030" y="19050"/>
-                </a:lnTo>
-                <a:lnTo>
-                  <a:pt x="19050" y="19050"/>
-                </a:lnTo>
-                <a:lnTo>
-                  <a:pt x="19050" y="209550"/>
-                </a:lnTo>
-                <a:close/>
-                <a:moveTo>
-                  <a:pt x="40640" y="177800"/>
-                </a:moveTo>
-                <a:lnTo>
-                  <a:pt x="104140" y="177800"/>
-                </a:lnTo>
-                <a:lnTo>
-                  <a:pt x="104140" y="152400"/>
-                </a:lnTo>
-                <a:lnTo>
-                  <a:pt x="40640" y="152400"/>
-                </a:lnTo>
-                <a:lnTo>
-                  <a:pt x="40640" y="177800"/>
-                </a:lnTo>
-                <a:close/>
-                <a:moveTo>
-                  <a:pt x="161925" y="152400"/>
-                </a:moveTo>
-                <a:lnTo>
-                  <a:pt x="224790" y="89535"/>
-                </a:lnTo>
-                <a:lnTo>
-                  <a:pt x="206692" y="71438"/>
-                </a:lnTo>
-                <a:lnTo>
-                  <a:pt x="161925" y="116522"/>
-                </a:lnTo>
-                <a:lnTo>
-                  <a:pt x="143828" y="98425"/>
-                </a:lnTo>
-                <a:lnTo>
-                  <a:pt x="126048" y="116522"/>
-                </a:lnTo>
-                <a:lnTo>
-                  <a:pt x="161925" y="152400"/>
-                </a:lnTo>
-                <a:close/>
-                <a:moveTo>
-                  <a:pt x="40640" y="127000"/>
-                </a:moveTo>
-                <a:lnTo>
-                  <a:pt x="104140" y="127000"/>
-                </a:lnTo>
-                <a:lnTo>
-                  <a:pt x="104140" y="101600"/>
-                </a:lnTo>
-                <a:lnTo>
-                  <a:pt x="40640" y="101600"/>
-                </a:lnTo>
-                <a:lnTo>
-                  <a:pt x="40640" y="127000"/>
-                </a:lnTo>
-                <a:close/>
-                <a:moveTo>
-                  <a:pt x="40640" y="76200"/>
-                </a:moveTo>
-                <a:lnTo>
-                  <a:pt x="104140" y="76200"/>
-                </a:lnTo>
-                <a:lnTo>
-                  <a:pt x="104140" y="50800"/>
-                </a:lnTo>
-                <a:lnTo>
-                  <a:pt x="40640" y="50800"/>
-                </a:lnTo>
-                <a:lnTo>
-                  <a:pt x="40640" y="76200"/>
-                </a:lnTo>
-                <a:close/>
-                <a:moveTo>
-                  <a:pt x="19050" y="209550"/>
-                </a:moveTo>
-                <a:lnTo>
-                  <a:pt x="19050" y="19050"/>
-                </a:lnTo>
-                <a:lnTo>
-                  <a:pt x="19050" y="209550"/>
-                </a:lnTo>
-                <a:close/>
-              </a:path>
-            </a:pathLst>
-          </a:custGeom>
-          <a:solidFill>
-            <a:srgbClr val="164B8C"/>
-          </a:solidFill>
-          <a:ln>
-            <a:noFill/>
-          </a:ln>
-        </p:spPr>
-        <p:txBody>
-          <a:bodyPr rtlCol="0" anchor="ctr"/>
-          <a:lstStyle/>
-          <a:p>
-            <a:pPr algn="ctr"/>
-          </a:p>
-        </p:txBody>
-      </p:sp>
-      <p:sp>
-        <p:nvSpPr>
-          <p:cNvPr id="26" name="번호 6"/>
-          <p:cNvSpPr/>
-          <p:nvPr/>
-        </p:nvSpPr>
-        <p:spPr>
-          <a:xfrm>
-            <a:off x="8724900" y="1615440"/>
-            <a:ext cx="198120" cy="198120"/>
-          </a:xfrm>
-          <a:prstGeom prst="ellipse">
-            <a:avLst/>
-          </a:prstGeom>
-          <a:solidFill>
-            <a:srgbClr val="164B8C"/>
-          </a:solidFill>
-          <a:ln>
-            <a:noFill/>
-          </a:ln>
-        </p:spPr>
-        <p:txBody>
-          <a:bodyPr rtlCol="0" anchor="ctr" lIns="0" tIns="0" rIns="0" bIns="0" wrap="none">
-            <a:noAutofit/>
-          </a:bodyPr>
-          <a:lstStyle/>
-          <a:p>
-            <a:pPr algn="ctr"/>
-            <a:r>
-              <a:rPr sz="900" b="1">
-                <a:solidFill>
-                  <a:srgbClr val="FFFFFF"/>
-                </a:solidFill>
-                <a:latin typeface="Pretendard"/>
-                <a:ea typeface="Pretendard"/>
-                <a:cs typeface="Pretendard"/>
-              </a:rPr>
-              <a:t>6</a:t>
-            </a:r>
-          </a:p>
-        </p:txBody>
-      </p:sp>
-      <p:sp>
-        <p:nvSpPr>
-          <p:cNvPr id="27" name="블록 전환"/>
-          <p:cNvSpPr/>
-          <p:nvPr/>
-        </p:nvSpPr>
-        <p:spPr>
-          <a:xfrm>
-            <a:off x="10256520" y="1562100"/>
-            <a:ext cx="1417320" cy="1143000"/>
+            <a:off x="8229600" y="3230880"/>
+            <a:ext cx="1828800" cy="822960"/>
           </a:xfrm>
           <a:prstGeom prst="roundRect">
             <a:avLst>
-              <a:gd name="adj" fmla="val 8000"/>
+              <a:gd name="adj" fmla="val 11111"/>
             </a:avLst>
           </a:prstGeom>
           <a:solidFill>
             <a:srgbClr val="FFFFFF"/>
           </a:solidFill>
-          <a:ln w="12192">
+          <a:ln w="13716">
             <a:solidFill>
-              <a:srgbClr val="6F9BD1"/>
+              <a:srgbClr val="8EC3EC"/>
             </a:solidFill>
           </a:ln>
         </p:spPr>
         <p:txBody>
-          <a:bodyPr rtlCol="0" anchor="t" lIns="45720" tIns="495300" rIns="45720" bIns="0" wrap="none">
+          <a:bodyPr rtlCol="0" anchor="t" lIns="45720" tIns="388620" rIns="45720" bIns="0" wrap="none">
             <a:noAutofit/>
           </a:bodyPr>
           <a:lstStyle/>
           <a:p>
             <a:pPr algn="ctr">
               <a:lnSpc>
-                <a:spcPts val="1439"/>
+                <a:spcPts val="1560"/>
               </a:lnSpc>
             </a:pPr>
             <a:r>
-              <a:rPr sz="1140" b="1">
+              <a:rPr sz="1200" b="1">
                 <a:solidFill>
-                  <a:srgbClr val="0A2342"/>
+                  <a:srgbClr val="0B2545"/>
                 </a:solidFill>
                 <a:latin typeface="Pretendard"/>
                 <a:ea typeface="Pretendard"/>
@@ -9603,11 +9148,11 @@
           <a:p>
             <a:pPr algn="ctr">
               <a:lnSpc>
-                <a:spcPts val="1140"/>
+                <a:spcPts val="1320"/>
               </a:lnSpc>
             </a:pPr>
             <a:r>
-              <a:rPr sz="869" b="0">
+              <a:rPr sz="1019" b="0">
                 <a:solidFill>
                   <a:srgbClr val="3F4E61"/>
                 </a:solidFill>
@@ -9618,35 +9163,17 @@
               <a:t>setval · FK 켜기</a:t>
             </a:r>
           </a:p>
-          <a:p>
-            <a:pPr algn="ctr">
-              <a:lnSpc>
-                <a:spcPts val="1140"/>
-              </a:lnSpc>
-            </a:pPr>
-            <a:r>
-              <a:rPr sz="869" b="0">
-                <a:solidFill>
-                  <a:srgbClr val="3F4E61"/>
-                </a:solidFill>
-                <a:latin typeface="Pretendard"/>
-                <a:ea typeface="Pretendard"/>
-                <a:cs typeface="Pretendard"/>
-              </a:rPr>
-              <a:t>소요 시간 기록</a:t>
-            </a:r>
-          </a:p>
         </p:txBody>
       </p:sp>
       <p:sp>
         <p:nvSpPr>
-          <p:cNvPr id="28" name="아이콘 swap_horiz"/>
+          <p:cNvPr id="29" name="아이콘 swap_horiz"/>
           <p:cNvSpPr/>
           <p:nvPr/>
         </p:nvSpPr>
         <p:spPr>
           <a:xfrm>
-            <a:off x="10838180" y="1757680"/>
+            <a:off x="9017000" y="3319780"/>
             <a:ext cx="254000" cy="203200"/>
           </a:xfrm>
           <a:custGeom>
@@ -9723,7 +9250,7 @@
             </a:pathLst>
           </a:custGeom>
           <a:solidFill>
-            <a:srgbClr val="164B8C"/>
+            <a:srgbClr val="1F4E8C"/>
           </a:solidFill>
           <a:ln>
             <a:noFill/>
@@ -9739,20 +9266,20 @@
       </p:sp>
       <p:sp>
         <p:nvSpPr>
-          <p:cNvPr id="29" name="번호 7"/>
+          <p:cNvPr id="30" name="번호 7"/>
           <p:cNvSpPr/>
           <p:nvPr/>
         </p:nvSpPr>
         <p:spPr>
           <a:xfrm>
-            <a:off x="10309860" y="1615440"/>
-            <a:ext cx="198120" cy="198120"/>
+            <a:off x="8282940" y="3284220"/>
+            <a:ext cx="213360" cy="213360"/>
           </a:xfrm>
           <a:prstGeom prst="ellipse">
             <a:avLst/>
           </a:prstGeom>
           <a:solidFill>
-            <a:srgbClr val="164B8C"/>
+            <a:srgbClr val="1F4E8C"/>
           </a:solidFill>
           <a:ln>
             <a:noFill/>
@@ -9766,7 +9293,7 @@
           <a:p>
             <a:pPr algn="ctr"/>
             <a:r>
-              <a:rPr sz="900" b="1">
+              <a:rPr sz="1019" b="1">
                 <a:solidFill>
                   <a:srgbClr val="FFFFFF"/>
                 </a:solidFill>
@@ -9781,14 +9308,14 @@
       </p:sp>
       <p:sp>
         <p:nvSpPr>
-          <p:cNvPr id="30" name="블록 원천 업무 쓰기 계속"/>
+          <p:cNvPr id="31" name="블록 완료 (DONE)"/>
           <p:cNvSpPr/>
           <p:nvPr/>
         </p:nvSpPr>
         <p:spPr>
           <a:xfrm>
-            <a:off x="457200" y="3200400"/>
-            <a:ext cx="4587240" cy="396240"/>
+            <a:off x="10515600" y="3474720"/>
+            <a:ext cx="1143000" cy="335280"/>
           </a:xfrm>
           <a:prstGeom prst="roundRect">
             <a:avLst>
@@ -9796,1995 +9323,143 @@
             </a:avLst>
           </a:prstGeom>
           <a:solidFill>
-            <a:srgbClr val="FFFFFF"/>
+            <a:srgbClr val="0B2545"/>
           </a:solidFill>
           <a:ln w="15240">
             <a:solidFill>
-              <a:srgbClr val="164B8C"/>
+              <a:srgbClr val="0B2545"/>
             </a:solidFill>
           </a:ln>
         </p:spPr>
         <p:txBody>
-          <a:bodyPr rtlCol="0" anchor="ctr" lIns="1805750" tIns="0" rIns="0" bIns="0" wrap="none">
+          <a:bodyPr rtlCol="0" anchor="ctr" lIns="170307" tIns="0" rIns="0" bIns="0" wrap="none">
             <a:noAutofit/>
           </a:bodyPr>
           <a:lstStyle/>
           <a:p>
             <a:pPr algn="l"/>
             <a:r>
-              <a:rPr sz="1019" b="1">
+              <a:rPr sz="1080" b="1">
                 <a:solidFill>
-                  <a:srgbClr val="0A2342"/>
+                  <a:srgbClr val="FFFFFF"/>
                 </a:solidFill>
                 <a:latin typeface="Pretendard"/>
                 <a:ea typeface="Pretendard"/>
                 <a:cs typeface="Pretendard"/>
               </a:rPr>
-              <a:t>원천 업무 쓰기 계속</a:t>
+              <a:t>완료 (DONE)</a:t>
             </a:r>
           </a:p>
         </p:txBody>
       </p:sp>
       <p:sp>
         <p:nvSpPr>
-          <p:cNvPr id="31" name="아이콘 edit_note"/>
+          <p:cNvPr id="32" name="블록 멈춤 (FAILED)"/>
           <p:cNvSpPr/>
           <p:nvPr/>
         </p:nvSpPr>
         <p:spPr>
           <a:xfrm>
-            <a:off x="2021650" y="3332480"/>
-            <a:ext cx="148590" cy="132080"/>
+            <a:off x="5867400" y="4328160"/>
+            <a:ext cx="1905000" cy="441960"/>
           </a:xfrm>
-          <a:custGeom>
-            <a:avLst/>
-            <a:gdLst/>
-            <a:ahLst/>
-            <a:cxnLst/>
-            <a:rect l="l" t="t" r="r" b="b"/>
-            <a:pathLst>
-              <a:path w="148590" h="132080">
-                <a:moveTo>
-                  <a:pt x="0" y="80486"/>
-                </a:moveTo>
-                <a:lnTo>
-                  <a:pt x="0" y="68104"/>
-                </a:lnTo>
-                <a:lnTo>
-                  <a:pt x="61912" y="68104"/>
-                </a:lnTo>
-                <a:lnTo>
-                  <a:pt x="61912" y="80486"/>
-                </a:lnTo>
-                <a:lnTo>
-                  <a:pt x="0" y="80486"/>
-                </a:lnTo>
-                <a:close/>
-                <a:moveTo>
-                  <a:pt x="0" y="46434"/>
-                </a:moveTo>
-                <a:lnTo>
-                  <a:pt x="0" y="34052"/>
-                </a:lnTo>
-                <a:lnTo>
-                  <a:pt x="96996" y="34052"/>
-                </a:lnTo>
-                <a:lnTo>
-                  <a:pt x="96996" y="46434"/>
-                </a:lnTo>
-                <a:lnTo>
-                  <a:pt x="0" y="46434"/>
-                </a:lnTo>
-                <a:close/>
-                <a:moveTo>
-                  <a:pt x="0" y="12382"/>
-                </a:moveTo>
-                <a:lnTo>
-                  <a:pt x="0" y="0"/>
-                </a:lnTo>
-                <a:lnTo>
-                  <a:pt x="96996" y="0"/>
-                </a:lnTo>
-                <a:lnTo>
-                  <a:pt x="96996" y="12382"/>
-                </a:lnTo>
-                <a:lnTo>
-                  <a:pt x="0" y="12382"/>
-                </a:lnTo>
-                <a:close/>
-                <a:moveTo>
-                  <a:pt x="74294" y="132080"/>
-                </a:moveTo>
-                <a:lnTo>
-                  <a:pt x="74294" y="106696"/>
-                </a:lnTo>
-                <a:lnTo>
-                  <a:pt x="119903" y="61293"/>
-                </a:lnTo>
-                <a:lnTo>
-                  <a:pt x="120216" y="60991"/>
-                </a:lnTo>
-                <a:lnTo>
-                  <a:pt x="120534" y="60703"/>
-                </a:lnTo>
-                <a:lnTo>
-                  <a:pt x="120858" y="60429"/>
-                </a:lnTo>
-                <a:lnTo>
-                  <a:pt x="121187" y="60170"/>
-                </a:lnTo>
-                <a:lnTo>
-                  <a:pt x="121523" y="59925"/>
-                </a:lnTo>
-                <a:lnTo>
-                  <a:pt x="121864" y="59694"/>
-                </a:lnTo>
-                <a:lnTo>
-                  <a:pt x="122211" y="59478"/>
-                </a:lnTo>
-                <a:lnTo>
-                  <a:pt x="122563" y="59275"/>
-                </a:lnTo>
-                <a:lnTo>
-                  <a:pt x="122922" y="59088"/>
-                </a:lnTo>
-                <a:lnTo>
-                  <a:pt x="123286" y="58914"/>
-                </a:lnTo>
-                <a:lnTo>
-                  <a:pt x="123655" y="58755"/>
-                </a:lnTo>
-                <a:lnTo>
-                  <a:pt x="124031" y="58610"/>
-                </a:lnTo>
-                <a:lnTo>
-                  <a:pt x="124409" y="58479"/>
-                </a:lnTo>
-                <a:lnTo>
-                  <a:pt x="124788" y="58358"/>
-                </a:lnTo>
-                <a:lnTo>
-                  <a:pt x="125166" y="58249"/>
-                </a:lnTo>
-                <a:lnTo>
-                  <a:pt x="125544" y="58152"/>
-                </a:lnTo>
-                <a:lnTo>
-                  <a:pt x="125923" y="58066"/>
-                </a:lnTo>
-                <a:lnTo>
-                  <a:pt x="126301" y="57991"/>
-                </a:lnTo>
-                <a:lnTo>
-                  <a:pt x="126679" y="57928"/>
-                </a:lnTo>
-                <a:lnTo>
-                  <a:pt x="127058" y="57877"/>
-                </a:lnTo>
-                <a:lnTo>
-                  <a:pt x="127436" y="57837"/>
-                </a:lnTo>
-                <a:lnTo>
-                  <a:pt x="127814" y="57808"/>
-                </a:lnTo>
-                <a:lnTo>
-                  <a:pt x="128193" y="57791"/>
-                </a:lnTo>
-                <a:lnTo>
-                  <a:pt x="128571" y="57785"/>
-                </a:lnTo>
-                <a:lnTo>
-                  <a:pt x="128982" y="57791"/>
-                </a:lnTo>
-                <a:lnTo>
-                  <a:pt x="129391" y="57811"/>
-                </a:lnTo>
-                <a:lnTo>
-                  <a:pt x="129796" y="57843"/>
-                </a:lnTo>
-                <a:lnTo>
-                  <a:pt x="130199" y="57888"/>
-                </a:lnTo>
-                <a:lnTo>
-                  <a:pt x="130599" y="57946"/>
-                </a:lnTo>
-                <a:lnTo>
-                  <a:pt x="130996" y="58017"/>
-                </a:lnTo>
-                <a:lnTo>
-                  <a:pt x="131390" y="58101"/>
-                </a:lnTo>
-                <a:lnTo>
-                  <a:pt x="131781" y="58198"/>
-                </a:lnTo>
-                <a:lnTo>
-                  <a:pt x="132170" y="58307"/>
-                </a:lnTo>
-                <a:lnTo>
-                  <a:pt x="132555" y="58430"/>
-                </a:lnTo>
-                <a:lnTo>
-                  <a:pt x="132938" y="58565"/>
-                </a:lnTo>
-                <a:lnTo>
-                  <a:pt x="133318" y="58714"/>
-                </a:lnTo>
-                <a:lnTo>
-                  <a:pt x="133693" y="58875"/>
-                </a:lnTo>
-                <a:lnTo>
-                  <a:pt x="134063" y="59049"/>
-                </a:lnTo>
-                <a:lnTo>
-                  <a:pt x="134427" y="59236"/>
-                </a:lnTo>
-                <a:lnTo>
-                  <a:pt x="134785" y="59436"/>
-                </a:lnTo>
-                <a:lnTo>
-                  <a:pt x="135138" y="59649"/>
-                </a:lnTo>
-                <a:lnTo>
-                  <a:pt x="135485" y="59875"/>
-                </a:lnTo>
-                <a:lnTo>
-                  <a:pt x="135826" y="60113"/>
-                </a:lnTo>
-                <a:lnTo>
-                  <a:pt x="136161" y="60365"/>
-                </a:lnTo>
-                <a:lnTo>
-                  <a:pt x="136491" y="60629"/>
-                </a:lnTo>
-                <a:lnTo>
-                  <a:pt x="136815" y="60906"/>
-                </a:lnTo>
-                <a:lnTo>
-                  <a:pt x="137133" y="61197"/>
-                </a:lnTo>
-                <a:lnTo>
-                  <a:pt x="137445" y="61500"/>
-                </a:lnTo>
-                <a:lnTo>
-                  <a:pt x="145081" y="69136"/>
-                </a:lnTo>
-                <a:lnTo>
-                  <a:pt x="145384" y="69448"/>
-                </a:lnTo>
-                <a:lnTo>
-                  <a:pt x="145672" y="69766"/>
-                </a:lnTo>
-                <a:lnTo>
-                  <a:pt x="145945" y="70090"/>
-                </a:lnTo>
-                <a:lnTo>
-                  <a:pt x="146205" y="70420"/>
-                </a:lnTo>
-                <a:lnTo>
-                  <a:pt x="146450" y="70755"/>
-                </a:lnTo>
-                <a:lnTo>
-                  <a:pt x="146681" y="71096"/>
-                </a:lnTo>
-                <a:lnTo>
-                  <a:pt x="146897" y="71443"/>
-                </a:lnTo>
-                <a:lnTo>
-                  <a:pt x="147099" y="71796"/>
-                </a:lnTo>
-                <a:lnTo>
-                  <a:pt x="147287" y="72154"/>
-                </a:lnTo>
-                <a:lnTo>
-                  <a:pt x="147460" y="72518"/>
-                </a:lnTo>
-                <a:lnTo>
-                  <a:pt x="147619" y="72888"/>
-                </a:lnTo>
-                <a:lnTo>
-                  <a:pt x="147764" y="73263"/>
-                </a:lnTo>
-                <a:lnTo>
-                  <a:pt x="147896" y="73641"/>
-                </a:lnTo>
-                <a:lnTo>
-                  <a:pt x="148016" y="74020"/>
-                </a:lnTo>
-                <a:lnTo>
-                  <a:pt x="148125" y="74398"/>
-                </a:lnTo>
-                <a:lnTo>
-                  <a:pt x="148223" y="74777"/>
-                </a:lnTo>
-                <a:lnTo>
-                  <a:pt x="148309" y="75155"/>
-                </a:lnTo>
-                <a:lnTo>
-                  <a:pt x="148383" y="75533"/>
-                </a:lnTo>
-                <a:lnTo>
-                  <a:pt x="148446" y="75912"/>
-                </a:lnTo>
-                <a:lnTo>
-                  <a:pt x="148498" y="76290"/>
-                </a:lnTo>
-                <a:lnTo>
-                  <a:pt x="148538" y="76668"/>
-                </a:lnTo>
-                <a:lnTo>
-                  <a:pt x="148567" y="77047"/>
-                </a:lnTo>
-                <a:lnTo>
-                  <a:pt x="148584" y="77425"/>
-                </a:lnTo>
-                <a:lnTo>
-                  <a:pt x="148590" y="77803"/>
-                </a:lnTo>
-                <a:lnTo>
-                  <a:pt x="148583" y="78182"/>
-                </a:lnTo>
-                <a:lnTo>
-                  <a:pt x="148564" y="78563"/>
-                </a:lnTo>
-                <a:lnTo>
-                  <a:pt x="148531" y="78945"/>
-                </a:lnTo>
-                <a:lnTo>
-                  <a:pt x="148486" y="79328"/>
-                </a:lnTo>
-                <a:lnTo>
-                  <a:pt x="148428" y="79713"/>
-                </a:lnTo>
-                <a:lnTo>
-                  <a:pt x="148357" y="80099"/>
-                </a:lnTo>
-                <a:lnTo>
-                  <a:pt x="148273" y="80487"/>
-                </a:lnTo>
-                <a:lnTo>
-                  <a:pt x="148177" y="80876"/>
-                </a:lnTo>
-                <a:lnTo>
-                  <a:pt x="148067" y="81267"/>
-                </a:lnTo>
-                <a:lnTo>
-                  <a:pt x="147945" y="81659"/>
-                </a:lnTo>
-                <a:lnTo>
-                  <a:pt x="147809" y="82052"/>
-                </a:lnTo>
-                <a:lnTo>
-                  <a:pt x="147661" y="82447"/>
-                </a:lnTo>
-                <a:lnTo>
-                  <a:pt x="147500" y="82839"/>
-                </a:lnTo>
-                <a:lnTo>
-                  <a:pt x="147326" y="83224"/>
-                </a:lnTo>
-                <a:lnTo>
-                  <a:pt x="147140" y="83601"/>
-                </a:lnTo>
-                <a:lnTo>
-                  <a:pt x="146941" y="83972"/>
-                </a:lnTo>
-                <a:lnTo>
-                  <a:pt x="146729" y="84335"/>
-                </a:lnTo>
-                <a:lnTo>
-                  <a:pt x="146505" y="84691"/>
-                </a:lnTo>
-                <a:lnTo>
-                  <a:pt x="146268" y="85040"/>
-                </a:lnTo>
-                <a:lnTo>
-                  <a:pt x="146018" y="85382"/>
-                </a:lnTo>
-                <a:lnTo>
-                  <a:pt x="145756" y="85717"/>
-                </a:lnTo>
-                <a:lnTo>
-                  <a:pt x="145481" y="86044"/>
-                </a:lnTo>
-                <a:lnTo>
-                  <a:pt x="145193" y="86364"/>
-                </a:lnTo>
-                <a:lnTo>
-                  <a:pt x="144893" y="86678"/>
-                </a:lnTo>
-                <a:lnTo>
-                  <a:pt x="99679" y="132080"/>
-                </a:lnTo>
-                <a:lnTo>
-                  <a:pt x="74294" y="132080"/>
-                </a:lnTo>
-                <a:close/>
-                <a:moveTo>
-                  <a:pt x="136207" y="77803"/>
-                </a:moveTo>
-                <a:lnTo>
-                  <a:pt x="128571" y="70168"/>
-                </a:lnTo>
-                <a:lnTo>
-                  <a:pt x="136207" y="77803"/>
-                </a:lnTo>
-                <a:close/>
-                <a:moveTo>
-                  <a:pt x="86677" y="119698"/>
-                </a:moveTo>
-                <a:lnTo>
-                  <a:pt x="94519" y="119698"/>
-                </a:lnTo>
-                <a:lnTo>
-                  <a:pt x="119491" y="94520"/>
-                </a:lnTo>
-                <a:lnTo>
-                  <a:pt x="115776" y="90599"/>
-                </a:lnTo>
-                <a:lnTo>
-                  <a:pt x="111855" y="86884"/>
-                </a:lnTo>
-                <a:lnTo>
-                  <a:pt x="86677" y="111855"/>
-                </a:lnTo>
-                <a:lnTo>
-                  <a:pt x="86677" y="119698"/>
-                </a:lnTo>
-                <a:close/>
-                <a:moveTo>
-                  <a:pt x="115776" y="90599"/>
-                </a:moveTo>
-                <a:lnTo>
-                  <a:pt x="111855" y="86884"/>
-                </a:lnTo>
-                <a:lnTo>
-                  <a:pt x="119491" y="94520"/>
-                </a:lnTo>
-                <a:lnTo>
-                  <a:pt x="115776" y="90599"/>
-                </a:lnTo>
-                <a:close/>
-              </a:path>
-            </a:pathLst>
-          </a:custGeom>
+          <a:prstGeom prst="roundRect">
+            <a:avLst>
+              <a:gd name="adj" fmla="val 20689"/>
+            </a:avLst>
+          </a:prstGeom>
           <a:solidFill>
-            <a:srgbClr val="164B8C"/>
+            <a:srgbClr val="D3E5F8"/>
           </a:solidFill>
-          <a:ln>
-            <a:noFill/>
+          <a:ln w="16764">
+            <a:solidFill>
+              <a:srgbClr val="1F4E8C"/>
+            </a:solidFill>
           </a:ln>
         </p:spPr>
         <p:txBody>
-          <a:bodyPr rtlCol="0" anchor="ctr"/>
+          <a:bodyPr rtlCol="0" anchor="t" lIns="45720" tIns="7620" rIns="45720" bIns="0" wrap="none">
+            <a:noAutofit/>
+          </a:bodyPr>
           <a:lstStyle/>
           <a:p>
-            <a:pPr algn="ctr"/>
+            <a:pPr algn="ctr">
+              <a:lnSpc>
+                <a:spcPts val="1560"/>
+              </a:lnSpc>
+            </a:pPr>
+            <a:r>
+              <a:rPr sz="1200" b="1">
+                <a:solidFill>
+                  <a:srgbClr val="0B2545"/>
+                </a:solidFill>
+                <a:latin typeface="Pretendard"/>
+                <a:ea typeface="Pretendard"/>
+                <a:cs typeface="Pretendard"/>
+              </a:rPr>
+              <a:t>멈춤 (FAILED)</a:t>
+            </a:r>
+          </a:p>
+          <a:p>
+            <a:pPr algn="ctr">
+              <a:lnSpc>
+                <a:spcPts val="1320"/>
+              </a:lnSpc>
+            </a:pPr>
+            <a:r>
+              <a:rPr sz="1019" b="0">
+                <a:solidFill>
+                  <a:srgbClr val="16202C"/>
+                </a:solidFill>
+                <a:latin typeface="Pretendard"/>
+                <a:ea typeface="Pretendard"/>
+                <a:cs typeface="Pretendard"/>
+              </a:rPr>
+              <a:t>setval · FK 안 함</a:t>
+            </a:r>
           </a:p>
         </p:txBody>
       </p:sp>
       <p:sp>
         <p:nvSpPr>
-          <p:cNvPr id="32" name="블록 다운타임 측정: ④ 시작 ~ ⑦ 끝"/>
+          <p:cNvPr id="33" name="블록 PLANNED"/>
           <p:cNvSpPr/>
           <p:nvPr/>
         </p:nvSpPr>
         <p:spPr>
           <a:xfrm>
-            <a:off x="5501640" y="3200400"/>
-            <a:ext cx="3002280" cy="396240"/>
+            <a:off x="533400" y="5593080"/>
+            <a:ext cx="1371600" cy="487680"/>
           </a:xfrm>
           <a:prstGeom prst="roundRect">
             <a:avLst>
-              <a:gd name="adj" fmla="val 50000"/>
+              <a:gd name="adj" fmla="val 18750"/>
             </a:avLst>
           </a:prstGeom>
           <a:solidFill>
             <a:srgbClr val="FFFFFF"/>
           </a:solidFill>
-          <a:ln w="15240">
+          <a:ln w="13716">
             <a:solidFill>
-              <a:srgbClr val="164B8C"/>
+              <a:srgbClr val="8EC3EC"/>
             </a:solidFill>
           </a:ln>
         </p:spPr>
         <p:txBody>
-          <a:bodyPr rtlCol="0" anchor="ctr" lIns="699135" tIns="0" rIns="0" bIns="0" wrap="none">
+          <a:bodyPr rtlCol="0" anchor="t" lIns="45720" tIns="30480" rIns="45720" bIns="0" wrap="none">
             <a:noAutofit/>
           </a:bodyPr>
           <a:lstStyle/>
           <a:p>
-            <a:pPr algn="l"/>
-            <a:r>
-              <a:rPr sz="1019" b="1">
-                <a:solidFill>
-                  <a:srgbClr val="0A2342"/>
-                </a:solidFill>
-                <a:latin typeface="Pretendard"/>
-                <a:ea typeface="Pretendard"/>
-                <a:cs typeface="Pretendard"/>
-              </a:rPr>
-              <a:t>다운타임 측정: ④ 시작 ~ ⑦ 끝</a:t>
-            </a:r>
-          </a:p>
-        </p:txBody>
-      </p:sp>
-      <p:sp>
-        <p:nvSpPr>
-          <p:cNvPr id="33" name="아이콘 timer"/>
-          <p:cNvSpPr/>
-          <p:nvPr/>
-        </p:nvSpPr>
-        <p:spPr>
-          <a:xfrm>
-            <a:off x="5951220" y="3307715"/>
-            <a:ext cx="148590" cy="173149"/>
-          </a:xfrm>
-          <a:custGeom>
-            <a:avLst/>
-            <a:gdLst/>
-            <a:ahLst/>
-            <a:cxnLst/>
-            <a:rect l="l" t="t" r="r" b="b"/>
-            <a:pathLst>
-              <a:path w="148590" h="173149">
-                <a:moveTo>
-                  <a:pt x="49530" y="12383"/>
-                </a:moveTo>
-                <a:lnTo>
-                  <a:pt x="49530" y="0"/>
-                </a:lnTo>
-                <a:lnTo>
-                  <a:pt x="99060" y="0"/>
-                </a:lnTo>
-                <a:lnTo>
-                  <a:pt x="99060" y="12383"/>
-                </a:lnTo>
-                <a:lnTo>
-                  <a:pt x="49530" y="12383"/>
-                </a:lnTo>
-                <a:close/>
-                <a:moveTo>
-                  <a:pt x="68104" y="104632"/>
-                </a:moveTo>
-                <a:lnTo>
-                  <a:pt x="80486" y="104632"/>
-                </a:lnTo>
-                <a:lnTo>
-                  <a:pt x="80486" y="57166"/>
-                </a:lnTo>
-                <a:lnTo>
-                  <a:pt x="68104" y="57166"/>
-                </a:lnTo>
-                <a:lnTo>
-                  <a:pt x="68104" y="104632"/>
-                </a:lnTo>
-                <a:close/>
-                <a:moveTo>
-                  <a:pt x="45506" y="167267"/>
-                </a:moveTo>
-                <a:lnTo>
-                  <a:pt x="43276" y="166257"/>
-                </a:lnTo>
-                <a:lnTo>
-                  <a:pt x="41094" y="165189"/>
-                </a:lnTo>
-                <a:lnTo>
-                  <a:pt x="38960" y="164062"/>
-                </a:lnTo>
-                <a:lnTo>
-                  <a:pt x="36872" y="162876"/>
-                </a:lnTo>
-                <a:lnTo>
-                  <a:pt x="34832" y="161631"/>
-                </a:lnTo>
-                <a:lnTo>
-                  <a:pt x="32839" y="160328"/>
-                </a:lnTo>
-                <a:lnTo>
-                  <a:pt x="30894" y="158965"/>
-                </a:lnTo>
-                <a:lnTo>
-                  <a:pt x="28996" y="157544"/>
-                </a:lnTo>
-                <a:lnTo>
-                  <a:pt x="27145" y="156065"/>
-                </a:lnTo>
-                <a:lnTo>
-                  <a:pt x="25341" y="154526"/>
-                </a:lnTo>
-                <a:lnTo>
-                  <a:pt x="23585" y="152929"/>
-                </a:lnTo>
-                <a:lnTo>
-                  <a:pt x="21876" y="151273"/>
-                </a:lnTo>
-                <a:lnTo>
-                  <a:pt x="20220" y="149564"/>
-                </a:lnTo>
-                <a:lnTo>
-                  <a:pt x="18622" y="147807"/>
-                </a:lnTo>
-                <a:lnTo>
-                  <a:pt x="17084" y="146004"/>
-                </a:lnTo>
-                <a:lnTo>
-                  <a:pt x="15604" y="144153"/>
-                </a:lnTo>
-                <a:lnTo>
-                  <a:pt x="14183" y="142255"/>
-                </a:lnTo>
-                <a:lnTo>
-                  <a:pt x="12821" y="140309"/>
-                </a:lnTo>
-                <a:lnTo>
-                  <a:pt x="11518" y="138316"/>
-                </a:lnTo>
-                <a:lnTo>
-                  <a:pt x="10273" y="136276"/>
-                </a:lnTo>
-                <a:lnTo>
-                  <a:pt x="9087" y="134189"/>
-                </a:lnTo>
-                <a:lnTo>
-                  <a:pt x="7960" y="132054"/>
-                </a:lnTo>
-                <a:lnTo>
-                  <a:pt x="6891" y="129872"/>
-                </a:lnTo>
-                <a:lnTo>
-                  <a:pt x="5882" y="127643"/>
-                </a:lnTo>
-                <a:lnTo>
-                  <a:pt x="4942" y="125378"/>
-                </a:lnTo>
-                <a:lnTo>
-                  <a:pt x="4085" y="123088"/>
-                </a:lnTo>
-                <a:lnTo>
-                  <a:pt x="3308" y="120775"/>
-                </a:lnTo>
-                <a:lnTo>
-                  <a:pt x="2614" y="118436"/>
-                </a:lnTo>
-                <a:lnTo>
-                  <a:pt x="2001" y="116074"/>
-                </a:lnTo>
-                <a:lnTo>
-                  <a:pt x="1470" y="113687"/>
-                </a:lnTo>
-                <a:lnTo>
-                  <a:pt x="1021" y="111276"/>
-                </a:lnTo>
-                <a:lnTo>
-                  <a:pt x="654" y="108840"/>
-                </a:lnTo>
-                <a:lnTo>
-                  <a:pt x="368" y="106380"/>
-                </a:lnTo>
-                <a:lnTo>
-                  <a:pt x="163" y="103895"/>
-                </a:lnTo>
-                <a:lnTo>
-                  <a:pt x="41" y="101387"/>
-                </a:lnTo>
-                <a:lnTo>
-                  <a:pt x="0" y="98854"/>
-                </a:lnTo>
-                <a:lnTo>
-                  <a:pt x="41" y="96321"/>
-                </a:lnTo>
-                <a:lnTo>
-                  <a:pt x="163" y="93812"/>
-                </a:lnTo>
-                <a:lnTo>
-                  <a:pt x="368" y="91327"/>
-                </a:lnTo>
-                <a:lnTo>
-                  <a:pt x="654" y="88867"/>
-                </a:lnTo>
-                <a:lnTo>
-                  <a:pt x="1021" y="86432"/>
-                </a:lnTo>
-                <a:lnTo>
-                  <a:pt x="1470" y="84020"/>
-                </a:lnTo>
-                <a:lnTo>
-                  <a:pt x="2001" y="81633"/>
-                </a:lnTo>
-                <a:lnTo>
-                  <a:pt x="2614" y="79271"/>
-                </a:lnTo>
-                <a:lnTo>
-                  <a:pt x="3308" y="76933"/>
-                </a:lnTo>
-                <a:lnTo>
-                  <a:pt x="4085" y="74619"/>
-                </a:lnTo>
-                <a:lnTo>
-                  <a:pt x="4942" y="72329"/>
-                </a:lnTo>
-                <a:lnTo>
-                  <a:pt x="5882" y="70064"/>
-                </a:lnTo>
-                <a:lnTo>
-                  <a:pt x="6891" y="67835"/>
-                </a:lnTo>
-                <a:lnTo>
-                  <a:pt x="7960" y="65653"/>
-                </a:lnTo>
-                <a:lnTo>
-                  <a:pt x="9087" y="63518"/>
-                </a:lnTo>
-                <a:lnTo>
-                  <a:pt x="10273" y="61431"/>
-                </a:lnTo>
-                <a:lnTo>
-                  <a:pt x="11518" y="59391"/>
-                </a:lnTo>
-                <a:lnTo>
-                  <a:pt x="12821" y="57398"/>
-                </a:lnTo>
-                <a:lnTo>
-                  <a:pt x="14183" y="55453"/>
-                </a:lnTo>
-                <a:lnTo>
-                  <a:pt x="15604" y="53554"/>
-                </a:lnTo>
-                <a:lnTo>
-                  <a:pt x="17084" y="51703"/>
-                </a:lnTo>
-                <a:lnTo>
-                  <a:pt x="18622" y="49900"/>
-                </a:lnTo>
-                <a:lnTo>
-                  <a:pt x="20220" y="48143"/>
-                </a:lnTo>
-                <a:lnTo>
-                  <a:pt x="21876" y="46434"/>
-                </a:lnTo>
-                <a:lnTo>
-                  <a:pt x="23585" y="44778"/>
-                </a:lnTo>
-                <a:lnTo>
-                  <a:pt x="25341" y="43181"/>
-                </a:lnTo>
-                <a:lnTo>
-                  <a:pt x="27145" y="41643"/>
-                </a:lnTo>
-                <a:lnTo>
-                  <a:pt x="28996" y="40163"/>
-                </a:lnTo>
-                <a:lnTo>
-                  <a:pt x="30894" y="38742"/>
-                </a:lnTo>
-                <a:lnTo>
-                  <a:pt x="32839" y="37380"/>
-                </a:lnTo>
-                <a:lnTo>
-                  <a:pt x="34832" y="36076"/>
-                </a:lnTo>
-                <a:lnTo>
-                  <a:pt x="36872" y="34832"/>
-                </a:lnTo>
-                <a:lnTo>
-                  <a:pt x="38960" y="33646"/>
-                </a:lnTo>
-                <a:lnTo>
-                  <a:pt x="41094" y="32518"/>
-                </a:lnTo>
-                <a:lnTo>
-                  <a:pt x="43276" y="31450"/>
-                </a:lnTo>
-                <a:lnTo>
-                  <a:pt x="45506" y="30440"/>
-                </a:lnTo>
-                <a:lnTo>
-                  <a:pt x="47771" y="29501"/>
-                </a:lnTo>
-                <a:lnTo>
-                  <a:pt x="50060" y="28643"/>
-                </a:lnTo>
-                <a:lnTo>
-                  <a:pt x="52374" y="27867"/>
-                </a:lnTo>
-                <a:lnTo>
-                  <a:pt x="54712" y="27173"/>
-                </a:lnTo>
-                <a:lnTo>
-                  <a:pt x="57075" y="26560"/>
-                </a:lnTo>
-                <a:lnTo>
-                  <a:pt x="59462" y="26029"/>
-                </a:lnTo>
-                <a:lnTo>
-                  <a:pt x="61873" y="25580"/>
-                </a:lnTo>
-                <a:lnTo>
-                  <a:pt x="64309" y="25212"/>
-                </a:lnTo>
-                <a:lnTo>
-                  <a:pt x="66769" y="24926"/>
-                </a:lnTo>
-                <a:lnTo>
-                  <a:pt x="69253" y="24722"/>
-                </a:lnTo>
-                <a:lnTo>
-                  <a:pt x="71762" y="24599"/>
-                </a:lnTo>
-                <a:lnTo>
-                  <a:pt x="74295" y="24559"/>
-                </a:lnTo>
-                <a:lnTo>
-                  <a:pt x="76588" y="24591"/>
-                </a:lnTo>
-                <a:lnTo>
-                  <a:pt x="78858" y="24688"/>
-                </a:lnTo>
-                <a:lnTo>
-                  <a:pt x="81105" y="24849"/>
-                </a:lnTo>
-                <a:lnTo>
-                  <a:pt x="83330" y="25075"/>
-                </a:lnTo>
-                <a:lnTo>
-                  <a:pt x="85531" y="25365"/>
-                </a:lnTo>
-                <a:lnTo>
-                  <a:pt x="87709" y="25719"/>
-                </a:lnTo>
-                <a:lnTo>
-                  <a:pt x="89865" y="26139"/>
-                </a:lnTo>
-                <a:lnTo>
-                  <a:pt x="91997" y="26622"/>
-                </a:lnTo>
-                <a:lnTo>
-                  <a:pt x="94107" y="27171"/>
-                </a:lnTo>
-                <a:lnTo>
-                  <a:pt x="96194" y="27783"/>
-                </a:lnTo>
-                <a:lnTo>
-                  <a:pt x="98257" y="28460"/>
-                </a:lnTo>
-                <a:lnTo>
-                  <a:pt x="100298" y="29202"/>
-                </a:lnTo>
-                <a:lnTo>
-                  <a:pt x="102309" y="30001"/>
-                </a:lnTo>
-                <a:lnTo>
-                  <a:pt x="104282" y="30850"/>
-                </a:lnTo>
-                <a:lnTo>
-                  <a:pt x="106219" y="31750"/>
-                </a:lnTo>
-                <a:lnTo>
-                  <a:pt x="108118" y="32699"/>
-                </a:lnTo>
-                <a:lnTo>
-                  <a:pt x="109979" y="33699"/>
-                </a:lnTo>
-                <a:lnTo>
-                  <a:pt x="111804" y="34748"/>
-                </a:lnTo>
-                <a:lnTo>
-                  <a:pt x="113591" y="35848"/>
-                </a:lnTo>
-                <a:lnTo>
-                  <a:pt x="115341" y="36998"/>
-                </a:lnTo>
-                <a:lnTo>
-                  <a:pt x="117053" y="38199"/>
-                </a:lnTo>
-                <a:lnTo>
-                  <a:pt x="118729" y="39449"/>
-                </a:lnTo>
-                <a:lnTo>
-                  <a:pt x="120367" y="40750"/>
-                </a:lnTo>
-                <a:lnTo>
-                  <a:pt x="121968" y="42101"/>
-                </a:lnTo>
-                <a:lnTo>
-                  <a:pt x="132493" y="31575"/>
-                </a:lnTo>
-                <a:lnTo>
-                  <a:pt x="141160" y="40243"/>
-                </a:lnTo>
-                <a:lnTo>
-                  <a:pt x="130635" y="50768"/>
-                </a:lnTo>
-                <a:lnTo>
-                  <a:pt x="131859" y="52168"/>
-                </a:lnTo>
-                <a:lnTo>
-                  <a:pt x="133052" y="53617"/>
-                </a:lnTo>
-                <a:lnTo>
-                  <a:pt x="134215" y="55115"/>
-                </a:lnTo>
-                <a:lnTo>
-                  <a:pt x="135348" y="56661"/>
-                </a:lnTo>
-                <a:lnTo>
-                  <a:pt x="136450" y="58257"/>
-                </a:lnTo>
-                <a:lnTo>
-                  <a:pt x="137523" y="59900"/>
-                </a:lnTo>
-                <a:lnTo>
-                  <a:pt x="138566" y="61593"/>
-                </a:lnTo>
-                <a:lnTo>
-                  <a:pt x="139578" y="63334"/>
-                </a:lnTo>
-                <a:lnTo>
-                  <a:pt x="140561" y="65124"/>
-                </a:lnTo>
-                <a:lnTo>
-                  <a:pt x="141513" y="66963"/>
-                </a:lnTo>
-                <a:lnTo>
-                  <a:pt x="142435" y="68850"/>
-                </a:lnTo>
-                <a:lnTo>
-                  <a:pt x="143327" y="70787"/>
-                </a:lnTo>
-                <a:lnTo>
-                  <a:pt x="144168" y="72779"/>
-                </a:lnTo>
-                <a:lnTo>
-                  <a:pt x="144935" y="74834"/>
-                </a:lnTo>
-                <a:lnTo>
-                  <a:pt x="145630" y="76952"/>
-                </a:lnTo>
-                <a:lnTo>
-                  <a:pt x="146251" y="79133"/>
-                </a:lnTo>
-                <a:lnTo>
-                  <a:pt x="146799" y="81378"/>
-                </a:lnTo>
-                <a:lnTo>
-                  <a:pt x="147274" y="83685"/>
-                </a:lnTo>
-                <a:lnTo>
-                  <a:pt x="147676" y="86056"/>
-                </a:lnTo>
-                <a:lnTo>
-                  <a:pt x="148005" y="88489"/>
-                </a:lnTo>
-                <a:lnTo>
-                  <a:pt x="148261" y="90986"/>
-                </a:lnTo>
-                <a:lnTo>
-                  <a:pt x="148444" y="93545"/>
-                </a:lnTo>
-                <a:lnTo>
-                  <a:pt x="148553" y="96168"/>
-                </a:lnTo>
-                <a:lnTo>
-                  <a:pt x="148590" y="98854"/>
-                </a:lnTo>
-                <a:lnTo>
-                  <a:pt x="148549" y="101387"/>
-                </a:lnTo>
-                <a:lnTo>
-                  <a:pt x="148427" y="103895"/>
-                </a:lnTo>
-                <a:lnTo>
-                  <a:pt x="148222" y="106380"/>
-                </a:lnTo>
-                <a:lnTo>
-                  <a:pt x="147936" y="108840"/>
-                </a:lnTo>
-                <a:lnTo>
-                  <a:pt x="147569" y="111276"/>
-                </a:lnTo>
-                <a:lnTo>
-                  <a:pt x="147120" y="113687"/>
-                </a:lnTo>
-                <a:lnTo>
-                  <a:pt x="146589" y="116074"/>
-                </a:lnTo>
-                <a:lnTo>
-                  <a:pt x="145976" y="118436"/>
-                </a:lnTo>
-                <a:lnTo>
-                  <a:pt x="145282" y="120775"/>
-                </a:lnTo>
-                <a:lnTo>
-                  <a:pt x="144505" y="123088"/>
-                </a:lnTo>
-                <a:lnTo>
-                  <a:pt x="143648" y="125378"/>
-                </a:lnTo>
-                <a:lnTo>
-                  <a:pt x="142708" y="127643"/>
-                </a:lnTo>
-                <a:lnTo>
-                  <a:pt x="141699" y="129872"/>
-                </a:lnTo>
-                <a:lnTo>
-                  <a:pt x="140630" y="132054"/>
-                </a:lnTo>
-                <a:lnTo>
-                  <a:pt x="139503" y="134189"/>
-                </a:lnTo>
-                <a:lnTo>
-                  <a:pt x="138317" y="136276"/>
-                </a:lnTo>
-                <a:lnTo>
-                  <a:pt x="137072" y="138316"/>
-                </a:lnTo>
-                <a:lnTo>
-                  <a:pt x="135769" y="140309"/>
-                </a:lnTo>
-                <a:lnTo>
-                  <a:pt x="134407" y="142255"/>
-                </a:lnTo>
-                <a:lnTo>
-                  <a:pt x="132986" y="144153"/>
-                </a:lnTo>
-                <a:lnTo>
-                  <a:pt x="131506" y="146004"/>
-                </a:lnTo>
-                <a:lnTo>
-                  <a:pt x="129968" y="147807"/>
-                </a:lnTo>
-                <a:lnTo>
-                  <a:pt x="128370" y="149564"/>
-                </a:lnTo>
-                <a:lnTo>
-                  <a:pt x="126714" y="151273"/>
-                </a:lnTo>
-                <a:lnTo>
-                  <a:pt x="125005" y="152929"/>
-                </a:lnTo>
-                <a:lnTo>
-                  <a:pt x="123249" y="154526"/>
-                </a:lnTo>
-                <a:lnTo>
-                  <a:pt x="121445" y="156065"/>
-                </a:lnTo>
-                <a:lnTo>
-                  <a:pt x="119594" y="157544"/>
-                </a:lnTo>
-                <a:lnTo>
-                  <a:pt x="117696" y="158965"/>
-                </a:lnTo>
-                <a:lnTo>
-                  <a:pt x="115751" y="160328"/>
-                </a:lnTo>
-                <a:lnTo>
-                  <a:pt x="113758" y="161631"/>
-                </a:lnTo>
-                <a:lnTo>
-                  <a:pt x="111718" y="162876"/>
-                </a:lnTo>
-                <a:lnTo>
-                  <a:pt x="109630" y="164062"/>
-                </a:lnTo>
-                <a:lnTo>
-                  <a:pt x="107496" y="165189"/>
-                </a:lnTo>
-                <a:lnTo>
-                  <a:pt x="105314" y="166257"/>
-                </a:lnTo>
-                <a:lnTo>
-                  <a:pt x="103084" y="167267"/>
-                </a:lnTo>
-                <a:lnTo>
-                  <a:pt x="100819" y="168206"/>
-                </a:lnTo>
-                <a:lnTo>
-                  <a:pt x="98530" y="169064"/>
-                </a:lnTo>
-                <a:lnTo>
-                  <a:pt x="96216" y="169840"/>
-                </a:lnTo>
-                <a:lnTo>
-                  <a:pt x="93878" y="170535"/>
-                </a:lnTo>
-                <a:lnTo>
-                  <a:pt x="91515" y="171147"/>
-                </a:lnTo>
-                <a:lnTo>
-                  <a:pt x="89128" y="171678"/>
-                </a:lnTo>
-                <a:lnTo>
-                  <a:pt x="86717" y="172127"/>
-                </a:lnTo>
-                <a:lnTo>
-                  <a:pt x="84281" y="172495"/>
-                </a:lnTo>
-                <a:lnTo>
-                  <a:pt x="81821" y="172781"/>
-                </a:lnTo>
-                <a:lnTo>
-                  <a:pt x="79337" y="172985"/>
-                </a:lnTo>
-                <a:lnTo>
-                  <a:pt x="76828" y="173108"/>
-                </a:lnTo>
-                <a:lnTo>
-                  <a:pt x="74295" y="173149"/>
-                </a:lnTo>
-                <a:lnTo>
-                  <a:pt x="71762" y="173108"/>
-                </a:lnTo>
-                <a:lnTo>
-                  <a:pt x="69253" y="172985"/>
-                </a:lnTo>
-                <a:lnTo>
-                  <a:pt x="66769" y="172781"/>
-                </a:lnTo>
-                <a:lnTo>
-                  <a:pt x="64309" y="172495"/>
-                </a:lnTo>
-                <a:lnTo>
-                  <a:pt x="61873" y="172127"/>
-                </a:lnTo>
-                <a:lnTo>
-                  <a:pt x="59462" y="171678"/>
-                </a:lnTo>
-                <a:lnTo>
-                  <a:pt x="57075" y="171147"/>
-                </a:lnTo>
-                <a:lnTo>
-                  <a:pt x="54712" y="170535"/>
-                </a:lnTo>
-                <a:lnTo>
-                  <a:pt x="52374" y="169840"/>
-                </a:lnTo>
-                <a:lnTo>
-                  <a:pt x="50060" y="169064"/>
-                </a:lnTo>
-                <a:lnTo>
-                  <a:pt x="47771" y="168206"/>
-                </a:lnTo>
-                <a:lnTo>
-                  <a:pt x="45506" y="167267"/>
-                </a:lnTo>
-                <a:close/>
-                <a:moveTo>
-                  <a:pt x="118150" y="142708"/>
-                </a:moveTo>
-                <a:lnTo>
-                  <a:pt x="121034" y="139645"/>
-                </a:lnTo>
-                <a:lnTo>
-                  <a:pt x="123667" y="136474"/>
-                </a:lnTo>
-                <a:lnTo>
-                  <a:pt x="126050" y="133196"/>
-                </a:lnTo>
-                <a:lnTo>
-                  <a:pt x="128182" y="129810"/>
-                </a:lnTo>
-                <a:lnTo>
-                  <a:pt x="130063" y="126317"/>
-                </a:lnTo>
-                <a:lnTo>
-                  <a:pt x="131693" y="122716"/>
-                </a:lnTo>
-                <a:lnTo>
-                  <a:pt x="133072" y="119007"/>
-                </a:lnTo>
-                <a:lnTo>
-                  <a:pt x="134201" y="115192"/>
-                </a:lnTo>
-                <a:lnTo>
-                  <a:pt x="135079" y="111268"/>
-                </a:lnTo>
-                <a:lnTo>
-                  <a:pt x="135706" y="107238"/>
-                </a:lnTo>
-                <a:lnTo>
-                  <a:pt x="136082" y="103099"/>
-                </a:lnTo>
-                <a:lnTo>
-                  <a:pt x="136208" y="98854"/>
-                </a:lnTo>
-                <a:lnTo>
-                  <a:pt x="136082" y="94608"/>
-                </a:lnTo>
-                <a:lnTo>
-                  <a:pt x="135706" y="90470"/>
-                </a:lnTo>
-                <a:lnTo>
-                  <a:pt x="135079" y="86439"/>
-                </a:lnTo>
-                <a:lnTo>
-                  <a:pt x="134201" y="82516"/>
-                </a:lnTo>
-                <a:lnTo>
-                  <a:pt x="133072" y="78700"/>
-                </a:lnTo>
-                <a:lnTo>
-                  <a:pt x="131693" y="74992"/>
-                </a:lnTo>
-                <a:lnTo>
-                  <a:pt x="130063" y="71391"/>
-                </a:lnTo>
-                <a:lnTo>
-                  <a:pt x="128182" y="67897"/>
-                </a:lnTo>
-                <a:lnTo>
-                  <a:pt x="126050" y="64512"/>
-                </a:lnTo>
-                <a:lnTo>
-                  <a:pt x="123667" y="61233"/>
-                </a:lnTo>
-                <a:lnTo>
-                  <a:pt x="121034" y="58062"/>
-                </a:lnTo>
-                <a:lnTo>
-                  <a:pt x="118150" y="54999"/>
-                </a:lnTo>
-                <a:lnTo>
-                  <a:pt x="115086" y="52115"/>
-                </a:lnTo>
-                <a:lnTo>
-                  <a:pt x="111915" y="49481"/>
-                </a:lnTo>
-                <a:lnTo>
-                  <a:pt x="108637" y="47099"/>
-                </a:lnTo>
-                <a:lnTo>
-                  <a:pt x="105251" y="44967"/>
-                </a:lnTo>
-                <a:lnTo>
-                  <a:pt x="101758" y="43086"/>
-                </a:lnTo>
-                <a:lnTo>
-                  <a:pt x="98157" y="41456"/>
-                </a:lnTo>
-                <a:lnTo>
-                  <a:pt x="94449" y="40076"/>
-                </a:lnTo>
-                <a:lnTo>
-                  <a:pt x="90633" y="38948"/>
-                </a:lnTo>
-                <a:lnTo>
-                  <a:pt x="86710" y="38070"/>
-                </a:lnTo>
-                <a:lnTo>
-                  <a:pt x="82679" y="37443"/>
-                </a:lnTo>
-                <a:lnTo>
-                  <a:pt x="78541" y="37067"/>
-                </a:lnTo>
-                <a:lnTo>
-                  <a:pt x="74295" y="36941"/>
-                </a:lnTo>
-                <a:lnTo>
-                  <a:pt x="70049" y="37067"/>
-                </a:lnTo>
-                <a:lnTo>
-                  <a:pt x="65911" y="37443"/>
-                </a:lnTo>
-                <a:lnTo>
-                  <a:pt x="61880" y="38070"/>
-                </a:lnTo>
-                <a:lnTo>
-                  <a:pt x="57957" y="38948"/>
-                </a:lnTo>
-                <a:lnTo>
-                  <a:pt x="54141" y="40076"/>
-                </a:lnTo>
-                <a:lnTo>
-                  <a:pt x="50433" y="41456"/>
-                </a:lnTo>
-                <a:lnTo>
-                  <a:pt x="46832" y="43086"/>
-                </a:lnTo>
-                <a:lnTo>
-                  <a:pt x="43339" y="44967"/>
-                </a:lnTo>
-                <a:lnTo>
-                  <a:pt x="39953" y="47099"/>
-                </a:lnTo>
-                <a:lnTo>
-                  <a:pt x="36675" y="49481"/>
-                </a:lnTo>
-                <a:lnTo>
-                  <a:pt x="33504" y="52115"/>
-                </a:lnTo>
-                <a:lnTo>
-                  <a:pt x="30440" y="54999"/>
-                </a:lnTo>
-                <a:lnTo>
-                  <a:pt x="27556" y="58062"/>
-                </a:lnTo>
-                <a:lnTo>
-                  <a:pt x="24923" y="61233"/>
-                </a:lnTo>
-                <a:lnTo>
-                  <a:pt x="22540" y="64512"/>
-                </a:lnTo>
-                <a:lnTo>
-                  <a:pt x="20408" y="67897"/>
-                </a:lnTo>
-                <a:lnTo>
-                  <a:pt x="18527" y="71391"/>
-                </a:lnTo>
-                <a:lnTo>
-                  <a:pt x="16897" y="74992"/>
-                </a:lnTo>
-                <a:lnTo>
-                  <a:pt x="15518" y="78700"/>
-                </a:lnTo>
-                <a:lnTo>
-                  <a:pt x="14389" y="82516"/>
-                </a:lnTo>
-                <a:lnTo>
-                  <a:pt x="13511" y="86439"/>
-                </a:lnTo>
-                <a:lnTo>
-                  <a:pt x="12884" y="90470"/>
-                </a:lnTo>
-                <a:lnTo>
-                  <a:pt x="12508" y="94608"/>
-                </a:lnTo>
-                <a:lnTo>
-                  <a:pt x="12382" y="98854"/>
-                </a:lnTo>
-                <a:lnTo>
-                  <a:pt x="12508" y="103099"/>
-                </a:lnTo>
-                <a:lnTo>
-                  <a:pt x="12884" y="107238"/>
-                </a:lnTo>
-                <a:lnTo>
-                  <a:pt x="13511" y="111268"/>
-                </a:lnTo>
-                <a:lnTo>
-                  <a:pt x="14389" y="115192"/>
-                </a:lnTo>
-                <a:lnTo>
-                  <a:pt x="15518" y="119007"/>
-                </a:lnTo>
-                <a:lnTo>
-                  <a:pt x="16897" y="122716"/>
-                </a:lnTo>
-                <a:lnTo>
-                  <a:pt x="18527" y="126317"/>
-                </a:lnTo>
-                <a:lnTo>
-                  <a:pt x="20408" y="129810"/>
-                </a:lnTo>
-                <a:lnTo>
-                  <a:pt x="22540" y="133196"/>
-                </a:lnTo>
-                <a:lnTo>
-                  <a:pt x="24923" y="136474"/>
-                </a:lnTo>
-                <a:lnTo>
-                  <a:pt x="27556" y="139645"/>
-                </a:lnTo>
-                <a:lnTo>
-                  <a:pt x="30440" y="142708"/>
-                </a:lnTo>
-                <a:lnTo>
-                  <a:pt x="33504" y="145593"/>
-                </a:lnTo>
-                <a:lnTo>
-                  <a:pt x="36675" y="148226"/>
-                </a:lnTo>
-                <a:lnTo>
-                  <a:pt x="39953" y="150609"/>
-                </a:lnTo>
-                <a:lnTo>
-                  <a:pt x="43339" y="152740"/>
-                </a:lnTo>
-                <a:lnTo>
-                  <a:pt x="46832" y="154621"/>
-                </a:lnTo>
-                <a:lnTo>
-                  <a:pt x="50433" y="156252"/>
-                </a:lnTo>
-                <a:lnTo>
-                  <a:pt x="54141" y="157631"/>
-                </a:lnTo>
-                <a:lnTo>
-                  <a:pt x="57957" y="158760"/>
-                </a:lnTo>
-                <a:lnTo>
-                  <a:pt x="61880" y="159638"/>
-                </a:lnTo>
-                <a:lnTo>
-                  <a:pt x="65911" y="160265"/>
-                </a:lnTo>
-                <a:lnTo>
-                  <a:pt x="70049" y="160641"/>
-                </a:lnTo>
-                <a:lnTo>
-                  <a:pt x="74295" y="160766"/>
-                </a:lnTo>
-                <a:lnTo>
-                  <a:pt x="78541" y="160641"/>
-                </a:lnTo>
-                <a:lnTo>
-                  <a:pt x="82679" y="160265"/>
-                </a:lnTo>
-                <a:lnTo>
-                  <a:pt x="86710" y="159638"/>
-                </a:lnTo>
-                <a:lnTo>
-                  <a:pt x="90633" y="158760"/>
-                </a:lnTo>
-                <a:lnTo>
-                  <a:pt x="94449" y="157631"/>
-                </a:lnTo>
-                <a:lnTo>
-                  <a:pt x="98157" y="156252"/>
-                </a:lnTo>
-                <a:lnTo>
-                  <a:pt x="101758" y="154621"/>
-                </a:lnTo>
-                <a:lnTo>
-                  <a:pt x="105251" y="152740"/>
-                </a:lnTo>
-                <a:lnTo>
-                  <a:pt x="108637" y="150609"/>
-                </a:lnTo>
-                <a:lnTo>
-                  <a:pt x="111915" y="148226"/>
-                </a:lnTo>
-                <a:lnTo>
-                  <a:pt x="115086" y="145593"/>
-                </a:lnTo>
-                <a:lnTo>
-                  <a:pt x="118150" y="142708"/>
-                </a:lnTo>
-                <a:close/>
-              </a:path>
-            </a:pathLst>
-          </a:custGeom>
-          <a:solidFill>
-            <a:srgbClr val="164B8C"/>
-          </a:solidFill>
-          <a:ln>
-            <a:noFill/>
-          </a:ln>
-        </p:spPr>
-        <p:txBody>
-          <a:bodyPr rtlCol="0" anchor="ctr"/>
-          <a:lstStyle/>
-          <a:p>
-            <a:pPr algn="ctr"/>
-          </a:p>
-        </p:txBody>
-      </p:sp>
-      <p:sp>
-        <p:nvSpPr>
-          <p:cNvPr id="34" name="블록 불일치 시 멈춤"/>
-          <p:cNvSpPr/>
-          <p:nvPr/>
-        </p:nvSpPr>
-        <p:spPr>
-          <a:xfrm>
-            <a:off x="8671560" y="2926080"/>
-            <a:ext cx="1417320" cy="883920"/>
-          </a:xfrm>
-          <a:prstGeom prst="roundRect">
-            <a:avLst>
-              <a:gd name="adj" fmla="val 10344"/>
-            </a:avLst>
-          </a:prstGeom>
-          <a:solidFill>
-            <a:srgbClr val="FFFFFF"/>
-          </a:solidFill>
-          <a:ln w="12192">
-            <a:solidFill>
-              <a:srgbClr val="6F9BD1"/>
-            </a:solidFill>
-          </a:ln>
-        </p:spPr>
-        <p:txBody>
-          <a:bodyPr rtlCol="0" anchor="t" lIns="45720" tIns="365760" rIns="45720" bIns="0" wrap="none">
-            <a:noAutofit/>
-          </a:bodyPr>
-          <a:lstStyle/>
-          <a:p>
             <a:pPr algn="ctr">
               <a:lnSpc>
-                <a:spcPts val="1439"/>
+                <a:spcPts val="1560"/>
               </a:lnSpc>
             </a:pPr>
             <a:r>
-              <a:rPr sz="1140" b="1">
+              <a:rPr sz="1200" b="1">
                 <a:solidFill>
-                  <a:srgbClr val="0A2342"/>
-                </a:solidFill>
-                <a:latin typeface="Pretendard"/>
-                <a:ea typeface="Pretendard"/>
-                <a:cs typeface="Pretendard"/>
-              </a:rPr>
-              <a:t>불일치 시 멈춤</a:t>
-            </a:r>
-          </a:p>
-          <a:p>
-            <a:pPr algn="ctr">
-              <a:lnSpc>
-                <a:spcPts val="1140"/>
-              </a:lnSpc>
-            </a:pPr>
-            <a:r>
-              <a:rPr sz="869" b="0">
-                <a:solidFill>
-                  <a:srgbClr val="3F4E61"/>
-                </a:solidFill>
-                <a:latin typeface="Pretendard"/>
-                <a:ea typeface="Pretendard"/>
-                <a:cs typeface="Pretendard"/>
-              </a:rPr>
-              <a:t>전환하지 않음</a:t>
-            </a:r>
-          </a:p>
-          <a:p>
-            <a:pPr algn="ctr">
-              <a:lnSpc>
-                <a:spcPts val="1140"/>
-              </a:lnSpc>
-            </a:pPr>
-            <a:r>
-              <a:rPr sz="869" b="0">
-                <a:solidFill>
-                  <a:srgbClr val="3F4E61"/>
-                </a:solidFill>
-                <a:latin typeface="Pretendard"/>
-                <a:ea typeface="Pretendard"/>
-                <a:cs typeface="Pretendard"/>
-              </a:rPr>
-              <a:t>행 차이 목록</a:t>
-            </a:r>
-          </a:p>
-        </p:txBody>
-      </p:sp>
-      <p:sp>
-        <p:nvSpPr>
-          <p:cNvPr id="35" name="아이콘 report"/>
-          <p:cNvSpPr/>
-          <p:nvPr/>
-        </p:nvSpPr>
-        <p:spPr>
-          <a:xfrm>
-            <a:off x="9265920" y="2979420"/>
-            <a:ext cx="228600" cy="228600"/>
-          </a:xfrm>
-          <a:custGeom>
-            <a:avLst/>
-            <a:gdLst/>
-            <a:ahLst/>
-            <a:cxnLst/>
-            <a:rect l="l" t="t" r="r" b="b"/>
-            <a:pathLst>
-              <a:path w="228600" h="228600">
-                <a:moveTo>
-                  <a:pt x="114300" y="177482"/>
-                </a:moveTo>
-                <a:lnTo>
-                  <a:pt x="115033" y="177459"/>
-                </a:lnTo>
-                <a:lnTo>
-                  <a:pt x="115751" y="177390"/>
-                </a:lnTo>
-                <a:lnTo>
-                  <a:pt x="116453" y="177274"/>
-                </a:lnTo>
-                <a:lnTo>
-                  <a:pt x="117140" y="177112"/>
-                </a:lnTo>
-                <a:lnTo>
-                  <a:pt x="117811" y="176904"/>
-                </a:lnTo>
-                <a:lnTo>
-                  <a:pt x="118467" y="176649"/>
-                </a:lnTo>
-                <a:lnTo>
-                  <a:pt x="119108" y="176348"/>
-                </a:lnTo>
-                <a:lnTo>
-                  <a:pt x="119733" y="176001"/>
-                </a:lnTo>
-                <a:lnTo>
-                  <a:pt x="120342" y="175607"/>
-                </a:lnTo>
-                <a:lnTo>
-                  <a:pt x="120937" y="175167"/>
-                </a:lnTo>
-                <a:lnTo>
-                  <a:pt x="121515" y="174681"/>
-                </a:lnTo>
-                <a:lnTo>
-                  <a:pt x="122079" y="174149"/>
-                </a:lnTo>
-                <a:lnTo>
-                  <a:pt x="122611" y="173585"/>
-                </a:lnTo>
-                <a:lnTo>
-                  <a:pt x="123097" y="173007"/>
-                </a:lnTo>
-                <a:lnTo>
-                  <a:pt x="123537" y="172412"/>
-                </a:lnTo>
-                <a:lnTo>
-                  <a:pt x="123931" y="171803"/>
-                </a:lnTo>
-                <a:lnTo>
-                  <a:pt x="124278" y="171178"/>
-                </a:lnTo>
-                <a:lnTo>
-                  <a:pt x="124579" y="170537"/>
-                </a:lnTo>
-                <a:lnTo>
-                  <a:pt x="124834" y="169881"/>
-                </a:lnTo>
-                <a:lnTo>
-                  <a:pt x="125042" y="169210"/>
-                </a:lnTo>
-                <a:lnTo>
-                  <a:pt x="125204" y="168523"/>
-                </a:lnTo>
-                <a:lnTo>
-                  <a:pt x="125320" y="167821"/>
-                </a:lnTo>
-                <a:lnTo>
-                  <a:pt x="125389" y="167103"/>
-                </a:lnTo>
-                <a:lnTo>
-                  <a:pt x="125412" y="166370"/>
-                </a:lnTo>
-                <a:lnTo>
-                  <a:pt x="125389" y="165637"/>
-                </a:lnTo>
-                <a:lnTo>
-                  <a:pt x="125320" y="164919"/>
-                </a:lnTo>
-                <a:lnTo>
-                  <a:pt x="125204" y="164217"/>
-                </a:lnTo>
-                <a:lnTo>
-                  <a:pt x="125042" y="163530"/>
-                </a:lnTo>
-                <a:lnTo>
-                  <a:pt x="124834" y="162859"/>
-                </a:lnTo>
-                <a:lnTo>
-                  <a:pt x="124579" y="162203"/>
-                </a:lnTo>
-                <a:lnTo>
-                  <a:pt x="124278" y="161562"/>
-                </a:lnTo>
-                <a:lnTo>
-                  <a:pt x="123931" y="160937"/>
-                </a:lnTo>
-                <a:lnTo>
-                  <a:pt x="123537" y="160328"/>
-                </a:lnTo>
-                <a:lnTo>
-                  <a:pt x="123097" y="159733"/>
-                </a:lnTo>
-                <a:lnTo>
-                  <a:pt x="122611" y="159155"/>
-                </a:lnTo>
-                <a:lnTo>
-                  <a:pt x="122079" y="158591"/>
-                </a:lnTo>
-                <a:lnTo>
-                  <a:pt x="121515" y="158059"/>
-                </a:lnTo>
-                <a:lnTo>
-                  <a:pt x="120937" y="157573"/>
-                </a:lnTo>
-                <a:lnTo>
-                  <a:pt x="120342" y="157133"/>
-                </a:lnTo>
-                <a:lnTo>
-                  <a:pt x="119733" y="156739"/>
-                </a:lnTo>
-                <a:lnTo>
-                  <a:pt x="119108" y="156392"/>
-                </a:lnTo>
-                <a:lnTo>
-                  <a:pt x="118467" y="156091"/>
-                </a:lnTo>
-                <a:lnTo>
-                  <a:pt x="117811" y="155836"/>
-                </a:lnTo>
-                <a:lnTo>
-                  <a:pt x="117140" y="155628"/>
-                </a:lnTo>
-                <a:lnTo>
-                  <a:pt x="116453" y="155466"/>
-                </a:lnTo>
-                <a:lnTo>
-                  <a:pt x="115751" y="155350"/>
-                </a:lnTo>
-                <a:lnTo>
-                  <a:pt x="115033" y="155281"/>
-                </a:lnTo>
-                <a:lnTo>
-                  <a:pt x="114300" y="155258"/>
-                </a:lnTo>
-                <a:lnTo>
-                  <a:pt x="113567" y="155281"/>
-                </a:lnTo>
-                <a:lnTo>
-                  <a:pt x="112849" y="155350"/>
-                </a:lnTo>
-                <a:lnTo>
-                  <a:pt x="112147" y="155466"/>
-                </a:lnTo>
-                <a:lnTo>
-                  <a:pt x="111460" y="155628"/>
-                </a:lnTo>
-                <a:lnTo>
-                  <a:pt x="110789" y="155836"/>
-                </a:lnTo>
-                <a:lnTo>
-                  <a:pt x="110133" y="156091"/>
-                </a:lnTo>
-                <a:lnTo>
-                  <a:pt x="109492" y="156392"/>
-                </a:lnTo>
-                <a:lnTo>
-                  <a:pt x="108867" y="156739"/>
-                </a:lnTo>
-                <a:lnTo>
-                  <a:pt x="108258" y="157133"/>
-                </a:lnTo>
-                <a:lnTo>
-                  <a:pt x="107663" y="157573"/>
-                </a:lnTo>
-                <a:lnTo>
-                  <a:pt x="107085" y="158059"/>
-                </a:lnTo>
-                <a:lnTo>
-                  <a:pt x="106521" y="158591"/>
-                </a:lnTo>
-                <a:lnTo>
-                  <a:pt x="105989" y="159155"/>
-                </a:lnTo>
-                <a:lnTo>
-                  <a:pt x="105503" y="159733"/>
-                </a:lnTo>
-                <a:lnTo>
-                  <a:pt x="105063" y="160328"/>
-                </a:lnTo>
-                <a:lnTo>
-                  <a:pt x="104669" y="160937"/>
-                </a:lnTo>
-                <a:lnTo>
-                  <a:pt x="104322" y="161562"/>
-                </a:lnTo>
-                <a:lnTo>
-                  <a:pt x="104021" y="162203"/>
-                </a:lnTo>
-                <a:lnTo>
-                  <a:pt x="103766" y="162859"/>
-                </a:lnTo>
-                <a:lnTo>
-                  <a:pt x="103558" y="163530"/>
-                </a:lnTo>
-                <a:lnTo>
-                  <a:pt x="103396" y="164217"/>
-                </a:lnTo>
-                <a:lnTo>
-                  <a:pt x="103280" y="164919"/>
-                </a:lnTo>
-                <a:lnTo>
-                  <a:pt x="103211" y="165637"/>
-                </a:lnTo>
-                <a:lnTo>
-                  <a:pt x="103188" y="166370"/>
-                </a:lnTo>
-                <a:lnTo>
-                  <a:pt x="103211" y="167103"/>
-                </a:lnTo>
-                <a:lnTo>
-                  <a:pt x="103280" y="167821"/>
-                </a:lnTo>
-                <a:lnTo>
-                  <a:pt x="103396" y="168523"/>
-                </a:lnTo>
-                <a:lnTo>
-                  <a:pt x="103558" y="169210"/>
-                </a:lnTo>
-                <a:lnTo>
-                  <a:pt x="103766" y="169881"/>
-                </a:lnTo>
-                <a:lnTo>
-                  <a:pt x="104021" y="170537"/>
-                </a:lnTo>
-                <a:lnTo>
-                  <a:pt x="104322" y="171178"/>
-                </a:lnTo>
-                <a:lnTo>
-                  <a:pt x="104669" y="171803"/>
-                </a:lnTo>
-                <a:lnTo>
-                  <a:pt x="105063" y="172412"/>
-                </a:lnTo>
-                <a:lnTo>
-                  <a:pt x="105503" y="173007"/>
-                </a:lnTo>
-                <a:lnTo>
-                  <a:pt x="105989" y="173585"/>
-                </a:lnTo>
-                <a:lnTo>
-                  <a:pt x="106521" y="174149"/>
-                </a:lnTo>
-                <a:lnTo>
-                  <a:pt x="107085" y="174681"/>
-                </a:lnTo>
-                <a:lnTo>
-                  <a:pt x="107663" y="175167"/>
-                </a:lnTo>
-                <a:lnTo>
-                  <a:pt x="108258" y="175607"/>
-                </a:lnTo>
-                <a:lnTo>
-                  <a:pt x="108867" y="176001"/>
-                </a:lnTo>
-                <a:lnTo>
-                  <a:pt x="109492" y="176348"/>
-                </a:lnTo>
-                <a:lnTo>
-                  <a:pt x="110133" y="176649"/>
-                </a:lnTo>
-                <a:lnTo>
-                  <a:pt x="110789" y="176904"/>
-                </a:lnTo>
-                <a:lnTo>
-                  <a:pt x="111460" y="177112"/>
-                </a:lnTo>
-                <a:lnTo>
-                  <a:pt x="112147" y="177274"/>
-                </a:lnTo>
-                <a:lnTo>
-                  <a:pt x="112849" y="177390"/>
-                </a:lnTo>
-                <a:lnTo>
-                  <a:pt x="113567" y="177459"/>
-                </a:lnTo>
-                <a:lnTo>
-                  <a:pt x="114300" y="177482"/>
-                </a:lnTo>
-                <a:close/>
-                <a:moveTo>
-                  <a:pt x="104775" y="131762"/>
-                </a:moveTo>
-                <a:lnTo>
-                  <a:pt x="123825" y="131762"/>
-                </a:lnTo>
-                <a:lnTo>
-                  <a:pt x="123825" y="48260"/>
-                </a:lnTo>
-                <a:lnTo>
-                  <a:pt x="104775" y="48260"/>
-                </a:lnTo>
-                <a:lnTo>
-                  <a:pt x="104775" y="131762"/>
-                </a:lnTo>
-                <a:close/>
-                <a:moveTo>
-                  <a:pt x="66675" y="228600"/>
-                </a:moveTo>
-                <a:lnTo>
-                  <a:pt x="0" y="161925"/>
-                </a:lnTo>
-                <a:lnTo>
-                  <a:pt x="0" y="66675"/>
-                </a:lnTo>
-                <a:lnTo>
-                  <a:pt x="66675" y="0"/>
-                </a:lnTo>
-                <a:lnTo>
-                  <a:pt x="161925" y="0"/>
-                </a:lnTo>
-                <a:lnTo>
-                  <a:pt x="228600" y="66675"/>
-                </a:lnTo>
-                <a:lnTo>
-                  <a:pt x="228600" y="161925"/>
-                </a:lnTo>
-                <a:lnTo>
-                  <a:pt x="161925" y="228600"/>
-                </a:lnTo>
-                <a:lnTo>
-                  <a:pt x="66675" y="228600"/>
-                </a:lnTo>
-                <a:close/>
-                <a:moveTo>
-                  <a:pt x="74612" y="209550"/>
-                </a:moveTo>
-                <a:lnTo>
-                  <a:pt x="153988" y="209550"/>
-                </a:lnTo>
-                <a:lnTo>
-                  <a:pt x="209550" y="153988"/>
-                </a:lnTo>
-                <a:lnTo>
-                  <a:pt x="209550" y="74612"/>
-                </a:lnTo>
-                <a:lnTo>
-                  <a:pt x="153988" y="19050"/>
-                </a:lnTo>
-                <a:lnTo>
-                  <a:pt x="74612" y="19050"/>
-                </a:lnTo>
-                <a:lnTo>
-                  <a:pt x="19050" y="74612"/>
-                </a:lnTo>
-                <a:lnTo>
-                  <a:pt x="19050" y="153988"/>
-                </a:lnTo>
-                <a:lnTo>
-                  <a:pt x="74612" y="209550"/>
-                </a:lnTo>
-                <a:close/>
-              </a:path>
-            </a:pathLst>
-          </a:custGeom>
-          <a:solidFill>
-            <a:srgbClr val="164B8C"/>
-          </a:solidFill>
-          <a:ln>
-            <a:noFill/>
-          </a:ln>
-        </p:spPr>
-        <p:txBody>
-          <a:bodyPr rtlCol="0" anchor="ctr"/>
-          <a:lstStyle/>
-          <a:p>
-            <a:pPr algn="ctr"/>
-          </a:p>
-        </p:txBody>
-      </p:sp>
-      <p:sp>
-        <p:nvSpPr>
-          <p:cNvPr id="36" name="블록 PLANNED"/>
-          <p:cNvSpPr/>
-          <p:nvPr/>
-        </p:nvSpPr>
-        <p:spPr>
-          <a:xfrm>
-            <a:off x="716280" y="4739640"/>
-            <a:ext cx="1295400" cy="579120"/>
-          </a:xfrm>
-          <a:prstGeom prst="roundRect">
-            <a:avLst>
-              <a:gd name="adj" fmla="val 15789"/>
-            </a:avLst>
-          </a:prstGeom>
-          <a:solidFill>
-            <a:srgbClr val="FFFFFF"/>
-          </a:solidFill>
-          <a:ln w="12192">
-            <a:solidFill>
-              <a:srgbClr val="6F9BD1"/>
-            </a:solidFill>
-          </a:ln>
-        </p:spPr>
-        <p:txBody>
-          <a:bodyPr rtlCol="0" anchor="t" lIns="45720" tIns="95250" rIns="45720" bIns="0" wrap="none">
-            <a:noAutofit/>
-          </a:bodyPr>
-          <a:lstStyle/>
-          <a:p>
-            <a:pPr algn="ctr">
-              <a:lnSpc>
-                <a:spcPts val="1439"/>
-              </a:lnSpc>
-            </a:pPr>
-            <a:r>
-              <a:rPr sz="1140" b="1">
-                <a:solidFill>
-                  <a:srgbClr val="0A2342"/>
+                  <a:srgbClr val="0B2545"/>
                 </a:solidFill>
                 <a:latin typeface="Pretendard"/>
                 <a:ea typeface="Pretendard"/>
@@ -11796,11 +9471,11 @@
           <a:p>
             <a:pPr algn="ctr">
               <a:lnSpc>
-                <a:spcPts val="1140"/>
+                <a:spcPts val="1320"/>
               </a:lnSpc>
             </a:pPr>
             <a:r>
-              <a:rPr sz="869" b="0">
+              <a:rPr sz="1019" b="0">
                 <a:solidFill>
                   <a:srgbClr val="3F4E61"/>
                 </a:solidFill>
@@ -11815,44 +9490,44 @@
       </p:sp>
       <p:sp>
         <p:nvSpPr>
-          <p:cNvPr id="37" name="블록 SCHEMA_DONE"/>
+          <p:cNvPr id="34" name="블록 SCHEMA_DONE"/>
           <p:cNvSpPr/>
           <p:nvPr/>
         </p:nvSpPr>
         <p:spPr>
           <a:xfrm>
-            <a:off x="2286000" y="4739640"/>
-            <a:ext cx="1295400" cy="579120"/>
+            <a:off x="2164080" y="5593080"/>
+            <a:ext cx="1371600" cy="487680"/>
           </a:xfrm>
           <a:prstGeom prst="roundRect">
             <a:avLst>
-              <a:gd name="adj" fmla="val 15789"/>
+              <a:gd name="adj" fmla="val 18750"/>
             </a:avLst>
           </a:prstGeom>
           <a:solidFill>
             <a:srgbClr val="FFFFFF"/>
           </a:solidFill>
-          <a:ln w="12192">
+          <a:ln w="13716">
             <a:solidFill>
-              <a:srgbClr val="6F9BD1"/>
+              <a:srgbClr val="8EC3EC"/>
             </a:solidFill>
           </a:ln>
         </p:spPr>
         <p:txBody>
-          <a:bodyPr rtlCol="0" anchor="t" lIns="45720" tIns="95250" rIns="45720" bIns="0" wrap="none">
+          <a:bodyPr rtlCol="0" anchor="t" lIns="45720" tIns="30480" rIns="45720" bIns="0" wrap="none">
             <a:noAutofit/>
           </a:bodyPr>
           <a:lstStyle/>
           <a:p>
             <a:pPr algn="ctr">
               <a:lnSpc>
-                <a:spcPts val="1439"/>
+                <a:spcPts val="1560"/>
               </a:lnSpc>
             </a:pPr>
             <a:r>
-              <a:rPr sz="1140" b="1">
+              <a:rPr sz="1200" b="1">
                 <a:solidFill>
-                  <a:srgbClr val="0A2342"/>
+                  <a:srgbClr val="0B2545"/>
                 </a:solidFill>
                 <a:latin typeface="Pretendard"/>
                 <a:ea typeface="Pretendard"/>
@@ -11864,11 +9539,11 @@
           <a:p>
             <a:pPr algn="ctr">
               <a:lnSpc>
-                <a:spcPts val="1140"/>
+                <a:spcPts val="1320"/>
               </a:lnSpc>
             </a:pPr>
             <a:r>
-              <a:rPr sz="869" b="0">
+              <a:rPr sz="1019" b="0">
                 <a:solidFill>
                   <a:srgbClr val="3F4E61"/>
                 </a:solidFill>
@@ -11883,44 +9558,44 @@
       </p:sp>
       <p:sp>
         <p:nvSpPr>
-          <p:cNvPr id="38" name="블록 LOADING"/>
+          <p:cNvPr id="35" name="블록 LOADING"/>
           <p:cNvSpPr/>
           <p:nvPr/>
         </p:nvSpPr>
         <p:spPr>
           <a:xfrm>
-            <a:off x="3855720" y="4739640"/>
-            <a:ext cx="1295400" cy="579120"/>
+            <a:off x="3794760" y="5593080"/>
+            <a:ext cx="1371600" cy="487680"/>
           </a:xfrm>
           <a:prstGeom prst="roundRect">
             <a:avLst>
-              <a:gd name="adj" fmla="val 15789"/>
+              <a:gd name="adj" fmla="val 18750"/>
             </a:avLst>
           </a:prstGeom>
           <a:solidFill>
             <a:srgbClr val="FFFFFF"/>
           </a:solidFill>
-          <a:ln w="12192">
+          <a:ln w="13716">
             <a:solidFill>
-              <a:srgbClr val="6F9BD1"/>
+              <a:srgbClr val="8EC3EC"/>
             </a:solidFill>
           </a:ln>
         </p:spPr>
         <p:txBody>
-          <a:bodyPr rtlCol="0" anchor="t" lIns="45720" tIns="95250" rIns="45720" bIns="0" wrap="none">
+          <a:bodyPr rtlCol="0" anchor="t" lIns="45720" tIns="30480" rIns="45720" bIns="0" wrap="none">
             <a:noAutofit/>
           </a:bodyPr>
           <a:lstStyle/>
           <a:p>
             <a:pPr algn="ctr">
               <a:lnSpc>
-                <a:spcPts val="1439"/>
+                <a:spcPts val="1560"/>
               </a:lnSpc>
             </a:pPr>
             <a:r>
-              <a:rPr sz="1140" b="1">
+              <a:rPr sz="1200" b="1">
                 <a:solidFill>
-                  <a:srgbClr val="0A2342"/>
+                  <a:srgbClr val="0B2545"/>
                 </a:solidFill>
                 <a:latin typeface="Pretendard"/>
                 <a:ea typeface="Pretendard"/>
@@ -11932,11 +9607,11 @@
           <a:p>
             <a:pPr algn="ctr">
               <a:lnSpc>
-                <a:spcPts val="1140"/>
+                <a:spcPts val="1320"/>
               </a:lnSpc>
             </a:pPr>
             <a:r>
-              <a:rPr sz="869" b="0">
+              <a:rPr sz="1019" b="0">
                 <a:solidFill>
                   <a:srgbClr val="3F4E61"/>
                 </a:solidFill>
@@ -11951,44 +9626,44 @@
       </p:sp>
       <p:sp>
         <p:nvSpPr>
-          <p:cNvPr id="39" name="블록 SYNCING"/>
+          <p:cNvPr id="36" name="블록 SYNCING"/>
           <p:cNvSpPr/>
           <p:nvPr/>
         </p:nvSpPr>
         <p:spPr>
           <a:xfrm>
-            <a:off x="5425440" y="4739640"/>
-            <a:ext cx="1295400" cy="579120"/>
+            <a:off x="5425440" y="5593080"/>
+            <a:ext cx="1371600" cy="487680"/>
           </a:xfrm>
           <a:prstGeom prst="roundRect">
             <a:avLst>
-              <a:gd name="adj" fmla="val 15789"/>
+              <a:gd name="adj" fmla="val 18750"/>
             </a:avLst>
           </a:prstGeom>
           <a:solidFill>
-            <a:srgbClr val="D3E5F8"/>
+            <a:srgbClr val="FFFFFF"/>
           </a:solidFill>
-          <a:ln w="18288">
+          <a:ln w="13716">
             <a:solidFill>
-              <a:srgbClr val="0F3C78"/>
+              <a:srgbClr val="8EC3EC"/>
             </a:solidFill>
           </a:ln>
         </p:spPr>
         <p:txBody>
-          <a:bodyPr rtlCol="0" anchor="t" lIns="45720" tIns="95250" rIns="45720" bIns="0" wrap="none">
+          <a:bodyPr rtlCol="0" anchor="t" lIns="45720" tIns="30480" rIns="45720" bIns="0" wrap="none">
             <a:noAutofit/>
           </a:bodyPr>
           <a:lstStyle/>
           <a:p>
             <a:pPr algn="ctr">
               <a:lnSpc>
-                <a:spcPts val="1439"/>
+                <a:spcPts val="1560"/>
               </a:lnSpc>
             </a:pPr>
             <a:r>
-              <a:rPr sz="1140" b="1">
+              <a:rPr sz="1200" b="1">
                 <a:solidFill>
-                  <a:srgbClr val="0A2342"/>
+                  <a:srgbClr val="0B2545"/>
                 </a:solidFill>
                 <a:latin typeface="Pretendard"/>
                 <a:ea typeface="Pretendard"/>
@@ -12000,11 +9675,11 @@
           <a:p>
             <a:pPr algn="ctr">
               <a:lnSpc>
-                <a:spcPts val="1140"/>
+                <a:spcPts val="1320"/>
               </a:lnSpc>
             </a:pPr>
             <a:r>
-              <a:rPr sz="869" b="0">
+              <a:rPr sz="1019" b="0">
                 <a:solidFill>
                   <a:srgbClr val="3F4E61"/>
                 </a:solidFill>
@@ -12019,44 +9694,44 @@
       </p:sp>
       <p:sp>
         <p:nvSpPr>
-          <p:cNvPr id="40" name="블록 CUTOVER"/>
+          <p:cNvPr id="37" name="블록 CUTOVER"/>
           <p:cNvSpPr/>
           <p:nvPr/>
         </p:nvSpPr>
         <p:spPr>
           <a:xfrm>
-            <a:off x="6995160" y="4739640"/>
-            <a:ext cx="1295400" cy="579120"/>
+            <a:off x="7056120" y="5593080"/>
+            <a:ext cx="1371600" cy="487680"/>
           </a:xfrm>
           <a:prstGeom prst="roundRect">
             <a:avLst>
-              <a:gd name="adj" fmla="val 15789"/>
+              <a:gd name="adj" fmla="val 18750"/>
             </a:avLst>
           </a:prstGeom>
           <a:solidFill>
-            <a:srgbClr val="D3E5F8"/>
+            <a:srgbClr val="FFFFFF"/>
           </a:solidFill>
-          <a:ln w="18288">
+          <a:ln w="13716">
             <a:solidFill>
-              <a:srgbClr val="0F3C78"/>
+              <a:srgbClr val="8EC3EC"/>
             </a:solidFill>
           </a:ln>
         </p:spPr>
         <p:txBody>
-          <a:bodyPr rtlCol="0" anchor="t" lIns="45720" tIns="95250" rIns="45720" bIns="0" wrap="none">
+          <a:bodyPr rtlCol="0" anchor="t" lIns="45720" tIns="30480" rIns="45720" bIns="0" wrap="none">
             <a:noAutofit/>
           </a:bodyPr>
           <a:lstStyle/>
           <a:p>
             <a:pPr algn="ctr">
               <a:lnSpc>
-                <a:spcPts val="1439"/>
+                <a:spcPts val="1560"/>
               </a:lnSpc>
             </a:pPr>
             <a:r>
-              <a:rPr sz="1140" b="1">
+              <a:rPr sz="1200" b="1">
                 <a:solidFill>
-                  <a:srgbClr val="0A2342"/>
+                  <a:srgbClr val="0B2545"/>
                 </a:solidFill>
                 <a:latin typeface="Pretendard"/>
                 <a:ea typeface="Pretendard"/>
@@ -12068,11 +9743,11 @@
           <a:p>
             <a:pPr algn="ctr">
               <a:lnSpc>
-                <a:spcPts val="1140"/>
+                <a:spcPts val="1320"/>
               </a:lnSpc>
             </a:pPr>
             <a:r>
-              <a:rPr sz="869" b="0">
+              <a:rPr sz="1019" b="0">
                 <a:solidFill>
                   <a:srgbClr val="3F4E61"/>
                 </a:solidFill>
@@ -12087,44 +9762,44 @@
       </p:sp>
       <p:sp>
         <p:nvSpPr>
-          <p:cNvPr id="41" name="블록 VERIFIED"/>
+          <p:cNvPr id="38" name="블록 VERIFIED"/>
           <p:cNvSpPr/>
           <p:nvPr/>
         </p:nvSpPr>
         <p:spPr>
           <a:xfrm>
-            <a:off x="8564880" y="4739640"/>
-            <a:ext cx="1295400" cy="579120"/>
+            <a:off x="8686800" y="5593080"/>
+            <a:ext cx="1371600" cy="487680"/>
           </a:xfrm>
           <a:prstGeom prst="roundRect">
             <a:avLst>
-              <a:gd name="adj" fmla="val 15789"/>
+              <a:gd name="adj" fmla="val 18750"/>
             </a:avLst>
           </a:prstGeom>
           <a:solidFill>
             <a:srgbClr val="FFFFFF"/>
           </a:solidFill>
-          <a:ln w="12192">
+          <a:ln w="13716">
             <a:solidFill>
-              <a:srgbClr val="6F9BD1"/>
+              <a:srgbClr val="8EC3EC"/>
             </a:solidFill>
           </a:ln>
         </p:spPr>
         <p:txBody>
-          <a:bodyPr rtlCol="0" anchor="t" lIns="45720" tIns="95250" rIns="45720" bIns="0" wrap="none">
+          <a:bodyPr rtlCol="0" anchor="t" lIns="45720" tIns="30480" rIns="45720" bIns="0" wrap="none">
             <a:noAutofit/>
           </a:bodyPr>
           <a:lstStyle/>
           <a:p>
             <a:pPr algn="ctr">
               <a:lnSpc>
-                <a:spcPts val="1439"/>
+                <a:spcPts val="1560"/>
               </a:lnSpc>
             </a:pPr>
             <a:r>
-              <a:rPr sz="1140" b="1">
+              <a:rPr sz="1200" b="1">
                 <a:solidFill>
-                  <a:srgbClr val="0A2342"/>
+                  <a:srgbClr val="0B2545"/>
                 </a:solidFill>
                 <a:latin typeface="Pretendard"/>
                 <a:ea typeface="Pretendard"/>
@@ -12136,11 +9811,11 @@
           <a:p>
             <a:pPr algn="ctr">
               <a:lnSpc>
-                <a:spcPts val="1140"/>
+                <a:spcPts val="1320"/>
               </a:lnSpc>
             </a:pPr>
             <a:r>
-              <a:rPr sz="869" b="0">
+              <a:rPr sz="1019" b="0">
                 <a:solidFill>
                   <a:srgbClr val="3F4E61"/>
                 </a:solidFill>
@@ -12155,44 +9830,44 @@
       </p:sp>
       <p:sp>
         <p:nvSpPr>
-          <p:cNvPr id="42" name="블록 DONE"/>
+          <p:cNvPr id="39" name="블록 DONE"/>
           <p:cNvSpPr/>
           <p:nvPr/>
         </p:nvSpPr>
         <p:spPr>
           <a:xfrm>
-            <a:off x="10134600" y="4739640"/>
-            <a:ext cx="1295400" cy="579120"/>
+            <a:off x="10317480" y="5593080"/>
+            <a:ext cx="1371600" cy="487680"/>
           </a:xfrm>
           <a:prstGeom prst="roundRect">
             <a:avLst>
-              <a:gd name="adj" fmla="val 15789"/>
+              <a:gd name="adj" fmla="val 18750"/>
             </a:avLst>
           </a:prstGeom>
           <a:solidFill>
             <a:srgbClr val="FFFFFF"/>
           </a:solidFill>
-          <a:ln w="12192">
+          <a:ln w="13716">
             <a:solidFill>
-              <a:srgbClr val="6F9BD1"/>
+              <a:srgbClr val="8EC3EC"/>
             </a:solidFill>
           </a:ln>
         </p:spPr>
         <p:txBody>
-          <a:bodyPr rtlCol="0" anchor="t" lIns="45720" tIns="95250" rIns="45720" bIns="0" wrap="none">
+          <a:bodyPr rtlCol="0" anchor="t" lIns="45720" tIns="30480" rIns="45720" bIns="0" wrap="none">
             <a:noAutofit/>
           </a:bodyPr>
           <a:lstStyle/>
           <a:p>
             <a:pPr algn="ctr">
               <a:lnSpc>
-                <a:spcPts val="1439"/>
+                <a:spcPts val="1560"/>
               </a:lnSpc>
             </a:pPr>
             <a:r>
-              <a:rPr sz="1140" b="1">
+              <a:rPr sz="1200" b="1">
                 <a:solidFill>
-                  <a:srgbClr val="0A2342"/>
+                  <a:srgbClr val="0B2545"/>
                 </a:solidFill>
                 <a:latin typeface="Pretendard"/>
                 <a:ea typeface="Pretendard"/>
@@ -12204,11 +9879,11 @@
           <a:p>
             <a:pPr algn="ctr">
               <a:lnSpc>
-                <a:spcPts val="1140"/>
+                <a:spcPts val="1320"/>
               </a:lnSpc>
             </a:pPr>
             <a:r>
-              <a:rPr sz="869" b="0">
+              <a:rPr sz="1019" b="0">
                 <a:solidFill>
                   <a:srgbClr val="3F4E61"/>
                 </a:solidFill>
@@ -12223,24 +9898,24 @@
       </p:sp>
       <p:cxnSp>
         <p:nvCxnSpPr>
-          <p:cNvPr id="43" name="연결 s1→s2"/>
+          <p:cNvPr id="40" name="연결 start→s1"/>
           <p:cNvCxnSpPr>
             <a:stCxn id="9" idx="3"/>
-            <a:endCxn id="12" idx="1"/>
+            <a:endCxn id="10" idx="1"/>
           </p:cNvCxnSpPr>
           <p:nvPr/>
         </p:nvCxnSpPr>
         <p:spPr>
           <a:xfrm>
-            <a:off x="1874520" y="2133600"/>
-            <a:ext cx="167640" cy="0"/>
+            <a:off x="1859280" y="1981200"/>
+            <a:ext cx="502920" cy="0"/>
           </a:xfrm>
           <a:prstGeom prst="line">
             <a:avLst/>
           </a:prstGeom>
           <a:ln w="16764">
             <a:solidFill>
-              <a:srgbClr val="164B8C"/>
+              <a:srgbClr val="1F4E8C"/>
             </a:solidFill>
             <a:tailEnd type="triangle" w="med" len="med"/>
           </a:ln>
@@ -12248,24 +9923,24 @@
       </p:cxnSp>
       <p:cxnSp>
         <p:nvCxnSpPr>
-          <p:cNvPr id="44" name="연결 s2→s3"/>
+          <p:cNvPr id="41" name="연결 s1→s2"/>
           <p:cNvCxnSpPr>
-            <a:stCxn id="12" idx="3"/>
-            <a:endCxn id="15" idx="1"/>
+            <a:stCxn id="10" idx="3"/>
+            <a:endCxn id="13" idx="1"/>
           </p:cNvCxnSpPr>
           <p:nvPr/>
         </p:nvCxnSpPr>
         <p:spPr>
           <a:xfrm>
-            <a:off x="3459480" y="2133600"/>
-            <a:ext cx="167640" cy="0"/>
+            <a:off x="4191000" y="1981200"/>
+            <a:ext cx="533400" cy="0"/>
           </a:xfrm>
           <a:prstGeom prst="line">
             <a:avLst/>
           </a:prstGeom>
           <a:ln w="16764">
             <a:solidFill>
-              <a:srgbClr val="164B8C"/>
+              <a:srgbClr val="1F4E8C"/>
             </a:solidFill>
             <a:tailEnd type="triangle" w="med" len="med"/>
           </a:ln>
@@ -12273,24 +9948,24 @@
       </p:cxnSp>
       <p:cxnSp>
         <p:nvCxnSpPr>
-          <p:cNvPr id="45" name="연결 s3→s4"/>
+          <p:cNvPr id="42" name="연결 s2→s3"/>
           <p:cNvCxnSpPr>
-            <a:stCxn id="15" idx="3"/>
-            <a:endCxn id="18" idx="1"/>
+            <a:stCxn id="13" idx="3"/>
+            <a:endCxn id="16" idx="1"/>
           </p:cNvCxnSpPr>
           <p:nvPr/>
         </p:nvCxnSpPr>
         <p:spPr>
           <a:xfrm>
-            <a:off x="5044440" y="2133600"/>
-            <a:ext cx="457200" cy="0"/>
+            <a:off x="6553200" y="1981200"/>
+            <a:ext cx="533400" cy="0"/>
           </a:xfrm>
           <a:prstGeom prst="line">
             <a:avLst/>
           </a:prstGeom>
           <a:ln w="16764">
             <a:solidFill>
-              <a:srgbClr val="164B8C"/>
+              <a:srgbClr val="1F4E8C"/>
             </a:solidFill>
             <a:tailEnd type="triangle" w="med" len="med"/>
           </a:ln>
@@ -12298,24 +9973,24 @@
       </p:cxnSp>
       <p:cxnSp>
         <p:nvCxnSpPr>
-          <p:cNvPr id="46" name="연결 s4→s5"/>
+          <p:cNvPr id="43" name="연결 s3→a1"/>
           <p:cNvCxnSpPr>
-            <a:stCxn id="18" idx="3"/>
-            <a:endCxn id="21" idx="1"/>
+            <a:stCxn id="16" idx="3"/>
+            <a:endCxn id="19" idx="2"/>
           </p:cNvCxnSpPr>
           <p:nvPr/>
         </p:nvCxnSpPr>
         <p:spPr>
           <a:xfrm>
-            <a:off x="6918960" y="2133600"/>
-            <a:ext cx="167640" cy="0"/>
+            <a:off x="8915400" y="1981200"/>
+            <a:ext cx="609600" cy="0"/>
           </a:xfrm>
           <a:prstGeom prst="line">
             <a:avLst/>
           </a:prstGeom>
           <a:ln w="16764">
             <a:solidFill>
-              <a:srgbClr val="164B8C"/>
+              <a:srgbClr val="1F4E8C"/>
             </a:solidFill>
             <a:tailEnd type="triangle" w="med" len="med"/>
           </a:ln>
@@ -12323,7 +9998,32 @@
       </p:cxnSp>
       <p:cxnSp>
         <p:nvCxnSpPr>
-          <p:cNvPr id="47" name="연결 s5→s6"/>
+          <p:cNvPr id="44" name="연결 a2→s4"/>
+          <p:cNvCxnSpPr>
+            <a:stCxn id="20" idx="6"/>
+            <a:endCxn id="21" idx="1"/>
+          </p:cNvCxnSpPr>
+          <p:nvPr/>
+        </p:nvCxnSpPr>
+        <p:spPr>
+          <a:xfrm>
+            <a:off x="899160" y="3642360"/>
+            <a:ext cx="396240" cy="0"/>
+          </a:xfrm>
+          <a:prstGeom prst="line">
+            <a:avLst/>
+          </a:prstGeom>
+          <a:ln w="16764">
+            <a:solidFill>
+              <a:srgbClr val="1F4E8C"/>
+            </a:solidFill>
+            <a:tailEnd type="triangle" w="med" len="med"/>
+          </a:ln>
+        </p:spPr>
+      </p:cxnSp>
+      <p:cxnSp>
+        <p:nvCxnSpPr>
+          <p:cNvPr id="45" name="연결 s4→s5"/>
           <p:cNvCxnSpPr>
             <a:stCxn id="21" idx="3"/>
             <a:endCxn id="24" idx="1"/>
@@ -12332,15 +10032,15 @@
         </p:nvCxnSpPr>
         <p:spPr>
           <a:xfrm>
-            <a:off x="8503920" y="2133600"/>
-            <a:ext cx="167640" cy="0"/>
+            <a:off x="3124200" y="3642360"/>
+            <a:ext cx="457200" cy="0"/>
           </a:xfrm>
           <a:prstGeom prst="line">
             <a:avLst/>
           </a:prstGeom>
           <a:ln w="16764">
             <a:solidFill>
-              <a:srgbClr val="164B8C"/>
+              <a:srgbClr val="1F4E8C"/>
             </a:solidFill>
             <a:tailEnd type="triangle" w="med" len="med"/>
           </a:ln>
@@ -12348,7 +10048,7 @@
       </p:cxnSp>
       <p:cxnSp>
         <p:nvCxnSpPr>
-          <p:cNvPr id="48" name="연결 s6→s7"/>
+          <p:cNvPr id="46" name="연결 s5→chk"/>
           <p:cNvCxnSpPr>
             <a:stCxn id="24" idx="3"/>
             <a:endCxn id="27" idx="1"/>
@@ -12357,15 +10057,15 @@
         </p:nvCxnSpPr>
         <p:spPr>
           <a:xfrm>
-            <a:off x="10088880" y="2133600"/>
-            <a:ext cx="167640" cy="0"/>
+            <a:off x="5410200" y="3642360"/>
+            <a:ext cx="457200" cy="0"/>
           </a:xfrm>
           <a:prstGeom prst="line">
             <a:avLst/>
           </a:prstGeom>
           <a:ln w="16764">
             <a:solidFill>
-              <a:srgbClr val="164B8C"/>
+              <a:srgbClr val="1F4E8C"/>
             </a:solidFill>
             <a:tailEnd type="triangle" w="med" len="med"/>
           </a:ln>
@@ -12373,39 +10073,39 @@
       </p:cxnSp>
       <p:cxnSp>
         <p:nvCxnSpPr>
-          <p:cNvPr id="49" name="연결 writes→s3"/>
+          <p:cNvPr id="47" name="연결 chk→s7"/>
           <p:cNvCxnSpPr>
-            <a:endCxn id="15" idx="2"/>
+            <a:stCxn id="27" idx="3"/>
+            <a:endCxn id="28" idx="1"/>
           </p:cNvCxnSpPr>
           <p:nvPr/>
         </p:nvCxnSpPr>
         <p:spPr>
-          <a:xfrm flipV="1">
-            <a:off x="4335780" y="2705100"/>
-            <a:ext cx="0" cy="495300"/>
+          <a:xfrm>
+            <a:off x="7772400" y="3642360"/>
+            <a:ext cx="457200" cy="0"/>
           </a:xfrm>
           <a:prstGeom prst="line">
             <a:avLst/>
           </a:prstGeom>
           <a:ln w="16764">
             <a:solidFill>
-              <a:srgbClr val="1F74C4"/>
+              <a:srgbClr val="1F4E8C"/>
             </a:solidFill>
-            <a:prstDash val="dash"/>
             <a:tailEnd type="triangle" w="med" len="med"/>
           </a:ln>
         </p:spPr>
       </p:cxnSp>
       <p:sp>
         <p:nvSpPr>
-          <p:cNvPr id="50" name="라벨 CDC 로 따라감"/>
+          <p:cNvPr id="48" name="라벨 예"/>
           <p:cNvSpPr txBox="1"/>
           <p:nvPr/>
         </p:nvSpPr>
         <p:spPr>
           <a:xfrm>
-            <a:off x="4381500" y="2868930"/>
-            <a:ext cx="811530" cy="167640"/>
+            <a:off x="7890510" y="3421380"/>
+            <a:ext cx="220980" cy="190500"/>
           </a:xfrm>
           <a:prstGeom prst="rect">
             <a:avLst/>
@@ -12422,54 +10122,80 @@
           <a:p>
             <a:pPr algn="ctr"/>
             <a:r>
-              <a:rPr sz="840" b="1">
+              <a:rPr sz="1019" b="1">
                 <a:solidFill>
-                  <a:srgbClr val="1F74C4"/>
+                  <a:srgbClr val="1F4E8C"/>
                 </a:solidFill>
                 <a:latin typeface="Pretendard"/>
                 <a:ea typeface="Pretendard"/>
                 <a:cs typeface="Pretendard"/>
               </a:rPr>
-              <a:t>CDC 로 따라감</a:t>
+              <a:t>예</a:t>
             </a:r>
           </a:p>
         </p:txBody>
       </p:sp>
       <p:cxnSp>
         <p:nvCxnSpPr>
-          <p:cNvPr id="51" name="연결 s6→stop"/>
+          <p:cNvPr id="49" name="연결 s7→end"/>
           <p:cNvCxnSpPr>
-            <a:stCxn id="24" idx="2"/>
-            <a:endCxn id="34" idx="0"/>
+            <a:stCxn id="28" idx="3"/>
+            <a:endCxn id="31" idx="1"/>
           </p:cNvCxnSpPr>
           <p:nvPr/>
         </p:nvCxnSpPr>
         <p:spPr>
           <a:xfrm>
-            <a:off x="9380220" y="2705100"/>
-            <a:ext cx="0" cy="220980"/>
+            <a:off x="10058400" y="3642360"/>
+            <a:ext cx="457200" cy="0"/>
           </a:xfrm>
           <a:prstGeom prst="line">
             <a:avLst/>
           </a:prstGeom>
           <a:ln w="16764">
             <a:solidFill>
-              <a:srgbClr val="164B8C"/>
+              <a:srgbClr val="1F4E8C"/>
             </a:solidFill>
+            <a:tailEnd type="triangle" w="med" len="med"/>
+          </a:ln>
+        </p:spPr>
+      </p:cxnSp>
+      <p:cxnSp>
+        <p:nvCxnSpPr>
+          <p:cNvPr id="50" name="연결 chk→stop"/>
+          <p:cNvCxnSpPr>
+            <a:stCxn id="27" idx="2"/>
+            <a:endCxn id="32" idx="0"/>
+          </p:cNvCxnSpPr>
+          <p:nvPr/>
+        </p:nvCxnSpPr>
+        <p:spPr>
+          <a:xfrm>
+            <a:off x="6819900" y="4099560"/>
+            <a:ext cx="0" cy="228600"/>
+          </a:xfrm>
+          <a:prstGeom prst="line">
+            <a:avLst/>
+          </a:prstGeom>
+          <a:ln w="16764">
+            <a:solidFill>
+              <a:srgbClr val="2B86C9"/>
+            </a:solidFill>
+            <a:prstDash val="dash"/>
             <a:tailEnd type="triangle" w="med" len="med"/>
           </a:ln>
         </p:spPr>
       </p:cxnSp>
       <p:sp>
         <p:nvSpPr>
-          <p:cNvPr id="52" name="라벨 불일치"/>
+          <p:cNvPr id="51" name="라벨 아니오"/>
           <p:cNvSpPr txBox="1"/>
           <p:nvPr/>
         </p:nvSpPr>
         <p:spPr>
           <a:xfrm>
-            <a:off x="9425940" y="2731770"/>
-            <a:ext cx="411480" cy="167640"/>
+            <a:off x="6865620" y="4118610"/>
+            <a:ext cx="480060" cy="190500"/>
           </a:xfrm>
           <a:prstGeom prst="rect">
             <a:avLst/>
@@ -12486,22 +10212,162 @@
           <a:p>
             <a:pPr algn="ctr"/>
             <a:r>
-              <a:rPr sz="840" b="1">
+              <a:rPr sz="1019" b="1">
                 <a:solidFill>
-                  <a:srgbClr val="164B8C"/>
+                  <a:srgbClr val="2B86C9"/>
                 </a:solidFill>
                 <a:latin typeface="Pretendard"/>
                 <a:ea typeface="Pretendard"/>
                 <a:cs typeface="Pretendard"/>
               </a:rPr>
-              <a:t>불일치</a:t>
+              <a:t>아니오</a:t>
             </a:r>
           </a:p>
         </p:txBody>
       </p:sp>
       <p:cxnSp>
         <p:nvCxnSpPr>
-          <p:cNvPr id="53" name="연결 st0→st1"/>
+          <p:cNvPr id="52" name="연결 stop→s5"/>
+          <p:cNvCxnSpPr>
+            <a:stCxn id="32" idx="1"/>
+            <a:endCxn id="24" idx="2"/>
+          </p:cNvCxnSpPr>
+          <p:nvPr/>
+        </p:nvCxnSpPr>
+        <p:spPr>
+          <a:xfrm flipH="1" flipV="1">
+            <a:off x="4495800" y="4053840"/>
+            <a:ext cx="1371600" cy="495300"/>
+          </a:xfrm>
+          <a:prstGeom prst="bentConnector3">
+            <a:avLst/>
+          </a:prstGeom>
+          <a:ln w="16764">
+            <a:solidFill>
+              <a:srgbClr val="2B86C9"/>
+            </a:solidFill>
+            <a:prstDash val="dash"/>
+            <a:tailEnd type="triangle" w="med" len="med"/>
+          </a:ln>
+        </p:spPr>
+      </p:cxnSp>
+      <p:sp>
+        <p:nvSpPr>
+          <p:cNvPr id="53" name="라벨 원인 수정 후 다시"/>
+          <p:cNvSpPr txBox="1"/>
+          <p:nvPr/>
+        </p:nvSpPr>
+        <p:spPr>
+          <a:xfrm>
+            <a:off x="4575620" y="4328160"/>
+            <a:ext cx="1211961" cy="190500"/>
+          </a:xfrm>
+          <a:prstGeom prst="rect">
+            <a:avLst/>
+          </a:prstGeom>
+          <a:solidFill>
+            <a:srgbClr val="FFFFFF"/>
+          </a:solidFill>
+        </p:spPr>
+        <p:txBody>
+          <a:bodyPr wrap="square" lIns="0" tIns="0" rIns="0" bIns="0" anchor="ctr">
+            <a:noAutofit/>
+          </a:bodyPr>
+          <a:lstStyle/>
+          <a:p>
+            <a:pPr algn="ctr"/>
+            <a:r>
+              <a:rPr sz="1019" b="1">
+                <a:solidFill>
+                  <a:srgbClr val="2B86C9"/>
+                </a:solidFill>
+                <a:latin typeface="Pretendard"/>
+                <a:ea typeface="Pretendard"/>
+                <a:cs typeface="Pretendard"/>
+              </a:rPr>
+              <a:t>원인 수정 후 다시</a:t>
+            </a:r>
+          </a:p>
+        </p:txBody>
+      </p:sp>
+      <p:cxnSp>
+        <p:nvCxnSpPr>
+          <p:cNvPr id="54" name="연결 st0→st1"/>
+          <p:cNvCxnSpPr>
+            <a:stCxn id="33" idx="3"/>
+            <a:endCxn id="34" idx="1"/>
+          </p:cNvCxnSpPr>
+          <p:nvPr/>
+        </p:nvCxnSpPr>
+        <p:spPr>
+          <a:xfrm>
+            <a:off x="1905000" y="5836920"/>
+            <a:ext cx="259080" cy="0"/>
+          </a:xfrm>
+          <a:prstGeom prst="line">
+            <a:avLst/>
+          </a:prstGeom>
+          <a:ln w="16764">
+            <a:solidFill>
+              <a:srgbClr val="1F4E8C"/>
+            </a:solidFill>
+            <a:tailEnd type="triangle" w="med" len="med"/>
+          </a:ln>
+        </p:spPr>
+      </p:cxnSp>
+      <p:cxnSp>
+        <p:nvCxnSpPr>
+          <p:cNvPr id="55" name="연결 st1→st2"/>
+          <p:cNvCxnSpPr>
+            <a:stCxn id="34" idx="3"/>
+            <a:endCxn id="35" idx="1"/>
+          </p:cNvCxnSpPr>
+          <p:nvPr/>
+        </p:nvCxnSpPr>
+        <p:spPr>
+          <a:xfrm>
+            <a:off x="3535680" y="5836920"/>
+            <a:ext cx="259080" cy="0"/>
+          </a:xfrm>
+          <a:prstGeom prst="line">
+            <a:avLst/>
+          </a:prstGeom>
+          <a:ln w="16764">
+            <a:solidFill>
+              <a:srgbClr val="1F4E8C"/>
+            </a:solidFill>
+            <a:tailEnd type="triangle" w="med" len="med"/>
+          </a:ln>
+        </p:spPr>
+      </p:cxnSp>
+      <p:cxnSp>
+        <p:nvCxnSpPr>
+          <p:cNvPr id="56" name="연결 st2→st3"/>
+          <p:cNvCxnSpPr>
+            <a:stCxn id="35" idx="3"/>
+            <a:endCxn id="36" idx="1"/>
+          </p:cNvCxnSpPr>
+          <p:nvPr/>
+        </p:nvCxnSpPr>
+        <p:spPr>
+          <a:xfrm>
+            <a:off x="5166360" y="5836920"/>
+            <a:ext cx="259080" cy="0"/>
+          </a:xfrm>
+          <a:prstGeom prst="line">
+            <a:avLst/>
+          </a:prstGeom>
+          <a:ln w="16764">
+            <a:solidFill>
+              <a:srgbClr val="1F4E8C"/>
+            </a:solidFill>
+            <a:tailEnd type="triangle" w="med" len="med"/>
+          </a:ln>
+        </p:spPr>
+      </p:cxnSp>
+      <p:cxnSp>
+        <p:nvCxnSpPr>
+          <p:cNvPr id="57" name="연결 st3→st4"/>
           <p:cNvCxnSpPr>
             <a:stCxn id="36" idx="3"/>
             <a:endCxn id="37" idx="1"/>
@@ -12510,15 +10376,15 @@
         </p:nvCxnSpPr>
         <p:spPr>
           <a:xfrm>
-            <a:off x="2011680" y="5029200"/>
-            <a:ext cx="274320" cy="0"/>
+            <a:off x="6797040" y="5836920"/>
+            <a:ext cx="259080" cy="0"/>
           </a:xfrm>
           <a:prstGeom prst="line">
             <a:avLst/>
           </a:prstGeom>
           <a:ln w="16764">
             <a:solidFill>
-              <a:srgbClr val="164B8C"/>
+              <a:srgbClr val="1F4E8C"/>
             </a:solidFill>
             <a:tailEnd type="triangle" w="med" len="med"/>
           </a:ln>
@@ -12526,7 +10392,7 @@
       </p:cxnSp>
       <p:cxnSp>
         <p:nvCxnSpPr>
-          <p:cNvPr id="54" name="연결 st1→st2"/>
+          <p:cNvPr id="58" name="연결 st4→st5"/>
           <p:cNvCxnSpPr>
             <a:stCxn id="37" idx="3"/>
             <a:endCxn id="38" idx="1"/>
@@ -12535,15 +10401,15 @@
         </p:nvCxnSpPr>
         <p:spPr>
           <a:xfrm>
-            <a:off x="3581400" y="5029200"/>
-            <a:ext cx="274320" cy="0"/>
+            <a:off x="8427720" y="5836920"/>
+            <a:ext cx="259080" cy="0"/>
           </a:xfrm>
           <a:prstGeom prst="line">
             <a:avLst/>
           </a:prstGeom>
           <a:ln w="16764">
             <a:solidFill>
-              <a:srgbClr val="164B8C"/>
+              <a:srgbClr val="1F4E8C"/>
             </a:solidFill>
             <a:tailEnd type="triangle" w="med" len="med"/>
           </a:ln>
@@ -12551,7 +10417,7 @@
       </p:cxnSp>
       <p:cxnSp>
         <p:nvCxnSpPr>
-          <p:cNvPr id="55" name="연결 st2→st3"/>
+          <p:cNvPr id="59" name="연결 st5→st6"/>
           <p:cNvCxnSpPr>
             <a:stCxn id="38" idx="3"/>
             <a:endCxn id="39" idx="1"/>
@@ -12560,90 +10426,15 @@
         </p:nvCxnSpPr>
         <p:spPr>
           <a:xfrm>
-            <a:off x="5151120" y="5029200"/>
-            <a:ext cx="274320" cy="0"/>
+            <a:off x="10058400" y="5836920"/>
+            <a:ext cx="259080" cy="0"/>
           </a:xfrm>
           <a:prstGeom prst="line">
             <a:avLst/>
           </a:prstGeom>
           <a:ln w="16764">
             <a:solidFill>
-              <a:srgbClr val="164B8C"/>
-            </a:solidFill>
-            <a:tailEnd type="triangle" w="med" len="med"/>
-          </a:ln>
-        </p:spPr>
-      </p:cxnSp>
-      <p:cxnSp>
-        <p:nvCxnSpPr>
-          <p:cNvPr id="56" name="연결 st3→st4"/>
-          <p:cNvCxnSpPr>
-            <a:stCxn id="39" idx="3"/>
-            <a:endCxn id="40" idx="1"/>
-          </p:cNvCxnSpPr>
-          <p:nvPr/>
-        </p:nvCxnSpPr>
-        <p:spPr>
-          <a:xfrm>
-            <a:off x="6720840" y="5029200"/>
-            <a:ext cx="274320" cy="0"/>
-          </a:xfrm>
-          <a:prstGeom prst="line">
-            <a:avLst/>
-          </a:prstGeom>
-          <a:ln w="16764">
-            <a:solidFill>
-              <a:srgbClr val="164B8C"/>
-            </a:solidFill>
-            <a:tailEnd type="triangle" w="med" len="med"/>
-          </a:ln>
-        </p:spPr>
-      </p:cxnSp>
-      <p:cxnSp>
-        <p:nvCxnSpPr>
-          <p:cNvPr id="57" name="연결 st4→st5"/>
-          <p:cNvCxnSpPr>
-            <a:stCxn id="40" idx="3"/>
-            <a:endCxn id="41" idx="1"/>
-          </p:cNvCxnSpPr>
-          <p:nvPr/>
-        </p:nvCxnSpPr>
-        <p:spPr>
-          <a:xfrm>
-            <a:off x="8290560" y="5029200"/>
-            <a:ext cx="274320" cy="0"/>
-          </a:xfrm>
-          <a:prstGeom prst="line">
-            <a:avLst/>
-          </a:prstGeom>
-          <a:ln w="16764">
-            <a:solidFill>
-              <a:srgbClr val="164B8C"/>
-            </a:solidFill>
-            <a:tailEnd type="triangle" w="med" len="med"/>
-          </a:ln>
-        </p:spPr>
-      </p:cxnSp>
-      <p:cxnSp>
-        <p:nvCxnSpPr>
-          <p:cNvPr id="58" name="연결 st5→st6"/>
-          <p:cNvCxnSpPr>
-            <a:stCxn id="41" idx="3"/>
-            <a:endCxn id="42" idx="1"/>
-          </p:cNvCxnSpPr>
-          <p:nvPr/>
-        </p:nvCxnSpPr>
-        <p:spPr>
-          <a:xfrm>
-            <a:off x="9860280" y="5029200"/>
-            <a:ext cx="274320" cy="0"/>
-          </a:xfrm>
-          <a:prstGeom prst="line">
-            <a:avLst/>
-          </a:prstGeom>
-          <a:ln w="16764">
-            <a:solidFill>
-              <a:srgbClr val="164B8C"/>
+              <a:srgbClr val="1F4E8C"/>
             </a:solidFill>
             <a:tailEnd type="triangle" w="med" len="med"/>
           </a:ln>
@@ -12651,14 +10442,14 @@
       </p:cxnSp>
       <p:sp>
         <p:nvSpPr>
-          <p:cNvPr id="59" name="범례"/>
+          <p:cNvPr id="60" name="범례"/>
           <p:cNvSpPr/>
           <p:nvPr/>
         </p:nvSpPr>
         <p:spPr>
           <a:xfrm>
             <a:off x="381000" y="6309360"/>
-            <a:ext cx="3442335" cy="396240"/>
+            <a:ext cx="3995928" cy="396240"/>
           </a:xfrm>
           <a:prstGeom prst="roundRect">
             <a:avLst>
@@ -12670,7 +10461,7 @@
           </a:solidFill>
           <a:ln w="10668">
             <a:solidFill>
-              <a:srgbClr val="A9C3E2"/>
+              <a:srgbClr val="8EC3EC"/>
             </a:solidFill>
           </a:ln>
         </p:spPr>
@@ -12684,7 +10475,7 @@
       </p:sp>
       <p:sp>
         <p:nvSpPr>
-          <p:cNvPr id="60" name="범례 제목"/>
+          <p:cNvPr id="61" name="범례 제목"/>
           <p:cNvSpPr txBox="1"/>
           <p:nvPr/>
         </p:nvSpPr>
@@ -12706,9 +10497,9 @@
           <a:p>
             <a:pPr algn="l"/>
             <a:r>
-              <a:rPr sz="900" b="1">
+              <a:rPr sz="1019" b="1">
                 <a:solidFill>
-                  <a:srgbClr val="0A2342"/>
+                  <a:srgbClr val="0B2545"/>
                 </a:solidFill>
                 <a:latin typeface="Pretendard"/>
                 <a:ea typeface="Pretendard"/>
@@ -12721,7 +10512,7 @@
       </p:sp>
       <p:cxnSp>
         <p:nvCxnSpPr>
-          <p:cNvPr id="61" name="범례 실시간 질의"/>
+          <p:cNvPr id="62" name="범례 처리 순서"/>
           <p:cNvCxnSpPr/>
           <p:nvPr/>
         </p:nvCxnSpPr>
@@ -12735,7 +10526,7 @@
           </a:prstGeom>
           <a:ln w="16764">
             <a:solidFill>
-              <a:srgbClr val="164B8C"/>
+              <a:srgbClr val="1F4E8C"/>
             </a:solidFill>
             <a:tailEnd type="triangle" w="med" len="med"/>
           </a:ln>
@@ -12743,14 +10534,14 @@
       </p:cxnSp>
       <p:sp>
         <p:nvSpPr>
-          <p:cNvPr id="62" name="범례 글 실시간 질의"/>
+          <p:cNvPr id="63" name="범례 글 처리 순서"/>
           <p:cNvSpPr txBox="1"/>
           <p:nvPr/>
         </p:nvSpPr>
         <p:spPr>
           <a:xfrm>
             <a:off x="1341120" y="6309360"/>
-            <a:ext cx="786765" cy="396240"/>
+            <a:ext cx="741807" cy="396240"/>
           </a:xfrm>
           <a:prstGeom prst="rect">
             <a:avLst/>
@@ -12765,7 +10556,7 @@
           <a:p>
             <a:pPr algn="l"/>
             <a:r>
-              <a:rPr sz="900" b="1">
+              <a:rPr sz="1019" b="1">
                 <a:solidFill>
                   <a:srgbClr val="16202C"/>
                 </a:solidFill>
@@ -12773,20 +10564,20 @@
                 <a:ea typeface="Pretendard"/>
                 <a:cs typeface="Pretendard"/>
               </a:rPr>
-              <a:t>실시간 질의</a:t>
+              <a:t>처리 순서</a:t>
             </a:r>
           </a:p>
         </p:txBody>
       </p:sp>
       <p:cxnSp>
         <p:nvCxnSpPr>
-          <p:cNvPr id="63" name="범례 비동기 데이터 흐름"/>
+          <p:cNvPr id="64" name="범례 불합격 시 되돌아가는 경로"/>
           <p:cNvCxnSpPr/>
           <p:nvPr/>
         </p:nvCxnSpPr>
         <p:spPr>
           <a:xfrm>
-            <a:off x="2204085" y="6507480"/>
+            <a:off x="2159127" y="6507480"/>
             <a:ext cx="350520" cy="0"/>
           </a:xfrm>
           <a:prstGeom prst="line">
@@ -12794,7 +10585,7 @@
           </a:prstGeom>
           <a:ln w="16764">
             <a:solidFill>
-              <a:srgbClr val="1F74C4"/>
+              <a:srgbClr val="2B86C9"/>
             </a:solidFill>
             <a:prstDash val="dash"/>
             <a:tailEnd type="triangle" w="med" len="med"/>
@@ -12803,14 +10594,14 @@
       </p:cxnSp>
       <p:sp>
         <p:nvSpPr>
-          <p:cNvPr id="64" name="범례 글 비동기 데이터 흐름"/>
+          <p:cNvPr id="65" name="범례 글 불합격 시 되돌아가는 경로"/>
           <p:cNvSpPr txBox="1"/>
           <p:nvPr/>
         </p:nvSpPr>
         <p:spPr>
           <a:xfrm>
-            <a:off x="2630805" y="6309360"/>
-            <a:ext cx="1192530" cy="396240"/>
+            <a:off x="2585847" y="6309360"/>
+            <a:ext cx="1791081" cy="396240"/>
           </a:xfrm>
           <a:prstGeom prst="rect">
             <a:avLst/>
@@ -12825,7 +10616,7 @@
           <a:p>
             <a:pPr algn="l"/>
             <a:r>
-              <a:rPr sz="900" b="1">
+              <a:rPr sz="1019" b="1">
                 <a:solidFill>
                   <a:srgbClr val="16202C"/>
                 </a:solidFill>
@@ -12833,21 +10624,21 @@
                 <a:ea typeface="Pretendard"/>
                 <a:cs typeface="Pretendard"/>
               </a:rPr>
-              <a:t>비동기 데이터 흐름</a:t>
+              <a:t>불합격 시 되돌아가는 경로</a:t>
             </a:r>
           </a:p>
         </p:txBody>
       </p:sp>
       <p:sp>
         <p:nvSpPr>
-          <p:cNvPr id="65" name="설명"/>
+          <p:cNvPr id="66" name="설명"/>
           <p:cNvSpPr txBox="1"/>
           <p:nvPr/>
         </p:nvSpPr>
         <p:spPr>
           <a:xfrm>
-            <a:off x="5926836" y="6385560"/>
-            <a:ext cx="5884164" cy="167640"/>
+            <a:off x="6564249" y="6347460"/>
+            <a:ext cx="5246751" cy="190500"/>
           </a:xfrm>
           <a:prstGeom prst="rect">
             <a:avLst/>
@@ -12862,7 +10653,7 @@
           <a:p>
             <a:pPr algn="r"/>
             <a:r>
-              <a:rPr sz="840" b="0">
+              <a:rPr sz="1019" b="0">
                 <a:solidFill>
                   <a:srgbClr val="3F4E61"/>
                 </a:solidFill>
@@ -12870,21 +10661,21 @@
                 <a:ea typeface="Pretendard"/>
                 <a:cs typeface="Pretendard"/>
               </a:rPr>
-              <a:t>④ 쓰기 중지는 사람이 한다(KDMS 는 업무 중지를 대신하지 않는다) · ⑥ 이 맞지 않으면 전환하지 않고 멈춘다</a:t>
+              <a:t>4 쓰기 중지와 전환 뒤 앱 연결은 사람이 한다 · 5 ~ 7 은 kdms cutover 한 번</a:t>
             </a:r>
           </a:p>
         </p:txBody>
       </p:sp>
       <p:sp>
         <p:nvSpPr>
-          <p:cNvPr id="66" name="설명"/>
+          <p:cNvPr id="67" name="설명"/>
           <p:cNvSpPr txBox="1"/>
           <p:nvPr/>
         </p:nvSpPr>
         <p:spPr>
           <a:xfrm>
-            <a:off x="5478780" y="6553200"/>
-            <a:ext cx="6332220" cy="167640"/>
+            <a:off x="6285738" y="6537960"/>
+            <a:ext cx="5525262" cy="190500"/>
           </a:xfrm>
           <a:prstGeom prst="rect">
             <a:avLst/>
@@ -12899,7 +10690,7 @@
           <a:p>
             <a:pPr algn="r"/>
             <a:r>
-              <a:rPr sz="840" b="0">
+              <a:rPr sz="1019" b="0">
                 <a:solidFill>
                   <a:srgbClr val="3F4E61"/>
                 </a:solidFill>
@@ -12907,7 +10698,7 @@
                 <a:ea typeface="Pretendard"/>
                 <a:cs typeface="Pretendard"/>
               </a:rPr>
-              <a:t>③ 은 테이블별 전체 적재가 끝난 뒤부터 반영한다 · 적재 중 들어온 변경은 워터마크 이후라 모두 change_log 에 있다</a:t>
+              <a:t>3 은 테이블별 적재가 끝난 뒤부터 반영 · 적재 중 변경은 모두 change_log 에 있다</a:t>
             </a:r>
           </a:p>
         </p:txBody>

--- a/docs/design/dist/d03-migration-flow.pptx
+++ b/docs/design/dist/d03-migration-flow.pptx
@@ -3113,7 +3113,7 @@
             </a:avLst>
           </a:prstGeom>
           <a:solidFill>
-            <a:srgbClr val="1F4E8C"/>
+            <a:srgbClr val="1E6B4F"/>
           </a:solidFill>
           <a:ln>
             <a:noFill/>
@@ -3153,7 +3153,7 @@
             <a:r>
               <a:rPr sz="2160" b="1">
                 <a:solidFill>
-                  <a:srgbClr val="0B2545"/>
+                  <a:srgbClr val="0B3D2E"/>
                 </a:solidFill>
                 <a:latin typeface="Pretendard"/>
                 <a:ea typeface="Pretendard"/>
@@ -3255,11 +3255,11 @@
             </a:avLst>
           </a:prstGeom>
           <a:solidFill>
-            <a:srgbClr val="EEF6FD"/>
+            <a:srgbClr val="EEF8F3"/>
           </a:solidFill>
           <a:ln w="10668">
             <a:solidFill>
-              <a:srgbClr val="8EC3EC"/>
+              <a:srgbClr val="9DD3B8"/>
             </a:solidFill>
           </a:ln>
         </p:spPr>
@@ -3277,7 +3277,7 @@
             <a:r>
               <a:rPr sz="1200" b="1">
                 <a:solidFill>
-                  <a:srgbClr val="0B2545"/>
+                  <a:srgbClr val="0B3D2E"/>
                 </a:solidFill>
                 <a:latin typeface="Pretendard"/>
                 <a:ea typeface="Pretendard"/>
@@ -3323,11 +3323,11 @@
             </a:avLst>
           </a:prstGeom>
           <a:solidFill>
-            <a:srgbClr val="EEF6FD"/>
+            <a:srgbClr val="EEF8F3"/>
           </a:solidFill>
           <a:ln w="15240">
             <a:solidFill>
-              <a:srgbClr val="1F4E8C"/>
+              <a:srgbClr val="1E6B4F"/>
             </a:solidFill>
           </a:ln>
         </p:spPr>
@@ -3345,7 +3345,7 @@
             <a:r>
               <a:rPr sz="1200" b="1">
                 <a:solidFill>
-                  <a:srgbClr val="0B2545"/>
+                  <a:srgbClr val="0B3D2E"/>
                 </a:solidFill>
                 <a:latin typeface="Pretendard"/>
                 <a:ea typeface="Pretendard"/>
@@ -3391,11 +3391,11 @@
             </a:avLst>
           </a:prstGeom>
           <a:solidFill>
-            <a:srgbClr val="EEF6FD"/>
+            <a:srgbClr val="EEF8F3"/>
           </a:solidFill>
           <a:ln w="10668">
             <a:solidFill>
-              <a:srgbClr val="8EC3EC"/>
+              <a:srgbClr val="9DD3B8"/>
             </a:solidFill>
           </a:ln>
         </p:spPr>
@@ -3413,7 +3413,7 @@
             <a:r>
               <a:rPr sz="1200" b="1">
                 <a:solidFill>
-                  <a:srgbClr val="0B2545"/>
+                  <a:srgbClr val="0B3D2E"/>
                 </a:solidFill>
                 <a:latin typeface="Pretendard"/>
                 <a:ea typeface="Pretendard"/>
@@ -3459,11 +3459,11 @@
             </a:avLst>
           </a:prstGeom>
           <a:solidFill>
-            <a:srgbClr val="0B2545"/>
+            <a:srgbClr val="0B3D2E"/>
           </a:solidFill>
           <a:ln w="15240">
             <a:solidFill>
-              <a:srgbClr val="0B2545"/>
+              <a:srgbClr val="0B3D2E"/>
             </a:solidFill>
           </a:ln>
         </p:spPr>
@@ -3509,7 +3509,7 @@
           </a:solidFill>
           <a:ln w="13716">
             <a:solidFill>
-              <a:srgbClr val="8EC3EC"/>
+              <a:srgbClr val="9DD3B8"/>
             </a:solidFill>
           </a:ln>
         </p:spPr>
@@ -3527,7 +3527,7 @@
             <a:r>
               <a:rPr sz="1200" b="1">
                 <a:solidFill>
-                  <a:srgbClr val="0B2545"/>
+                  <a:srgbClr val="0B3D2E"/>
                 </a:solidFill>
                 <a:latin typeface="Pretendard"/>
                 <a:ea typeface="Pretendard"/>
@@ -3796,7 +3796,7 @@
             </a:pathLst>
           </a:custGeom>
           <a:solidFill>
-            <a:srgbClr val="1F4E8C"/>
+            <a:srgbClr val="1E6B4F"/>
           </a:solidFill>
           <a:ln>
             <a:noFill/>
@@ -3825,7 +3825,7 @@
             <a:avLst/>
           </a:prstGeom>
           <a:solidFill>
-            <a:srgbClr val="1F4E8C"/>
+            <a:srgbClr val="1E6B4F"/>
           </a:solidFill>
           <a:ln>
             <a:noFill/>
@@ -3873,7 +3873,7 @@
           </a:solidFill>
           <a:ln w="13716">
             <a:solidFill>
-              <a:srgbClr val="8EC3EC"/>
+              <a:srgbClr val="9DD3B8"/>
             </a:solidFill>
           </a:ln>
         </p:spPr>
@@ -3891,7 +3891,7 @@
             <a:r>
               <a:rPr sz="1200" b="1">
                 <a:solidFill>
-                  <a:srgbClr val="0B2545"/>
+                  <a:srgbClr val="0B3D2E"/>
                 </a:solidFill>
                 <a:latin typeface="Pretendard"/>
                 <a:ea typeface="Pretendard"/>
@@ -6184,7 +6184,7 @@
             </a:pathLst>
           </a:custGeom>
           <a:solidFill>
-            <a:srgbClr val="1F4E8C"/>
+            <a:srgbClr val="1E6B4F"/>
           </a:solidFill>
           <a:ln>
             <a:noFill/>
@@ -6213,7 +6213,7 @@
             <a:avLst/>
           </a:prstGeom>
           <a:solidFill>
-            <a:srgbClr val="1F4E8C"/>
+            <a:srgbClr val="1E6B4F"/>
           </a:solidFill>
           <a:ln>
             <a:noFill/>
@@ -6257,11 +6257,11 @@
             </a:avLst>
           </a:prstGeom>
           <a:solidFill>
-            <a:srgbClr val="0B2545"/>
+            <a:srgbClr val="0B3D2E"/>
           </a:solidFill>
           <a:ln w="18288">
             <a:solidFill>
-              <a:srgbClr val="0B2545"/>
+              <a:srgbClr val="0B3D2E"/>
             </a:solidFill>
           </a:ln>
         </p:spPr>
@@ -7014,7 +7014,7 @@
             <a:r>
               <a:rPr sz="1019" b="1">
                 <a:solidFill>
-                  <a:srgbClr val="0B2545"/>
+                  <a:srgbClr val="0B3D2E"/>
                 </a:solidFill>
                 <a:latin typeface="Pretendard"/>
                 <a:ea typeface="Pretendard"/>
@@ -7044,7 +7044,7 @@
           </a:solidFill>
           <a:ln w="16764">
             <a:solidFill>
-              <a:srgbClr val="1F4E8C"/>
+              <a:srgbClr val="1E6B4F"/>
             </a:solidFill>
           </a:ln>
         </p:spPr>
@@ -7058,7 +7058,7 @@
             <a:r>
               <a:rPr sz="1200" b="1">
                 <a:solidFill>
-                  <a:srgbClr val="1F4E8C"/>
+                  <a:srgbClr val="1E6B4F"/>
                 </a:solidFill>
                 <a:latin typeface="Pretendard"/>
                 <a:ea typeface="Pretendard"/>
@@ -7088,7 +7088,7 @@
           </a:solidFill>
           <a:ln w="16764">
             <a:solidFill>
-              <a:srgbClr val="1F4E8C"/>
+              <a:srgbClr val="1E6B4F"/>
             </a:solidFill>
           </a:ln>
         </p:spPr>
@@ -7102,7 +7102,7 @@
             <a:r>
               <a:rPr sz="1200" b="1">
                 <a:solidFill>
-                  <a:srgbClr val="1F4E8C"/>
+                  <a:srgbClr val="1E6B4F"/>
                 </a:solidFill>
                 <a:latin typeface="Pretendard"/>
                 <a:ea typeface="Pretendard"/>
@@ -7134,7 +7134,7 @@
           </a:solidFill>
           <a:ln w="13716">
             <a:solidFill>
-              <a:srgbClr val="8EC3EC"/>
+              <a:srgbClr val="9DD3B8"/>
             </a:solidFill>
           </a:ln>
         </p:spPr>
@@ -7152,7 +7152,7 @@
             <a:r>
               <a:rPr sz="1200" b="1">
                 <a:solidFill>
-                  <a:srgbClr val="0B2545"/>
+                  <a:srgbClr val="0B3D2E"/>
                 </a:solidFill>
                 <a:latin typeface="Pretendard"/>
                 <a:ea typeface="Pretendard"/>
@@ -8108,7 +8108,7 @@
             </a:pathLst>
           </a:custGeom>
           <a:solidFill>
-            <a:srgbClr val="1F4E8C"/>
+            <a:srgbClr val="1E6B4F"/>
           </a:solidFill>
           <a:ln>
             <a:noFill/>
@@ -8137,7 +8137,7 @@
             <a:avLst/>
           </a:prstGeom>
           <a:solidFill>
-            <a:srgbClr val="1F4E8C"/>
+            <a:srgbClr val="1E6B4F"/>
           </a:solidFill>
           <a:ln>
             <a:noFill/>
@@ -8181,11 +8181,11 @@
             </a:avLst>
           </a:prstGeom>
           <a:solidFill>
-            <a:srgbClr val="0B2545"/>
+            <a:srgbClr val="0B3D2E"/>
           </a:solidFill>
           <a:ln w="18288">
             <a:solidFill>
-              <a:srgbClr val="0B2545"/>
+              <a:srgbClr val="0B3D2E"/>
             </a:solidFill>
           </a:ln>
         </p:spPr>
@@ -9020,7 +9020,7 @@
             <a:r>
               <a:rPr sz="1019" b="1">
                 <a:solidFill>
-                  <a:srgbClr val="0B2545"/>
+                  <a:srgbClr val="0B3D2E"/>
                 </a:solidFill>
                 <a:latin typeface="Pretendard"/>
                 <a:ea typeface="Pretendard"/>
@@ -9050,7 +9050,7 @@
           </a:solidFill>
           <a:ln w="13716">
             <a:solidFill>
-              <a:srgbClr val="8EC3EC"/>
+              <a:srgbClr val="9DD3B8"/>
             </a:solidFill>
           </a:ln>
         </p:spPr>
@@ -9068,7 +9068,7 @@
             <a:r>
               <a:rPr sz="1200" b="1">
                 <a:solidFill>
-                  <a:srgbClr val="0B2545"/>
+                  <a:srgbClr val="0B3D2E"/>
                 </a:solidFill>
                 <a:latin typeface="Pretendard"/>
                 <a:ea typeface="Pretendard"/>
@@ -9118,7 +9118,7 @@
           </a:solidFill>
           <a:ln w="13716">
             <a:solidFill>
-              <a:srgbClr val="8EC3EC"/>
+              <a:srgbClr val="9DD3B8"/>
             </a:solidFill>
           </a:ln>
         </p:spPr>
@@ -9136,7 +9136,7 @@
             <a:r>
               <a:rPr sz="1200" b="1">
                 <a:solidFill>
-                  <a:srgbClr val="0B2545"/>
+                  <a:srgbClr val="0B3D2E"/>
                 </a:solidFill>
                 <a:latin typeface="Pretendard"/>
                 <a:ea typeface="Pretendard"/>
@@ -9250,7 +9250,7 @@
             </a:pathLst>
           </a:custGeom>
           <a:solidFill>
-            <a:srgbClr val="1F4E8C"/>
+            <a:srgbClr val="1E6B4F"/>
           </a:solidFill>
           <a:ln>
             <a:noFill/>
@@ -9279,7 +9279,7 @@
             <a:avLst/>
           </a:prstGeom>
           <a:solidFill>
-            <a:srgbClr val="1F4E8C"/>
+            <a:srgbClr val="1E6B4F"/>
           </a:solidFill>
           <a:ln>
             <a:noFill/>
@@ -9323,11 +9323,11 @@
             </a:avLst>
           </a:prstGeom>
           <a:solidFill>
-            <a:srgbClr val="0B2545"/>
+            <a:srgbClr val="0B3D2E"/>
           </a:solidFill>
           <a:ln w="15240">
             <a:solidFill>
-              <a:srgbClr val="0B2545"/>
+              <a:srgbClr val="0B3D2E"/>
             </a:solidFill>
           </a:ln>
         </p:spPr>
@@ -9369,11 +9369,11 @@
             </a:avLst>
           </a:prstGeom>
           <a:solidFill>
-            <a:srgbClr val="D3E5F8"/>
+            <a:srgbClr val="D5EFE2"/>
           </a:solidFill>
           <a:ln w="16764">
             <a:solidFill>
-              <a:srgbClr val="1F4E8C"/>
+              <a:srgbClr val="1E6B4F"/>
             </a:solidFill>
           </a:ln>
         </p:spPr>
@@ -9391,7 +9391,7 @@
             <a:r>
               <a:rPr sz="1200" b="1">
                 <a:solidFill>
-                  <a:srgbClr val="0B2545"/>
+                  <a:srgbClr val="0B3D2E"/>
                 </a:solidFill>
                 <a:latin typeface="Pretendard"/>
                 <a:ea typeface="Pretendard"/>
@@ -9441,7 +9441,7 @@
           </a:solidFill>
           <a:ln w="13716">
             <a:solidFill>
-              <a:srgbClr val="8EC3EC"/>
+              <a:srgbClr val="9DD3B8"/>
             </a:solidFill>
           </a:ln>
         </p:spPr>
@@ -9459,7 +9459,7 @@
             <a:r>
               <a:rPr sz="1200" b="1">
                 <a:solidFill>
-                  <a:srgbClr val="0B2545"/>
+                  <a:srgbClr val="0B3D2E"/>
                 </a:solidFill>
                 <a:latin typeface="Pretendard"/>
                 <a:ea typeface="Pretendard"/>
@@ -9509,7 +9509,7 @@
           </a:solidFill>
           <a:ln w="13716">
             <a:solidFill>
-              <a:srgbClr val="8EC3EC"/>
+              <a:srgbClr val="9DD3B8"/>
             </a:solidFill>
           </a:ln>
         </p:spPr>
@@ -9527,7 +9527,7 @@
             <a:r>
               <a:rPr sz="1200" b="1">
                 <a:solidFill>
-                  <a:srgbClr val="0B2545"/>
+                  <a:srgbClr val="0B3D2E"/>
                 </a:solidFill>
                 <a:latin typeface="Pretendard"/>
                 <a:ea typeface="Pretendard"/>
@@ -9577,7 +9577,7 @@
           </a:solidFill>
           <a:ln w="13716">
             <a:solidFill>
-              <a:srgbClr val="8EC3EC"/>
+              <a:srgbClr val="9DD3B8"/>
             </a:solidFill>
           </a:ln>
         </p:spPr>
@@ -9595,7 +9595,7 @@
             <a:r>
               <a:rPr sz="1200" b="1">
                 <a:solidFill>
-                  <a:srgbClr val="0B2545"/>
+                  <a:srgbClr val="0B3D2E"/>
                 </a:solidFill>
                 <a:latin typeface="Pretendard"/>
                 <a:ea typeface="Pretendard"/>
@@ -9645,7 +9645,7 @@
           </a:solidFill>
           <a:ln w="13716">
             <a:solidFill>
-              <a:srgbClr val="8EC3EC"/>
+              <a:srgbClr val="9DD3B8"/>
             </a:solidFill>
           </a:ln>
         </p:spPr>
@@ -9663,7 +9663,7 @@
             <a:r>
               <a:rPr sz="1200" b="1">
                 <a:solidFill>
-                  <a:srgbClr val="0B2545"/>
+                  <a:srgbClr val="0B3D2E"/>
                 </a:solidFill>
                 <a:latin typeface="Pretendard"/>
                 <a:ea typeface="Pretendard"/>
@@ -9713,7 +9713,7 @@
           </a:solidFill>
           <a:ln w="13716">
             <a:solidFill>
-              <a:srgbClr val="8EC3EC"/>
+              <a:srgbClr val="9DD3B8"/>
             </a:solidFill>
           </a:ln>
         </p:spPr>
@@ -9731,7 +9731,7 @@
             <a:r>
               <a:rPr sz="1200" b="1">
                 <a:solidFill>
-                  <a:srgbClr val="0B2545"/>
+                  <a:srgbClr val="0B3D2E"/>
                 </a:solidFill>
                 <a:latin typeface="Pretendard"/>
                 <a:ea typeface="Pretendard"/>
@@ -9781,7 +9781,7 @@
           </a:solidFill>
           <a:ln w="13716">
             <a:solidFill>
-              <a:srgbClr val="8EC3EC"/>
+              <a:srgbClr val="9DD3B8"/>
             </a:solidFill>
           </a:ln>
         </p:spPr>
@@ -9799,7 +9799,7 @@
             <a:r>
               <a:rPr sz="1200" b="1">
                 <a:solidFill>
-                  <a:srgbClr val="0B2545"/>
+                  <a:srgbClr val="0B3D2E"/>
                 </a:solidFill>
                 <a:latin typeface="Pretendard"/>
                 <a:ea typeface="Pretendard"/>
@@ -9849,7 +9849,7 @@
           </a:solidFill>
           <a:ln w="13716">
             <a:solidFill>
-              <a:srgbClr val="8EC3EC"/>
+              <a:srgbClr val="9DD3B8"/>
             </a:solidFill>
           </a:ln>
         </p:spPr>
@@ -9867,7 +9867,7 @@
             <a:r>
               <a:rPr sz="1200" b="1">
                 <a:solidFill>
-                  <a:srgbClr val="0B2545"/>
+                  <a:srgbClr val="0B3D2E"/>
                 </a:solidFill>
                 <a:latin typeface="Pretendard"/>
                 <a:ea typeface="Pretendard"/>
@@ -9915,7 +9915,7 @@
           </a:prstGeom>
           <a:ln w="16764">
             <a:solidFill>
-              <a:srgbClr val="1F4E8C"/>
+              <a:srgbClr val="1E6B4F"/>
             </a:solidFill>
             <a:tailEnd type="triangle" w="med" len="med"/>
           </a:ln>
@@ -9940,7 +9940,7 @@
           </a:prstGeom>
           <a:ln w="16764">
             <a:solidFill>
-              <a:srgbClr val="1F4E8C"/>
+              <a:srgbClr val="1E6B4F"/>
             </a:solidFill>
             <a:tailEnd type="triangle" w="med" len="med"/>
           </a:ln>
@@ -9965,7 +9965,7 @@
           </a:prstGeom>
           <a:ln w="16764">
             <a:solidFill>
-              <a:srgbClr val="1F4E8C"/>
+              <a:srgbClr val="1E6B4F"/>
             </a:solidFill>
             <a:tailEnd type="triangle" w="med" len="med"/>
           </a:ln>
@@ -9990,7 +9990,7 @@
           </a:prstGeom>
           <a:ln w="16764">
             <a:solidFill>
-              <a:srgbClr val="1F4E8C"/>
+              <a:srgbClr val="1E6B4F"/>
             </a:solidFill>
             <a:tailEnd type="triangle" w="med" len="med"/>
           </a:ln>
@@ -10015,7 +10015,7 @@
           </a:prstGeom>
           <a:ln w="16764">
             <a:solidFill>
-              <a:srgbClr val="1F4E8C"/>
+              <a:srgbClr val="1E6B4F"/>
             </a:solidFill>
             <a:tailEnd type="triangle" w="med" len="med"/>
           </a:ln>
@@ -10040,7 +10040,7 @@
           </a:prstGeom>
           <a:ln w="16764">
             <a:solidFill>
-              <a:srgbClr val="1F4E8C"/>
+              <a:srgbClr val="1E6B4F"/>
             </a:solidFill>
             <a:tailEnd type="triangle" w="med" len="med"/>
           </a:ln>
@@ -10065,7 +10065,7 @@
           </a:prstGeom>
           <a:ln w="16764">
             <a:solidFill>
-              <a:srgbClr val="1F4E8C"/>
+              <a:srgbClr val="1E6B4F"/>
             </a:solidFill>
             <a:tailEnd type="triangle" w="med" len="med"/>
           </a:ln>
@@ -10090,7 +10090,7 @@
           </a:prstGeom>
           <a:ln w="16764">
             <a:solidFill>
-              <a:srgbClr val="1F4E8C"/>
+              <a:srgbClr val="1E6B4F"/>
             </a:solidFill>
             <a:tailEnd type="triangle" w="med" len="med"/>
           </a:ln>
@@ -10124,7 +10124,7 @@
             <a:r>
               <a:rPr sz="1019" b="1">
                 <a:solidFill>
-                  <a:srgbClr val="1F4E8C"/>
+                  <a:srgbClr val="1E6B4F"/>
                 </a:solidFill>
                 <a:latin typeface="Pretendard"/>
                 <a:ea typeface="Pretendard"/>
@@ -10154,7 +10154,7 @@
           </a:prstGeom>
           <a:ln w="16764">
             <a:solidFill>
-              <a:srgbClr val="1F4E8C"/>
+              <a:srgbClr val="1E6B4F"/>
             </a:solidFill>
             <a:tailEnd type="triangle" w="med" len="med"/>
           </a:ln>
@@ -10179,7 +10179,7 @@
           </a:prstGeom>
           <a:ln w="16764">
             <a:solidFill>
-              <a:srgbClr val="2B86C9"/>
+              <a:srgbClr val="2E9E6E"/>
             </a:solidFill>
             <a:prstDash val="dash"/>
             <a:tailEnd type="triangle" w="med" len="med"/>
@@ -10214,7 +10214,7 @@
             <a:r>
               <a:rPr sz="1019" b="1">
                 <a:solidFill>
-                  <a:srgbClr val="2B86C9"/>
+                  <a:srgbClr val="2E9E6E"/>
                 </a:solidFill>
                 <a:latin typeface="Pretendard"/>
                 <a:ea typeface="Pretendard"/>
@@ -10244,7 +10244,7 @@
           </a:prstGeom>
           <a:ln w="16764">
             <a:solidFill>
-              <a:srgbClr val="2B86C9"/>
+              <a:srgbClr val="2E9E6E"/>
             </a:solidFill>
             <a:prstDash val="dash"/>
             <a:tailEnd type="triangle" w="med" len="med"/>
@@ -10279,7 +10279,7 @@
             <a:r>
               <a:rPr sz="1019" b="1">
                 <a:solidFill>
-                  <a:srgbClr val="2B86C9"/>
+                  <a:srgbClr val="2E9E6E"/>
                 </a:solidFill>
                 <a:latin typeface="Pretendard"/>
                 <a:ea typeface="Pretendard"/>
@@ -10309,7 +10309,7 @@
           </a:prstGeom>
           <a:ln w="16764">
             <a:solidFill>
-              <a:srgbClr val="1F4E8C"/>
+              <a:srgbClr val="1E6B4F"/>
             </a:solidFill>
             <a:tailEnd type="triangle" w="med" len="med"/>
           </a:ln>
@@ -10334,7 +10334,7 @@
           </a:prstGeom>
           <a:ln w="16764">
             <a:solidFill>
-              <a:srgbClr val="1F4E8C"/>
+              <a:srgbClr val="1E6B4F"/>
             </a:solidFill>
             <a:tailEnd type="triangle" w="med" len="med"/>
           </a:ln>
@@ -10359,7 +10359,7 @@
           </a:prstGeom>
           <a:ln w="16764">
             <a:solidFill>
-              <a:srgbClr val="1F4E8C"/>
+              <a:srgbClr val="1E6B4F"/>
             </a:solidFill>
             <a:tailEnd type="triangle" w="med" len="med"/>
           </a:ln>
@@ -10384,7 +10384,7 @@
           </a:prstGeom>
           <a:ln w="16764">
             <a:solidFill>
-              <a:srgbClr val="1F4E8C"/>
+              <a:srgbClr val="1E6B4F"/>
             </a:solidFill>
             <a:tailEnd type="triangle" w="med" len="med"/>
           </a:ln>
@@ -10409,7 +10409,7 @@
           </a:prstGeom>
           <a:ln w="16764">
             <a:solidFill>
-              <a:srgbClr val="1F4E8C"/>
+              <a:srgbClr val="1E6B4F"/>
             </a:solidFill>
             <a:tailEnd type="triangle" w="med" len="med"/>
           </a:ln>
@@ -10434,7 +10434,7 @@
           </a:prstGeom>
           <a:ln w="16764">
             <a:solidFill>
-              <a:srgbClr val="1F4E8C"/>
+              <a:srgbClr val="1E6B4F"/>
             </a:solidFill>
             <a:tailEnd type="triangle" w="med" len="med"/>
           </a:ln>
@@ -10461,7 +10461,7 @@
           </a:solidFill>
           <a:ln w="10668">
             <a:solidFill>
-              <a:srgbClr val="8EC3EC"/>
+              <a:srgbClr val="9DD3B8"/>
             </a:solidFill>
           </a:ln>
         </p:spPr>
@@ -10499,7 +10499,7 @@
             <a:r>
               <a:rPr sz="1019" b="1">
                 <a:solidFill>
-                  <a:srgbClr val="0B2545"/>
+                  <a:srgbClr val="0B3D2E"/>
                 </a:solidFill>
                 <a:latin typeface="Pretendard"/>
                 <a:ea typeface="Pretendard"/>
@@ -10526,7 +10526,7 @@
           </a:prstGeom>
           <a:ln w="16764">
             <a:solidFill>
-              <a:srgbClr val="1F4E8C"/>
+              <a:srgbClr val="1E6B4F"/>
             </a:solidFill>
             <a:tailEnd type="triangle" w="med" len="med"/>
           </a:ln>
@@ -10585,7 +10585,7 @@
           </a:prstGeom>
           <a:ln w="16764">
             <a:solidFill>
-              <a:srgbClr val="2B86C9"/>
+              <a:srgbClr val="2E9E6E"/>
             </a:solidFill>
             <a:prstDash val="dash"/>
             <a:tailEnd type="triangle" w="med" len="med"/>

--- a/docs/design/dist/d03-migration-flow.pptx
+++ b/docs/design/dist/d03-migration-flow.pptx
@@ -3104,8 +3104,8 @@
         </p:nvSpPr>
         <p:spPr>
           <a:xfrm>
-            <a:off x="381000" y="289560"/>
-            <a:ext cx="53340" cy="335280"/>
+            <a:off x="381000" y="274320"/>
+            <a:ext cx="53340" cy="548640"/>
           </a:xfrm>
           <a:prstGeom prst="roundRect">
             <a:avLst>
@@ -3113,7 +3113,7 @@
             </a:avLst>
           </a:prstGeom>
           <a:solidFill>
-            <a:srgbClr val="164B8C"/>
+            <a:srgbClr val="1E6B4F"/>
           </a:solidFill>
           <a:ln>
             <a:noFill/>
@@ -3135,8 +3135,8 @@
         </p:nvSpPr>
         <p:spPr>
           <a:xfrm>
-            <a:off x="533400" y="289560"/>
-            <a:ext cx="7620000" cy="304800"/>
+            <a:off x="533400" y="228600"/>
+            <a:ext cx="8001000" cy="365760"/>
           </a:xfrm>
           <a:prstGeom prst="rect">
             <a:avLst/>
@@ -3151,9 +3151,9 @@
           <a:p>
             <a:pPr algn="l"/>
             <a:r>
-              <a:rPr sz="1800" b="1">
+              <a:rPr sz="2160" b="1">
                 <a:solidFill>
-                  <a:srgbClr val="0A2342"/>
+                  <a:srgbClr val="0B3D2E"/>
                 </a:solidFill>
                 <a:latin typeface="Pretendard"/>
                 <a:ea typeface="Pretendard"/>
@@ -3172,8 +3172,8 @@
         </p:nvSpPr>
         <p:spPr>
           <a:xfrm>
-            <a:off x="533400" y="624840"/>
-            <a:ext cx="7620000" cy="167640"/>
+            <a:off x="533400" y="640080"/>
+            <a:ext cx="9144000" cy="182880"/>
           </a:xfrm>
           <a:prstGeom prst="rect">
             <a:avLst/>
@@ -3188,7 +3188,7 @@
           <a:p>
             <a:pPr algn="l"/>
             <a:r>
-              <a:rPr sz="960" b="0">
+              <a:rPr sz="1080" b="0">
                 <a:solidFill>
                   <a:srgbClr val="3F4E61"/>
                 </a:solidFill>
@@ -3209,8 +3209,8 @@
         </p:nvSpPr>
         <p:spPr>
           <a:xfrm>
-            <a:off x="8763000" y="426720"/>
-            <a:ext cx="3048000" cy="152400"/>
+            <a:off x="8382000" y="411480"/>
+            <a:ext cx="3429000" cy="167640"/>
           </a:xfrm>
           <a:prstGeom prst="rect">
             <a:avLst/>
@@ -3225,7 +3225,7 @@
           <a:p>
             <a:pPr algn="r"/>
             <a:r>
-              <a:rPr sz="840" b="0">
+              <a:rPr sz="1019" b="0">
                 <a:solidFill>
                   <a:srgbClr val="3F4E61"/>
                 </a:solidFill>
@@ -3233,7 +3233,7 @@
                 <a:ea typeface="Pretendard"/>
                 <a:cs typeface="Pretendard"/>
               </a:rPr>
-              <a:t>KDMS-D03 · v0.1 · 2026-10-06</a:t>
+              <a:t>KDMS-D03 · v0.2 · 2026-10-09</a:t>
             </a:r>
           </a:p>
         </p:txBody>
@@ -3247,19 +3247,19 @@
         <p:spPr>
           <a:xfrm>
             <a:off x="335280" y="960120"/>
-            <a:ext cx="4846320" cy="2971800"/>
+            <a:ext cx="11521440" cy="1554480"/>
           </a:xfrm>
           <a:prstGeom prst="roundRect">
             <a:avLst>
-              <a:gd name="adj" fmla="val 4615"/>
+              <a:gd name="adj" fmla="val 8823"/>
             </a:avLst>
           </a:prstGeom>
           <a:solidFill>
-            <a:srgbClr val="F1F6FC"/>
+            <a:srgbClr val="EEF8F3"/>
           </a:solidFill>
           <a:ln w="10668">
             <a:solidFill>
-              <a:srgbClr val="A9C3E2"/>
+              <a:srgbClr val="9DD3B8"/>
             </a:solidFill>
           </a:ln>
         </p:spPr>
@@ -3277,7 +3277,7 @@
             <a:r>
               <a:rPr sz="1200" b="1">
                 <a:solidFill>
-                  <a:srgbClr val="0A2342"/>
+                  <a:srgbClr val="0B3D2E"/>
                 </a:solidFill>
                 <a:latin typeface="Pretendard"/>
                 <a:ea typeface="Pretendard"/>
@@ -3289,11 +3289,11 @@
           <a:p>
             <a:pPr algn="l">
               <a:lnSpc>
-                <a:spcPts val="1200"/>
+                <a:spcPts val="1320"/>
               </a:lnSpc>
             </a:pPr>
             <a:r>
-              <a:rPr sz="869" b="0">
+              <a:rPr sz="1019" b="0">
                 <a:solidFill>
                   <a:srgbClr val="3F4E61"/>
                 </a:solidFill>
@@ -3301,7 +3301,7 @@
                 <a:ea typeface="Pretendard"/>
                 <a:cs typeface="Pretendard"/>
               </a:rPr>
-              <a:t>원천 업무는 평소처럼 계속 쓰인다</a:t>
+              <a:t>원천 업무 쓰기는 계속된다 · 그 변경은 CDC 로 따라간다</a:t>
             </a:r>
           </a:p>
         </p:txBody>
@@ -3314,20 +3314,20 @@
         </p:nvSpPr>
         <p:spPr>
           <a:xfrm>
-            <a:off x="5364480" y="960120"/>
-            <a:ext cx="6446520" cy="2971800"/>
+            <a:off x="335280" y="2636520"/>
+            <a:ext cx="11521440" cy="2209800"/>
           </a:xfrm>
           <a:prstGeom prst="roundRect">
             <a:avLst>
-              <a:gd name="adj" fmla="val 4615"/>
+              <a:gd name="adj" fmla="val 6206"/>
             </a:avLst>
           </a:prstGeom>
           <a:solidFill>
-            <a:srgbClr val="E8F1FB"/>
+            <a:srgbClr val="EEF8F3"/>
           </a:solidFill>
           <a:ln w="15240">
             <a:solidFill>
-              <a:srgbClr val="164B8C"/>
+              <a:srgbClr val="1E6B4F"/>
             </a:solidFill>
           </a:ln>
         </p:spPr>
@@ -3345,7 +3345,7 @@
             <a:r>
               <a:rPr sz="1200" b="1">
                 <a:solidFill>
-                  <a:srgbClr val="0A2342"/>
+                  <a:srgbClr val="0B3D2E"/>
                 </a:solidFill>
                 <a:latin typeface="Pretendard"/>
                 <a:ea typeface="Pretendard"/>
@@ -3357,11 +3357,11 @@
           <a:p>
             <a:pPr algn="l">
               <a:lnSpc>
-                <a:spcPts val="1200"/>
+                <a:spcPts val="1320"/>
               </a:lnSpc>
             </a:pPr>
             <a:r>
-              <a:rPr sz="869" b="0">
+              <a:rPr sz="1019" b="0">
                 <a:solidFill>
                   <a:srgbClr val="3F4E61"/>
                 </a:solidFill>
@@ -3369,7 +3369,7 @@
                 <a:ea typeface="Pretendard"/>
                 <a:cs typeface="Pretendard"/>
               </a:rPr>
-              <a:t>원천 쓰기를 멈춘 뒤 · 실제 다운타임 = ④ ~ ⑦</a:t>
+              <a:t>원천 쓰기를 멈춘 뒤 · 실제 다운타임 = 4 ~ 7 (kdms 가 재는 것은 cutover 시작 ~ 끝)</a:t>
             </a:r>
           </a:p>
         </p:txBody>
@@ -3382,20 +3382,20 @@
         </p:nvSpPr>
         <p:spPr>
           <a:xfrm>
-            <a:off x="335280" y="4084320"/>
-            <a:ext cx="11475720" cy="1569720"/>
+            <a:off x="335280" y="4968240"/>
+            <a:ext cx="11521440" cy="1219200"/>
           </a:xfrm>
           <a:prstGeom prst="roundRect">
             <a:avLst>
-              <a:gd name="adj" fmla="val 8737"/>
+              <a:gd name="adj" fmla="val 11250"/>
             </a:avLst>
           </a:prstGeom>
           <a:solidFill>
-            <a:srgbClr val="F1F6FC"/>
+            <a:srgbClr val="EEF8F3"/>
           </a:solidFill>
           <a:ln w="10668">
             <a:solidFill>
-              <a:srgbClr val="A9C3E2"/>
+              <a:srgbClr val="9DD3B8"/>
             </a:solidFill>
           </a:ln>
         </p:spPr>
@@ -3413,7 +3413,7 @@
             <a:r>
               <a:rPr sz="1200" b="1">
                 <a:solidFill>
-                  <a:srgbClr val="0A2342"/>
+                  <a:srgbClr val="0B3D2E"/>
                 </a:solidFill>
                 <a:latin typeface="Pretendard"/>
                 <a:ea typeface="Pretendard"/>
@@ -3425,11 +3425,11 @@
           <a:p>
             <a:pPr algn="l">
               <a:lnSpc>
-                <a:spcPts val="1200"/>
+                <a:spcPts val="1320"/>
               </a:lnSpc>
             </a:pPr>
             <a:r>
-              <a:rPr sz="869" b="0">
+              <a:rPr sz="1019" b="0">
                 <a:solidFill>
                   <a:srgbClr val="3F4E61"/>
                 </a:solidFill>
@@ -3437,51 +3437,97 @@
                 <a:ea typeface="Pretendard"/>
                 <a:cs typeface="Pretendard"/>
               </a:rPr>
-              <a:t>어느 단계에서 멈춰도 다시 실행하면 이어서 진행 · 오류는 FAILED 로 남고 원인 수정 후 재실행</a:t>
+              <a:t>어느 단계에서 멈춰도 다시 실행하면 이어서 진행 · 실패는 FAILED 와 원인(last_error)으로 남는다</a:t>
             </a:r>
           </a:p>
         </p:txBody>
       </p:sp>
       <p:sp>
         <p:nvSpPr>
-          <p:cNvPr id="9" name="블록 워터마크 기록"/>
+          <p:cNvPr id="9" name="블록 이관 시작"/>
           <p:cNvSpPr/>
           <p:nvPr/>
         </p:nvSpPr>
         <p:spPr>
           <a:xfrm>
-            <a:off x="457200" y="1562100"/>
-            <a:ext cx="1417320" cy="1143000"/>
+            <a:off x="563880" y="1813560"/>
+            <a:ext cx="1295400" cy="335280"/>
           </a:xfrm>
           <a:prstGeom prst="roundRect">
             <a:avLst>
-              <a:gd name="adj" fmla="val 8000"/>
+              <a:gd name="adj" fmla="val 50000"/>
+            </a:avLst>
+          </a:prstGeom>
+          <a:solidFill>
+            <a:srgbClr val="0B3D2E"/>
+          </a:solidFill>
+          <a:ln w="15240">
+            <a:solidFill>
+              <a:srgbClr val="0B3D2E"/>
+            </a:solidFill>
+          </a:ln>
+        </p:spPr>
+        <p:txBody>
+          <a:bodyPr rtlCol="0" anchor="ctr" lIns="335661" tIns="0" rIns="0" bIns="0" wrap="none">
+            <a:noAutofit/>
+          </a:bodyPr>
+          <a:lstStyle/>
+          <a:p>
+            <a:pPr algn="l"/>
+            <a:r>
+              <a:rPr sz="1080" b="1">
+                <a:solidFill>
+                  <a:srgbClr val="FFFFFF"/>
+                </a:solidFill>
+                <a:latin typeface="Pretendard"/>
+                <a:ea typeface="Pretendard"/>
+                <a:cs typeface="Pretendard"/>
+              </a:rPr>
+              <a:t>이관 시작</a:t>
+            </a:r>
+          </a:p>
+        </p:txBody>
+      </p:sp>
+      <p:sp>
+        <p:nvSpPr>
+          <p:cNvPr id="10" name="블록 워터마크 기록"/>
+          <p:cNvSpPr/>
+          <p:nvPr/>
+        </p:nvSpPr>
+        <p:spPr>
+          <a:xfrm>
+            <a:off x="2362200" y="1569720"/>
+            <a:ext cx="1828800" cy="822960"/>
+          </a:xfrm>
+          <a:prstGeom prst="roundRect">
+            <a:avLst>
+              <a:gd name="adj" fmla="val 11111"/>
             </a:avLst>
           </a:prstGeom>
           <a:solidFill>
             <a:srgbClr val="FFFFFF"/>
           </a:solidFill>
-          <a:ln w="12192">
+          <a:ln w="13716">
             <a:solidFill>
-              <a:srgbClr val="6F9BD1"/>
+              <a:srgbClr val="9DD3B8"/>
             </a:solidFill>
           </a:ln>
         </p:spPr>
         <p:txBody>
-          <a:bodyPr rtlCol="0" anchor="t" lIns="45720" tIns="495300" rIns="45720" bIns="0" wrap="none">
+          <a:bodyPr rtlCol="0" anchor="t" lIns="45720" tIns="388620" rIns="45720" bIns="0" wrap="none">
             <a:noAutofit/>
           </a:bodyPr>
           <a:lstStyle/>
           <a:p>
             <a:pPr algn="ctr">
               <a:lnSpc>
-                <a:spcPts val="1439"/>
+                <a:spcPts val="1560"/>
               </a:lnSpc>
             </a:pPr>
             <a:r>
-              <a:rPr sz="1140" b="1">
+              <a:rPr sz="1200" b="1">
                 <a:solidFill>
-                  <a:srgbClr val="0A2342"/>
+                  <a:srgbClr val="0B3D2E"/>
                 </a:solidFill>
                 <a:latin typeface="Pretendard"/>
                 <a:ea typeface="Pretendard"/>
@@ -3493,11 +3539,11 @@
           <a:p>
             <a:pPr algn="ctr">
               <a:lnSpc>
-                <a:spcPts val="1140"/>
+                <a:spcPts val="1320"/>
               </a:lnSpc>
             </a:pPr>
             <a:r>
-              <a:rPr sz="869" b="0">
+              <a:rPr sz="1019" b="0">
                 <a:solidFill>
                   <a:srgbClr val="3F4E61"/>
                 </a:solidFill>
@@ -3508,35 +3554,17 @@
               <a:t>CDC 시작 LSN 저장</a:t>
             </a:r>
           </a:p>
-          <a:p>
-            <a:pPr algn="ctr">
-              <a:lnSpc>
-                <a:spcPts val="1140"/>
-              </a:lnSpc>
-            </a:pPr>
-            <a:r>
-              <a:rPr sz="869" b="0">
-                <a:solidFill>
-                  <a:srgbClr val="3F4E61"/>
-                </a:solidFill>
-                <a:latin typeface="Pretendard"/>
-                <a:ea typeface="Pretendard"/>
-                <a:cs typeface="Pretendard"/>
-              </a:rPr>
-              <a:t>적재보다 먼저</a:t>
-            </a:r>
-          </a:p>
         </p:txBody>
       </p:sp>
       <p:sp>
         <p:nvSpPr>
-          <p:cNvPr id="10" name="아이콘 bookmark_flag"/>
+          <p:cNvPr id="11" name="아이콘 bookmark_flag"/>
           <p:cNvSpPr/>
           <p:nvPr/>
         </p:nvSpPr>
         <p:spPr>
           <a:xfrm>
-            <a:off x="1076960" y="1743392"/>
+            <a:off x="3187700" y="1644332"/>
             <a:ext cx="177800" cy="230188"/>
           </a:xfrm>
           <a:custGeom>
@@ -3768,7 +3796,7 @@
             </a:pathLst>
           </a:custGeom>
           <a:solidFill>
-            <a:srgbClr val="164B8C"/>
+            <a:srgbClr val="1E6B4F"/>
           </a:solidFill>
           <a:ln>
             <a:noFill/>
@@ -3784,20 +3812,20 @@
       </p:sp>
       <p:sp>
         <p:nvSpPr>
-          <p:cNvPr id="11" name="번호 1"/>
+          <p:cNvPr id="12" name="번호 1"/>
           <p:cNvSpPr/>
           <p:nvPr/>
         </p:nvSpPr>
         <p:spPr>
           <a:xfrm>
-            <a:off x="510540" y="1615440"/>
-            <a:ext cx="198120" cy="198120"/>
+            <a:off x="2415540" y="1623060"/>
+            <a:ext cx="213360" cy="213360"/>
           </a:xfrm>
           <a:prstGeom prst="ellipse">
             <a:avLst/>
           </a:prstGeom>
           <a:solidFill>
-            <a:srgbClr val="164B8C"/>
+            <a:srgbClr val="1E6B4F"/>
           </a:solidFill>
           <a:ln>
             <a:noFill/>
@@ -3811,7 +3839,7 @@
           <a:p>
             <a:pPr algn="ctr"/>
             <a:r>
-              <a:rPr sz="900" b="1">
+              <a:rPr sz="1019" b="1">
                 <a:solidFill>
                   <a:srgbClr val="FFFFFF"/>
                 </a:solidFill>
@@ -3826,44 +3854,44 @@
       </p:sp>
       <p:sp>
         <p:nvSpPr>
-          <p:cNvPr id="12" name="블록 전체 적재"/>
+          <p:cNvPr id="13" name="블록 전체 적재"/>
           <p:cNvSpPr/>
           <p:nvPr/>
         </p:nvSpPr>
         <p:spPr>
           <a:xfrm>
-            <a:off x="2042160" y="1562100"/>
-            <a:ext cx="1417320" cy="1143000"/>
+            <a:off x="4724400" y="1569720"/>
+            <a:ext cx="1828800" cy="822960"/>
           </a:xfrm>
           <a:prstGeom prst="roundRect">
             <a:avLst>
-              <a:gd name="adj" fmla="val 8000"/>
+              <a:gd name="adj" fmla="val 11111"/>
             </a:avLst>
           </a:prstGeom>
           <a:solidFill>
             <a:srgbClr val="FFFFFF"/>
           </a:solidFill>
-          <a:ln w="12192">
+          <a:ln w="13716">
             <a:solidFill>
-              <a:srgbClr val="6F9BD1"/>
+              <a:srgbClr val="9DD3B8"/>
             </a:solidFill>
           </a:ln>
         </p:spPr>
         <p:txBody>
-          <a:bodyPr rtlCol="0" anchor="t" lIns="45720" tIns="495300" rIns="45720" bIns="0" wrap="none">
+          <a:bodyPr rtlCol="0" anchor="t" lIns="45720" tIns="388620" rIns="45720" bIns="0" wrap="none">
             <a:noAutofit/>
           </a:bodyPr>
           <a:lstStyle/>
           <a:p>
             <a:pPr algn="ctr">
               <a:lnSpc>
-                <a:spcPts val="1439"/>
+                <a:spcPts val="1560"/>
               </a:lnSpc>
             </a:pPr>
             <a:r>
-              <a:rPr sz="1140" b="1">
+              <a:rPr sz="1200" b="1">
                 <a:solidFill>
-                  <a:srgbClr val="0A2342"/>
+                  <a:srgbClr val="0B3D2E"/>
                 </a:solidFill>
                 <a:latin typeface="Pretendard"/>
                 <a:ea typeface="Pretendard"/>
@@ -3875,11 +3903,11 @@
           <a:p>
             <a:pPr algn="ctr">
               <a:lnSpc>
-                <a:spcPts val="1140"/>
+                <a:spcPts val="1320"/>
               </a:lnSpc>
             </a:pPr>
             <a:r>
-              <a:rPr sz="869" b="0">
+              <a:rPr sz="1019" b="0">
                 <a:solidFill>
                   <a:srgbClr val="3F4E61"/>
                 </a:solidFill>
@@ -3887,38 +3915,20 @@
                 <a:ea typeface="Pretendard"/>
                 <a:cs typeface="Pretendard"/>
               </a:rPr>
-              <a:t>SNAPSHOT · COPY</a:t>
-            </a:r>
-          </a:p>
-          <a:p>
-            <a:pPr algn="ctr">
-              <a:lnSpc>
-                <a:spcPts val="1140"/>
-              </a:lnSpc>
-            </a:pPr>
-            <a:r>
-              <a:rPr sz="869" b="0">
-                <a:solidFill>
-                  <a:srgbClr val="3F4E61"/>
-                </a:solidFill>
-                <a:latin typeface="Pretendard"/>
-                <a:ea typeface="Pretendard"/>
-                <a:cs typeface="Pretendard"/>
-              </a:rPr>
-              <a:t>구간 병렬 · 수 시간</a:t>
+              <a:t>SNAPSHOT · COPY 병렬</a:t>
             </a:r>
           </a:p>
         </p:txBody>
       </p:sp>
       <p:sp>
         <p:nvSpPr>
-          <p:cNvPr id="13" name="아이콘 database_upload"/>
+          <p:cNvPr id="14" name="아이콘 database_upload"/>
           <p:cNvSpPr/>
           <p:nvPr/>
         </p:nvSpPr>
         <p:spPr>
           <a:xfrm>
-            <a:off x="2636520" y="1744980"/>
+            <a:off x="5524500" y="1645920"/>
             <a:ext cx="254000" cy="254000"/>
           </a:xfrm>
           <a:custGeom>
@@ -3972,7 +3982,7 @@
                   <a:pt x="94942" y="227315"/>
                 </a:lnTo>
                 <a:lnTo>
-                  <a:pt x="91599" y="227013"/>
+                  <a:pt x="91599" y="227012"/>
                 </a:lnTo>
                 <a:lnTo>
                   <a:pt x="88187" y="226670"/>
@@ -4188,7 +4198,7 @@
                   <a:pt x="88187" y="226670"/>
                 </a:lnTo>
                 <a:lnTo>
-                  <a:pt x="91599" y="227013"/>
+                  <a:pt x="91599" y="227012"/>
                 </a:lnTo>
                 <a:lnTo>
                   <a:pt x="94942" y="227315"/>
@@ -5177,7 +5187,7 @@
                   <a:pt x="118301" y="218597"/>
                 </a:lnTo>
                 <a:lnTo>
-                  <a:pt x="118586" y="219393"/>
+                  <a:pt x="118586" y="219392"/>
                 </a:lnTo>
                 <a:lnTo>
                   <a:pt x="118881" y="220184"/>
@@ -5249,7 +5259,7 @@
                   <a:pt x="94942" y="227315"/>
                 </a:lnTo>
                 <a:lnTo>
-                  <a:pt x="91599" y="227013"/>
+                  <a:pt x="91599" y="227012"/>
                 </a:lnTo>
                 <a:lnTo>
                   <a:pt x="88187" y="226670"/>
@@ -6174,7 +6184,7 @@
             </a:pathLst>
           </a:custGeom>
           <a:solidFill>
-            <a:srgbClr val="164B8C"/>
+            <a:srgbClr val="1E6B4F"/>
           </a:solidFill>
           <a:ln>
             <a:noFill/>
@@ -6190,20 +6200,20 @@
       </p:sp>
       <p:sp>
         <p:nvSpPr>
-          <p:cNvPr id="14" name="번호 2"/>
+          <p:cNvPr id="15" name="번호 2"/>
           <p:cNvSpPr/>
           <p:nvPr/>
         </p:nvSpPr>
         <p:spPr>
           <a:xfrm>
-            <a:off x="2095500" y="1615440"/>
-            <a:ext cx="198120" cy="198120"/>
+            <a:off x="4777740" y="1623060"/>
+            <a:ext cx="213360" cy="213360"/>
           </a:xfrm>
           <a:prstGeom prst="ellipse">
             <a:avLst/>
           </a:prstGeom>
           <a:solidFill>
-            <a:srgbClr val="164B8C"/>
+            <a:srgbClr val="1E6B4F"/>
           </a:solidFill>
           <a:ln>
             <a:noFill/>
@@ -6217,7 +6227,7 @@
           <a:p>
             <a:pPr algn="ctr"/>
             <a:r>
-              <a:rPr sz="900" b="1">
+              <a:rPr sz="1019" b="1">
                 <a:solidFill>
                   <a:srgbClr val="FFFFFF"/>
                 </a:solidFill>
@@ -6232,44 +6242,44 @@
       </p:sp>
       <p:sp>
         <p:nvSpPr>
-          <p:cNvPr id="15" name="블록 변경분 반영"/>
+          <p:cNvPr id="16" name="블록 변경분 반영"/>
           <p:cNvSpPr/>
           <p:nvPr/>
         </p:nvSpPr>
         <p:spPr>
           <a:xfrm>
-            <a:off x="3627120" y="1562100"/>
-            <a:ext cx="1417320" cy="1143000"/>
+            <a:off x="7086600" y="1569720"/>
+            <a:ext cx="1828800" cy="822960"/>
           </a:xfrm>
           <a:prstGeom prst="roundRect">
             <a:avLst>
-              <a:gd name="adj" fmla="val 8000"/>
+              <a:gd name="adj" fmla="val 11111"/>
             </a:avLst>
           </a:prstGeom>
           <a:solidFill>
-            <a:srgbClr val="D3E5F8"/>
+            <a:srgbClr val="0B3D2E"/>
           </a:solidFill>
           <a:ln w="18288">
             <a:solidFill>
-              <a:srgbClr val="0F3C78"/>
+              <a:srgbClr val="0B3D2E"/>
             </a:solidFill>
           </a:ln>
         </p:spPr>
         <p:txBody>
-          <a:bodyPr rtlCol="0" anchor="t" lIns="45720" tIns="495300" rIns="45720" bIns="0" wrap="none">
+          <a:bodyPr rtlCol="0" anchor="t" lIns="45720" tIns="388620" rIns="45720" bIns="0" wrap="none">
             <a:noAutofit/>
           </a:bodyPr>
           <a:lstStyle/>
           <a:p>
             <a:pPr algn="ctr">
               <a:lnSpc>
-                <a:spcPts val="1439"/>
+                <a:spcPts val="1560"/>
               </a:lnSpc>
             </a:pPr>
             <a:r>
-              <a:rPr sz="1140" b="1">
+              <a:rPr sz="1200" b="1">
                 <a:solidFill>
-                  <a:srgbClr val="0A2342"/>
+                  <a:srgbClr val="FFFFFF"/>
                 </a:solidFill>
                 <a:latin typeface="Pretendard"/>
                 <a:ea typeface="Pretendard"/>
@@ -6281,50 +6291,32 @@
           <a:p>
             <a:pPr algn="ctr">
               <a:lnSpc>
-                <a:spcPts val="1140"/>
+                <a:spcPts val="1320"/>
               </a:lnSpc>
             </a:pPr>
             <a:r>
-              <a:rPr sz="869" b="0">
+              <a:rPr sz="1019" b="0">
                 <a:solidFill>
-                  <a:srgbClr val="3F4E61"/>
+                  <a:srgbClr val="FFFFFF"/>
                 </a:solidFill>
                 <a:latin typeface="Pretendard"/>
                 <a:ea typeface="Pretendard"/>
                 <a:cs typeface="Pretendard"/>
               </a:rPr>
-              <a:t>CDC 이벤트 반복 적용</a:t>
-            </a:r>
-          </a:p>
-          <a:p>
-            <a:pPr algn="ctr">
-              <a:lnSpc>
-                <a:spcPts val="1140"/>
-              </a:lnSpc>
-            </a:pPr>
-            <a:r>
-              <a:rPr sz="869" b="0">
-                <a:solidFill>
-                  <a:srgbClr val="3F4E61"/>
-                </a:solidFill>
-                <a:latin typeface="Pretendard"/>
-                <a:ea typeface="Pretendard"/>
-                <a:cs typeface="Pretendard"/>
-              </a:rPr>
-              <a:t>지연 수 초 ~ 수 분</a:t>
+              <a:t>change_log 멱등 반영</a:t>
             </a:r>
           </a:p>
         </p:txBody>
       </p:sp>
       <p:sp>
         <p:nvSpPr>
-          <p:cNvPr id="16" name="아이콘 sync"/>
+          <p:cNvPr id="17" name="아이콘 sync"/>
           <p:cNvSpPr/>
           <p:nvPr/>
         </p:nvSpPr>
         <p:spPr>
           <a:xfrm>
-            <a:off x="4234180" y="1757680"/>
+            <a:off x="7899400" y="1658620"/>
             <a:ext cx="203200" cy="203200"/>
           </a:xfrm>
           <a:custGeom>
@@ -6636,7 +6628,7 @@
                   <a:pt x="44592" y="161051"/>
                 </a:lnTo>
                 <a:lnTo>
-                  <a:pt x="46672" y="162878"/>
+                  <a:pt x="46673" y="162878"/>
                 </a:lnTo>
                 <a:lnTo>
                   <a:pt x="56198" y="169545"/>
@@ -6802,7 +6794,7 @@
                   <a:pt x="159141" y="43946"/>
                 </a:lnTo>
                 <a:lnTo>
-                  <a:pt x="157162" y="41910"/>
+                  <a:pt x="157163" y="41910"/>
                 </a:lnTo>
                 <a:lnTo>
                   <a:pt x="147955" y="33655"/>
@@ -6823,7 +6815,7 @@
                   <a:pt x="201930" y="19050"/>
                 </a:lnTo>
                 <a:lnTo>
-                  <a:pt x="160338" y="19050"/>
+                  <a:pt x="160337" y="19050"/>
                 </a:lnTo>
                 <a:lnTo>
                   <a:pt x="165100" y="23495"/>
@@ -6977,7 +6969,7 @@
             </a:pathLst>
           </a:custGeom>
           <a:solidFill>
-            <a:srgbClr val="164B8C"/>
+            <a:srgbClr val="FFFFFF"/>
           </a:solidFill>
           <a:ln>
             <a:noFill/>
@@ -6993,20 +6985,20 @@
       </p:sp>
       <p:sp>
         <p:nvSpPr>
-          <p:cNvPr id="17" name="번호 3"/>
+          <p:cNvPr id="18" name="번호 3"/>
           <p:cNvSpPr/>
           <p:nvPr/>
         </p:nvSpPr>
         <p:spPr>
           <a:xfrm>
-            <a:off x="3680460" y="1615440"/>
-            <a:ext cx="198120" cy="198120"/>
+            <a:off x="7139940" y="1623060"/>
+            <a:ext cx="213360" cy="213360"/>
           </a:xfrm>
           <a:prstGeom prst="ellipse">
             <a:avLst/>
           </a:prstGeom>
           <a:solidFill>
-            <a:srgbClr val="164B8C"/>
+            <a:srgbClr val="FFFFFF"/>
           </a:solidFill>
           <a:ln>
             <a:noFill/>
@@ -7020,9 +7012,9 @@
           <a:p>
             <a:pPr algn="ctr"/>
             <a:r>
-              <a:rPr sz="900" b="1">
+              <a:rPr sz="1019" b="1">
                 <a:solidFill>
-                  <a:srgbClr val="FFFFFF"/>
+                  <a:srgbClr val="0B3D2E"/>
                 </a:solidFill>
                 <a:latin typeface="Pretendard"/>
                 <a:ea typeface="Pretendard"/>
@@ -7035,44 +7027,132 @@
       </p:sp>
       <p:sp>
         <p:nvSpPr>
-          <p:cNvPr id="18" name="블록 원천 쓰기 중지"/>
+          <p:cNvPr id="19" name="연결점 A"/>
           <p:cNvSpPr/>
           <p:nvPr/>
         </p:nvSpPr>
         <p:spPr>
           <a:xfrm>
-            <a:off x="5501640" y="1562100"/>
-            <a:ext cx="1417320" cy="1143000"/>
+            <a:off x="9525000" y="1813560"/>
+            <a:ext cx="335280" cy="335280"/>
+          </a:xfrm>
+          <a:prstGeom prst="ellipse">
+            <a:avLst/>
+          </a:prstGeom>
+          <a:solidFill>
+            <a:srgbClr val="FFFFFF"/>
+          </a:solidFill>
+          <a:ln w="16764">
+            <a:solidFill>
+              <a:srgbClr val="1E6B4F"/>
+            </a:solidFill>
+          </a:ln>
+        </p:spPr>
+        <p:txBody>
+          <a:bodyPr rtlCol="0" anchor="ctr" lIns="0" tIns="0" rIns="0" bIns="0" wrap="none">
+            <a:noAutofit/>
+          </a:bodyPr>
+          <a:lstStyle/>
+          <a:p>
+            <a:pPr algn="ctr"/>
+            <a:r>
+              <a:rPr sz="1200" b="1">
+                <a:solidFill>
+                  <a:srgbClr val="1E6B4F"/>
+                </a:solidFill>
+                <a:latin typeface="Pretendard"/>
+                <a:ea typeface="Pretendard"/>
+                <a:cs typeface="Pretendard"/>
+              </a:rPr>
+              <a:t>A</a:t>
+            </a:r>
+          </a:p>
+        </p:txBody>
+      </p:sp>
+      <p:sp>
+        <p:nvSpPr>
+          <p:cNvPr id="20" name="연결점 A"/>
+          <p:cNvSpPr/>
+          <p:nvPr/>
+        </p:nvSpPr>
+        <p:spPr>
+          <a:xfrm>
+            <a:off x="563880" y="3474720"/>
+            <a:ext cx="335280" cy="335280"/>
+          </a:xfrm>
+          <a:prstGeom prst="ellipse">
+            <a:avLst/>
+          </a:prstGeom>
+          <a:solidFill>
+            <a:srgbClr val="FFFFFF"/>
+          </a:solidFill>
+          <a:ln w="16764">
+            <a:solidFill>
+              <a:srgbClr val="1E6B4F"/>
+            </a:solidFill>
+          </a:ln>
+        </p:spPr>
+        <p:txBody>
+          <a:bodyPr rtlCol="0" anchor="ctr" lIns="0" tIns="0" rIns="0" bIns="0" wrap="none">
+            <a:noAutofit/>
+          </a:bodyPr>
+          <a:lstStyle/>
+          <a:p>
+            <a:pPr algn="ctr"/>
+            <a:r>
+              <a:rPr sz="1200" b="1">
+                <a:solidFill>
+                  <a:srgbClr val="1E6B4F"/>
+                </a:solidFill>
+                <a:latin typeface="Pretendard"/>
+                <a:ea typeface="Pretendard"/>
+                <a:cs typeface="Pretendard"/>
+              </a:rPr>
+              <a:t>A</a:t>
+            </a:r>
+          </a:p>
+        </p:txBody>
+      </p:sp>
+      <p:sp>
+        <p:nvSpPr>
+          <p:cNvPr id="21" name="블록 원천 쓰기 중지"/>
+          <p:cNvSpPr/>
+          <p:nvPr/>
+        </p:nvSpPr>
+        <p:spPr>
+          <a:xfrm>
+            <a:off x="1295400" y="3230880"/>
+            <a:ext cx="1828800" cy="822960"/>
           </a:xfrm>
           <a:prstGeom prst="roundRect">
             <a:avLst>
-              <a:gd name="adj" fmla="val 8000"/>
+              <a:gd name="adj" fmla="val 11111"/>
             </a:avLst>
           </a:prstGeom>
           <a:solidFill>
             <a:srgbClr val="FFFFFF"/>
           </a:solidFill>
-          <a:ln w="12192">
+          <a:ln w="13716">
             <a:solidFill>
-              <a:srgbClr val="6F9BD1"/>
+              <a:srgbClr val="9DD3B8"/>
             </a:solidFill>
           </a:ln>
         </p:spPr>
         <p:txBody>
-          <a:bodyPr rtlCol="0" anchor="t" lIns="45720" tIns="495300" rIns="45720" bIns="0" wrap="none">
+          <a:bodyPr rtlCol="0" anchor="t" lIns="45720" tIns="388620" rIns="45720" bIns="0" wrap="none">
             <a:noAutofit/>
           </a:bodyPr>
           <a:lstStyle/>
           <a:p>
             <a:pPr algn="ctr">
               <a:lnSpc>
-                <a:spcPts val="1439"/>
+                <a:spcPts val="1560"/>
               </a:lnSpc>
             </a:pPr>
             <a:r>
-              <a:rPr sz="1140" b="1">
+              <a:rPr sz="1200" b="1">
                 <a:solidFill>
-                  <a:srgbClr val="0A2342"/>
+                  <a:srgbClr val="0B3D2E"/>
                 </a:solidFill>
                 <a:latin typeface="Pretendard"/>
                 <a:ea typeface="Pretendard"/>
@@ -7084,11 +7164,11 @@
           <a:p>
             <a:pPr algn="ctr">
               <a:lnSpc>
-                <a:spcPts val="1140"/>
+                <a:spcPts val="1320"/>
               </a:lnSpc>
             </a:pPr>
             <a:r>
-              <a:rPr sz="869" b="0">
+              <a:rPr sz="1019" b="0">
                 <a:solidFill>
                   <a:srgbClr val="3F4E61"/>
                 </a:solidFill>
@@ -7096,38 +7176,20 @@
                 <a:ea typeface="Pretendard"/>
                 <a:cs typeface="Pretendard"/>
               </a:rPr>
-              <a:t>사람이 업무 중지</a:t>
-            </a:r>
-          </a:p>
-          <a:p>
-            <a:pPr algn="ctr">
-              <a:lnSpc>
-                <a:spcPts val="1140"/>
-              </a:lnSpc>
-            </a:pPr>
-            <a:r>
-              <a:rPr sz="869" b="0">
-                <a:solidFill>
-                  <a:srgbClr val="3F4E61"/>
-                </a:solidFill>
-                <a:latin typeface="Pretendard"/>
-                <a:ea typeface="Pretendard"/>
-                <a:cs typeface="Pretendard"/>
-              </a:rPr>
-              <a:t>캡처 지연 확인</a:t>
+              <a:t>사람이 업무를 멈춘다</a:t>
             </a:r>
           </a:p>
         </p:txBody>
       </p:sp>
       <p:sp>
         <p:nvSpPr>
-          <p:cNvPr id="19" name="아이콘 pause_circle"/>
+          <p:cNvPr id="22" name="아이콘 pause_circle"/>
           <p:cNvSpPr/>
           <p:nvPr/>
         </p:nvSpPr>
         <p:spPr>
           <a:xfrm>
-            <a:off x="6083300" y="1732280"/>
+            <a:off x="2082800" y="3294380"/>
             <a:ext cx="254000" cy="254000"/>
           </a:xfrm>
           <a:custGeom>
@@ -8046,7 +8108,7 @@
             </a:pathLst>
           </a:custGeom>
           <a:solidFill>
-            <a:srgbClr val="164B8C"/>
+            <a:srgbClr val="1E6B4F"/>
           </a:solidFill>
           <a:ln>
             <a:noFill/>
@@ -8062,20 +8124,20 @@
       </p:sp>
       <p:sp>
         <p:nvSpPr>
-          <p:cNvPr id="20" name="번호 4"/>
+          <p:cNvPr id="23" name="번호 4"/>
           <p:cNvSpPr/>
           <p:nvPr/>
         </p:nvSpPr>
         <p:spPr>
           <a:xfrm>
-            <a:off x="5554980" y="1615440"/>
-            <a:ext cx="198120" cy="198120"/>
+            <a:off x="1348740" y="3284220"/>
+            <a:ext cx="213360" cy="213360"/>
           </a:xfrm>
           <a:prstGeom prst="ellipse">
             <a:avLst/>
           </a:prstGeom>
           <a:solidFill>
-            <a:srgbClr val="164B8C"/>
+            <a:srgbClr val="1E6B4F"/>
           </a:solidFill>
           <a:ln>
             <a:noFill/>
@@ -8089,7 +8151,7 @@
           <a:p>
             <a:pPr algn="ctr"/>
             <a:r>
-              <a:rPr sz="900" b="1">
+              <a:rPr sz="1019" b="1">
                 <a:solidFill>
                   <a:srgbClr val="FFFFFF"/>
                 </a:solidFill>
@@ -8104,44 +8166,44 @@
       </p:sp>
       <p:sp>
         <p:nvSpPr>
-          <p:cNvPr id="21" name="블록 마지막 반영"/>
+          <p:cNvPr id="24" name="블록 마지막 반영"/>
           <p:cNvSpPr/>
           <p:nvPr/>
         </p:nvSpPr>
         <p:spPr>
           <a:xfrm>
-            <a:off x="7086600" y="1562100"/>
-            <a:ext cx="1417320" cy="1143000"/>
+            <a:off x="3581400" y="3230880"/>
+            <a:ext cx="1828800" cy="822960"/>
           </a:xfrm>
           <a:prstGeom prst="roundRect">
             <a:avLst>
-              <a:gd name="adj" fmla="val 8000"/>
+              <a:gd name="adj" fmla="val 11111"/>
             </a:avLst>
           </a:prstGeom>
           <a:solidFill>
-            <a:srgbClr val="D3E5F8"/>
+            <a:srgbClr val="0B3D2E"/>
           </a:solidFill>
           <a:ln w="18288">
             <a:solidFill>
-              <a:srgbClr val="0F3C78"/>
+              <a:srgbClr val="0B3D2E"/>
             </a:solidFill>
           </a:ln>
         </p:spPr>
         <p:txBody>
-          <a:bodyPr rtlCol="0" anchor="t" lIns="45720" tIns="495300" rIns="45720" bIns="0" wrap="none">
+          <a:bodyPr rtlCol="0" anchor="t" lIns="45720" tIns="388620" rIns="45720" bIns="0" wrap="none">
             <a:noAutofit/>
           </a:bodyPr>
           <a:lstStyle/>
           <a:p>
             <a:pPr algn="ctr">
               <a:lnSpc>
-                <a:spcPts val="1439"/>
+                <a:spcPts val="1560"/>
               </a:lnSpc>
             </a:pPr>
             <a:r>
-              <a:rPr sz="1140" b="1">
+              <a:rPr sz="1200" b="1">
                 <a:solidFill>
-                  <a:srgbClr val="0A2342"/>
+                  <a:srgbClr val="FFFFFF"/>
                 </a:solidFill>
                 <a:latin typeface="Pretendard"/>
                 <a:ea typeface="Pretendard"/>
@@ -8153,50 +8215,32 @@
           <a:p>
             <a:pPr algn="ctr">
               <a:lnSpc>
-                <a:spcPts val="1140"/>
+                <a:spcPts val="1320"/>
               </a:lnSpc>
             </a:pPr>
             <a:r>
-              <a:rPr sz="869" b="0">
+              <a:rPr sz="1019" b="0">
                 <a:solidFill>
-                  <a:srgbClr val="3F4E61"/>
+                  <a:srgbClr val="FFFFFF"/>
                 </a:solidFill>
                 <a:latin typeface="Pretendard"/>
                 <a:ea typeface="Pretendard"/>
                 <a:cs typeface="Pretendard"/>
               </a:rPr>
-              <a:t>반영 0건이</a:t>
-            </a:r>
-          </a:p>
-          <a:p>
-            <a:pPr algn="ctr">
-              <a:lnSpc>
-                <a:spcPts val="1140"/>
-              </a:lnSpc>
-            </a:pPr>
-            <a:r>
-              <a:rPr sz="869" b="0">
-                <a:solidFill>
-                  <a:srgbClr val="3F4E61"/>
-                </a:solidFill>
-                <a:latin typeface="Pretendard"/>
-                <a:ea typeface="Pretendard"/>
-                <a:cs typeface="Pretendard"/>
-              </a:rPr>
-              <a:t>2회 연속될 때까지</a:t>
+              <a:t>kdms cutover 시작</a:t>
             </a:r>
           </a:p>
         </p:txBody>
       </p:sp>
       <p:sp>
         <p:nvSpPr>
-          <p:cNvPr id="22" name="아이콘 published_with_changes"/>
+          <p:cNvPr id="25" name="아이콘 published_with_changes"/>
           <p:cNvSpPr/>
           <p:nvPr/>
         </p:nvSpPr>
         <p:spPr>
           <a:xfrm>
-            <a:off x="7671435" y="1732915"/>
+            <a:off x="4371975" y="3295015"/>
             <a:ext cx="247650" cy="252730"/>
           </a:xfrm>
           <a:custGeom>
@@ -8244,7 +8288,7 @@
                   <a:pt x="68574" y="240822"/>
                 </a:lnTo>
                 <a:lnTo>
-                  <a:pt x="65246" y="239078"/>
+                  <a:pt x="65246" y="239077"/>
                 </a:lnTo>
                 <a:lnTo>
                   <a:pt x="61976" y="237238"/>
@@ -8807,7 +8851,7 @@
                   <a:pt x="211612" y="35289"/>
                 </a:lnTo>
                 <a:lnTo>
-                  <a:pt x="216852" y="40957"/>
+                  <a:pt x="216853" y="40957"/>
                 </a:lnTo>
                 <a:lnTo>
                   <a:pt x="221772" y="46935"/>
@@ -8931,7 +8975,7 @@
             </a:pathLst>
           </a:custGeom>
           <a:solidFill>
-            <a:srgbClr val="164B8C"/>
+            <a:srgbClr val="FFFFFF"/>
           </a:solidFill>
           <a:ln>
             <a:noFill/>
@@ -8947,20 +8991,20 @@
       </p:sp>
       <p:sp>
         <p:nvSpPr>
-          <p:cNvPr id="23" name="번호 5"/>
+          <p:cNvPr id="26" name="번호 5"/>
           <p:cNvSpPr/>
           <p:nvPr/>
         </p:nvSpPr>
         <p:spPr>
           <a:xfrm>
-            <a:off x="7139940" y="1615440"/>
-            <a:ext cx="198120" cy="198120"/>
+            <a:off x="3634740" y="3284220"/>
+            <a:ext cx="213360" cy="213360"/>
           </a:xfrm>
           <a:prstGeom prst="ellipse">
             <a:avLst/>
           </a:prstGeom>
           <a:solidFill>
-            <a:srgbClr val="164B8C"/>
+            <a:srgbClr val="FFFFFF"/>
           </a:solidFill>
           <a:ln>
             <a:noFill/>
@@ -8974,9 +9018,9 @@
           <a:p>
             <a:pPr algn="ctr"/>
             <a:r>
-              <a:rPr sz="900" b="1">
+              <a:rPr sz="1019" b="1">
                 <a:solidFill>
-                  <a:srgbClr val="FFFFFF"/>
+                  <a:srgbClr val="0B3D2E"/>
                 </a:solidFill>
                 <a:latin typeface="Pretendard"/>
                 <a:ea typeface="Pretendard"/>
@@ -8989,60 +9033,58 @@
       </p:sp>
       <p:sp>
         <p:nvSpPr>
-          <p:cNvPr id="24" name="블록 검증"/>
+          <p:cNvPr id="27" name="판단 6. 검증 일치?"/>
           <p:cNvSpPr/>
           <p:nvPr/>
         </p:nvSpPr>
         <p:spPr>
           <a:xfrm>
-            <a:off x="8671560" y="1562100"/>
-            <a:ext cx="1417320" cy="1143000"/>
+            <a:off x="5867400" y="3185160"/>
+            <a:ext cx="1905000" cy="914400"/>
           </a:xfrm>
-          <a:prstGeom prst="roundRect">
-            <a:avLst>
-              <a:gd name="adj" fmla="val 8000"/>
-            </a:avLst>
+          <a:prstGeom prst="diamond">
+            <a:avLst/>
           </a:prstGeom>
           <a:solidFill>
             <a:srgbClr val="FFFFFF"/>
           </a:solidFill>
-          <a:ln w="12192">
+          <a:ln w="13716">
             <a:solidFill>
-              <a:srgbClr val="6F9BD1"/>
+              <a:srgbClr val="9DD3B8"/>
             </a:solidFill>
           </a:ln>
         </p:spPr>
         <p:txBody>
-          <a:bodyPr rtlCol="0" anchor="t" lIns="45720" tIns="495300" rIns="45720" bIns="0" wrap="none">
+          <a:bodyPr rtlCol="0" anchor="t" lIns="45720" tIns="243840" rIns="45720" bIns="0" wrap="none">
             <a:noAutofit/>
           </a:bodyPr>
           <a:lstStyle/>
           <a:p>
             <a:pPr algn="ctr">
               <a:lnSpc>
-                <a:spcPts val="1439"/>
+                <a:spcPts val="1560"/>
               </a:lnSpc>
             </a:pPr>
             <a:r>
-              <a:rPr sz="1140" b="1">
+              <a:rPr sz="1200" b="1">
                 <a:solidFill>
-                  <a:srgbClr val="0A2342"/>
+                  <a:srgbClr val="0B3D2E"/>
                 </a:solidFill>
                 <a:latin typeface="Pretendard"/>
                 <a:ea typeface="Pretendard"/>
                 <a:cs typeface="Pretendard"/>
               </a:rPr>
-              <a:t>검증</a:t>
+              <a:t>6. 검증 일치?</a:t>
             </a:r>
           </a:p>
           <a:p>
             <a:pPr algn="ctr">
               <a:lnSpc>
-                <a:spcPts val="1140"/>
+                <a:spcPts val="1320"/>
               </a:lnSpc>
             </a:pPr>
             <a:r>
-              <a:rPr sz="869" b="0">
+              <a:rPr sz="1019" b="0">
                 <a:solidFill>
                   <a:srgbClr val="3F4E61"/>
                 </a:solidFill>
@@ -9050,548 +9092,51 @@
                 <a:ea typeface="Pretendard"/>
                 <a:cs typeface="Pretendard"/>
               </a:rPr>
-              <a:t>건수 · 합계 · 해시</a:t>
-            </a:r>
-          </a:p>
-          <a:p>
-            <a:pPr algn="ctr">
-              <a:lnSpc>
-                <a:spcPts val="1140"/>
-              </a:lnSpc>
-            </a:pPr>
-            <a:r>
-              <a:rPr sz="869" b="0">
-                <a:solidFill>
-                  <a:srgbClr val="3F4E61"/>
-                </a:solidFill>
-                <a:latin typeface="Pretendard"/>
-                <a:ea typeface="Pretendard"/>
-                <a:cs typeface="Pretendard"/>
-              </a:rPr>
-              <a:t>원천 = 대상</a:t>
+              <a:t>건수·합계·해시</a:t>
             </a:r>
           </a:p>
         </p:txBody>
       </p:sp>
       <p:sp>
         <p:nvSpPr>
-          <p:cNvPr id="25" name="아이콘 fact_check"/>
+          <p:cNvPr id="28" name="블록 전환"/>
           <p:cNvSpPr/>
           <p:nvPr/>
         </p:nvSpPr>
         <p:spPr>
           <a:xfrm>
-            <a:off x="9250680" y="1744980"/>
-            <a:ext cx="259080" cy="228600"/>
-          </a:xfrm>
-          <a:custGeom>
-            <a:avLst/>
-            <a:gdLst/>
-            <a:ahLst/>
-            <a:cxnLst/>
-            <a:rect l="l" t="t" r="r" b="b"/>
-            <a:pathLst>
-              <a:path w="259080" h="228600">
-                <a:moveTo>
-                  <a:pt x="19050" y="228600"/>
-                </a:moveTo>
-                <a:lnTo>
-                  <a:pt x="17793" y="228560"/>
-                </a:lnTo>
-                <a:lnTo>
-                  <a:pt x="16563" y="228441"/>
-                </a:lnTo>
-                <a:lnTo>
-                  <a:pt x="15359" y="228243"/>
-                </a:lnTo>
-                <a:lnTo>
-                  <a:pt x="14182" y="227965"/>
-                </a:lnTo>
-                <a:lnTo>
-                  <a:pt x="13031" y="227608"/>
-                </a:lnTo>
-                <a:lnTo>
-                  <a:pt x="11906" y="227171"/>
-                </a:lnTo>
-                <a:lnTo>
-                  <a:pt x="10808" y="226655"/>
-                </a:lnTo>
-                <a:lnTo>
-                  <a:pt x="9737" y="226060"/>
-                </a:lnTo>
-                <a:lnTo>
-                  <a:pt x="8692" y="225385"/>
-                </a:lnTo>
-                <a:lnTo>
-                  <a:pt x="7673" y="224631"/>
-                </a:lnTo>
-                <a:lnTo>
-                  <a:pt x="6681" y="223798"/>
-                </a:lnTo>
-                <a:lnTo>
-                  <a:pt x="5715" y="222885"/>
-                </a:lnTo>
-                <a:lnTo>
-                  <a:pt x="4802" y="221919"/>
-                </a:lnTo>
-                <a:lnTo>
-                  <a:pt x="3969" y="220927"/>
-                </a:lnTo>
-                <a:lnTo>
-                  <a:pt x="3215" y="219908"/>
-                </a:lnTo>
-                <a:lnTo>
-                  <a:pt x="2540" y="218863"/>
-                </a:lnTo>
-                <a:lnTo>
-                  <a:pt x="1945" y="217792"/>
-                </a:lnTo>
-                <a:lnTo>
-                  <a:pt x="1429" y="216694"/>
-                </a:lnTo>
-                <a:lnTo>
-                  <a:pt x="992" y="215569"/>
-                </a:lnTo>
-                <a:lnTo>
-                  <a:pt x="635" y="214418"/>
-                </a:lnTo>
-                <a:lnTo>
-                  <a:pt x="357" y="213241"/>
-                </a:lnTo>
-                <a:lnTo>
-                  <a:pt x="159" y="212037"/>
-                </a:lnTo>
-                <a:lnTo>
-                  <a:pt x="40" y="210807"/>
-                </a:lnTo>
-                <a:lnTo>
-                  <a:pt x="0" y="209550"/>
-                </a:lnTo>
-                <a:lnTo>
-                  <a:pt x="0" y="19050"/>
-                </a:lnTo>
-                <a:lnTo>
-                  <a:pt x="40" y="17793"/>
-                </a:lnTo>
-                <a:lnTo>
-                  <a:pt x="159" y="16563"/>
-                </a:lnTo>
-                <a:lnTo>
-                  <a:pt x="357" y="15359"/>
-                </a:lnTo>
-                <a:lnTo>
-                  <a:pt x="635" y="14182"/>
-                </a:lnTo>
-                <a:lnTo>
-                  <a:pt x="992" y="13031"/>
-                </a:lnTo>
-                <a:lnTo>
-                  <a:pt x="1429" y="11906"/>
-                </a:lnTo>
-                <a:lnTo>
-                  <a:pt x="1945" y="10808"/>
-                </a:lnTo>
-                <a:lnTo>
-                  <a:pt x="2540" y="9737"/>
-                </a:lnTo>
-                <a:lnTo>
-                  <a:pt x="3215" y="8692"/>
-                </a:lnTo>
-                <a:lnTo>
-                  <a:pt x="3969" y="7673"/>
-                </a:lnTo>
-                <a:lnTo>
-                  <a:pt x="4802" y="6681"/>
-                </a:lnTo>
-                <a:lnTo>
-                  <a:pt x="5715" y="5715"/>
-                </a:lnTo>
-                <a:lnTo>
-                  <a:pt x="6681" y="4802"/>
-                </a:lnTo>
-                <a:lnTo>
-                  <a:pt x="7673" y="3969"/>
-                </a:lnTo>
-                <a:lnTo>
-                  <a:pt x="8692" y="3215"/>
-                </a:lnTo>
-                <a:lnTo>
-                  <a:pt x="9737" y="2540"/>
-                </a:lnTo>
-                <a:lnTo>
-                  <a:pt x="10808" y="1945"/>
-                </a:lnTo>
-                <a:lnTo>
-                  <a:pt x="11906" y="1429"/>
-                </a:lnTo>
-                <a:lnTo>
-                  <a:pt x="13031" y="992"/>
-                </a:lnTo>
-                <a:lnTo>
-                  <a:pt x="14182" y="635"/>
-                </a:lnTo>
-                <a:lnTo>
-                  <a:pt x="15359" y="357"/>
-                </a:lnTo>
-                <a:lnTo>
-                  <a:pt x="16563" y="159"/>
-                </a:lnTo>
-                <a:lnTo>
-                  <a:pt x="17793" y="40"/>
-                </a:lnTo>
-                <a:lnTo>
-                  <a:pt x="19050" y="0"/>
-                </a:lnTo>
-                <a:lnTo>
-                  <a:pt x="240030" y="0"/>
-                </a:lnTo>
-                <a:lnTo>
-                  <a:pt x="241287" y="40"/>
-                </a:lnTo>
-                <a:lnTo>
-                  <a:pt x="242517" y="159"/>
-                </a:lnTo>
-                <a:lnTo>
-                  <a:pt x="243721" y="357"/>
-                </a:lnTo>
-                <a:lnTo>
-                  <a:pt x="244898" y="635"/>
-                </a:lnTo>
-                <a:lnTo>
-                  <a:pt x="246049" y="992"/>
-                </a:lnTo>
-                <a:lnTo>
-                  <a:pt x="247174" y="1429"/>
-                </a:lnTo>
-                <a:lnTo>
-                  <a:pt x="248272" y="1945"/>
-                </a:lnTo>
-                <a:lnTo>
-                  <a:pt x="249343" y="2540"/>
-                </a:lnTo>
-                <a:lnTo>
-                  <a:pt x="250388" y="3215"/>
-                </a:lnTo>
-                <a:lnTo>
-                  <a:pt x="251407" y="3969"/>
-                </a:lnTo>
-                <a:lnTo>
-                  <a:pt x="252399" y="4802"/>
-                </a:lnTo>
-                <a:lnTo>
-                  <a:pt x="253365" y="5715"/>
-                </a:lnTo>
-                <a:lnTo>
-                  <a:pt x="254278" y="6681"/>
-                </a:lnTo>
-                <a:lnTo>
-                  <a:pt x="255111" y="7673"/>
-                </a:lnTo>
-                <a:lnTo>
-                  <a:pt x="255865" y="8692"/>
-                </a:lnTo>
-                <a:lnTo>
-                  <a:pt x="256540" y="9737"/>
-                </a:lnTo>
-                <a:lnTo>
-                  <a:pt x="257135" y="10808"/>
-                </a:lnTo>
-                <a:lnTo>
-                  <a:pt x="257651" y="11906"/>
-                </a:lnTo>
-                <a:lnTo>
-                  <a:pt x="258088" y="13031"/>
-                </a:lnTo>
-                <a:lnTo>
-                  <a:pt x="258445" y="14182"/>
-                </a:lnTo>
-                <a:lnTo>
-                  <a:pt x="258723" y="15359"/>
-                </a:lnTo>
-                <a:lnTo>
-                  <a:pt x="258921" y="16563"/>
-                </a:lnTo>
-                <a:lnTo>
-                  <a:pt x="259040" y="17793"/>
-                </a:lnTo>
-                <a:lnTo>
-                  <a:pt x="259080" y="19050"/>
-                </a:lnTo>
-                <a:lnTo>
-                  <a:pt x="259080" y="209550"/>
-                </a:lnTo>
-                <a:lnTo>
-                  <a:pt x="259040" y="210807"/>
-                </a:lnTo>
-                <a:lnTo>
-                  <a:pt x="258921" y="212037"/>
-                </a:lnTo>
-                <a:lnTo>
-                  <a:pt x="258723" y="213241"/>
-                </a:lnTo>
-                <a:lnTo>
-                  <a:pt x="258445" y="214418"/>
-                </a:lnTo>
-                <a:lnTo>
-                  <a:pt x="258088" y="215569"/>
-                </a:lnTo>
-                <a:lnTo>
-                  <a:pt x="257651" y="216694"/>
-                </a:lnTo>
-                <a:lnTo>
-                  <a:pt x="257135" y="217792"/>
-                </a:lnTo>
-                <a:lnTo>
-                  <a:pt x="256540" y="218863"/>
-                </a:lnTo>
-                <a:lnTo>
-                  <a:pt x="255865" y="219908"/>
-                </a:lnTo>
-                <a:lnTo>
-                  <a:pt x="255111" y="220927"/>
-                </a:lnTo>
-                <a:lnTo>
-                  <a:pt x="254278" y="221919"/>
-                </a:lnTo>
-                <a:lnTo>
-                  <a:pt x="253365" y="222885"/>
-                </a:lnTo>
-                <a:lnTo>
-                  <a:pt x="252399" y="223798"/>
-                </a:lnTo>
-                <a:lnTo>
-                  <a:pt x="251407" y="224631"/>
-                </a:lnTo>
-                <a:lnTo>
-                  <a:pt x="250388" y="225385"/>
-                </a:lnTo>
-                <a:lnTo>
-                  <a:pt x="249343" y="226060"/>
-                </a:lnTo>
-                <a:lnTo>
-                  <a:pt x="248272" y="226655"/>
-                </a:lnTo>
-                <a:lnTo>
-                  <a:pt x="247174" y="227171"/>
-                </a:lnTo>
-                <a:lnTo>
-                  <a:pt x="246049" y="227608"/>
-                </a:lnTo>
-                <a:lnTo>
-                  <a:pt x="244898" y="227965"/>
-                </a:lnTo>
-                <a:lnTo>
-                  <a:pt x="243721" y="228243"/>
-                </a:lnTo>
-                <a:lnTo>
-                  <a:pt x="242517" y="228441"/>
-                </a:lnTo>
-                <a:lnTo>
-                  <a:pt x="241287" y="228560"/>
-                </a:lnTo>
-                <a:lnTo>
-                  <a:pt x="240030" y="228600"/>
-                </a:lnTo>
-                <a:lnTo>
-                  <a:pt x="19050" y="228600"/>
-                </a:lnTo>
-                <a:close/>
-                <a:moveTo>
-                  <a:pt x="19050" y="209550"/>
-                </a:moveTo>
-                <a:lnTo>
-                  <a:pt x="240030" y="209550"/>
-                </a:lnTo>
-                <a:lnTo>
-                  <a:pt x="240030" y="19050"/>
-                </a:lnTo>
-                <a:lnTo>
-                  <a:pt x="19050" y="19050"/>
-                </a:lnTo>
-                <a:lnTo>
-                  <a:pt x="19050" y="209550"/>
-                </a:lnTo>
-                <a:close/>
-                <a:moveTo>
-                  <a:pt x="40640" y="177800"/>
-                </a:moveTo>
-                <a:lnTo>
-                  <a:pt x="104140" y="177800"/>
-                </a:lnTo>
-                <a:lnTo>
-                  <a:pt x="104140" y="152400"/>
-                </a:lnTo>
-                <a:lnTo>
-                  <a:pt x="40640" y="152400"/>
-                </a:lnTo>
-                <a:lnTo>
-                  <a:pt x="40640" y="177800"/>
-                </a:lnTo>
-                <a:close/>
-                <a:moveTo>
-                  <a:pt x="161925" y="152400"/>
-                </a:moveTo>
-                <a:lnTo>
-                  <a:pt x="224790" y="89535"/>
-                </a:lnTo>
-                <a:lnTo>
-                  <a:pt x="206692" y="71438"/>
-                </a:lnTo>
-                <a:lnTo>
-                  <a:pt x="161925" y="116522"/>
-                </a:lnTo>
-                <a:lnTo>
-                  <a:pt x="143828" y="98425"/>
-                </a:lnTo>
-                <a:lnTo>
-                  <a:pt x="126048" y="116522"/>
-                </a:lnTo>
-                <a:lnTo>
-                  <a:pt x="161925" y="152400"/>
-                </a:lnTo>
-                <a:close/>
-                <a:moveTo>
-                  <a:pt x="40640" y="127000"/>
-                </a:moveTo>
-                <a:lnTo>
-                  <a:pt x="104140" y="127000"/>
-                </a:lnTo>
-                <a:lnTo>
-                  <a:pt x="104140" y="101600"/>
-                </a:lnTo>
-                <a:lnTo>
-                  <a:pt x="40640" y="101600"/>
-                </a:lnTo>
-                <a:lnTo>
-                  <a:pt x="40640" y="127000"/>
-                </a:lnTo>
-                <a:close/>
-                <a:moveTo>
-                  <a:pt x="40640" y="76200"/>
-                </a:moveTo>
-                <a:lnTo>
-                  <a:pt x="104140" y="76200"/>
-                </a:lnTo>
-                <a:lnTo>
-                  <a:pt x="104140" y="50800"/>
-                </a:lnTo>
-                <a:lnTo>
-                  <a:pt x="40640" y="50800"/>
-                </a:lnTo>
-                <a:lnTo>
-                  <a:pt x="40640" y="76200"/>
-                </a:lnTo>
-                <a:close/>
-                <a:moveTo>
-                  <a:pt x="19050" y="209550"/>
-                </a:moveTo>
-                <a:lnTo>
-                  <a:pt x="19050" y="19050"/>
-                </a:lnTo>
-                <a:lnTo>
-                  <a:pt x="19050" y="209550"/>
-                </a:lnTo>
-                <a:close/>
-              </a:path>
-            </a:pathLst>
-          </a:custGeom>
-          <a:solidFill>
-            <a:srgbClr val="164B8C"/>
-          </a:solidFill>
-          <a:ln>
-            <a:noFill/>
-          </a:ln>
-        </p:spPr>
-        <p:txBody>
-          <a:bodyPr rtlCol="0" anchor="ctr"/>
-          <a:lstStyle/>
-          <a:p>
-            <a:pPr algn="ctr"/>
-          </a:p>
-        </p:txBody>
-      </p:sp>
-      <p:sp>
-        <p:nvSpPr>
-          <p:cNvPr id="26" name="번호 6"/>
-          <p:cNvSpPr/>
-          <p:nvPr/>
-        </p:nvSpPr>
-        <p:spPr>
-          <a:xfrm>
-            <a:off x="8724900" y="1615440"/>
-            <a:ext cx="198120" cy="198120"/>
-          </a:xfrm>
-          <a:prstGeom prst="ellipse">
-            <a:avLst/>
-          </a:prstGeom>
-          <a:solidFill>
-            <a:srgbClr val="164B8C"/>
-          </a:solidFill>
-          <a:ln>
-            <a:noFill/>
-          </a:ln>
-        </p:spPr>
-        <p:txBody>
-          <a:bodyPr rtlCol="0" anchor="ctr" lIns="0" tIns="0" rIns="0" bIns="0" wrap="none">
-            <a:noAutofit/>
-          </a:bodyPr>
-          <a:lstStyle/>
-          <a:p>
-            <a:pPr algn="ctr"/>
-            <a:r>
-              <a:rPr sz="900" b="1">
-                <a:solidFill>
-                  <a:srgbClr val="FFFFFF"/>
-                </a:solidFill>
-                <a:latin typeface="Pretendard"/>
-                <a:ea typeface="Pretendard"/>
-                <a:cs typeface="Pretendard"/>
-              </a:rPr>
-              <a:t>6</a:t>
-            </a:r>
-          </a:p>
-        </p:txBody>
-      </p:sp>
-      <p:sp>
-        <p:nvSpPr>
-          <p:cNvPr id="27" name="블록 전환"/>
-          <p:cNvSpPr/>
-          <p:nvPr/>
-        </p:nvSpPr>
-        <p:spPr>
-          <a:xfrm>
-            <a:off x="10256520" y="1562100"/>
-            <a:ext cx="1417320" cy="1143000"/>
+            <a:off x="8229600" y="3230880"/>
+            <a:ext cx="1828800" cy="822960"/>
           </a:xfrm>
           <a:prstGeom prst="roundRect">
             <a:avLst>
-              <a:gd name="adj" fmla="val 8000"/>
+              <a:gd name="adj" fmla="val 11111"/>
             </a:avLst>
           </a:prstGeom>
           <a:solidFill>
             <a:srgbClr val="FFFFFF"/>
           </a:solidFill>
-          <a:ln w="12192">
+          <a:ln w="13716">
             <a:solidFill>
-              <a:srgbClr val="6F9BD1"/>
+              <a:srgbClr val="9DD3B8"/>
             </a:solidFill>
           </a:ln>
         </p:spPr>
         <p:txBody>
-          <a:bodyPr rtlCol="0" anchor="t" lIns="45720" tIns="495300" rIns="45720" bIns="0" wrap="none">
+          <a:bodyPr rtlCol="0" anchor="t" lIns="45720" tIns="388620" rIns="45720" bIns="0" wrap="none">
             <a:noAutofit/>
           </a:bodyPr>
           <a:lstStyle/>
           <a:p>
             <a:pPr algn="ctr">
               <a:lnSpc>
-                <a:spcPts val="1439"/>
+                <a:spcPts val="1560"/>
               </a:lnSpc>
             </a:pPr>
             <a:r>
-              <a:rPr sz="1140" b="1">
+              <a:rPr sz="1200" b="1">
                 <a:solidFill>
-                  <a:srgbClr val="0A2342"/>
+                  <a:srgbClr val="0B3D2E"/>
                 </a:solidFill>
                 <a:latin typeface="Pretendard"/>
                 <a:ea typeface="Pretendard"/>
@@ -9603,11 +9148,11 @@
           <a:p>
             <a:pPr algn="ctr">
               <a:lnSpc>
-                <a:spcPts val="1140"/>
+                <a:spcPts val="1320"/>
               </a:lnSpc>
             </a:pPr>
             <a:r>
-              <a:rPr sz="869" b="0">
+              <a:rPr sz="1019" b="0">
                 <a:solidFill>
                   <a:srgbClr val="3F4E61"/>
                 </a:solidFill>
@@ -9618,35 +9163,17 @@
               <a:t>setval · FK 켜기</a:t>
             </a:r>
           </a:p>
-          <a:p>
-            <a:pPr algn="ctr">
-              <a:lnSpc>
-                <a:spcPts val="1140"/>
-              </a:lnSpc>
-            </a:pPr>
-            <a:r>
-              <a:rPr sz="869" b="0">
-                <a:solidFill>
-                  <a:srgbClr val="3F4E61"/>
-                </a:solidFill>
-                <a:latin typeface="Pretendard"/>
-                <a:ea typeface="Pretendard"/>
-                <a:cs typeface="Pretendard"/>
-              </a:rPr>
-              <a:t>소요 시간 기록</a:t>
-            </a:r>
-          </a:p>
         </p:txBody>
       </p:sp>
       <p:sp>
         <p:nvSpPr>
-          <p:cNvPr id="28" name="아이콘 swap_horiz"/>
+          <p:cNvPr id="29" name="아이콘 swap_horiz"/>
           <p:cNvSpPr/>
           <p:nvPr/>
         </p:nvSpPr>
         <p:spPr>
           <a:xfrm>
-            <a:off x="10838180" y="1757680"/>
+            <a:off x="9017000" y="3319780"/>
             <a:ext cx="254000" cy="203200"/>
           </a:xfrm>
           <a:custGeom>
@@ -9723,7 +9250,7 @@
             </a:pathLst>
           </a:custGeom>
           <a:solidFill>
-            <a:srgbClr val="164B8C"/>
+            <a:srgbClr val="1E6B4F"/>
           </a:solidFill>
           <a:ln>
             <a:noFill/>
@@ -9739,20 +9266,20 @@
       </p:sp>
       <p:sp>
         <p:nvSpPr>
-          <p:cNvPr id="29" name="번호 7"/>
+          <p:cNvPr id="30" name="번호 7"/>
           <p:cNvSpPr/>
           <p:nvPr/>
         </p:nvSpPr>
         <p:spPr>
           <a:xfrm>
-            <a:off x="10309860" y="1615440"/>
-            <a:ext cx="198120" cy="198120"/>
+            <a:off x="8282940" y="3284220"/>
+            <a:ext cx="213360" cy="213360"/>
           </a:xfrm>
           <a:prstGeom prst="ellipse">
             <a:avLst/>
           </a:prstGeom>
           <a:solidFill>
-            <a:srgbClr val="164B8C"/>
+            <a:srgbClr val="1E6B4F"/>
           </a:solidFill>
           <a:ln>
             <a:noFill/>
@@ -9766,7 +9293,7 @@
           <a:p>
             <a:pPr algn="ctr"/>
             <a:r>
-              <a:rPr sz="900" b="1">
+              <a:rPr sz="1019" b="1">
                 <a:solidFill>
                   <a:srgbClr val="FFFFFF"/>
                 </a:solidFill>
@@ -9781,14 +9308,14 @@
       </p:sp>
       <p:sp>
         <p:nvSpPr>
-          <p:cNvPr id="30" name="블록 원천 업무 쓰기 계속"/>
+          <p:cNvPr id="31" name="블록 완료 (DONE)"/>
           <p:cNvSpPr/>
           <p:nvPr/>
         </p:nvSpPr>
         <p:spPr>
           <a:xfrm>
-            <a:off x="457200" y="3200400"/>
-            <a:ext cx="4587240" cy="396240"/>
+            <a:off x="10515600" y="3474720"/>
+            <a:ext cx="1143000" cy="335280"/>
           </a:xfrm>
           <a:prstGeom prst="roundRect">
             <a:avLst>
@@ -9796,1995 +9323,143 @@
             </a:avLst>
           </a:prstGeom>
           <a:solidFill>
-            <a:srgbClr val="FFFFFF"/>
+            <a:srgbClr val="0B3D2E"/>
           </a:solidFill>
           <a:ln w="15240">
             <a:solidFill>
-              <a:srgbClr val="164B8C"/>
+              <a:srgbClr val="0B3D2E"/>
             </a:solidFill>
           </a:ln>
         </p:spPr>
         <p:txBody>
-          <a:bodyPr rtlCol="0" anchor="ctr" lIns="1805750" tIns="0" rIns="0" bIns="0" wrap="none">
+          <a:bodyPr rtlCol="0" anchor="ctr" lIns="170307" tIns="0" rIns="0" bIns="0" wrap="none">
             <a:noAutofit/>
           </a:bodyPr>
           <a:lstStyle/>
           <a:p>
             <a:pPr algn="l"/>
             <a:r>
-              <a:rPr sz="1019" b="1">
+              <a:rPr sz="1080" b="1">
                 <a:solidFill>
-                  <a:srgbClr val="0A2342"/>
+                  <a:srgbClr val="FFFFFF"/>
                 </a:solidFill>
                 <a:latin typeface="Pretendard"/>
                 <a:ea typeface="Pretendard"/>
                 <a:cs typeface="Pretendard"/>
               </a:rPr>
-              <a:t>원천 업무 쓰기 계속</a:t>
+              <a:t>완료 (DONE)</a:t>
             </a:r>
           </a:p>
         </p:txBody>
       </p:sp>
       <p:sp>
         <p:nvSpPr>
-          <p:cNvPr id="31" name="아이콘 edit_note"/>
+          <p:cNvPr id="32" name="블록 멈춤 (FAILED)"/>
           <p:cNvSpPr/>
           <p:nvPr/>
         </p:nvSpPr>
         <p:spPr>
           <a:xfrm>
-            <a:off x="2021650" y="3332480"/>
-            <a:ext cx="148590" cy="132080"/>
+            <a:off x="5867400" y="4328160"/>
+            <a:ext cx="1905000" cy="441960"/>
           </a:xfrm>
-          <a:custGeom>
-            <a:avLst/>
-            <a:gdLst/>
-            <a:ahLst/>
-            <a:cxnLst/>
-            <a:rect l="l" t="t" r="r" b="b"/>
-            <a:pathLst>
-              <a:path w="148590" h="132080">
-                <a:moveTo>
-                  <a:pt x="0" y="80486"/>
-                </a:moveTo>
-                <a:lnTo>
-                  <a:pt x="0" y="68104"/>
-                </a:lnTo>
-                <a:lnTo>
-                  <a:pt x="61912" y="68104"/>
-                </a:lnTo>
-                <a:lnTo>
-                  <a:pt x="61912" y="80486"/>
-                </a:lnTo>
-                <a:lnTo>
-                  <a:pt x="0" y="80486"/>
-                </a:lnTo>
-                <a:close/>
-                <a:moveTo>
-                  <a:pt x="0" y="46434"/>
-                </a:moveTo>
-                <a:lnTo>
-                  <a:pt x="0" y="34052"/>
-                </a:lnTo>
-                <a:lnTo>
-                  <a:pt x="96996" y="34052"/>
-                </a:lnTo>
-                <a:lnTo>
-                  <a:pt x="96996" y="46434"/>
-                </a:lnTo>
-                <a:lnTo>
-                  <a:pt x="0" y="46434"/>
-                </a:lnTo>
-                <a:close/>
-                <a:moveTo>
-                  <a:pt x="0" y="12382"/>
-                </a:moveTo>
-                <a:lnTo>
-                  <a:pt x="0" y="0"/>
-                </a:lnTo>
-                <a:lnTo>
-                  <a:pt x="96996" y="0"/>
-                </a:lnTo>
-                <a:lnTo>
-                  <a:pt x="96996" y="12382"/>
-                </a:lnTo>
-                <a:lnTo>
-                  <a:pt x="0" y="12382"/>
-                </a:lnTo>
-                <a:close/>
-                <a:moveTo>
-                  <a:pt x="74294" y="132080"/>
-                </a:moveTo>
-                <a:lnTo>
-                  <a:pt x="74294" y="106696"/>
-                </a:lnTo>
-                <a:lnTo>
-                  <a:pt x="119903" y="61293"/>
-                </a:lnTo>
-                <a:lnTo>
-                  <a:pt x="120216" y="60991"/>
-                </a:lnTo>
-                <a:lnTo>
-                  <a:pt x="120534" y="60703"/>
-                </a:lnTo>
-                <a:lnTo>
-                  <a:pt x="120858" y="60429"/>
-                </a:lnTo>
-                <a:lnTo>
-                  <a:pt x="121187" y="60170"/>
-                </a:lnTo>
-                <a:lnTo>
-                  <a:pt x="121523" y="59925"/>
-                </a:lnTo>
-                <a:lnTo>
-                  <a:pt x="121864" y="59694"/>
-                </a:lnTo>
-                <a:lnTo>
-                  <a:pt x="122211" y="59478"/>
-                </a:lnTo>
-                <a:lnTo>
-                  <a:pt x="122563" y="59275"/>
-                </a:lnTo>
-                <a:lnTo>
-                  <a:pt x="122922" y="59088"/>
-                </a:lnTo>
-                <a:lnTo>
-                  <a:pt x="123286" y="58914"/>
-                </a:lnTo>
-                <a:lnTo>
-                  <a:pt x="123655" y="58755"/>
-                </a:lnTo>
-                <a:lnTo>
-                  <a:pt x="124031" y="58610"/>
-                </a:lnTo>
-                <a:lnTo>
-                  <a:pt x="124409" y="58479"/>
-                </a:lnTo>
-                <a:lnTo>
-                  <a:pt x="124788" y="58358"/>
-                </a:lnTo>
-                <a:lnTo>
-                  <a:pt x="125166" y="58249"/>
-                </a:lnTo>
-                <a:lnTo>
-                  <a:pt x="125544" y="58152"/>
-                </a:lnTo>
-                <a:lnTo>
-                  <a:pt x="125923" y="58066"/>
-                </a:lnTo>
-                <a:lnTo>
-                  <a:pt x="126301" y="57991"/>
-                </a:lnTo>
-                <a:lnTo>
-                  <a:pt x="126679" y="57928"/>
-                </a:lnTo>
-                <a:lnTo>
-                  <a:pt x="127058" y="57877"/>
-                </a:lnTo>
-                <a:lnTo>
-                  <a:pt x="127436" y="57837"/>
-                </a:lnTo>
-                <a:lnTo>
-                  <a:pt x="127814" y="57808"/>
-                </a:lnTo>
-                <a:lnTo>
-                  <a:pt x="128193" y="57791"/>
-                </a:lnTo>
-                <a:lnTo>
-                  <a:pt x="128571" y="57785"/>
-                </a:lnTo>
-                <a:lnTo>
-                  <a:pt x="128982" y="57791"/>
-                </a:lnTo>
-                <a:lnTo>
-                  <a:pt x="129391" y="57811"/>
-                </a:lnTo>
-                <a:lnTo>
-                  <a:pt x="129796" y="57843"/>
-                </a:lnTo>
-                <a:lnTo>
-                  <a:pt x="130199" y="57888"/>
-                </a:lnTo>
-                <a:lnTo>
-                  <a:pt x="130599" y="57946"/>
-                </a:lnTo>
-                <a:lnTo>
-                  <a:pt x="130996" y="58017"/>
-                </a:lnTo>
-                <a:lnTo>
-                  <a:pt x="131390" y="58101"/>
-                </a:lnTo>
-                <a:lnTo>
-                  <a:pt x="131781" y="58198"/>
-                </a:lnTo>
-                <a:lnTo>
-                  <a:pt x="132170" y="58307"/>
-                </a:lnTo>
-                <a:lnTo>
-                  <a:pt x="132555" y="58430"/>
-                </a:lnTo>
-                <a:lnTo>
-                  <a:pt x="132938" y="58565"/>
-                </a:lnTo>
-                <a:lnTo>
-                  <a:pt x="133318" y="58714"/>
-                </a:lnTo>
-                <a:lnTo>
-                  <a:pt x="133693" y="58875"/>
-                </a:lnTo>
-                <a:lnTo>
-                  <a:pt x="134063" y="59049"/>
-                </a:lnTo>
-                <a:lnTo>
-                  <a:pt x="134427" y="59236"/>
-                </a:lnTo>
-                <a:lnTo>
-                  <a:pt x="134785" y="59436"/>
-                </a:lnTo>
-                <a:lnTo>
-                  <a:pt x="135138" y="59649"/>
-                </a:lnTo>
-                <a:lnTo>
-                  <a:pt x="135485" y="59875"/>
-                </a:lnTo>
-                <a:lnTo>
-                  <a:pt x="135826" y="60113"/>
-                </a:lnTo>
-                <a:lnTo>
-                  <a:pt x="136161" y="60365"/>
-                </a:lnTo>
-                <a:lnTo>
-                  <a:pt x="136491" y="60629"/>
-                </a:lnTo>
-                <a:lnTo>
-                  <a:pt x="136815" y="60906"/>
-                </a:lnTo>
-                <a:lnTo>
-                  <a:pt x="137133" y="61197"/>
-                </a:lnTo>
-                <a:lnTo>
-                  <a:pt x="137445" y="61500"/>
-                </a:lnTo>
-                <a:lnTo>
-                  <a:pt x="145081" y="69136"/>
-                </a:lnTo>
-                <a:lnTo>
-                  <a:pt x="145384" y="69448"/>
-                </a:lnTo>
-                <a:lnTo>
-                  <a:pt x="145672" y="69766"/>
-                </a:lnTo>
-                <a:lnTo>
-                  <a:pt x="145945" y="70090"/>
-                </a:lnTo>
-                <a:lnTo>
-                  <a:pt x="146205" y="70420"/>
-                </a:lnTo>
-                <a:lnTo>
-                  <a:pt x="146450" y="70755"/>
-                </a:lnTo>
-                <a:lnTo>
-                  <a:pt x="146681" y="71096"/>
-                </a:lnTo>
-                <a:lnTo>
-                  <a:pt x="146897" y="71443"/>
-                </a:lnTo>
-                <a:lnTo>
-                  <a:pt x="147099" y="71796"/>
-                </a:lnTo>
-                <a:lnTo>
-                  <a:pt x="147287" y="72154"/>
-                </a:lnTo>
-                <a:lnTo>
-                  <a:pt x="147460" y="72518"/>
-                </a:lnTo>
-                <a:lnTo>
-                  <a:pt x="147619" y="72888"/>
-                </a:lnTo>
-                <a:lnTo>
-                  <a:pt x="147764" y="73263"/>
-                </a:lnTo>
-                <a:lnTo>
-                  <a:pt x="147896" y="73641"/>
-                </a:lnTo>
-                <a:lnTo>
-                  <a:pt x="148016" y="74020"/>
-                </a:lnTo>
-                <a:lnTo>
-                  <a:pt x="148125" y="74398"/>
-                </a:lnTo>
-                <a:lnTo>
-                  <a:pt x="148223" y="74777"/>
-                </a:lnTo>
-                <a:lnTo>
-                  <a:pt x="148309" y="75155"/>
-                </a:lnTo>
-                <a:lnTo>
-                  <a:pt x="148383" y="75533"/>
-                </a:lnTo>
-                <a:lnTo>
-                  <a:pt x="148446" y="75912"/>
-                </a:lnTo>
-                <a:lnTo>
-                  <a:pt x="148498" y="76290"/>
-                </a:lnTo>
-                <a:lnTo>
-                  <a:pt x="148538" y="76668"/>
-                </a:lnTo>
-                <a:lnTo>
-                  <a:pt x="148567" y="77047"/>
-                </a:lnTo>
-                <a:lnTo>
-                  <a:pt x="148584" y="77425"/>
-                </a:lnTo>
-                <a:lnTo>
-                  <a:pt x="148590" y="77803"/>
-                </a:lnTo>
-                <a:lnTo>
-                  <a:pt x="148583" y="78182"/>
-                </a:lnTo>
-                <a:lnTo>
-                  <a:pt x="148564" y="78563"/>
-                </a:lnTo>
-                <a:lnTo>
-                  <a:pt x="148531" y="78945"/>
-                </a:lnTo>
-                <a:lnTo>
-                  <a:pt x="148486" y="79328"/>
-                </a:lnTo>
-                <a:lnTo>
-                  <a:pt x="148428" y="79713"/>
-                </a:lnTo>
-                <a:lnTo>
-                  <a:pt x="148357" y="80099"/>
-                </a:lnTo>
-                <a:lnTo>
-                  <a:pt x="148273" y="80487"/>
-                </a:lnTo>
-                <a:lnTo>
-                  <a:pt x="148177" y="80876"/>
-                </a:lnTo>
-                <a:lnTo>
-                  <a:pt x="148067" y="81267"/>
-                </a:lnTo>
-                <a:lnTo>
-                  <a:pt x="147945" y="81659"/>
-                </a:lnTo>
-                <a:lnTo>
-                  <a:pt x="147809" y="82052"/>
-                </a:lnTo>
-                <a:lnTo>
-                  <a:pt x="147661" y="82447"/>
-                </a:lnTo>
-                <a:lnTo>
-                  <a:pt x="147500" y="82839"/>
-                </a:lnTo>
-                <a:lnTo>
-                  <a:pt x="147326" y="83224"/>
-                </a:lnTo>
-                <a:lnTo>
-                  <a:pt x="147140" y="83601"/>
-                </a:lnTo>
-                <a:lnTo>
-                  <a:pt x="146941" y="83972"/>
-                </a:lnTo>
-                <a:lnTo>
-                  <a:pt x="146729" y="84335"/>
-                </a:lnTo>
-                <a:lnTo>
-                  <a:pt x="146505" y="84691"/>
-                </a:lnTo>
-                <a:lnTo>
-                  <a:pt x="146268" y="85040"/>
-                </a:lnTo>
-                <a:lnTo>
-                  <a:pt x="146018" y="85382"/>
-                </a:lnTo>
-                <a:lnTo>
-                  <a:pt x="145756" y="85717"/>
-                </a:lnTo>
-                <a:lnTo>
-                  <a:pt x="145481" y="86044"/>
-                </a:lnTo>
-                <a:lnTo>
-                  <a:pt x="145193" y="86364"/>
-                </a:lnTo>
-                <a:lnTo>
-                  <a:pt x="144893" y="86678"/>
-                </a:lnTo>
-                <a:lnTo>
-                  <a:pt x="99679" y="132080"/>
-                </a:lnTo>
-                <a:lnTo>
-                  <a:pt x="74294" y="132080"/>
-                </a:lnTo>
-                <a:close/>
-                <a:moveTo>
-                  <a:pt x="136207" y="77803"/>
-                </a:moveTo>
-                <a:lnTo>
-                  <a:pt x="128571" y="70168"/>
-                </a:lnTo>
-                <a:lnTo>
-                  <a:pt x="136207" y="77803"/>
-                </a:lnTo>
-                <a:close/>
-                <a:moveTo>
-                  <a:pt x="86677" y="119698"/>
-                </a:moveTo>
-                <a:lnTo>
-                  <a:pt x="94519" y="119698"/>
-                </a:lnTo>
-                <a:lnTo>
-                  <a:pt x="119491" y="94520"/>
-                </a:lnTo>
-                <a:lnTo>
-                  <a:pt x="115776" y="90599"/>
-                </a:lnTo>
-                <a:lnTo>
-                  <a:pt x="111855" y="86884"/>
-                </a:lnTo>
-                <a:lnTo>
-                  <a:pt x="86677" y="111855"/>
-                </a:lnTo>
-                <a:lnTo>
-                  <a:pt x="86677" y="119698"/>
-                </a:lnTo>
-                <a:close/>
-                <a:moveTo>
-                  <a:pt x="115776" y="90599"/>
-                </a:moveTo>
-                <a:lnTo>
-                  <a:pt x="111855" y="86884"/>
-                </a:lnTo>
-                <a:lnTo>
-                  <a:pt x="119491" y="94520"/>
-                </a:lnTo>
-                <a:lnTo>
-                  <a:pt x="115776" y="90599"/>
-                </a:lnTo>
-                <a:close/>
-              </a:path>
-            </a:pathLst>
-          </a:custGeom>
+          <a:prstGeom prst="roundRect">
+            <a:avLst>
+              <a:gd name="adj" fmla="val 20689"/>
+            </a:avLst>
+          </a:prstGeom>
           <a:solidFill>
-            <a:srgbClr val="164B8C"/>
+            <a:srgbClr val="D5EFE2"/>
           </a:solidFill>
-          <a:ln>
-            <a:noFill/>
+          <a:ln w="16764">
+            <a:solidFill>
+              <a:srgbClr val="1E6B4F"/>
+            </a:solidFill>
           </a:ln>
         </p:spPr>
         <p:txBody>
-          <a:bodyPr rtlCol="0" anchor="ctr"/>
+          <a:bodyPr rtlCol="0" anchor="t" lIns="45720" tIns="7620" rIns="45720" bIns="0" wrap="none">
+            <a:noAutofit/>
+          </a:bodyPr>
           <a:lstStyle/>
           <a:p>
-            <a:pPr algn="ctr"/>
+            <a:pPr algn="ctr">
+              <a:lnSpc>
+                <a:spcPts val="1560"/>
+              </a:lnSpc>
+            </a:pPr>
+            <a:r>
+              <a:rPr sz="1200" b="1">
+                <a:solidFill>
+                  <a:srgbClr val="0B3D2E"/>
+                </a:solidFill>
+                <a:latin typeface="Pretendard"/>
+                <a:ea typeface="Pretendard"/>
+                <a:cs typeface="Pretendard"/>
+              </a:rPr>
+              <a:t>멈춤 (FAILED)</a:t>
+            </a:r>
+          </a:p>
+          <a:p>
+            <a:pPr algn="ctr">
+              <a:lnSpc>
+                <a:spcPts val="1320"/>
+              </a:lnSpc>
+            </a:pPr>
+            <a:r>
+              <a:rPr sz="1019" b="0">
+                <a:solidFill>
+                  <a:srgbClr val="16202C"/>
+                </a:solidFill>
+                <a:latin typeface="Pretendard"/>
+                <a:ea typeface="Pretendard"/>
+                <a:cs typeface="Pretendard"/>
+              </a:rPr>
+              <a:t>setval · FK 안 함</a:t>
+            </a:r>
           </a:p>
         </p:txBody>
       </p:sp>
       <p:sp>
         <p:nvSpPr>
-          <p:cNvPr id="32" name="블록 다운타임 측정: ④ 시작 ~ ⑦ 끝"/>
+          <p:cNvPr id="33" name="블록 PLANNED"/>
           <p:cNvSpPr/>
           <p:nvPr/>
         </p:nvSpPr>
         <p:spPr>
           <a:xfrm>
-            <a:off x="5501640" y="3200400"/>
-            <a:ext cx="3002280" cy="396240"/>
+            <a:off x="533400" y="5593080"/>
+            <a:ext cx="1371600" cy="487680"/>
           </a:xfrm>
           <a:prstGeom prst="roundRect">
             <a:avLst>
-              <a:gd name="adj" fmla="val 50000"/>
+              <a:gd name="adj" fmla="val 18750"/>
             </a:avLst>
           </a:prstGeom>
           <a:solidFill>
             <a:srgbClr val="FFFFFF"/>
           </a:solidFill>
-          <a:ln w="15240">
+          <a:ln w="13716">
             <a:solidFill>
-              <a:srgbClr val="164B8C"/>
+              <a:srgbClr val="9DD3B8"/>
             </a:solidFill>
           </a:ln>
         </p:spPr>
         <p:txBody>
-          <a:bodyPr rtlCol="0" anchor="ctr" lIns="699135" tIns="0" rIns="0" bIns="0" wrap="none">
+          <a:bodyPr rtlCol="0" anchor="t" lIns="45720" tIns="30480" rIns="45720" bIns="0" wrap="none">
             <a:noAutofit/>
           </a:bodyPr>
           <a:lstStyle/>
           <a:p>
-            <a:pPr algn="l"/>
-            <a:r>
-              <a:rPr sz="1019" b="1">
-                <a:solidFill>
-                  <a:srgbClr val="0A2342"/>
-                </a:solidFill>
-                <a:latin typeface="Pretendard"/>
-                <a:ea typeface="Pretendard"/>
-                <a:cs typeface="Pretendard"/>
-              </a:rPr>
-              <a:t>다운타임 측정: ④ 시작 ~ ⑦ 끝</a:t>
-            </a:r>
-          </a:p>
-        </p:txBody>
-      </p:sp>
-      <p:sp>
-        <p:nvSpPr>
-          <p:cNvPr id="33" name="아이콘 timer"/>
-          <p:cNvSpPr/>
-          <p:nvPr/>
-        </p:nvSpPr>
-        <p:spPr>
-          <a:xfrm>
-            <a:off x="5951220" y="3307715"/>
-            <a:ext cx="148590" cy="173149"/>
-          </a:xfrm>
-          <a:custGeom>
-            <a:avLst/>
-            <a:gdLst/>
-            <a:ahLst/>
-            <a:cxnLst/>
-            <a:rect l="l" t="t" r="r" b="b"/>
-            <a:pathLst>
-              <a:path w="148590" h="173149">
-                <a:moveTo>
-                  <a:pt x="49530" y="12383"/>
-                </a:moveTo>
-                <a:lnTo>
-                  <a:pt x="49530" y="0"/>
-                </a:lnTo>
-                <a:lnTo>
-                  <a:pt x="99060" y="0"/>
-                </a:lnTo>
-                <a:lnTo>
-                  <a:pt x="99060" y="12383"/>
-                </a:lnTo>
-                <a:lnTo>
-                  <a:pt x="49530" y="12383"/>
-                </a:lnTo>
-                <a:close/>
-                <a:moveTo>
-                  <a:pt x="68104" y="104632"/>
-                </a:moveTo>
-                <a:lnTo>
-                  <a:pt x="80486" y="104632"/>
-                </a:lnTo>
-                <a:lnTo>
-                  <a:pt x="80486" y="57166"/>
-                </a:lnTo>
-                <a:lnTo>
-                  <a:pt x="68104" y="57166"/>
-                </a:lnTo>
-                <a:lnTo>
-                  <a:pt x="68104" y="104632"/>
-                </a:lnTo>
-                <a:close/>
-                <a:moveTo>
-                  <a:pt x="45506" y="167267"/>
-                </a:moveTo>
-                <a:lnTo>
-                  <a:pt x="43276" y="166257"/>
-                </a:lnTo>
-                <a:lnTo>
-                  <a:pt x="41094" y="165189"/>
-                </a:lnTo>
-                <a:lnTo>
-                  <a:pt x="38960" y="164062"/>
-                </a:lnTo>
-                <a:lnTo>
-                  <a:pt x="36872" y="162876"/>
-                </a:lnTo>
-                <a:lnTo>
-                  <a:pt x="34832" y="161631"/>
-                </a:lnTo>
-                <a:lnTo>
-                  <a:pt x="32839" y="160328"/>
-                </a:lnTo>
-                <a:lnTo>
-                  <a:pt x="30894" y="158965"/>
-                </a:lnTo>
-                <a:lnTo>
-                  <a:pt x="28996" y="157544"/>
-                </a:lnTo>
-                <a:lnTo>
-                  <a:pt x="27145" y="156065"/>
-                </a:lnTo>
-                <a:lnTo>
-                  <a:pt x="25341" y="154526"/>
-                </a:lnTo>
-                <a:lnTo>
-                  <a:pt x="23585" y="152929"/>
-                </a:lnTo>
-                <a:lnTo>
-                  <a:pt x="21876" y="151273"/>
-                </a:lnTo>
-                <a:lnTo>
-                  <a:pt x="20220" y="149564"/>
-                </a:lnTo>
-                <a:lnTo>
-                  <a:pt x="18622" y="147807"/>
-                </a:lnTo>
-                <a:lnTo>
-                  <a:pt x="17084" y="146004"/>
-                </a:lnTo>
-                <a:lnTo>
-                  <a:pt x="15604" y="144153"/>
-                </a:lnTo>
-                <a:lnTo>
-                  <a:pt x="14183" y="142255"/>
-                </a:lnTo>
-                <a:lnTo>
-                  <a:pt x="12821" y="140309"/>
-                </a:lnTo>
-                <a:lnTo>
-                  <a:pt x="11518" y="138316"/>
-                </a:lnTo>
-                <a:lnTo>
-                  <a:pt x="10273" y="136276"/>
-                </a:lnTo>
-                <a:lnTo>
-                  <a:pt x="9087" y="134189"/>
-                </a:lnTo>
-                <a:lnTo>
-                  <a:pt x="7960" y="132054"/>
-                </a:lnTo>
-                <a:lnTo>
-                  <a:pt x="6891" y="129872"/>
-                </a:lnTo>
-                <a:lnTo>
-                  <a:pt x="5882" y="127643"/>
-                </a:lnTo>
-                <a:lnTo>
-                  <a:pt x="4942" y="125378"/>
-                </a:lnTo>
-                <a:lnTo>
-                  <a:pt x="4085" y="123088"/>
-                </a:lnTo>
-                <a:lnTo>
-                  <a:pt x="3308" y="120775"/>
-                </a:lnTo>
-                <a:lnTo>
-                  <a:pt x="2614" y="118436"/>
-                </a:lnTo>
-                <a:lnTo>
-                  <a:pt x="2001" y="116074"/>
-                </a:lnTo>
-                <a:lnTo>
-                  <a:pt x="1470" y="113687"/>
-                </a:lnTo>
-                <a:lnTo>
-                  <a:pt x="1021" y="111276"/>
-                </a:lnTo>
-                <a:lnTo>
-                  <a:pt x="654" y="108840"/>
-                </a:lnTo>
-                <a:lnTo>
-                  <a:pt x="368" y="106380"/>
-                </a:lnTo>
-                <a:lnTo>
-                  <a:pt x="163" y="103895"/>
-                </a:lnTo>
-                <a:lnTo>
-                  <a:pt x="41" y="101387"/>
-                </a:lnTo>
-                <a:lnTo>
-                  <a:pt x="0" y="98854"/>
-                </a:lnTo>
-                <a:lnTo>
-                  <a:pt x="41" y="96321"/>
-                </a:lnTo>
-                <a:lnTo>
-                  <a:pt x="163" y="93812"/>
-                </a:lnTo>
-                <a:lnTo>
-                  <a:pt x="368" y="91327"/>
-                </a:lnTo>
-                <a:lnTo>
-                  <a:pt x="654" y="88867"/>
-                </a:lnTo>
-                <a:lnTo>
-                  <a:pt x="1021" y="86432"/>
-                </a:lnTo>
-                <a:lnTo>
-                  <a:pt x="1470" y="84020"/>
-                </a:lnTo>
-                <a:lnTo>
-                  <a:pt x="2001" y="81633"/>
-                </a:lnTo>
-                <a:lnTo>
-                  <a:pt x="2614" y="79271"/>
-                </a:lnTo>
-                <a:lnTo>
-                  <a:pt x="3308" y="76933"/>
-                </a:lnTo>
-                <a:lnTo>
-                  <a:pt x="4085" y="74619"/>
-                </a:lnTo>
-                <a:lnTo>
-                  <a:pt x="4942" y="72329"/>
-                </a:lnTo>
-                <a:lnTo>
-                  <a:pt x="5882" y="70064"/>
-                </a:lnTo>
-                <a:lnTo>
-                  <a:pt x="6891" y="67835"/>
-                </a:lnTo>
-                <a:lnTo>
-                  <a:pt x="7960" y="65653"/>
-                </a:lnTo>
-                <a:lnTo>
-                  <a:pt x="9087" y="63518"/>
-                </a:lnTo>
-                <a:lnTo>
-                  <a:pt x="10273" y="61431"/>
-                </a:lnTo>
-                <a:lnTo>
-                  <a:pt x="11518" y="59391"/>
-                </a:lnTo>
-                <a:lnTo>
-                  <a:pt x="12821" y="57398"/>
-                </a:lnTo>
-                <a:lnTo>
-                  <a:pt x="14183" y="55453"/>
-                </a:lnTo>
-                <a:lnTo>
-                  <a:pt x="15604" y="53554"/>
-                </a:lnTo>
-                <a:lnTo>
-                  <a:pt x="17084" y="51703"/>
-                </a:lnTo>
-                <a:lnTo>
-                  <a:pt x="18622" y="49900"/>
-                </a:lnTo>
-                <a:lnTo>
-                  <a:pt x="20220" y="48143"/>
-                </a:lnTo>
-                <a:lnTo>
-                  <a:pt x="21876" y="46434"/>
-                </a:lnTo>
-                <a:lnTo>
-                  <a:pt x="23585" y="44778"/>
-                </a:lnTo>
-                <a:lnTo>
-                  <a:pt x="25341" y="43181"/>
-                </a:lnTo>
-                <a:lnTo>
-                  <a:pt x="27145" y="41643"/>
-                </a:lnTo>
-                <a:lnTo>
-                  <a:pt x="28996" y="40163"/>
-                </a:lnTo>
-                <a:lnTo>
-                  <a:pt x="30894" y="38742"/>
-                </a:lnTo>
-                <a:lnTo>
-                  <a:pt x="32839" y="37380"/>
-                </a:lnTo>
-                <a:lnTo>
-                  <a:pt x="34832" y="36076"/>
-                </a:lnTo>
-                <a:lnTo>
-                  <a:pt x="36872" y="34832"/>
-                </a:lnTo>
-                <a:lnTo>
-                  <a:pt x="38960" y="33646"/>
-                </a:lnTo>
-                <a:lnTo>
-                  <a:pt x="41094" y="32518"/>
-                </a:lnTo>
-                <a:lnTo>
-                  <a:pt x="43276" y="31450"/>
-                </a:lnTo>
-                <a:lnTo>
-                  <a:pt x="45506" y="30440"/>
-                </a:lnTo>
-                <a:lnTo>
-                  <a:pt x="47771" y="29501"/>
-                </a:lnTo>
-                <a:lnTo>
-                  <a:pt x="50060" y="28643"/>
-                </a:lnTo>
-                <a:lnTo>
-                  <a:pt x="52374" y="27867"/>
-                </a:lnTo>
-                <a:lnTo>
-                  <a:pt x="54712" y="27173"/>
-                </a:lnTo>
-                <a:lnTo>
-                  <a:pt x="57075" y="26560"/>
-                </a:lnTo>
-                <a:lnTo>
-                  <a:pt x="59462" y="26029"/>
-                </a:lnTo>
-                <a:lnTo>
-                  <a:pt x="61873" y="25580"/>
-                </a:lnTo>
-                <a:lnTo>
-                  <a:pt x="64309" y="25212"/>
-                </a:lnTo>
-                <a:lnTo>
-                  <a:pt x="66769" y="24926"/>
-                </a:lnTo>
-                <a:lnTo>
-                  <a:pt x="69253" y="24722"/>
-                </a:lnTo>
-                <a:lnTo>
-                  <a:pt x="71762" y="24599"/>
-                </a:lnTo>
-                <a:lnTo>
-                  <a:pt x="74295" y="24559"/>
-                </a:lnTo>
-                <a:lnTo>
-                  <a:pt x="76588" y="24591"/>
-                </a:lnTo>
-                <a:lnTo>
-                  <a:pt x="78858" y="24688"/>
-                </a:lnTo>
-                <a:lnTo>
-                  <a:pt x="81105" y="24849"/>
-                </a:lnTo>
-                <a:lnTo>
-                  <a:pt x="83330" y="25075"/>
-                </a:lnTo>
-                <a:lnTo>
-                  <a:pt x="85531" y="25365"/>
-                </a:lnTo>
-                <a:lnTo>
-                  <a:pt x="87709" y="25719"/>
-                </a:lnTo>
-                <a:lnTo>
-                  <a:pt x="89865" y="26139"/>
-                </a:lnTo>
-                <a:lnTo>
-                  <a:pt x="91997" y="26622"/>
-                </a:lnTo>
-                <a:lnTo>
-                  <a:pt x="94107" y="27171"/>
-                </a:lnTo>
-                <a:lnTo>
-                  <a:pt x="96194" y="27783"/>
-                </a:lnTo>
-                <a:lnTo>
-                  <a:pt x="98257" y="28460"/>
-                </a:lnTo>
-                <a:lnTo>
-                  <a:pt x="100298" y="29202"/>
-                </a:lnTo>
-                <a:lnTo>
-                  <a:pt x="102309" y="30001"/>
-                </a:lnTo>
-                <a:lnTo>
-                  <a:pt x="104282" y="30850"/>
-                </a:lnTo>
-                <a:lnTo>
-                  <a:pt x="106219" y="31750"/>
-                </a:lnTo>
-                <a:lnTo>
-                  <a:pt x="108118" y="32699"/>
-                </a:lnTo>
-                <a:lnTo>
-                  <a:pt x="109979" y="33699"/>
-                </a:lnTo>
-                <a:lnTo>
-                  <a:pt x="111804" y="34748"/>
-                </a:lnTo>
-                <a:lnTo>
-                  <a:pt x="113591" y="35848"/>
-                </a:lnTo>
-                <a:lnTo>
-                  <a:pt x="115341" y="36998"/>
-                </a:lnTo>
-                <a:lnTo>
-                  <a:pt x="117053" y="38199"/>
-                </a:lnTo>
-                <a:lnTo>
-                  <a:pt x="118729" y="39449"/>
-                </a:lnTo>
-                <a:lnTo>
-                  <a:pt x="120367" y="40750"/>
-                </a:lnTo>
-                <a:lnTo>
-                  <a:pt x="121968" y="42101"/>
-                </a:lnTo>
-                <a:lnTo>
-                  <a:pt x="132493" y="31575"/>
-                </a:lnTo>
-                <a:lnTo>
-                  <a:pt x="141160" y="40243"/>
-                </a:lnTo>
-                <a:lnTo>
-                  <a:pt x="130635" y="50768"/>
-                </a:lnTo>
-                <a:lnTo>
-                  <a:pt x="131859" y="52168"/>
-                </a:lnTo>
-                <a:lnTo>
-                  <a:pt x="133052" y="53617"/>
-                </a:lnTo>
-                <a:lnTo>
-                  <a:pt x="134215" y="55115"/>
-                </a:lnTo>
-                <a:lnTo>
-                  <a:pt x="135348" y="56661"/>
-                </a:lnTo>
-                <a:lnTo>
-                  <a:pt x="136450" y="58257"/>
-                </a:lnTo>
-                <a:lnTo>
-                  <a:pt x="137523" y="59900"/>
-                </a:lnTo>
-                <a:lnTo>
-                  <a:pt x="138566" y="61593"/>
-                </a:lnTo>
-                <a:lnTo>
-                  <a:pt x="139578" y="63334"/>
-                </a:lnTo>
-                <a:lnTo>
-                  <a:pt x="140561" y="65124"/>
-                </a:lnTo>
-                <a:lnTo>
-                  <a:pt x="141513" y="66963"/>
-                </a:lnTo>
-                <a:lnTo>
-                  <a:pt x="142435" y="68850"/>
-                </a:lnTo>
-                <a:lnTo>
-                  <a:pt x="143327" y="70787"/>
-                </a:lnTo>
-                <a:lnTo>
-                  <a:pt x="144168" y="72779"/>
-                </a:lnTo>
-                <a:lnTo>
-                  <a:pt x="144935" y="74834"/>
-                </a:lnTo>
-                <a:lnTo>
-                  <a:pt x="145630" y="76952"/>
-                </a:lnTo>
-                <a:lnTo>
-                  <a:pt x="146251" y="79133"/>
-                </a:lnTo>
-                <a:lnTo>
-                  <a:pt x="146799" y="81378"/>
-                </a:lnTo>
-                <a:lnTo>
-                  <a:pt x="147274" y="83685"/>
-                </a:lnTo>
-                <a:lnTo>
-                  <a:pt x="147676" y="86056"/>
-                </a:lnTo>
-                <a:lnTo>
-                  <a:pt x="148005" y="88489"/>
-                </a:lnTo>
-                <a:lnTo>
-                  <a:pt x="148261" y="90986"/>
-                </a:lnTo>
-                <a:lnTo>
-                  <a:pt x="148444" y="93545"/>
-                </a:lnTo>
-                <a:lnTo>
-                  <a:pt x="148553" y="96168"/>
-                </a:lnTo>
-                <a:lnTo>
-                  <a:pt x="148590" y="98854"/>
-                </a:lnTo>
-                <a:lnTo>
-                  <a:pt x="148549" y="101387"/>
-                </a:lnTo>
-                <a:lnTo>
-                  <a:pt x="148427" y="103895"/>
-                </a:lnTo>
-                <a:lnTo>
-                  <a:pt x="148222" y="106380"/>
-                </a:lnTo>
-                <a:lnTo>
-                  <a:pt x="147936" y="108840"/>
-                </a:lnTo>
-                <a:lnTo>
-                  <a:pt x="147569" y="111276"/>
-                </a:lnTo>
-                <a:lnTo>
-                  <a:pt x="147120" y="113687"/>
-                </a:lnTo>
-                <a:lnTo>
-                  <a:pt x="146589" y="116074"/>
-                </a:lnTo>
-                <a:lnTo>
-                  <a:pt x="145976" y="118436"/>
-                </a:lnTo>
-                <a:lnTo>
-                  <a:pt x="145282" y="120775"/>
-                </a:lnTo>
-                <a:lnTo>
-                  <a:pt x="144505" y="123088"/>
-                </a:lnTo>
-                <a:lnTo>
-                  <a:pt x="143648" y="125378"/>
-                </a:lnTo>
-                <a:lnTo>
-                  <a:pt x="142708" y="127643"/>
-                </a:lnTo>
-                <a:lnTo>
-                  <a:pt x="141699" y="129872"/>
-                </a:lnTo>
-                <a:lnTo>
-                  <a:pt x="140630" y="132054"/>
-                </a:lnTo>
-                <a:lnTo>
-                  <a:pt x="139503" y="134189"/>
-                </a:lnTo>
-                <a:lnTo>
-                  <a:pt x="138317" y="136276"/>
-                </a:lnTo>
-                <a:lnTo>
-                  <a:pt x="137072" y="138316"/>
-                </a:lnTo>
-                <a:lnTo>
-                  <a:pt x="135769" y="140309"/>
-                </a:lnTo>
-                <a:lnTo>
-                  <a:pt x="134407" y="142255"/>
-                </a:lnTo>
-                <a:lnTo>
-                  <a:pt x="132986" y="144153"/>
-                </a:lnTo>
-                <a:lnTo>
-                  <a:pt x="131506" y="146004"/>
-                </a:lnTo>
-                <a:lnTo>
-                  <a:pt x="129968" y="147807"/>
-                </a:lnTo>
-                <a:lnTo>
-                  <a:pt x="128370" y="149564"/>
-                </a:lnTo>
-                <a:lnTo>
-                  <a:pt x="126714" y="151273"/>
-                </a:lnTo>
-                <a:lnTo>
-                  <a:pt x="125005" y="152929"/>
-                </a:lnTo>
-                <a:lnTo>
-                  <a:pt x="123249" y="154526"/>
-                </a:lnTo>
-                <a:lnTo>
-                  <a:pt x="121445" y="156065"/>
-                </a:lnTo>
-                <a:lnTo>
-                  <a:pt x="119594" y="157544"/>
-                </a:lnTo>
-                <a:lnTo>
-                  <a:pt x="117696" y="158965"/>
-                </a:lnTo>
-                <a:lnTo>
-                  <a:pt x="115751" y="160328"/>
-                </a:lnTo>
-                <a:lnTo>
-                  <a:pt x="113758" y="161631"/>
-                </a:lnTo>
-                <a:lnTo>
-                  <a:pt x="111718" y="162876"/>
-                </a:lnTo>
-                <a:lnTo>
-                  <a:pt x="109630" y="164062"/>
-                </a:lnTo>
-                <a:lnTo>
-                  <a:pt x="107496" y="165189"/>
-                </a:lnTo>
-                <a:lnTo>
-                  <a:pt x="105314" y="166257"/>
-                </a:lnTo>
-                <a:lnTo>
-                  <a:pt x="103084" y="167267"/>
-                </a:lnTo>
-                <a:lnTo>
-                  <a:pt x="100819" y="168206"/>
-                </a:lnTo>
-                <a:lnTo>
-                  <a:pt x="98530" y="169064"/>
-                </a:lnTo>
-                <a:lnTo>
-                  <a:pt x="96216" y="169840"/>
-                </a:lnTo>
-                <a:lnTo>
-                  <a:pt x="93878" y="170535"/>
-                </a:lnTo>
-                <a:lnTo>
-                  <a:pt x="91515" y="171147"/>
-                </a:lnTo>
-                <a:lnTo>
-                  <a:pt x="89128" y="171678"/>
-                </a:lnTo>
-                <a:lnTo>
-                  <a:pt x="86717" y="172127"/>
-                </a:lnTo>
-                <a:lnTo>
-                  <a:pt x="84281" y="172495"/>
-                </a:lnTo>
-                <a:lnTo>
-                  <a:pt x="81821" y="172781"/>
-                </a:lnTo>
-                <a:lnTo>
-                  <a:pt x="79337" y="172985"/>
-                </a:lnTo>
-                <a:lnTo>
-                  <a:pt x="76828" y="173108"/>
-                </a:lnTo>
-                <a:lnTo>
-                  <a:pt x="74295" y="173149"/>
-                </a:lnTo>
-                <a:lnTo>
-                  <a:pt x="71762" y="173108"/>
-                </a:lnTo>
-                <a:lnTo>
-                  <a:pt x="69253" y="172985"/>
-                </a:lnTo>
-                <a:lnTo>
-                  <a:pt x="66769" y="172781"/>
-                </a:lnTo>
-                <a:lnTo>
-                  <a:pt x="64309" y="172495"/>
-                </a:lnTo>
-                <a:lnTo>
-                  <a:pt x="61873" y="172127"/>
-                </a:lnTo>
-                <a:lnTo>
-                  <a:pt x="59462" y="171678"/>
-                </a:lnTo>
-                <a:lnTo>
-                  <a:pt x="57075" y="171147"/>
-                </a:lnTo>
-                <a:lnTo>
-                  <a:pt x="54712" y="170535"/>
-                </a:lnTo>
-                <a:lnTo>
-                  <a:pt x="52374" y="169840"/>
-                </a:lnTo>
-                <a:lnTo>
-                  <a:pt x="50060" y="169064"/>
-                </a:lnTo>
-                <a:lnTo>
-                  <a:pt x="47771" y="168206"/>
-                </a:lnTo>
-                <a:lnTo>
-                  <a:pt x="45506" y="167267"/>
-                </a:lnTo>
-                <a:close/>
-                <a:moveTo>
-                  <a:pt x="118150" y="142708"/>
-                </a:moveTo>
-                <a:lnTo>
-                  <a:pt x="121034" y="139645"/>
-                </a:lnTo>
-                <a:lnTo>
-                  <a:pt x="123667" y="136474"/>
-                </a:lnTo>
-                <a:lnTo>
-                  <a:pt x="126050" y="133196"/>
-                </a:lnTo>
-                <a:lnTo>
-                  <a:pt x="128182" y="129810"/>
-                </a:lnTo>
-                <a:lnTo>
-                  <a:pt x="130063" y="126317"/>
-                </a:lnTo>
-                <a:lnTo>
-                  <a:pt x="131693" y="122716"/>
-                </a:lnTo>
-                <a:lnTo>
-                  <a:pt x="133072" y="119007"/>
-                </a:lnTo>
-                <a:lnTo>
-                  <a:pt x="134201" y="115192"/>
-                </a:lnTo>
-                <a:lnTo>
-                  <a:pt x="135079" y="111268"/>
-                </a:lnTo>
-                <a:lnTo>
-                  <a:pt x="135706" y="107238"/>
-                </a:lnTo>
-                <a:lnTo>
-                  <a:pt x="136082" y="103099"/>
-                </a:lnTo>
-                <a:lnTo>
-                  <a:pt x="136208" y="98854"/>
-                </a:lnTo>
-                <a:lnTo>
-                  <a:pt x="136082" y="94608"/>
-                </a:lnTo>
-                <a:lnTo>
-                  <a:pt x="135706" y="90470"/>
-                </a:lnTo>
-                <a:lnTo>
-                  <a:pt x="135079" y="86439"/>
-                </a:lnTo>
-                <a:lnTo>
-                  <a:pt x="134201" y="82516"/>
-                </a:lnTo>
-                <a:lnTo>
-                  <a:pt x="133072" y="78700"/>
-                </a:lnTo>
-                <a:lnTo>
-                  <a:pt x="131693" y="74992"/>
-                </a:lnTo>
-                <a:lnTo>
-                  <a:pt x="130063" y="71391"/>
-                </a:lnTo>
-                <a:lnTo>
-                  <a:pt x="128182" y="67897"/>
-                </a:lnTo>
-                <a:lnTo>
-                  <a:pt x="126050" y="64512"/>
-                </a:lnTo>
-                <a:lnTo>
-                  <a:pt x="123667" y="61233"/>
-                </a:lnTo>
-                <a:lnTo>
-                  <a:pt x="121034" y="58062"/>
-                </a:lnTo>
-                <a:lnTo>
-                  <a:pt x="118150" y="54999"/>
-                </a:lnTo>
-                <a:lnTo>
-                  <a:pt x="115086" y="52115"/>
-                </a:lnTo>
-                <a:lnTo>
-                  <a:pt x="111915" y="49481"/>
-                </a:lnTo>
-                <a:lnTo>
-                  <a:pt x="108637" y="47099"/>
-                </a:lnTo>
-                <a:lnTo>
-                  <a:pt x="105251" y="44967"/>
-                </a:lnTo>
-                <a:lnTo>
-                  <a:pt x="101758" y="43086"/>
-                </a:lnTo>
-                <a:lnTo>
-                  <a:pt x="98157" y="41456"/>
-                </a:lnTo>
-                <a:lnTo>
-                  <a:pt x="94449" y="40076"/>
-                </a:lnTo>
-                <a:lnTo>
-                  <a:pt x="90633" y="38948"/>
-                </a:lnTo>
-                <a:lnTo>
-                  <a:pt x="86710" y="38070"/>
-                </a:lnTo>
-                <a:lnTo>
-                  <a:pt x="82679" y="37443"/>
-                </a:lnTo>
-                <a:lnTo>
-                  <a:pt x="78541" y="37067"/>
-                </a:lnTo>
-                <a:lnTo>
-                  <a:pt x="74295" y="36941"/>
-                </a:lnTo>
-                <a:lnTo>
-                  <a:pt x="70049" y="37067"/>
-                </a:lnTo>
-                <a:lnTo>
-                  <a:pt x="65911" y="37443"/>
-                </a:lnTo>
-                <a:lnTo>
-                  <a:pt x="61880" y="38070"/>
-                </a:lnTo>
-                <a:lnTo>
-                  <a:pt x="57957" y="38948"/>
-                </a:lnTo>
-                <a:lnTo>
-                  <a:pt x="54141" y="40076"/>
-                </a:lnTo>
-                <a:lnTo>
-                  <a:pt x="50433" y="41456"/>
-                </a:lnTo>
-                <a:lnTo>
-                  <a:pt x="46832" y="43086"/>
-                </a:lnTo>
-                <a:lnTo>
-                  <a:pt x="43339" y="44967"/>
-                </a:lnTo>
-                <a:lnTo>
-                  <a:pt x="39953" y="47099"/>
-                </a:lnTo>
-                <a:lnTo>
-                  <a:pt x="36675" y="49481"/>
-                </a:lnTo>
-                <a:lnTo>
-                  <a:pt x="33504" y="52115"/>
-                </a:lnTo>
-                <a:lnTo>
-                  <a:pt x="30440" y="54999"/>
-                </a:lnTo>
-                <a:lnTo>
-                  <a:pt x="27556" y="58062"/>
-                </a:lnTo>
-                <a:lnTo>
-                  <a:pt x="24923" y="61233"/>
-                </a:lnTo>
-                <a:lnTo>
-                  <a:pt x="22540" y="64512"/>
-                </a:lnTo>
-                <a:lnTo>
-                  <a:pt x="20408" y="67897"/>
-                </a:lnTo>
-                <a:lnTo>
-                  <a:pt x="18527" y="71391"/>
-                </a:lnTo>
-                <a:lnTo>
-                  <a:pt x="16897" y="74992"/>
-                </a:lnTo>
-                <a:lnTo>
-                  <a:pt x="15518" y="78700"/>
-                </a:lnTo>
-                <a:lnTo>
-                  <a:pt x="14389" y="82516"/>
-                </a:lnTo>
-                <a:lnTo>
-                  <a:pt x="13511" y="86439"/>
-                </a:lnTo>
-                <a:lnTo>
-                  <a:pt x="12884" y="90470"/>
-                </a:lnTo>
-                <a:lnTo>
-                  <a:pt x="12508" y="94608"/>
-                </a:lnTo>
-                <a:lnTo>
-                  <a:pt x="12382" y="98854"/>
-                </a:lnTo>
-                <a:lnTo>
-                  <a:pt x="12508" y="103099"/>
-                </a:lnTo>
-                <a:lnTo>
-                  <a:pt x="12884" y="107238"/>
-                </a:lnTo>
-                <a:lnTo>
-                  <a:pt x="13511" y="111268"/>
-                </a:lnTo>
-                <a:lnTo>
-                  <a:pt x="14389" y="115192"/>
-                </a:lnTo>
-                <a:lnTo>
-                  <a:pt x="15518" y="119007"/>
-                </a:lnTo>
-                <a:lnTo>
-                  <a:pt x="16897" y="122716"/>
-                </a:lnTo>
-                <a:lnTo>
-                  <a:pt x="18527" y="126317"/>
-                </a:lnTo>
-                <a:lnTo>
-                  <a:pt x="20408" y="129810"/>
-                </a:lnTo>
-                <a:lnTo>
-                  <a:pt x="22540" y="133196"/>
-                </a:lnTo>
-                <a:lnTo>
-                  <a:pt x="24923" y="136474"/>
-                </a:lnTo>
-                <a:lnTo>
-                  <a:pt x="27556" y="139645"/>
-                </a:lnTo>
-                <a:lnTo>
-                  <a:pt x="30440" y="142708"/>
-                </a:lnTo>
-                <a:lnTo>
-                  <a:pt x="33504" y="145593"/>
-                </a:lnTo>
-                <a:lnTo>
-                  <a:pt x="36675" y="148226"/>
-                </a:lnTo>
-                <a:lnTo>
-                  <a:pt x="39953" y="150609"/>
-                </a:lnTo>
-                <a:lnTo>
-                  <a:pt x="43339" y="152740"/>
-                </a:lnTo>
-                <a:lnTo>
-                  <a:pt x="46832" y="154621"/>
-                </a:lnTo>
-                <a:lnTo>
-                  <a:pt x="50433" y="156252"/>
-                </a:lnTo>
-                <a:lnTo>
-                  <a:pt x="54141" y="157631"/>
-                </a:lnTo>
-                <a:lnTo>
-                  <a:pt x="57957" y="158760"/>
-                </a:lnTo>
-                <a:lnTo>
-                  <a:pt x="61880" y="159638"/>
-                </a:lnTo>
-                <a:lnTo>
-                  <a:pt x="65911" y="160265"/>
-                </a:lnTo>
-                <a:lnTo>
-                  <a:pt x="70049" y="160641"/>
-                </a:lnTo>
-                <a:lnTo>
-                  <a:pt x="74295" y="160766"/>
-                </a:lnTo>
-                <a:lnTo>
-                  <a:pt x="78541" y="160641"/>
-                </a:lnTo>
-                <a:lnTo>
-                  <a:pt x="82679" y="160265"/>
-                </a:lnTo>
-                <a:lnTo>
-                  <a:pt x="86710" y="159638"/>
-                </a:lnTo>
-                <a:lnTo>
-                  <a:pt x="90633" y="158760"/>
-                </a:lnTo>
-                <a:lnTo>
-                  <a:pt x="94449" y="157631"/>
-                </a:lnTo>
-                <a:lnTo>
-                  <a:pt x="98157" y="156252"/>
-                </a:lnTo>
-                <a:lnTo>
-                  <a:pt x="101758" y="154621"/>
-                </a:lnTo>
-                <a:lnTo>
-                  <a:pt x="105251" y="152740"/>
-                </a:lnTo>
-                <a:lnTo>
-                  <a:pt x="108637" y="150609"/>
-                </a:lnTo>
-                <a:lnTo>
-                  <a:pt x="111915" y="148226"/>
-                </a:lnTo>
-                <a:lnTo>
-                  <a:pt x="115086" y="145593"/>
-                </a:lnTo>
-                <a:lnTo>
-                  <a:pt x="118150" y="142708"/>
-                </a:lnTo>
-                <a:close/>
-              </a:path>
-            </a:pathLst>
-          </a:custGeom>
-          <a:solidFill>
-            <a:srgbClr val="164B8C"/>
-          </a:solidFill>
-          <a:ln>
-            <a:noFill/>
-          </a:ln>
-        </p:spPr>
-        <p:txBody>
-          <a:bodyPr rtlCol="0" anchor="ctr"/>
-          <a:lstStyle/>
-          <a:p>
-            <a:pPr algn="ctr"/>
-          </a:p>
-        </p:txBody>
-      </p:sp>
-      <p:sp>
-        <p:nvSpPr>
-          <p:cNvPr id="34" name="블록 불일치 시 멈춤"/>
-          <p:cNvSpPr/>
-          <p:nvPr/>
-        </p:nvSpPr>
-        <p:spPr>
-          <a:xfrm>
-            <a:off x="8671560" y="2926080"/>
-            <a:ext cx="1417320" cy="883920"/>
-          </a:xfrm>
-          <a:prstGeom prst="roundRect">
-            <a:avLst>
-              <a:gd name="adj" fmla="val 10344"/>
-            </a:avLst>
-          </a:prstGeom>
-          <a:solidFill>
-            <a:srgbClr val="FFFFFF"/>
-          </a:solidFill>
-          <a:ln w="12192">
-            <a:solidFill>
-              <a:srgbClr val="6F9BD1"/>
-            </a:solidFill>
-          </a:ln>
-        </p:spPr>
-        <p:txBody>
-          <a:bodyPr rtlCol="0" anchor="t" lIns="45720" tIns="365760" rIns="45720" bIns="0" wrap="none">
-            <a:noAutofit/>
-          </a:bodyPr>
-          <a:lstStyle/>
-          <a:p>
             <a:pPr algn="ctr">
               <a:lnSpc>
-                <a:spcPts val="1439"/>
+                <a:spcPts val="1560"/>
               </a:lnSpc>
             </a:pPr>
             <a:r>
-              <a:rPr sz="1140" b="1">
+              <a:rPr sz="1200" b="1">
                 <a:solidFill>
-                  <a:srgbClr val="0A2342"/>
-                </a:solidFill>
-                <a:latin typeface="Pretendard"/>
-                <a:ea typeface="Pretendard"/>
-                <a:cs typeface="Pretendard"/>
-              </a:rPr>
-              <a:t>불일치 시 멈춤</a:t>
-            </a:r>
-          </a:p>
-          <a:p>
-            <a:pPr algn="ctr">
-              <a:lnSpc>
-                <a:spcPts val="1140"/>
-              </a:lnSpc>
-            </a:pPr>
-            <a:r>
-              <a:rPr sz="869" b="0">
-                <a:solidFill>
-                  <a:srgbClr val="3F4E61"/>
-                </a:solidFill>
-                <a:latin typeface="Pretendard"/>
-                <a:ea typeface="Pretendard"/>
-                <a:cs typeface="Pretendard"/>
-              </a:rPr>
-              <a:t>전환하지 않음</a:t>
-            </a:r>
-          </a:p>
-          <a:p>
-            <a:pPr algn="ctr">
-              <a:lnSpc>
-                <a:spcPts val="1140"/>
-              </a:lnSpc>
-            </a:pPr>
-            <a:r>
-              <a:rPr sz="869" b="0">
-                <a:solidFill>
-                  <a:srgbClr val="3F4E61"/>
-                </a:solidFill>
-                <a:latin typeface="Pretendard"/>
-                <a:ea typeface="Pretendard"/>
-                <a:cs typeface="Pretendard"/>
-              </a:rPr>
-              <a:t>행 차이 목록</a:t>
-            </a:r>
-          </a:p>
-        </p:txBody>
-      </p:sp>
-      <p:sp>
-        <p:nvSpPr>
-          <p:cNvPr id="35" name="아이콘 report"/>
-          <p:cNvSpPr/>
-          <p:nvPr/>
-        </p:nvSpPr>
-        <p:spPr>
-          <a:xfrm>
-            <a:off x="9265920" y="2979420"/>
-            <a:ext cx="228600" cy="228600"/>
-          </a:xfrm>
-          <a:custGeom>
-            <a:avLst/>
-            <a:gdLst/>
-            <a:ahLst/>
-            <a:cxnLst/>
-            <a:rect l="l" t="t" r="r" b="b"/>
-            <a:pathLst>
-              <a:path w="228600" h="228600">
-                <a:moveTo>
-                  <a:pt x="114300" y="177482"/>
-                </a:moveTo>
-                <a:lnTo>
-                  <a:pt x="115033" y="177459"/>
-                </a:lnTo>
-                <a:lnTo>
-                  <a:pt x="115751" y="177390"/>
-                </a:lnTo>
-                <a:lnTo>
-                  <a:pt x="116453" y="177274"/>
-                </a:lnTo>
-                <a:lnTo>
-                  <a:pt x="117140" y="177112"/>
-                </a:lnTo>
-                <a:lnTo>
-                  <a:pt x="117811" y="176904"/>
-                </a:lnTo>
-                <a:lnTo>
-                  <a:pt x="118467" y="176649"/>
-                </a:lnTo>
-                <a:lnTo>
-                  <a:pt x="119108" y="176348"/>
-                </a:lnTo>
-                <a:lnTo>
-                  <a:pt x="119733" y="176001"/>
-                </a:lnTo>
-                <a:lnTo>
-                  <a:pt x="120342" y="175607"/>
-                </a:lnTo>
-                <a:lnTo>
-                  <a:pt x="120937" y="175167"/>
-                </a:lnTo>
-                <a:lnTo>
-                  <a:pt x="121515" y="174681"/>
-                </a:lnTo>
-                <a:lnTo>
-                  <a:pt x="122079" y="174149"/>
-                </a:lnTo>
-                <a:lnTo>
-                  <a:pt x="122611" y="173585"/>
-                </a:lnTo>
-                <a:lnTo>
-                  <a:pt x="123097" y="173007"/>
-                </a:lnTo>
-                <a:lnTo>
-                  <a:pt x="123537" y="172412"/>
-                </a:lnTo>
-                <a:lnTo>
-                  <a:pt x="123931" y="171803"/>
-                </a:lnTo>
-                <a:lnTo>
-                  <a:pt x="124278" y="171178"/>
-                </a:lnTo>
-                <a:lnTo>
-                  <a:pt x="124579" y="170537"/>
-                </a:lnTo>
-                <a:lnTo>
-                  <a:pt x="124834" y="169881"/>
-                </a:lnTo>
-                <a:lnTo>
-                  <a:pt x="125042" y="169210"/>
-                </a:lnTo>
-                <a:lnTo>
-                  <a:pt x="125204" y="168523"/>
-                </a:lnTo>
-                <a:lnTo>
-                  <a:pt x="125320" y="167821"/>
-                </a:lnTo>
-                <a:lnTo>
-                  <a:pt x="125389" y="167103"/>
-                </a:lnTo>
-                <a:lnTo>
-                  <a:pt x="125412" y="166370"/>
-                </a:lnTo>
-                <a:lnTo>
-                  <a:pt x="125389" y="165637"/>
-                </a:lnTo>
-                <a:lnTo>
-                  <a:pt x="125320" y="164919"/>
-                </a:lnTo>
-                <a:lnTo>
-                  <a:pt x="125204" y="164217"/>
-                </a:lnTo>
-                <a:lnTo>
-                  <a:pt x="125042" y="163530"/>
-                </a:lnTo>
-                <a:lnTo>
-                  <a:pt x="124834" y="162859"/>
-                </a:lnTo>
-                <a:lnTo>
-                  <a:pt x="124579" y="162203"/>
-                </a:lnTo>
-                <a:lnTo>
-                  <a:pt x="124278" y="161562"/>
-                </a:lnTo>
-                <a:lnTo>
-                  <a:pt x="123931" y="160937"/>
-                </a:lnTo>
-                <a:lnTo>
-                  <a:pt x="123537" y="160328"/>
-                </a:lnTo>
-                <a:lnTo>
-                  <a:pt x="123097" y="159733"/>
-                </a:lnTo>
-                <a:lnTo>
-                  <a:pt x="122611" y="159155"/>
-                </a:lnTo>
-                <a:lnTo>
-                  <a:pt x="122079" y="158591"/>
-                </a:lnTo>
-                <a:lnTo>
-                  <a:pt x="121515" y="158059"/>
-                </a:lnTo>
-                <a:lnTo>
-                  <a:pt x="120937" y="157573"/>
-                </a:lnTo>
-                <a:lnTo>
-                  <a:pt x="120342" y="157133"/>
-                </a:lnTo>
-                <a:lnTo>
-                  <a:pt x="119733" y="156739"/>
-                </a:lnTo>
-                <a:lnTo>
-                  <a:pt x="119108" y="156392"/>
-                </a:lnTo>
-                <a:lnTo>
-                  <a:pt x="118467" y="156091"/>
-                </a:lnTo>
-                <a:lnTo>
-                  <a:pt x="117811" y="155836"/>
-                </a:lnTo>
-                <a:lnTo>
-                  <a:pt x="117140" y="155628"/>
-                </a:lnTo>
-                <a:lnTo>
-                  <a:pt x="116453" y="155466"/>
-                </a:lnTo>
-                <a:lnTo>
-                  <a:pt x="115751" y="155350"/>
-                </a:lnTo>
-                <a:lnTo>
-                  <a:pt x="115033" y="155281"/>
-                </a:lnTo>
-                <a:lnTo>
-                  <a:pt x="114300" y="155258"/>
-                </a:lnTo>
-                <a:lnTo>
-                  <a:pt x="113567" y="155281"/>
-                </a:lnTo>
-                <a:lnTo>
-                  <a:pt x="112849" y="155350"/>
-                </a:lnTo>
-                <a:lnTo>
-                  <a:pt x="112147" y="155466"/>
-                </a:lnTo>
-                <a:lnTo>
-                  <a:pt x="111460" y="155628"/>
-                </a:lnTo>
-                <a:lnTo>
-                  <a:pt x="110789" y="155836"/>
-                </a:lnTo>
-                <a:lnTo>
-                  <a:pt x="110133" y="156091"/>
-                </a:lnTo>
-                <a:lnTo>
-                  <a:pt x="109492" y="156392"/>
-                </a:lnTo>
-                <a:lnTo>
-                  <a:pt x="108867" y="156739"/>
-                </a:lnTo>
-                <a:lnTo>
-                  <a:pt x="108258" y="157133"/>
-                </a:lnTo>
-                <a:lnTo>
-                  <a:pt x="107663" y="157573"/>
-                </a:lnTo>
-                <a:lnTo>
-                  <a:pt x="107085" y="158059"/>
-                </a:lnTo>
-                <a:lnTo>
-                  <a:pt x="106521" y="158591"/>
-                </a:lnTo>
-                <a:lnTo>
-                  <a:pt x="105989" y="159155"/>
-                </a:lnTo>
-                <a:lnTo>
-                  <a:pt x="105503" y="159733"/>
-                </a:lnTo>
-                <a:lnTo>
-                  <a:pt x="105063" y="160328"/>
-                </a:lnTo>
-                <a:lnTo>
-                  <a:pt x="104669" y="160937"/>
-                </a:lnTo>
-                <a:lnTo>
-                  <a:pt x="104322" y="161562"/>
-                </a:lnTo>
-                <a:lnTo>
-                  <a:pt x="104021" y="162203"/>
-                </a:lnTo>
-                <a:lnTo>
-                  <a:pt x="103766" y="162859"/>
-                </a:lnTo>
-                <a:lnTo>
-                  <a:pt x="103558" y="163530"/>
-                </a:lnTo>
-                <a:lnTo>
-                  <a:pt x="103396" y="164217"/>
-                </a:lnTo>
-                <a:lnTo>
-                  <a:pt x="103280" y="164919"/>
-                </a:lnTo>
-                <a:lnTo>
-                  <a:pt x="103211" y="165637"/>
-                </a:lnTo>
-                <a:lnTo>
-                  <a:pt x="103188" y="166370"/>
-                </a:lnTo>
-                <a:lnTo>
-                  <a:pt x="103211" y="167103"/>
-                </a:lnTo>
-                <a:lnTo>
-                  <a:pt x="103280" y="167821"/>
-                </a:lnTo>
-                <a:lnTo>
-                  <a:pt x="103396" y="168523"/>
-                </a:lnTo>
-                <a:lnTo>
-                  <a:pt x="103558" y="169210"/>
-                </a:lnTo>
-                <a:lnTo>
-                  <a:pt x="103766" y="169881"/>
-                </a:lnTo>
-                <a:lnTo>
-                  <a:pt x="104021" y="170537"/>
-                </a:lnTo>
-                <a:lnTo>
-                  <a:pt x="104322" y="171178"/>
-                </a:lnTo>
-                <a:lnTo>
-                  <a:pt x="104669" y="171803"/>
-                </a:lnTo>
-                <a:lnTo>
-                  <a:pt x="105063" y="172412"/>
-                </a:lnTo>
-                <a:lnTo>
-                  <a:pt x="105503" y="173007"/>
-                </a:lnTo>
-                <a:lnTo>
-                  <a:pt x="105989" y="173585"/>
-                </a:lnTo>
-                <a:lnTo>
-                  <a:pt x="106521" y="174149"/>
-                </a:lnTo>
-                <a:lnTo>
-                  <a:pt x="107085" y="174681"/>
-                </a:lnTo>
-                <a:lnTo>
-                  <a:pt x="107663" y="175167"/>
-                </a:lnTo>
-                <a:lnTo>
-                  <a:pt x="108258" y="175607"/>
-                </a:lnTo>
-                <a:lnTo>
-                  <a:pt x="108867" y="176001"/>
-                </a:lnTo>
-                <a:lnTo>
-                  <a:pt x="109492" y="176348"/>
-                </a:lnTo>
-                <a:lnTo>
-                  <a:pt x="110133" y="176649"/>
-                </a:lnTo>
-                <a:lnTo>
-                  <a:pt x="110789" y="176904"/>
-                </a:lnTo>
-                <a:lnTo>
-                  <a:pt x="111460" y="177112"/>
-                </a:lnTo>
-                <a:lnTo>
-                  <a:pt x="112147" y="177274"/>
-                </a:lnTo>
-                <a:lnTo>
-                  <a:pt x="112849" y="177390"/>
-                </a:lnTo>
-                <a:lnTo>
-                  <a:pt x="113567" y="177459"/>
-                </a:lnTo>
-                <a:lnTo>
-                  <a:pt x="114300" y="177482"/>
-                </a:lnTo>
-                <a:close/>
-                <a:moveTo>
-                  <a:pt x="104775" y="131762"/>
-                </a:moveTo>
-                <a:lnTo>
-                  <a:pt x="123825" y="131762"/>
-                </a:lnTo>
-                <a:lnTo>
-                  <a:pt x="123825" y="48260"/>
-                </a:lnTo>
-                <a:lnTo>
-                  <a:pt x="104775" y="48260"/>
-                </a:lnTo>
-                <a:lnTo>
-                  <a:pt x="104775" y="131762"/>
-                </a:lnTo>
-                <a:close/>
-                <a:moveTo>
-                  <a:pt x="66675" y="228600"/>
-                </a:moveTo>
-                <a:lnTo>
-                  <a:pt x="0" y="161925"/>
-                </a:lnTo>
-                <a:lnTo>
-                  <a:pt x="0" y="66675"/>
-                </a:lnTo>
-                <a:lnTo>
-                  <a:pt x="66675" y="0"/>
-                </a:lnTo>
-                <a:lnTo>
-                  <a:pt x="161925" y="0"/>
-                </a:lnTo>
-                <a:lnTo>
-                  <a:pt x="228600" y="66675"/>
-                </a:lnTo>
-                <a:lnTo>
-                  <a:pt x="228600" y="161925"/>
-                </a:lnTo>
-                <a:lnTo>
-                  <a:pt x="161925" y="228600"/>
-                </a:lnTo>
-                <a:lnTo>
-                  <a:pt x="66675" y="228600"/>
-                </a:lnTo>
-                <a:close/>
-                <a:moveTo>
-                  <a:pt x="74612" y="209550"/>
-                </a:moveTo>
-                <a:lnTo>
-                  <a:pt x="153988" y="209550"/>
-                </a:lnTo>
-                <a:lnTo>
-                  <a:pt x="209550" y="153988"/>
-                </a:lnTo>
-                <a:lnTo>
-                  <a:pt x="209550" y="74612"/>
-                </a:lnTo>
-                <a:lnTo>
-                  <a:pt x="153988" y="19050"/>
-                </a:lnTo>
-                <a:lnTo>
-                  <a:pt x="74612" y="19050"/>
-                </a:lnTo>
-                <a:lnTo>
-                  <a:pt x="19050" y="74612"/>
-                </a:lnTo>
-                <a:lnTo>
-                  <a:pt x="19050" y="153988"/>
-                </a:lnTo>
-                <a:lnTo>
-                  <a:pt x="74612" y="209550"/>
-                </a:lnTo>
-                <a:close/>
-              </a:path>
-            </a:pathLst>
-          </a:custGeom>
-          <a:solidFill>
-            <a:srgbClr val="164B8C"/>
-          </a:solidFill>
-          <a:ln>
-            <a:noFill/>
-          </a:ln>
-        </p:spPr>
-        <p:txBody>
-          <a:bodyPr rtlCol="0" anchor="ctr"/>
-          <a:lstStyle/>
-          <a:p>
-            <a:pPr algn="ctr"/>
-          </a:p>
-        </p:txBody>
-      </p:sp>
-      <p:sp>
-        <p:nvSpPr>
-          <p:cNvPr id="36" name="블록 PLANNED"/>
-          <p:cNvSpPr/>
-          <p:nvPr/>
-        </p:nvSpPr>
-        <p:spPr>
-          <a:xfrm>
-            <a:off x="716280" y="4739640"/>
-            <a:ext cx="1295400" cy="579120"/>
-          </a:xfrm>
-          <a:prstGeom prst="roundRect">
-            <a:avLst>
-              <a:gd name="adj" fmla="val 15789"/>
-            </a:avLst>
-          </a:prstGeom>
-          <a:solidFill>
-            <a:srgbClr val="FFFFFF"/>
-          </a:solidFill>
-          <a:ln w="12192">
-            <a:solidFill>
-              <a:srgbClr val="6F9BD1"/>
-            </a:solidFill>
-          </a:ln>
-        </p:spPr>
-        <p:txBody>
-          <a:bodyPr rtlCol="0" anchor="t" lIns="45720" tIns="95250" rIns="45720" bIns="0" wrap="none">
-            <a:noAutofit/>
-          </a:bodyPr>
-          <a:lstStyle/>
-          <a:p>
-            <a:pPr algn="ctr">
-              <a:lnSpc>
-                <a:spcPts val="1439"/>
-              </a:lnSpc>
-            </a:pPr>
-            <a:r>
-              <a:rPr sz="1140" b="1">
-                <a:solidFill>
-                  <a:srgbClr val="0A2342"/>
+                  <a:srgbClr val="0B3D2E"/>
                 </a:solidFill>
                 <a:latin typeface="Pretendard"/>
                 <a:ea typeface="Pretendard"/>
@@ -11796,11 +9471,11 @@
           <a:p>
             <a:pPr algn="ctr">
               <a:lnSpc>
-                <a:spcPts val="1140"/>
+                <a:spcPts val="1320"/>
               </a:lnSpc>
             </a:pPr>
             <a:r>
-              <a:rPr sz="869" b="0">
+              <a:rPr sz="1019" b="0">
                 <a:solidFill>
                   <a:srgbClr val="3F4E61"/>
                 </a:solidFill>
@@ -11815,44 +9490,44 @@
       </p:sp>
       <p:sp>
         <p:nvSpPr>
-          <p:cNvPr id="37" name="블록 SCHEMA_DONE"/>
+          <p:cNvPr id="34" name="블록 SCHEMA_DONE"/>
           <p:cNvSpPr/>
           <p:nvPr/>
         </p:nvSpPr>
         <p:spPr>
           <a:xfrm>
-            <a:off x="2286000" y="4739640"/>
-            <a:ext cx="1295400" cy="579120"/>
+            <a:off x="2164080" y="5593080"/>
+            <a:ext cx="1371600" cy="487680"/>
           </a:xfrm>
           <a:prstGeom prst="roundRect">
             <a:avLst>
-              <a:gd name="adj" fmla="val 15789"/>
+              <a:gd name="adj" fmla="val 18750"/>
             </a:avLst>
           </a:prstGeom>
           <a:solidFill>
             <a:srgbClr val="FFFFFF"/>
           </a:solidFill>
-          <a:ln w="12192">
+          <a:ln w="13716">
             <a:solidFill>
-              <a:srgbClr val="6F9BD1"/>
+              <a:srgbClr val="9DD3B8"/>
             </a:solidFill>
           </a:ln>
         </p:spPr>
         <p:txBody>
-          <a:bodyPr rtlCol="0" anchor="t" lIns="45720" tIns="95250" rIns="45720" bIns="0" wrap="none">
+          <a:bodyPr rtlCol="0" anchor="t" lIns="45720" tIns="30480" rIns="45720" bIns="0" wrap="none">
             <a:noAutofit/>
           </a:bodyPr>
           <a:lstStyle/>
           <a:p>
             <a:pPr algn="ctr">
               <a:lnSpc>
-                <a:spcPts val="1439"/>
+                <a:spcPts val="1560"/>
               </a:lnSpc>
             </a:pPr>
             <a:r>
-              <a:rPr sz="1140" b="1">
+              <a:rPr sz="1200" b="1">
                 <a:solidFill>
-                  <a:srgbClr val="0A2342"/>
+                  <a:srgbClr val="0B3D2E"/>
                 </a:solidFill>
                 <a:latin typeface="Pretendard"/>
                 <a:ea typeface="Pretendard"/>
@@ -11864,11 +9539,11 @@
           <a:p>
             <a:pPr algn="ctr">
               <a:lnSpc>
-                <a:spcPts val="1140"/>
+                <a:spcPts val="1320"/>
               </a:lnSpc>
             </a:pPr>
             <a:r>
-              <a:rPr sz="869" b="0">
+              <a:rPr sz="1019" b="0">
                 <a:solidFill>
                   <a:srgbClr val="3F4E61"/>
                 </a:solidFill>
@@ -11883,44 +9558,44 @@
       </p:sp>
       <p:sp>
         <p:nvSpPr>
-          <p:cNvPr id="38" name="블록 LOADING"/>
+          <p:cNvPr id="35" name="블록 LOADING"/>
           <p:cNvSpPr/>
           <p:nvPr/>
         </p:nvSpPr>
         <p:spPr>
           <a:xfrm>
-            <a:off x="3855720" y="4739640"/>
-            <a:ext cx="1295400" cy="579120"/>
+            <a:off x="3794760" y="5593080"/>
+            <a:ext cx="1371600" cy="487680"/>
           </a:xfrm>
           <a:prstGeom prst="roundRect">
             <a:avLst>
-              <a:gd name="adj" fmla="val 15789"/>
+              <a:gd name="adj" fmla="val 18750"/>
             </a:avLst>
           </a:prstGeom>
           <a:solidFill>
             <a:srgbClr val="FFFFFF"/>
           </a:solidFill>
-          <a:ln w="12192">
+          <a:ln w="13716">
             <a:solidFill>
-              <a:srgbClr val="6F9BD1"/>
+              <a:srgbClr val="9DD3B8"/>
             </a:solidFill>
           </a:ln>
         </p:spPr>
         <p:txBody>
-          <a:bodyPr rtlCol="0" anchor="t" lIns="45720" tIns="95250" rIns="45720" bIns="0" wrap="none">
+          <a:bodyPr rtlCol="0" anchor="t" lIns="45720" tIns="30480" rIns="45720" bIns="0" wrap="none">
             <a:noAutofit/>
           </a:bodyPr>
           <a:lstStyle/>
           <a:p>
             <a:pPr algn="ctr">
               <a:lnSpc>
-                <a:spcPts val="1439"/>
+                <a:spcPts val="1560"/>
               </a:lnSpc>
             </a:pPr>
             <a:r>
-              <a:rPr sz="1140" b="1">
+              <a:rPr sz="1200" b="1">
                 <a:solidFill>
-                  <a:srgbClr val="0A2342"/>
+                  <a:srgbClr val="0B3D2E"/>
                 </a:solidFill>
                 <a:latin typeface="Pretendard"/>
                 <a:ea typeface="Pretendard"/>
@@ -11932,11 +9607,11 @@
           <a:p>
             <a:pPr algn="ctr">
               <a:lnSpc>
-                <a:spcPts val="1140"/>
+                <a:spcPts val="1320"/>
               </a:lnSpc>
             </a:pPr>
             <a:r>
-              <a:rPr sz="869" b="0">
+              <a:rPr sz="1019" b="0">
                 <a:solidFill>
                   <a:srgbClr val="3F4E61"/>
                 </a:solidFill>
@@ -11951,44 +9626,44 @@
       </p:sp>
       <p:sp>
         <p:nvSpPr>
-          <p:cNvPr id="39" name="블록 SYNCING"/>
+          <p:cNvPr id="36" name="블록 SYNCING"/>
           <p:cNvSpPr/>
           <p:nvPr/>
         </p:nvSpPr>
         <p:spPr>
           <a:xfrm>
-            <a:off x="5425440" y="4739640"/>
-            <a:ext cx="1295400" cy="579120"/>
+            <a:off x="5425440" y="5593080"/>
+            <a:ext cx="1371600" cy="487680"/>
           </a:xfrm>
           <a:prstGeom prst="roundRect">
             <a:avLst>
-              <a:gd name="adj" fmla="val 15789"/>
+              <a:gd name="adj" fmla="val 18750"/>
             </a:avLst>
           </a:prstGeom>
           <a:solidFill>
-            <a:srgbClr val="D3E5F8"/>
+            <a:srgbClr val="FFFFFF"/>
           </a:solidFill>
-          <a:ln w="18288">
+          <a:ln w="13716">
             <a:solidFill>
-              <a:srgbClr val="0F3C78"/>
+              <a:srgbClr val="9DD3B8"/>
             </a:solidFill>
           </a:ln>
         </p:spPr>
         <p:txBody>
-          <a:bodyPr rtlCol="0" anchor="t" lIns="45720" tIns="95250" rIns="45720" bIns="0" wrap="none">
+          <a:bodyPr rtlCol="0" anchor="t" lIns="45720" tIns="30480" rIns="45720" bIns="0" wrap="none">
             <a:noAutofit/>
           </a:bodyPr>
           <a:lstStyle/>
           <a:p>
             <a:pPr algn="ctr">
               <a:lnSpc>
-                <a:spcPts val="1439"/>
+                <a:spcPts val="1560"/>
               </a:lnSpc>
             </a:pPr>
             <a:r>
-              <a:rPr sz="1140" b="1">
+              <a:rPr sz="1200" b="1">
                 <a:solidFill>
-                  <a:srgbClr val="0A2342"/>
+                  <a:srgbClr val="0B3D2E"/>
                 </a:solidFill>
                 <a:latin typeface="Pretendard"/>
                 <a:ea typeface="Pretendard"/>
@@ -12000,11 +9675,11 @@
           <a:p>
             <a:pPr algn="ctr">
               <a:lnSpc>
-                <a:spcPts val="1140"/>
+                <a:spcPts val="1320"/>
               </a:lnSpc>
             </a:pPr>
             <a:r>
-              <a:rPr sz="869" b="0">
+              <a:rPr sz="1019" b="0">
                 <a:solidFill>
                   <a:srgbClr val="3F4E61"/>
                 </a:solidFill>
@@ -12019,44 +9694,44 @@
       </p:sp>
       <p:sp>
         <p:nvSpPr>
-          <p:cNvPr id="40" name="블록 CUTOVER"/>
+          <p:cNvPr id="37" name="블록 CUTOVER"/>
           <p:cNvSpPr/>
           <p:nvPr/>
         </p:nvSpPr>
         <p:spPr>
           <a:xfrm>
-            <a:off x="6995160" y="4739640"/>
-            <a:ext cx="1295400" cy="579120"/>
+            <a:off x="7056120" y="5593080"/>
+            <a:ext cx="1371600" cy="487680"/>
           </a:xfrm>
           <a:prstGeom prst="roundRect">
             <a:avLst>
-              <a:gd name="adj" fmla="val 15789"/>
+              <a:gd name="adj" fmla="val 18750"/>
             </a:avLst>
           </a:prstGeom>
           <a:solidFill>
-            <a:srgbClr val="D3E5F8"/>
+            <a:srgbClr val="FFFFFF"/>
           </a:solidFill>
-          <a:ln w="18288">
+          <a:ln w="13716">
             <a:solidFill>
-              <a:srgbClr val="0F3C78"/>
+              <a:srgbClr val="9DD3B8"/>
             </a:solidFill>
           </a:ln>
         </p:spPr>
         <p:txBody>
-          <a:bodyPr rtlCol="0" anchor="t" lIns="45720" tIns="95250" rIns="45720" bIns="0" wrap="none">
+          <a:bodyPr rtlCol="0" anchor="t" lIns="45720" tIns="30480" rIns="45720" bIns="0" wrap="none">
             <a:noAutofit/>
           </a:bodyPr>
           <a:lstStyle/>
           <a:p>
             <a:pPr algn="ctr">
               <a:lnSpc>
-                <a:spcPts val="1439"/>
+                <a:spcPts val="1560"/>
               </a:lnSpc>
             </a:pPr>
             <a:r>
-              <a:rPr sz="1140" b="1">
+              <a:rPr sz="1200" b="1">
                 <a:solidFill>
-                  <a:srgbClr val="0A2342"/>
+                  <a:srgbClr val="0B3D2E"/>
                 </a:solidFill>
                 <a:latin typeface="Pretendard"/>
                 <a:ea typeface="Pretendard"/>
@@ -12068,11 +9743,11 @@
           <a:p>
             <a:pPr algn="ctr">
               <a:lnSpc>
-                <a:spcPts val="1140"/>
+                <a:spcPts val="1320"/>
               </a:lnSpc>
             </a:pPr>
             <a:r>
-              <a:rPr sz="869" b="0">
+              <a:rPr sz="1019" b="0">
                 <a:solidFill>
                   <a:srgbClr val="3F4E61"/>
                 </a:solidFill>
@@ -12087,44 +9762,44 @@
       </p:sp>
       <p:sp>
         <p:nvSpPr>
-          <p:cNvPr id="41" name="블록 VERIFIED"/>
+          <p:cNvPr id="38" name="블록 VERIFIED"/>
           <p:cNvSpPr/>
           <p:nvPr/>
         </p:nvSpPr>
         <p:spPr>
           <a:xfrm>
-            <a:off x="8564880" y="4739640"/>
-            <a:ext cx="1295400" cy="579120"/>
+            <a:off x="8686800" y="5593080"/>
+            <a:ext cx="1371600" cy="487680"/>
           </a:xfrm>
           <a:prstGeom prst="roundRect">
             <a:avLst>
-              <a:gd name="adj" fmla="val 15789"/>
+              <a:gd name="adj" fmla="val 18750"/>
             </a:avLst>
           </a:prstGeom>
           <a:solidFill>
             <a:srgbClr val="FFFFFF"/>
           </a:solidFill>
-          <a:ln w="12192">
+          <a:ln w="13716">
             <a:solidFill>
-              <a:srgbClr val="6F9BD1"/>
+              <a:srgbClr val="9DD3B8"/>
             </a:solidFill>
           </a:ln>
         </p:spPr>
         <p:txBody>
-          <a:bodyPr rtlCol="0" anchor="t" lIns="45720" tIns="95250" rIns="45720" bIns="0" wrap="none">
+          <a:bodyPr rtlCol="0" anchor="t" lIns="45720" tIns="30480" rIns="45720" bIns="0" wrap="none">
             <a:noAutofit/>
           </a:bodyPr>
           <a:lstStyle/>
           <a:p>
             <a:pPr algn="ctr">
               <a:lnSpc>
-                <a:spcPts val="1439"/>
+                <a:spcPts val="1560"/>
               </a:lnSpc>
             </a:pPr>
             <a:r>
-              <a:rPr sz="1140" b="1">
+              <a:rPr sz="1200" b="1">
                 <a:solidFill>
-                  <a:srgbClr val="0A2342"/>
+                  <a:srgbClr val="0B3D2E"/>
                 </a:solidFill>
                 <a:latin typeface="Pretendard"/>
                 <a:ea typeface="Pretendard"/>
@@ -12136,11 +9811,11 @@
           <a:p>
             <a:pPr algn="ctr">
               <a:lnSpc>
-                <a:spcPts val="1140"/>
+                <a:spcPts val="1320"/>
               </a:lnSpc>
             </a:pPr>
             <a:r>
-              <a:rPr sz="869" b="0">
+              <a:rPr sz="1019" b="0">
                 <a:solidFill>
                   <a:srgbClr val="3F4E61"/>
                 </a:solidFill>
@@ -12155,44 +9830,44 @@
       </p:sp>
       <p:sp>
         <p:nvSpPr>
-          <p:cNvPr id="42" name="블록 DONE"/>
+          <p:cNvPr id="39" name="블록 DONE"/>
           <p:cNvSpPr/>
           <p:nvPr/>
         </p:nvSpPr>
         <p:spPr>
           <a:xfrm>
-            <a:off x="10134600" y="4739640"/>
-            <a:ext cx="1295400" cy="579120"/>
+            <a:off x="10317480" y="5593080"/>
+            <a:ext cx="1371600" cy="487680"/>
           </a:xfrm>
           <a:prstGeom prst="roundRect">
             <a:avLst>
-              <a:gd name="adj" fmla="val 15789"/>
+              <a:gd name="adj" fmla="val 18750"/>
             </a:avLst>
           </a:prstGeom>
           <a:solidFill>
             <a:srgbClr val="FFFFFF"/>
           </a:solidFill>
-          <a:ln w="12192">
+          <a:ln w="13716">
             <a:solidFill>
-              <a:srgbClr val="6F9BD1"/>
+              <a:srgbClr val="9DD3B8"/>
             </a:solidFill>
           </a:ln>
         </p:spPr>
         <p:txBody>
-          <a:bodyPr rtlCol="0" anchor="t" lIns="45720" tIns="95250" rIns="45720" bIns="0" wrap="none">
+          <a:bodyPr rtlCol="0" anchor="t" lIns="45720" tIns="30480" rIns="45720" bIns="0" wrap="none">
             <a:noAutofit/>
           </a:bodyPr>
           <a:lstStyle/>
           <a:p>
             <a:pPr algn="ctr">
               <a:lnSpc>
-                <a:spcPts val="1439"/>
+                <a:spcPts val="1560"/>
               </a:lnSpc>
             </a:pPr>
             <a:r>
-              <a:rPr sz="1140" b="1">
+              <a:rPr sz="1200" b="1">
                 <a:solidFill>
-                  <a:srgbClr val="0A2342"/>
+                  <a:srgbClr val="0B3D2E"/>
                 </a:solidFill>
                 <a:latin typeface="Pretendard"/>
                 <a:ea typeface="Pretendard"/>
@@ -12204,11 +9879,11 @@
           <a:p>
             <a:pPr algn="ctr">
               <a:lnSpc>
-                <a:spcPts val="1140"/>
+                <a:spcPts val="1320"/>
               </a:lnSpc>
             </a:pPr>
             <a:r>
-              <a:rPr sz="869" b="0">
+              <a:rPr sz="1019" b="0">
                 <a:solidFill>
                   <a:srgbClr val="3F4E61"/>
                 </a:solidFill>
@@ -12223,24 +9898,24 @@
       </p:sp>
       <p:cxnSp>
         <p:nvCxnSpPr>
-          <p:cNvPr id="43" name="연결 s1→s2"/>
+          <p:cNvPr id="40" name="연결 start→s1"/>
           <p:cNvCxnSpPr>
             <a:stCxn id="9" idx="3"/>
-            <a:endCxn id="12" idx="1"/>
+            <a:endCxn id="10" idx="1"/>
           </p:cNvCxnSpPr>
           <p:nvPr/>
         </p:nvCxnSpPr>
         <p:spPr>
           <a:xfrm>
-            <a:off x="1874520" y="2133600"/>
-            <a:ext cx="167640" cy="0"/>
+            <a:off x="1859280" y="1981200"/>
+            <a:ext cx="502920" cy="0"/>
           </a:xfrm>
           <a:prstGeom prst="line">
             <a:avLst/>
           </a:prstGeom>
           <a:ln w="16764">
             <a:solidFill>
-              <a:srgbClr val="164B8C"/>
+              <a:srgbClr val="1E6B4F"/>
             </a:solidFill>
             <a:tailEnd type="triangle" w="med" len="med"/>
           </a:ln>
@@ -12248,24 +9923,24 @@
       </p:cxnSp>
       <p:cxnSp>
         <p:nvCxnSpPr>
-          <p:cNvPr id="44" name="연결 s2→s3"/>
+          <p:cNvPr id="41" name="연결 s1→s2"/>
           <p:cNvCxnSpPr>
-            <a:stCxn id="12" idx="3"/>
-            <a:endCxn id="15" idx="1"/>
+            <a:stCxn id="10" idx="3"/>
+            <a:endCxn id="13" idx="1"/>
           </p:cNvCxnSpPr>
           <p:nvPr/>
         </p:nvCxnSpPr>
         <p:spPr>
           <a:xfrm>
-            <a:off x="3459480" y="2133600"/>
-            <a:ext cx="167640" cy="0"/>
+            <a:off x="4191000" y="1981200"/>
+            <a:ext cx="533400" cy="0"/>
           </a:xfrm>
           <a:prstGeom prst="line">
             <a:avLst/>
           </a:prstGeom>
           <a:ln w="16764">
             <a:solidFill>
-              <a:srgbClr val="164B8C"/>
+              <a:srgbClr val="1E6B4F"/>
             </a:solidFill>
             <a:tailEnd type="triangle" w="med" len="med"/>
           </a:ln>
@@ -12273,24 +9948,24 @@
       </p:cxnSp>
       <p:cxnSp>
         <p:nvCxnSpPr>
-          <p:cNvPr id="45" name="연결 s3→s4"/>
+          <p:cNvPr id="42" name="연결 s2→s3"/>
           <p:cNvCxnSpPr>
-            <a:stCxn id="15" idx="3"/>
-            <a:endCxn id="18" idx="1"/>
+            <a:stCxn id="13" idx="3"/>
+            <a:endCxn id="16" idx="1"/>
           </p:cNvCxnSpPr>
           <p:nvPr/>
         </p:nvCxnSpPr>
         <p:spPr>
           <a:xfrm>
-            <a:off x="5044440" y="2133600"/>
-            <a:ext cx="457200" cy="0"/>
+            <a:off x="6553200" y="1981200"/>
+            <a:ext cx="533400" cy="0"/>
           </a:xfrm>
           <a:prstGeom prst="line">
             <a:avLst/>
           </a:prstGeom>
           <a:ln w="16764">
             <a:solidFill>
-              <a:srgbClr val="164B8C"/>
+              <a:srgbClr val="1E6B4F"/>
             </a:solidFill>
             <a:tailEnd type="triangle" w="med" len="med"/>
           </a:ln>
@@ -12298,24 +9973,24 @@
       </p:cxnSp>
       <p:cxnSp>
         <p:nvCxnSpPr>
-          <p:cNvPr id="46" name="연결 s4→s5"/>
+          <p:cNvPr id="43" name="연결 s3→a1"/>
           <p:cNvCxnSpPr>
-            <a:stCxn id="18" idx="3"/>
-            <a:endCxn id="21" idx="1"/>
+            <a:stCxn id="16" idx="3"/>
+            <a:endCxn id="19" idx="2"/>
           </p:cNvCxnSpPr>
           <p:nvPr/>
         </p:nvCxnSpPr>
         <p:spPr>
           <a:xfrm>
-            <a:off x="6918960" y="2133600"/>
-            <a:ext cx="167640" cy="0"/>
+            <a:off x="8915400" y="1981200"/>
+            <a:ext cx="609600" cy="0"/>
           </a:xfrm>
           <a:prstGeom prst="line">
             <a:avLst/>
           </a:prstGeom>
           <a:ln w="16764">
             <a:solidFill>
-              <a:srgbClr val="164B8C"/>
+              <a:srgbClr val="1E6B4F"/>
             </a:solidFill>
             <a:tailEnd type="triangle" w="med" len="med"/>
           </a:ln>
@@ -12323,7 +9998,32 @@
       </p:cxnSp>
       <p:cxnSp>
         <p:nvCxnSpPr>
-          <p:cNvPr id="47" name="연결 s5→s6"/>
+          <p:cNvPr id="44" name="연결 a2→s4"/>
+          <p:cNvCxnSpPr>
+            <a:stCxn id="20" idx="6"/>
+            <a:endCxn id="21" idx="1"/>
+          </p:cNvCxnSpPr>
+          <p:nvPr/>
+        </p:nvCxnSpPr>
+        <p:spPr>
+          <a:xfrm>
+            <a:off x="899160" y="3642360"/>
+            <a:ext cx="396240" cy="0"/>
+          </a:xfrm>
+          <a:prstGeom prst="line">
+            <a:avLst/>
+          </a:prstGeom>
+          <a:ln w="16764">
+            <a:solidFill>
+              <a:srgbClr val="1E6B4F"/>
+            </a:solidFill>
+            <a:tailEnd type="triangle" w="med" len="med"/>
+          </a:ln>
+        </p:spPr>
+      </p:cxnSp>
+      <p:cxnSp>
+        <p:nvCxnSpPr>
+          <p:cNvPr id="45" name="연결 s4→s5"/>
           <p:cNvCxnSpPr>
             <a:stCxn id="21" idx="3"/>
             <a:endCxn id="24" idx="1"/>
@@ -12332,15 +10032,15 @@
         </p:nvCxnSpPr>
         <p:spPr>
           <a:xfrm>
-            <a:off x="8503920" y="2133600"/>
-            <a:ext cx="167640" cy="0"/>
+            <a:off x="3124200" y="3642360"/>
+            <a:ext cx="457200" cy="0"/>
           </a:xfrm>
           <a:prstGeom prst="line">
             <a:avLst/>
           </a:prstGeom>
           <a:ln w="16764">
             <a:solidFill>
-              <a:srgbClr val="164B8C"/>
+              <a:srgbClr val="1E6B4F"/>
             </a:solidFill>
             <a:tailEnd type="triangle" w="med" len="med"/>
           </a:ln>
@@ -12348,7 +10048,7 @@
       </p:cxnSp>
       <p:cxnSp>
         <p:nvCxnSpPr>
-          <p:cNvPr id="48" name="연결 s6→s7"/>
+          <p:cNvPr id="46" name="연결 s5→chk"/>
           <p:cNvCxnSpPr>
             <a:stCxn id="24" idx="3"/>
             <a:endCxn id="27" idx="1"/>
@@ -12357,15 +10057,15 @@
         </p:nvCxnSpPr>
         <p:spPr>
           <a:xfrm>
-            <a:off x="10088880" y="2133600"/>
-            <a:ext cx="167640" cy="0"/>
+            <a:off x="5410200" y="3642360"/>
+            <a:ext cx="457200" cy="0"/>
           </a:xfrm>
           <a:prstGeom prst="line">
             <a:avLst/>
           </a:prstGeom>
           <a:ln w="16764">
             <a:solidFill>
-              <a:srgbClr val="164B8C"/>
+              <a:srgbClr val="1E6B4F"/>
             </a:solidFill>
             <a:tailEnd type="triangle" w="med" len="med"/>
           </a:ln>
@@ -12373,39 +10073,39 @@
       </p:cxnSp>
       <p:cxnSp>
         <p:nvCxnSpPr>
-          <p:cNvPr id="49" name="연결 writes→s3"/>
+          <p:cNvPr id="47" name="연결 chk→s7"/>
           <p:cNvCxnSpPr>
-            <a:endCxn id="15" idx="2"/>
+            <a:stCxn id="27" idx="3"/>
+            <a:endCxn id="28" idx="1"/>
           </p:cNvCxnSpPr>
           <p:nvPr/>
         </p:nvCxnSpPr>
         <p:spPr>
-          <a:xfrm flipV="1">
-            <a:off x="4335780" y="2705100"/>
-            <a:ext cx="0" cy="495300"/>
+          <a:xfrm>
+            <a:off x="7772400" y="3642360"/>
+            <a:ext cx="457200" cy="0"/>
           </a:xfrm>
           <a:prstGeom prst="line">
             <a:avLst/>
           </a:prstGeom>
           <a:ln w="16764">
             <a:solidFill>
-              <a:srgbClr val="1F74C4"/>
+              <a:srgbClr val="1E6B4F"/>
             </a:solidFill>
-            <a:prstDash val="dash"/>
             <a:tailEnd type="triangle" w="med" len="med"/>
           </a:ln>
         </p:spPr>
       </p:cxnSp>
       <p:sp>
         <p:nvSpPr>
-          <p:cNvPr id="50" name="라벨 CDC 로 따라감"/>
+          <p:cNvPr id="48" name="라벨 예"/>
           <p:cNvSpPr txBox="1"/>
           <p:nvPr/>
         </p:nvSpPr>
         <p:spPr>
           <a:xfrm>
-            <a:off x="4381500" y="2868930"/>
-            <a:ext cx="811530" cy="167640"/>
+            <a:off x="7890510" y="3421380"/>
+            <a:ext cx="220980" cy="190500"/>
           </a:xfrm>
           <a:prstGeom prst="rect">
             <a:avLst/>
@@ -12422,54 +10122,80 @@
           <a:p>
             <a:pPr algn="ctr"/>
             <a:r>
-              <a:rPr sz="840" b="1">
+              <a:rPr sz="1019" b="1">
                 <a:solidFill>
-                  <a:srgbClr val="1F74C4"/>
+                  <a:srgbClr val="1E6B4F"/>
                 </a:solidFill>
                 <a:latin typeface="Pretendard"/>
                 <a:ea typeface="Pretendard"/>
                 <a:cs typeface="Pretendard"/>
               </a:rPr>
-              <a:t>CDC 로 따라감</a:t>
+              <a:t>예</a:t>
             </a:r>
           </a:p>
         </p:txBody>
       </p:sp>
       <p:cxnSp>
         <p:nvCxnSpPr>
-          <p:cNvPr id="51" name="연결 s6→stop"/>
+          <p:cNvPr id="49" name="연결 s7→end"/>
           <p:cNvCxnSpPr>
-            <a:stCxn id="24" idx="2"/>
-            <a:endCxn id="34" idx="0"/>
+            <a:stCxn id="28" idx="3"/>
+            <a:endCxn id="31" idx="1"/>
           </p:cNvCxnSpPr>
           <p:nvPr/>
         </p:nvCxnSpPr>
         <p:spPr>
           <a:xfrm>
-            <a:off x="9380220" y="2705100"/>
-            <a:ext cx="0" cy="220980"/>
+            <a:off x="10058400" y="3642360"/>
+            <a:ext cx="457200" cy="0"/>
           </a:xfrm>
           <a:prstGeom prst="line">
             <a:avLst/>
           </a:prstGeom>
           <a:ln w="16764">
             <a:solidFill>
-              <a:srgbClr val="164B8C"/>
+              <a:srgbClr val="1E6B4F"/>
             </a:solidFill>
+            <a:tailEnd type="triangle" w="med" len="med"/>
+          </a:ln>
+        </p:spPr>
+      </p:cxnSp>
+      <p:cxnSp>
+        <p:nvCxnSpPr>
+          <p:cNvPr id="50" name="연결 chk→stop"/>
+          <p:cNvCxnSpPr>
+            <a:stCxn id="27" idx="2"/>
+            <a:endCxn id="32" idx="0"/>
+          </p:cNvCxnSpPr>
+          <p:nvPr/>
+        </p:nvCxnSpPr>
+        <p:spPr>
+          <a:xfrm>
+            <a:off x="6819900" y="4099560"/>
+            <a:ext cx="0" cy="228600"/>
+          </a:xfrm>
+          <a:prstGeom prst="line">
+            <a:avLst/>
+          </a:prstGeom>
+          <a:ln w="16764">
+            <a:solidFill>
+              <a:srgbClr val="2E9E6E"/>
+            </a:solidFill>
+            <a:prstDash val="dash"/>
             <a:tailEnd type="triangle" w="med" len="med"/>
           </a:ln>
         </p:spPr>
       </p:cxnSp>
       <p:sp>
         <p:nvSpPr>
-          <p:cNvPr id="52" name="라벨 불일치"/>
+          <p:cNvPr id="51" name="라벨 아니오"/>
           <p:cNvSpPr txBox="1"/>
           <p:nvPr/>
         </p:nvSpPr>
         <p:spPr>
           <a:xfrm>
-            <a:off x="9425940" y="2731770"/>
-            <a:ext cx="411480" cy="167640"/>
+            <a:off x="6865620" y="4118610"/>
+            <a:ext cx="480060" cy="190500"/>
           </a:xfrm>
           <a:prstGeom prst="rect">
             <a:avLst/>
@@ -12486,22 +10212,162 @@
           <a:p>
             <a:pPr algn="ctr"/>
             <a:r>
-              <a:rPr sz="840" b="1">
+              <a:rPr sz="1019" b="1">
                 <a:solidFill>
-                  <a:srgbClr val="164B8C"/>
+                  <a:srgbClr val="2E9E6E"/>
                 </a:solidFill>
                 <a:latin typeface="Pretendard"/>
                 <a:ea typeface="Pretendard"/>
                 <a:cs typeface="Pretendard"/>
               </a:rPr>
-              <a:t>불일치</a:t>
+              <a:t>아니오</a:t>
             </a:r>
           </a:p>
         </p:txBody>
       </p:sp>
       <p:cxnSp>
         <p:nvCxnSpPr>
-          <p:cNvPr id="53" name="연결 st0→st1"/>
+          <p:cNvPr id="52" name="연결 stop→s5"/>
+          <p:cNvCxnSpPr>
+            <a:stCxn id="32" idx="1"/>
+            <a:endCxn id="24" idx="2"/>
+          </p:cNvCxnSpPr>
+          <p:nvPr/>
+        </p:nvCxnSpPr>
+        <p:spPr>
+          <a:xfrm flipH="1" flipV="1">
+            <a:off x="4495800" y="4053840"/>
+            <a:ext cx="1371600" cy="495300"/>
+          </a:xfrm>
+          <a:prstGeom prst="bentConnector3">
+            <a:avLst/>
+          </a:prstGeom>
+          <a:ln w="16764">
+            <a:solidFill>
+              <a:srgbClr val="2E9E6E"/>
+            </a:solidFill>
+            <a:prstDash val="dash"/>
+            <a:tailEnd type="triangle" w="med" len="med"/>
+          </a:ln>
+        </p:spPr>
+      </p:cxnSp>
+      <p:sp>
+        <p:nvSpPr>
+          <p:cNvPr id="53" name="라벨 원인 수정 후 다시"/>
+          <p:cNvSpPr txBox="1"/>
+          <p:nvPr/>
+        </p:nvSpPr>
+        <p:spPr>
+          <a:xfrm>
+            <a:off x="4575620" y="4328160"/>
+            <a:ext cx="1211961" cy="190500"/>
+          </a:xfrm>
+          <a:prstGeom prst="rect">
+            <a:avLst/>
+          </a:prstGeom>
+          <a:solidFill>
+            <a:srgbClr val="FFFFFF"/>
+          </a:solidFill>
+        </p:spPr>
+        <p:txBody>
+          <a:bodyPr wrap="square" lIns="0" tIns="0" rIns="0" bIns="0" anchor="ctr">
+            <a:noAutofit/>
+          </a:bodyPr>
+          <a:lstStyle/>
+          <a:p>
+            <a:pPr algn="ctr"/>
+            <a:r>
+              <a:rPr sz="1019" b="1">
+                <a:solidFill>
+                  <a:srgbClr val="2E9E6E"/>
+                </a:solidFill>
+                <a:latin typeface="Pretendard"/>
+                <a:ea typeface="Pretendard"/>
+                <a:cs typeface="Pretendard"/>
+              </a:rPr>
+              <a:t>원인 수정 후 다시</a:t>
+            </a:r>
+          </a:p>
+        </p:txBody>
+      </p:sp>
+      <p:cxnSp>
+        <p:nvCxnSpPr>
+          <p:cNvPr id="54" name="연결 st0→st1"/>
+          <p:cNvCxnSpPr>
+            <a:stCxn id="33" idx="3"/>
+            <a:endCxn id="34" idx="1"/>
+          </p:cNvCxnSpPr>
+          <p:nvPr/>
+        </p:nvCxnSpPr>
+        <p:spPr>
+          <a:xfrm>
+            <a:off x="1905000" y="5836920"/>
+            <a:ext cx="259080" cy="0"/>
+          </a:xfrm>
+          <a:prstGeom prst="line">
+            <a:avLst/>
+          </a:prstGeom>
+          <a:ln w="16764">
+            <a:solidFill>
+              <a:srgbClr val="1E6B4F"/>
+            </a:solidFill>
+            <a:tailEnd type="triangle" w="med" len="med"/>
+          </a:ln>
+        </p:spPr>
+      </p:cxnSp>
+      <p:cxnSp>
+        <p:nvCxnSpPr>
+          <p:cNvPr id="55" name="연결 st1→st2"/>
+          <p:cNvCxnSpPr>
+            <a:stCxn id="34" idx="3"/>
+            <a:endCxn id="35" idx="1"/>
+          </p:cNvCxnSpPr>
+          <p:nvPr/>
+        </p:nvCxnSpPr>
+        <p:spPr>
+          <a:xfrm>
+            <a:off x="3535680" y="5836920"/>
+            <a:ext cx="259080" cy="0"/>
+          </a:xfrm>
+          <a:prstGeom prst="line">
+            <a:avLst/>
+          </a:prstGeom>
+          <a:ln w="16764">
+            <a:solidFill>
+              <a:srgbClr val="1E6B4F"/>
+            </a:solidFill>
+            <a:tailEnd type="triangle" w="med" len="med"/>
+          </a:ln>
+        </p:spPr>
+      </p:cxnSp>
+      <p:cxnSp>
+        <p:nvCxnSpPr>
+          <p:cNvPr id="56" name="연결 st2→st3"/>
+          <p:cNvCxnSpPr>
+            <a:stCxn id="35" idx="3"/>
+            <a:endCxn id="36" idx="1"/>
+          </p:cNvCxnSpPr>
+          <p:nvPr/>
+        </p:nvCxnSpPr>
+        <p:spPr>
+          <a:xfrm>
+            <a:off x="5166360" y="5836920"/>
+            <a:ext cx="259080" cy="0"/>
+          </a:xfrm>
+          <a:prstGeom prst="line">
+            <a:avLst/>
+          </a:prstGeom>
+          <a:ln w="16764">
+            <a:solidFill>
+              <a:srgbClr val="1E6B4F"/>
+            </a:solidFill>
+            <a:tailEnd type="triangle" w="med" len="med"/>
+          </a:ln>
+        </p:spPr>
+      </p:cxnSp>
+      <p:cxnSp>
+        <p:nvCxnSpPr>
+          <p:cNvPr id="57" name="연결 st3→st4"/>
           <p:cNvCxnSpPr>
             <a:stCxn id="36" idx="3"/>
             <a:endCxn id="37" idx="1"/>
@@ -12510,15 +10376,15 @@
         </p:nvCxnSpPr>
         <p:spPr>
           <a:xfrm>
-            <a:off x="2011680" y="5029200"/>
-            <a:ext cx="274320" cy="0"/>
+            <a:off x="6797040" y="5836920"/>
+            <a:ext cx="259080" cy="0"/>
           </a:xfrm>
           <a:prstGeom prst="line">
             <a:avLst/>
           </a:prstGeom>
           <a:ln w="16764">
             <a:solidFill>
-              <a:srgbClr val="164B8C"/>
+              <a:srgbClr val="1E6B4F"/>
             </a:solidFill>
             <a:tailEnd type="triangle" w="med" len="med"/>
           </a:ln>
@@ -12526,7 +10392,7 @@
       </p:cxnSp>
       <p:cxnSp>
         <p:nvCxnSpPr>
-          <p:cNvPr id="54" name="연결 st1→st2"/>
+          <p:cNvPr id="58" name="연결 st4→st5"/>
           <p:cNvCxnSpPr>
             <a:stCxn id="37" idx="3"/>
             <a:endCxn id="38" idx="1"/>
@@ -12535,15 +10401,15 @@
         </p:nvCxnSpPr>
         <p:spPr>
           <a:xfrm>
-            <a:off x="3581400" y="5029200"/>
-            <a:ext cx="274320" cy="0"/>
+            <a:off x="8427720" y="5836920"/>
+            <a:ext cx="259080" cy="0"/>
           </a:xfrm>
           <a:prstGeom prst="line">
             <a:avLst/>
           </a:prstGeom>
           <a:ln w="16764">
             <a:solidFill>
-              <a:srgbClr val="164B8C"/>
+              <a:srgbClr val="1E6B4F"/>
             </a:solidFill>
             <a:tailEnd type="triangle" w="med" len="med"/>
           </a:ln>
@@ -12551,7 +10417,7 @@
       </p:cxnSp>
       <p:cxnSp>
         <p:nvCxnSpPr>
-          <p:cNvPr id="55" name="연결 st2→st3"/>
+          <p:cNvPr id="59" name="연결 st5→st6"/>
           <p:cNvCxnSpPr>
             <a:stCxn id="38" idx="3"/>
             <a:endCxn id="39" idx="1"/>
@@ -12560,90 +10426,15 @@
         </p:nvCxnSpPr>
         <p:spPr>
           <a:xfrm>
-            <a:off x="5151120" y="5029200"/>
-            <a:ext cx="274320" cy="0"/>
+            <a:off x="10058400" y="5836920"/>
+            <a:ext cx="259080" cy="0"/>
           </a:xfrm>
           <a:prstGeom prst="line">
             <a:avLst/>
           </a:prstGeom>
           <a:ln w="16764">
             <a:solidFill>
-              <a:srgbClr val="164B8C"/>
-            </a:solidFill>
-            <a:tailEnd type="triangle" w="med" len="med"/>
-          </a:ln>
-        </p:spPr>
-      </p:cxnSp>
-      <p:cxnSp>
-        <p:nvCxnSpPr>
-          <p:cNvPr id="56" name="연결 st3→st4"/>
-          <p:cNvCxnSpPr>
-            <a:stCxn id="39" idx="3"/>
-            <a:endCxn id="40" idx="1"/>
-          </p:cNvCxnSpPr>
-          <p:nvPr/>
-        </p:nvCxnSpPr>
-        <p:spPr>
-          <a:xfrm>
-            <a:off x="6720840" y="5029200"/>
-            <a:ext cx="274320" cy="0"/>
-          </a:xfrm>
-          <a:prstGeom prst="line">
-            <a:avLst/>
-          </a:prstGeom>
-          <a:ln w="16764">
-            <a:solidFill>
-              <a:srgbClr val="164B8C"/>
-            </a:solidFill>
-            <a:tailEnd type="triangle" w="med" len="med"/>
-          </a:ln>
-        </p:spPr>
-      </p:cxnSp>
-      <p:cxnSp>
-        <p:nvCxnSpPr>
-          <p:cNvPr id="57" name="연결 st4→st5"/>
-          <p:cNvCxnSpPr>
-            <a:stCxn id="40" idx="3"/>
-            <a:endCxn id="41" idx="1"/>
-          </p:cNvCxnSpPr>
-          <p:nvPr/>
-        </p:nvCxnSpPr>
-        <p:spPr>
-          <a:xfrm>
-            <a:off x="8290560" y="5029200"/>
-            <a:ext cx="274320" cy="0"/>
-          </a:xfrm>
-          <a:prstGeom prst="line">
-            <a:avLst/>
-          </a:prstGeom>
-          <a:ln w="16764">
-            <a:solidFill>
-              <a:srgbClr val="164B8C"/>
-            </a:solidFill>
-            <a:tailEnd type="triangle" w="med" len="med"/>
-          </a:ln>
-        </p:spPr>
-      </p:cxnSp>
-      <p:cxnSp>
-        <p:nvCxnSpPr>
-          <p:cNvPr id="58" name="연결 st5→st6"/>
-          <p:cNvCxnSpPr>
-            <a:stCxn id="41" idx="3"/>
-            <a:endCxn id="42" idx="1"/>
-          </p:cNvCxnSpPr>
-          <p:nvPr/>
-        </p:nvCxnSpPr>
-        <p:spPr>
-          <a:xfrm>
-            <a:off x="9860280" y="5029200"/>
-            <a:ext cx="274320" cy="0"/>
-          </a:xfrm>
-          <a:prstGeom prst="line">
-            <a:avLst/>
-          </a:prstGeom>
-          <a:ln w="16764">
-            <a:solidFill>
-              <a:srgbClr val="164B8C"/>
+              <a:srgbClr val="1E6B4F"/>
             </a:solidFill>
             <a:tailEnd type="triangle" w="med" len="med"/>
           </a:ln>
@@ -12651,14 +10442,14 @@
       </p:cxnSp>
       <p:sp>
         <p:nvSpPr>
-          <p:cNvPr id="59" name="범례"/>
+          <p:cNvPr id="60" name="범례"/>
           <p:cNvSpPr/>
           <p:nvPr/>
         </p:nvSpPr>
         <p:spPr>
           <a:xfrm>
             <a:off x="381000" y="6309360"/>
-            <a:ext cx="3442335" cy="396240"/>
+            <a:ext cx="3995928" cy="396240"/>
           </a:xfrm>
           <a:prstGeom prst="roundRect">
             <a:avLst>
@@ -12670,7 +10461,7 @@
           </a:solidFill>
           <a:ln w="10668">
             <a:solidFill>
-              <a:srgbClr val="A9C3E2"/>
+              <a:srgbClr val="9DD3B8"/>
             </a:solidFill>
           </a:ln>
         </p:spPr>
@@ -12684,7 +10475,7 @@
       </p:sp>
       <p:sp>
         <p:nvSpPr>
-          <p:cNvPr id="60" name="범례 제목"/>
+          <p:cNvPr id="61" name="범례 제목"/>
           <p:cNvSpPr txBox="1"/>
           <p:nvPr/>
         </p:nvSpPr>
@@ -12706,9 +10497,9 @@
           <a:p>
             <a:pPr algn="l"/>
             <a:r>
-              <a:rPr sz="900" b="1">
+              <a:rPr sz="1019" b="1">
                 <a:solidFill>
-                  <a:srgbClr val="0A2342"/>
+                  <a:srgbClr val="0B3D2E"/>
                 </a:solidFill>
                 <a:latin typeface="Pretendard"/>
                 <a:ea typeface="Pretendard"/>
@@ -12721,7 +10512,7 @@
       </p:sp>
       <p:cxnSp>
         <p:nvCxnSpPr>
-          <p:cNvPr id="61" name="범례 실시간 질의"/>
+          <p:cNvPr id="62" name="범례 처리 순서"/>
           <p:cNvCxnSpPr/>
           <p:nvPr/>
         </p:nvCxnSpPr>
@@ -12735,7 +10526,7 @@
           </a:prstGeom>
           <a:ln w="16764">
             <a:solidFill>
-              <a:srgbClr val="164B8C"/>
+              <a:srgbClr val="1E6B4F"/>
             </a:solidFill>
             <a:tailEnd type="triangle" w="med" len="med"/>
           </a:ln>
@@ -12743,14 +10534,14 @@
       </p:cxnSp>
       <p:sp>
         <p:nvSpPr>
-          <p:cNvPr id="62" name="범례 글 실시간 질의"/>
+          <p:cNvPr id="63" name="범례 글 처리 순서"/>
           <p:cNvSpPr txBox="1"/>
           <p:nvPr/>
         </p:nvSpPr>
         <p:spPr>
           <a:xfrm>
             <a:off x="1341120" y="6309360"/>
-            <a:ext cx="786765" cy="396240"/>
+            <a:ext cx="741807" cy="396240"/>
           </a:xfrm>
           <a:prstGeom prst="rect">
             <a:avLst/>
@@ -12765,7 +10556,7 @@
           <a:p>
             <a:pPr algn="l"/>
             <a:r>
-              <a:rPr sz="900" b="1">
+              <a:rPr sz="1019" b="1">
                 <a:solidFill>
                   <a:srgbClr val="16202C"/>
                 </a:solidFill>
@@ -12773,20 +10564,20 @@
                 <a:ea typeface="Pretendard"/>
                 <a:cs typeface="Pretendard"/>
               </a:rPr>
-              <a:t>실시간 질의</a:t>
+              <a:t>처리 순서</a:t>
             </a:r>
           </a:p>
         </p:txBody>
       </p:sp>
       <p:cxnSp>
         <p:nvCxnSpPr>
-          <p:cNvPr id="63" name="범례 비동기 데이터 흐름"/>
+          <p:cNvPr id="64" name="범례 불합격 시 되돌아가는 경로"/>
           <p:cNvCxnSpPr/>
           <p:nvPr/>
         </p:nvCxnSpPr>
         <p:spPr>
           <a:xfrm>
-            <a:off x="2204085" y="6507480"/>
+            <a:off x="2159127" y="6507480"/>
             <a:ext cx="350520" cy="0"/>
           </a:xfrm>
           <a:prstGeom prst="line">
@@ -12794,7 +10585,7 @@
           </a:prstGeom>
           <a:ln w="16764">
             <a:solidFill>
-              <a:srgbClr val="1F74C4"/>
+              <a:srgbClr val="2E9E6E"/>
             </a:solidFill>
             <a:prstDash val="dash"/>
             <a:tailEnd type="triangle" w="med" len="med"/>
@@ -12803,14 +10594,14 @@
       </p:cxnSp>
       <p:sp>
         <p:nvSpPr>
-          <p:cNvPr id="64" name="범례 글 비동기 데이터 흐름"/>
+          <p:cNvPr id="65" name="범례 글 불합격 시 되돌아가는 경로"/>
           <p:cNvSpPr txBox="1"/>
           <p:nvPr/>
         </p:nvSpPr>
         <p:spPr>
           <a:xfrm>
-            <a:off x="2630805" y="6309360"/>
-            <a:ext cx="1192530" cy="396240"/>
+            <a:off x="2585847" y="6309360"/>
+            <a:ext cx="1791081" cy="396240"/>
           </a:xfrm>
           <a:prstGeom prst="rect">
             <a:avLst/>
@@ -12825,7 +10616,7 @@
           <a:p>
             <a:pPr algn="l"/>
             <a:r>
-              <a:rPr sz="900" b="1">
+              <a:rPr sz="1019" b="1">
                 <a:solidFill>
                   <a:srgbClr val="16202C"/>
                 </a:solidFill>
@@ -12833,21 +10624,21 @@
                 <a:ea typeface="Pretendard"/>
                 <a:cs typeface="Pretendard"/>
               </a:rPr>
-              <a:t>비동기 데이터 흐름</a:t>
+              <a:t>불합격 시 되돌아가는 경로</a:t>
             </a:r>
           </a:p>
         </p:txBody>
       </p:sp>
       <p:sp>
         <p:nvSpPr>
-          <p:cNvPr id="65" name="설명"/>
+          <p:cNvPr id="66" name="설명"/>
           <p:cNvSpPr txBox="1"/>
           <p:nvPr/>
         </p:nvSpPr>
         <p:spPr>
           <a:xfrm>
-            <a:off x="5926836" y="6385560"/>
-            <a:ext cx="5884164" cy="167640"/>
+            <a:off x="6564249" y="6347460"/>
+            <a:ext cx="5246751" cy="190500"/>
           </a:xfrm>
           <a:prstGeom prst="rect">
             <a:avLst/>
@@ -12862,7 +10653,7 @@
           <a:p>
             <a:pPr algn="r"/>
             <a:r>
-              <a:rPr sz="840" b="0">
+              <a:rPr sz="1019" b="0">
                 <a:solidFill>
                   <a:srgbClr val="3F4E61"/>
                 </a:solidFill>
@@ -12870,21 +10661,21 @@
                 <a:ea typeface="Pretendard"/>
                 <a:cs typeface="Pretendard"/>
               </a:rPr>
-              <a:t>④ 쓰기 중지는 사람이 한다(KDMS 는 업무 중지를 대신하지 않는다) · ⑥ 이 맞지 않으면 전환하지 않고 멈춘다</a:t>
+              <a:t>4 쓰기 중지와 전환 뒤 앱 연결은 사람이 한다 · 5 ~ 7 은 kdms cutover 한 번</a:t>
             </a:r>
           </a:p>
         </p:txBody>
       </p:sp>
       <p:sp>
         <p:nvSpPr>
-          <p:cNvPr id="66" name="설명"/>
+          <p:cNvPr id="67" name="설명"/>
           <p:cNvSpPr txBox="1"/>
           <p:nvPr/>
         </p:nvSpPr>
         <p:spPr>
           <a:xfrm>
-            <a:off x="5478780" y="6553200"/>
-            <a:ext cx="6332220" cy="167640"/>
+            <a:off x="6285738" y="6537960"/>
+            <a:ext cx="5525262" cy="190500"/>
           </a:xfrm>
           <a:prstGeom prst="rect">
             <a:avLst/>
@@ -12899,7 +10690,7 @@
           <a:p>
             <a:pPr algn="r"/>
             <a:r>
-              <a:rPr sz="840" b="0">
+              <a:rPr sz="1019" b="0">
                 <a:solidFill>
                   <a:srgbClr val="3F4E61"/>
                 </a:solidFill>
@@ -12907,7 +10698,7 @@
                 <a:ea typeface="Pretendard"/>
                 <a:cs typeface="Pretendard"/>
               </a:rPr>
-              <a:t>③ 은 테이블별 전체 적재가 끝난 뒤부터 반영한다 · 적재 중 들어온 변경은 워터마크 이후라 모두 change_log 에 있다</a:t>
+              <a:t>3 은 테이블별 적재가 끝난 뒤부터 반영 · 적재 중 변경은 모두 change_log 에 있다</a:t>
             </a:r>
           </a:p>
         </p:txBody>
